--- a/workshop_presentation.pptx
+++ b/workshop_presentation.pptx
@@ -5,7 +5,7 @@
     <p:sldMasterId id="2147483648" r:id="rId1"/>
   </p:sldMasterIdLst>
   <p:notesMasterIdLst>
-    <p:notesMasterId r:id="rId21"/>
+    <p:notesMasterId r:id="rId30"/>
   </p:notesMasterIdLst>
   <p:sldIdLst>
     <p:sldId id="256" r:id="rId2"/>
@@ -26,7 +26,16 @@
     <p:sldId id="270" r:id="rId17"/>
     <p:sldId id="273" r:id="rId18"/>
     <p:sldId id="274" r:id="rId19"/>
-    <p:sldId id="268" r:id="rId20"/>
+    <p:sldId id="275" r:id="rId20"/>
+    <p:sldId id="276" r:id="rId21"/>
+    <p:sldId id="277" r:id="rId22"/>
+    <p:sldId id="278" r:id="rId23"/>
+    <p:sldId id="279" r:id="rId24"/>
+    <p:sldId id="280" r:id="rId25"/>
+    <p:sldId id="281" r:id="rId26"/>
+    <p:sldId id="282" r:id="rId27"/>
+    <p:sldId id="283" r:id="rId28"/>
+    <p:sldId id="268" r:id="rId29"/>
   </p:sldIdLst>
   <p:sldSz cx="24384000" cy="13716000"/>
   <p:notesSz cx="6858000" cy="9144000"/>
@@ -517,6 +526,72 @@
     </a:lvl9pPr>
   </p:notesStyle>
 </p:notesMaster>
+</file>
+
+<file path=ppt/notesSlides/notesSlide1.xml><?xml version="1.0" encoding="utf-8"?>
+<p:notes xmlns:a="http://schemas.openxmlformats.org/drawingml/2006/main" xmlns:r="http://schemas.openxmlformats.org/officeDocument/2006/relationships" xmlns:p="http://schemas.openxmlformats.org/presentationml/2006/main">
+  <p:cSld>
+    <p:spTree>
+      <p:nvGrpSpPr>
+        <p:cNvPr id="1" name=""/>
+        <p:cNvGrpSpPr/>
+        <p:nvPr/>
+      </p:nvGrpSpPr>
+      <p:grpSpPr>
+        <a:xfrm>
+          <a:off x="0" y="0"/>
+          <a:ext cx="0" cy="0"/>
+          <a:chOff x="0" y="0"/>
+          <a:chExt cx="0" cy="0"/>
+        </a:xfrm>
+      </p:grpSpPr>
+      <p:sp>
+        <p:nvSpPr>
+          <p:cNvPr id="2" name="Slide Image Placeholder 1"/>
+          <p:cNvSpPr>
+            <a:spLocks noGrp="1" noRot="1" noChangeAspect="1"/>
+          </p:cNvSpPr>
+          <p:nvPr>
+            <p:ph type="sldImg"/>
+          </p:nvPr>
+        </p:nvSpPr>
+        <p:spPr>
+          <a:xfrm>
+            <a:off x="381000" y="685800"/>
+            <a:ext cx="6096000" cy="3429000"/>
+          </a:xfrm>
+        </p:spPr>
+      </p:sp>
+      <p:sp>
+        <p:nvSpPr>
+          <p:cNvPr id="3" name="Notes Placeholder 2"/>
+          <p:cNvSpPr>
+            <a:spLocks noGrp="1"/>
+          </p:cNvSpPr>
+          <p:nvPr>
+            <p:ph type="body" idx="1"/>
+          </p:nvPr>
+        </p:nvSpPr>
+        <p:spPr/>
+        <p:txBody>
+          <a:bodyPr/>
+          <a:lstStyle/>
+          <a:p>
+            <a:endParaRPr lang="de-DE" dirty="0"/>
+          </a:p>
+        </p:txBody>
+      </p:sp>
+    </p:spTree>
+    <p:extLst>
+      <p:ext uri="{BB962C8B-B14F-4D97-AF65-F5344CB8AC3E}">
+        <p14:creationId xmlns:p14="http://schemas.microsoft.com/office/powerpoint/2010/main" val="1056561473"/>
+      </p:ext>
+    </p:extLst>
+  </p:cSld>
+  <p:clrMapOvr>
+    <a:masterClrMapping/>
+  </p:clrMapOvr>
+</p:notes>
 </file>
 
 <file path=ppt/slideLayouts/slideLayout1.xml><?xml version="1.0" encoding="utf-8"?>
@@ -2496,7 +2571,7 @@
           </a:ln>
           <a:extLst>
             <a:ext uri="{C572A759-6A51-4108-AA02-DFA0A04FC94B}">
-              <ma14:wrappingTextBoxFlag xmlns="" xmlns:m="http://schemas.openxmlformats.org/officeDocument/2006/math" xmlns:a14="http://schemas.microsoft.com/office/drawing/2010/main" xmlns:ma14="http://schemas.microsoft.com/office/mac/drawingml/2011/main" val="1"/>
+              <ma14:wrappingTextBoxFlag xmlns:ma14="http://schemas.microsoft.com/office/mac/drawingml/2011/main" xmlns:a14="http://schemas.microsoft.com/office/drawing/2010/main" xmlns:m="http://schemas.openxmlformats.org/officeDocument/2006/math" xmlns="" val="1"/>
             </a:ext>
           </a:extLst>
         </p:spPr>
@@ -2535,7 +2610,7 @@
           </a:ln>
           <a:extLst>
             <a:ext uri="{C572A759-6A51-4108-AA02-DFA0A04FC94B}">
-              <ma14:wrappingTextBoxFlag xmlns="" xmlns:m="http://schemas.openxmlformats.org/officeDocument/2006/math" xmlns:a14="http://schemas.microsoft.com/office/drawing/2010/main" xmlns:ma14="http://schemas.microsoft.com/office/mac/drawingml/2011/main" val="1"/>
+              <ma14:wrappingTextBoxFlag xmlns:ma14="http://schemas.microsoft.com/office/mac/drawingml/2011/main" xmlns:a14="http://schemas.microsoft.com/office/drawing/2010/main" xmlns:m="http://schemas.openxmlformats.org/officeDocument/2006/math" xmlns="" val="1"/>
             </a:ext>
           </a:extLst>
         </p:spPr>
@@ -3532,7 +3607,7 @@
           </a:ln>
           <a:extLst>
             <a:ext uri="{C572A759-6A51-4108-AA02-DFA0A04FC94B}">
-              <ma14:wrappingTextBoxFlag xmlns="" xmlns:m="http://schemas.openxmlformats.org/officeDocument/2006/math" xmlns:a14="http://schemas.microsoft.com/office/drawing/2010/main" xmlns:ma14="http://schemas.microsoft.com/office/mac/drawingml/2011/main" val="1"/>
+              <ma14:wrappingTextBoxFlag xmlns:ma14="http://schemas.microsoft.com/office/mac/drawingml/2011/main" xmlns:a14="http://schemas.microsoft.com/office/drawing/2010/main" xmlns:m="http://schemas.openxmlformats.org/officeDocument/2006/math" xmlns="" val="1"/>
             </a:ext>
           </a:extLst>
         </p:spPr>
@@ -3571,7 +3646,7 @@
           </a:ln>
           <a:extLst>
             <a:ext uri="{C572A759-6A51-4108-AA02-DFA0A04FC94B}">
-              <ma14:wrappingTextBoxFlag xmlns="" xmlns:m="http://schemas.openxmlformats.org/officeDocument/2006/math" xmlns:a14="http://schemas.microsoft.com/office/drawing/2010/main" xmlns:ma14="http://schemas.microsoft.com/office/mac/drawingml/2011/main" val="1"/>
+              <ma14:wrappingTextBoxFlag xmlns:ma14="http://schemas.microsoft.com/office/mac/drawingml/2011/main" xmlns:a14="http://schemas.microsoft.com/office/drawing/2010/main" xmlns:m="http://schemas.openxmlformats.org/officeDocument/2006/math" xmlns="" val="1"/>
             </a:ext>
           </a:extLst>
         </p:spPr>
@@ -3634,7 +3709,7 @@
           </a:prstGeom>
           <a:extLst>
             <a:ext uri="{C572A759-6A51-4108-AA02-DFA0A04FC94B}">
-              <ma14:wrappingTextBoxFlag xmlns="" xmlns:m="http://schemas.openxmlformats.org/officeDocument/2006/math" xmlns:a14="http://schemas.microsoft.com/office/drawing/2010/main" xmlns:ma14="http://schemas.microsoft.com/office/mac/drawingml/2011/main" val="1"/>
+              <ma14:wrappingTextBoxFlag xmlns:ma14="http://schemas.microsoft.com/office/mac/drawingml/2011/main" xmlns:a14="http://schemas.microsoft.com/office/drawing/2010/main" xmlns:m="http://schemas.openxmlformats.org/officeDocument/2006/math" xmlns="" val="1"/>
             </a:ext>
           </a:extLst>
         </p:spPr>
@@ -3927,7 +4002,7 @@
           </a:ln>
           <a:extLst>
             <a:ext uri="{C572A759-6A51-4108-AA02-DFA0A04FC94B}">
-              <ma14:wrappingTextBoxFlag xmlns="" xmlns:m="http://schemas.openxmlformats.org/officeDocument/2006/math" xmlns:a14="http://schemas.microsoft.com/office/drawing/2010/main" xmlns:ma14="http://schemas.microsoft.com/office/mac/drawingml/2011/main" val="1"/>
+              <ma14:wrappingTextBoxFlag xmlns:ma14="http://schemas.microsoft.com/office/mac/drawingml/2011/main" xmlns:a14="http://schemas.microsoft.com/office/drawing/2010/main" xmlns:m="http://schemas.openxmlformats.org/officeDocument/2006/math" xmlns="" val="1"/>
             </a:ext>
           </a:extLst>
         </p:spPr>
@@ -4076,7 +4151,7 @@
           </a:prstGeom>
           <a:extLst>
             <a:ext uri="{C572A759-6A51-4108-AA02-DFA0A04FC94B}">
-              <ma14:wrappingTextBoxFlag xmlns="" xmlns:m="http://schemas.openxmlformats.org/officeDocument/2006/math" xmlns:a14="http://schemas.microsoft.com/office/drawing/2010/main" xmlns:ma14="http://schemas.microsoft.com/office/mac/drawingml/2011/main" val="1"/>
+              <ma14:wrappingTextBoxFlag xmlns:ma14="http://schemas.microsoft.com/office/mac/drawingml/2011/main" xmlns:a14="http://schemas.microsoft.com/office/drawing/2010/main" xmlns:m="http://schemas.openxmlformats.org/officeDocument/2006/math" xmlns="" val="1"/>
             </a:ext>
           </a:extLst>
         </p:spPr>
@@ -4240,7 +4315,7 @@
           </a:ln>
           <a:extLst>
             <a:ext uri="{C572A759-6A51-4108-AA02-DFA0A04FC94B}">
-              <ma14:wrappingTextBoxFlag xmlns="" xmlns:m="http://schemas.openxmlformats.org/officeDocument/2006/math" xmlns:a14="http://schemas.microsoft.com/office/drawing/2010/main" xmlns:ma14="http://schemas.microsoft.com/office/mac/drawingml/2011/main" val="1"/>
+              <ma14:wrappingTextBoxFlag xmlns:ma14="http://schemas.microsoft.com/office/mac/drawingml/2011/main" xmlns:a14="http://schemas.microsoft.com/office/drawing/2010/main" xmlns:m="http://schemas.openxmlformats.org/officeDocument/2006/math" xmlns="" val="1"/>
             </a:ext>
           </a:extLst>
         </p:spPr>
@@ -4323,7 +4398,7 @@
           </a:ln>
           <a:extLst>
             <a:ext uri="{C572A759-6A51-4108-AA02-DFA0A04FC94B}">
-              <ma14:wrappingTextBoxFlag xmlns="" xmlns:m="http://schemas.openxmlformats.org/officeDocument/2006/math" xmlns:a14="http://schemas.microsoft.com/office/drawing/2010/main" xmlns:ma14="http://schemas.microsoft.com/office/mac/drawingml/2011/main" val="1"/>
+              <ma14:wrappingTextBoxFlag xmlns:ma14="http://schemas.microsoft.com/office/mac/drawingml/2011/main" xmlns:a14="http://schemas.microsoft.com/office/drawing/2010/main" xmlns:m="http://schemas.openxmlformats.org/officeDocument/2006/math" xmlns="" val="1"/>
             </a:ext>
           </a:extLst>
         </p:spPr>
@@ -4359,7 +4434,7 @@
           </a:ln>
           <a:extLst>
             <a:ext uri="{C572A759-6A51-4108-AA02-DFA0A04FC94B}">
-              <ma14:wrappingTextBoxFlag xmlns="" xmlns:m="http://schemas.openxmlformats.org/officeDocument/2006/math" xmlns:a14="http://schemas.microsoft.com/office/drawing/2010/main" xmlns:ma14="http://schemas.microsoft.com/office/mac/drawingml/2011/main" val="1"/>
+              <ma14:wrappingTextBoxFlag xmlns:ma14="http://schemas.microsoft.com/office/mac/drawingml/2011/main" xmlns:a14="http://schemas.microsoft.com/office/drawing/2010/main" xmlns:m="http://schemas.openxmlformats.org/officeDocument/2006/math" xmlns="" val="1"/>
             </a:ext>
           </a:extLst>
         </p:spPr>
@@ -4403,7 +4478,7 @@
           </a:prstGeom>
           <a:extLst>
             <a:ext uri="{C572A759-6A51-4108-AA02-DFA0A04FC94B}">
-              <ma14:wrappingTextBoxFlag xmlns="" xmlns:m="http://schemas.openxmlformats.org/officeDocument/2006/math" xmlns:a14="http://schemas.microsoft.com/office/drawing/2010/main" xmlns:ma14="http://schemas.microsoft.com/office/mac/drawingml/2011/main" val="1"/>
+              <ma14:wrappingTextBoxFlag xmlns:ma14="http://schemas.microsoft.com/office/mac/drawingml/2011/main" xmlns:a14="http://schemas.microsoft.com/office/drawing/2010/main" xmlns:m="http://schemas.openxmlformats.org/officeDocument/2006/math" xmlns="" val="1"/>
             </a:ext>
           </a:extLst>
         </p:spPr>
@@ -4637,7 +4712,7 @@
           </a:ln>
           <a:extLst>
             <a:ext uri="{C572A759-6A51-4108-AA02-DFA0A04FC94B}">
-              <ma14:wrappingTextBoxFlag xmlns="" xmlns:m="http://schemas.openxmlformats.org/officeDocument/2006/math" xmlns:a14="http://schemas.microsoft.com/office/drawing/2010/main" xmlns:ma14="http://schemas.microsoft.com/office/mac/drawingml/2011/main" val="1"/>
+              <ma14:wrappingTextBoxFlag xmlns:ma14="http://schemas.microsoft.com/office/mac/drawingml/2011/main" xmlns:a14="http://schemas.microsoft.com/office/drawing/2010/main" xmlns:m="http://schemas.openxmlformats.org/officeDocument/2006/math" xmlns="" val="1"/>
             </a:ext>
           </a:extLst>
         </p:spPr>
@@ -4733,7 +4808,7 @@
           </a:prstGeom>
           <a:extLst>
             <a:ext uri="{C572A759-6A51-4108-AA02-DFA0A04FC94B}">
-              <ma14:wrappingTextBoxFlag xmlns="" xmlns:m="http://schemas.openxmlformats.org/officeDocument/2006/math" xmlns:a14="http://schemas.microsoft.com/office/drawing/2010/main" xmlns:ma14="http://schemas.microsoft.com/office/mac/drawingml/2011/main" val="1"/>
+              <ma14:wrappingTextBoxFlag xmlns:ma14="http://schemas.microsoft.com/office/mac/drawingml/2011/main" xmlns:a14="http://schemas.microsoft.com/office/drawing/2010/main" xmlns:m="http://schemas.openxmlformats.org/officeDocument/2006/math" xmlns="" val="1"/>
             </a:ext>
           </a:extLst>
         </p:spPr>
@@ -5562,7 +5637,7 @@
           </a:ln>
           <a:extLst>
             <a:ext uri="{C572A759-6A51-4108-AA02-DFA0A04FC94B}">
-              <ma14:wrappingTextBoxFlag xmlns="" xmlns:m="http://schemas.openxmlformats.org/officeDocument/2006/math" xmlns:a14="http://schemas.microsoft.com/office/drawing/2010/main" xmlns:ma14="http://schemas.microsoft.com/office/mac/drawingml/2011/main" val="1"/>
+              <ma14:wrappingTextBoxFlag xmlns:ma14="http://schemas.microsoft.com/office/mac/drawingml/2011/main" xmlns:a14="http://schemas.microsoft.com/office/drawing/2010/main" xmlns:m="http://schemas.openxmlformats.org/officeDocument/2006/math" xmlns="" val="1"/>
             </a:ext>
           </a:extLst>
         </p:spPr>
@@ -5645,7 +5720,7 @@
           </a:ln>
           <a:extLst>
             <a:ext uri="{C572A759-6A51-4108-AA02-DFA0A04FC94B}">
-              <ma14:wrappingTextBoxFlag xmlns="" xmlns:m="http://schemas.openxmlformats.org/officeDocument/2006/math" xmlns:a14="http://schemas.microsoft.com/office/drawing/2010/main" xmlns:ma14="http://schemas.microsoft.com/office/mac/drawingml/2011/main" val="1"/>
+              <ma14:wrappingTextBoxFlag xmlns:ma14="http://schemas.microsoft.com/office/mac/drawingml/2011/main" xmlns:a14="http://schemas.microsoft.com/office/drawing/2010/main" xmlns:m="http://schemas.openxmlformats.org/officeDocument/2006/math" xmlns="" val="1"/>
             </a:ext>
           </a:extLst>
         </p:spPr>
@@ -5681,7 +5756,7 @@
           </a:ln>
           <a:extLst>
             <a:ext uri="{C572A759-6A51-4108-AA02-DFA0A04FC94B}">
-              <ma14:wrappingTextBoxFlag xmlns="" xmlns:m="http://schemas.openxmlformats.org/officeDocument/2006/math" xmlns:a14="http://schemas.microsoft.com/office/drawing/2010/main" xmlns:ma14="http://schemas.microsoft.com/office/mac/drawingml/2011/main" val="1"/>
+              <ma14:wrappingTextBoxFlag xmlns:ma14="http://schemas.microsoft.com/office/mac/drawingml/2011/main" xmlns:a14="http://schemas.microsoft.com/office/drawing/2010/main" xmlns:m="http://schemas.openxmlformats.org/officeDocument/2006/math" xmlns="" val="1"/>
             </a:ext>
           </a:extLst>
         </p:spPr>
@@ -5725,7 +5800,7 @@
           </a:prstGeom>
           <a:extLst>
             <a:ext uri="{C572A759-6A51-4108-AA02-DFA0A04FC94B}">
-              <ma14:wrappingTextBoxFlag xmlns="" xmlns:m="http://schemas.openxmlformats.org/officeDocument/2006/math" xmlns:a14="http://schemas.microsoft.com/office/drawing/2010/main" xmlns:ma14="http://schemas.microsoft.com/office/mac/drawingml/2011/main" val="1"/>
+              <ma14:wrappingTextBoxFlag xmlns:ma14="http://schemas.microsoft.com/office/mac/drawingml/2011/main" xmlns:a14="http://schemas.microsoft.com/office/drawing/2010/main" xmlns:m="http://schemas.openxmlformats.org/officeDocument/2006/math" xmlns="" val="1"/>
             </a:ext>
           </a:extLst>
         </p:spPr>
@@ -12744,7 +12819,116 @@
       </p:grpSpPr>
       <p:sp>
         <p:nvSpPr>
-          <p:cNvPr id="228" name="References"/>
+          <p:cNvPr id="20" name="Clustering Algorithm -…"/>
+          <p:cNvSpPr txBox="1"/>
+          <p:nvPr/>
+        </p:nvSpPr>
+        <p:spPr>
+          <a:xfrm>
+            <a:off x="989149" y="3962922"/>
+            <a:ext cx="6940488" cy="3572260"/>
+          </a:xfrm>
+          <a:prstGeom prst="rect">
+            <a:avLst/>
+          </a:prstGeom>
+          <a:ln w="12700">
+            <a:miter lim="400000"/>
+          </a:ln>
+          <a:extLst>
+            <a:ext uri="{C572A759-6A51-4108-AA02-DFA0A04FC94B}">
+              <ma14:wrappingTextBoxFlag xmlns:ma14="http://schemas.microsoft.com/office/mac/drawingml/2011/main" xmlns:a14="http://schemas.microsoft.com/office/drawing/2010/main" xmlns:m="http://schemas.openxmlformats.org/officeDocument/2006/math" xmlns="" val="1"/>
+            </a:ext>
+          </a:extLst>
+        </p:spPr>
+        <p:txBody>
+          <a:bodyPr wrap="square" lIns="50800" tIns="50800" rIns="50800" bIns="50800" anchor="ctr">
+            <a:spAutoFit/>
+          </a:bodyPr>
+          <a:lstStyle/>
+          <a:p>
+            <a:pPr>
+              <a:lnSpc>
+                <a:spcPct val="10000"/>
+              </a:lnSpc>
+            </a:pPr>
+            <a:r>
+              <a:rPr dirty="0"/>
+              <a:t>Clustering Algorithm - </a:t>
+            </a:r>
+          </a:p>
+          <a:p>
+            <a:pPr marL="1270000" lvl="1" indent="-635000">
+              <a:lnSpc>
+                <a:spcPct val="10000"/>
+              </a:lnSpc>
+              <a:buSzPct val="125000"/>
+              <a:buChar char="•"/>
+            </a:pPr>
+            <a:r>
+              <a:rPr lang="de-DE" dirty="0" smtClean="0"/>
+              <a:t>Agglomerative</a:t>
+            </a:r>
+            <a:endParaRPr dirty="0"/>
+          </a:p>
+          <a:p>
+            <a:pPr marL="1270000" lvl="1" indent="-635000">
+              <a:lnSpc>
+                <a:spcPct val="10000"/>
+              </a:lnSpc>
+              <a:buSzPct val="125000"/>
+              <a:buChar char="•"/>
+            </a:pPr>
+            <a:r>
+              <a:rPr dirty="0" smtClean="0"/>
+              <a:t>HD</a:t>
+            </a:r>
+            <a:r>
+              <a:rPr lang="de-DE" dirty="0" smtClean="0"/>
+              <a:t>B</a:t>
+            </a:r>
+            <a:r>
+              <a:rPr dirty="0" smtClean="0"/>
+              <a:t>SCAN</a:t>
+            </a:r>
+            <a:endParaRPr dirty="0"/>
+          </a:p>
+          <a:p>
+            <a:pPr marL="1270000" lvl="1" indent="-635000">
+              <a:lnSpc>
+                <a:spcPct val="10000"/>
+              </a:lnSpc>
+              <a:buSzPct val="125000"/>
+              <a:buChar char="•"/>
+            </a:pPr>
+            <a:r>
+              <a:rPr lang="de-DE" dirty="0" smtClean="0"/>
+              <a:t>Spectral</a:t>
+            </a:r>
+            <a:endParaRPr dirty="0"/>
+          </a:p>
+          <a:p>
+            <a:pPr marL="1270000" lvl="1" indent="-635000">
+              <a:lnSpc>
+                <a:spcPct val="10000"/>
+              </a:lnSpc>
+              <a:buSzPct val="125000"/>
+              <a:buChar char="•"/>
+            </a:pPr>
+            <a:r>
+              <a:rPr lang="de-DE" dirty="0" smtClean="0"/>
+              <a:t>Mini-Batch </a:t>
+            </a:r>
+            <a:r>
+              <a:rPr dirty="0" err="1" smtClean="0"/>
+              <a:t>KMeans</a:t>
+            </a:r>
+            <a:endParaRPr dirty="0"/>
+          </a:p>
+        </p:txBody>
+      </p:sp>
+      <p:sp>
+        <p:nvSpPr>
+          <p:cNvPr id="214" name="New idea"/>
           <p:cNvSpPr txBox="1">
             <a:spLocks noGrp="1"/>
           </p:cNvSpPr>
@@ -12762,146 +12946,144 @@
           <a:lstStyle/>
           <a:p>
             <a:r>
-              <a:t>References</a:t>
+              <a:rPr lang="de-DE" dirty="0" smtClean="0"/>
+              <a:t>Quick Recap</a:t>
             </a:r>
+            <a:endParaRPr dirty="0"/>
+          </a:p>
+        </p:txBody>
+      </p:sp>
+      <p:pic>
+        <p:nvPicPr>
+          <p:cNvPr id="215" name="IMG_1041.jpeg" descr="IMG_1041.jpeg"/>
+          <p:cNvPicPr>
+            <a:picLocks noChangeAspect="1"/>
+          </p:cNvPicPr>
+          <p:nvPr/>
+        </p:nvPicPr>
+        <p:blipFill>
+          <a:blip r:embed="rId3">
+            <a:extLst/>
+          </a:blip>
+          <a:stretch>
+            <a:fillRect/>
+          </a:stretch>
+        </p:blipFill>
+        <p:spPr>
+          <a:xfrm>
+            <a:off x="10884514" y="4376392"/>
+            <a:ext cx="13313953" cy="7846984"/>
+          </a:xfrm>
+          <a:prstGeom prst="rect">
+            <a:avLst/>
+          </a:prstGeom>
+          <a:ln w="12700">
+            <a:miter lim="400000"/>
+          </a:ln>
+        </p:spPr>
+      </p:pic>
+      <p:sp>
+        <p:nvSpPr>
+          <p:cNvPr id="216" name="Clustering Algorithm -…"/>
+          <p:cNvSpPr txBox="1"/>
+          <p:nvPr/>
+        </p:nvSpPr>
+        <p:spPr>
+          <a:xfrm>
+            <a:off x="989149" y="3999855"/>
+            <a:ext cx="6489813" cy="3498394"/>
+          </a:xfrm>
+          <a:prstGeom prst="rect">
+            <a:avLst/>
+          </a:prstGeom>
+          <a:ln w="12700">
+            <a:miter lim="400000"/>
+          </a:ln>
+          <a:extLst>
+            <a:ext uri="{C572A759-6A51-4108-AA02-DFA0A04FC94B}">
+              <ma14:wrappingTextBoxFlag xmlns:ma14="http://schemas.microsoft.com/office/mac/drawingml/2011/main" xmlns:a14="http://schemas.microsoft.com/office/drawing/2010/main" xmlns:m="http://schemas.openxmlformats.org/officeDocument/2006/math" xmlns="" val="1"/>
+            </a:ext>
+          </a:extLst>
+        </p:spPr>
+        <p:txBody>
+          <a:bodyPr wrap="square" lIns="50800" tIns="50800" rIns="50800" bIns="50800" anchor="ctr">
+            <a:spAutoFit/>
+          </a:bodyPr>
+          <a:lstStyle/>
+          <a:p>
+            <a:pPr>
+              <a:lnSpc>
+                <a:spcPct val="10000"/>
+              </a:lnSpc>
+            </a:pPr>
+            <a:r>
+              <a:rPr dirty="0"/>
+              <a:t>Clustering Algorithm - </a:t>
+            </a:r>
+          </a:p>
+          <a:p>
+            <a:pPr marL="1270000" lvl="1" indent="-635000">
+              <a:lnSpc>
+                <a:spcPct val="10000"/>
+              </a:lnSpc>
+              <a:buSzPct val="125000"/>
+              <a:buChar char="•"/>
+            </a:pPr>
+            <a:r>
+              <a:rPr dirty="0"/>
+              <a:t>DBSCAN</a:t>
+            </a:r>
+          </a:p>
+          <a:p>
+            <a:pPr marL="1270000" lvl="1" indent="-635000">
+              <a:lnSpc>
+                <a:spcPct val="10000"/>
+              </a:lnSpc>
+              <a:buSzPct val="125000"/>
+              <a:buChar char="•"/>
+            </a:pPr>
+            <a:r>
+              <a:rPr dirty="0"/>
+              <a:t>HDSCAN</a:t>
+            </a:r>
+          </a:p>
+          <a:p>
+            <a:pPr marL="1270000" lvl="1" indent="-635000">
+              <a:lnSpc>
+                <a:spcPct val="10000"/>
+              </a:lnSpc>
+              <a:buSzPct val="125000"/>
+              <a:buChar char="•"/>
+            </a:pPr>
+            <a:r>
+              <a:rPr dirty="0"/>
+              <a:t>K-</a:t>
+            </a:r>
+            <a:r>
+              <a:rPr dirty="0" err="1"/>
+              <a:t>Medoids</a:t>
+            </a:r>
+            <a:endParaRPr dirty="0"/>
+          </a:p>
+          <a:p>
+            <a:pPr marL="1270000" lvl="1" indent="-635000">
+              <a:lnSpc>
+                <a:spcPct val="10000"/>
+              </a:lnSpc>
+              <a:buSzPct val="125000"/>
+              <a:buChar char="•"/>
+            </a:pPr>
+            <a:r>
+              <a:rPr dirty="0" err="1" smtClean="0"/>
+              <a:t>KMeans</a:t>
+            </a:r>
+            <a:endParaRPr dirty="0"/>
           </a:p>
         </p:txBody>
       </p:sp>
       <p:sp>
         <p:nvSpPr>
-          <p:cNvPr id="229" name="Zhu, Zhuotun and Wang, Xinggang and Bai, Song and Yao, Cong and Bai, Xiang : Deep learning representation using autoencoder for 3D shape retrieval…"/>
-          <p:cNvSpPr txBox="1">
-            <a:spLocks noGrp="1"/>
-          </p:cNvSpPr>
-          <p:nvPr>
-            <p:ph type="body" idx="1"/>
-          </p:nvPr>
-        </p:nvSpPr>
-        <p:spPr>
-          <a:xfrm>
-            <a:off x="1689100" y="-1695181"/>
-            <a:ext cx="21005800" cy="14141181"/>
-          </a:xfrm>
-          <a:prstGeom prst="rect">
-            <a:avLst/>
-          </a:prstGeom>
-        </p:spPr>
-        <p:txBody>
-          <a:bodyPr/>
-          <a:lstStyle/>
-          <a:p>
-            <a:pPr marL="396874" indent="-396874" defTabSz="457200">
-              <a:spcBef>
-                <a:spcPts val="0"/>
-              </a:spcBef>
-              <a:defRPr sz="3000">
-                <a:latin typeface="Courier"/>
-                <a:ea typeface="Courier"/>
-                <a:cs typeface="Courier"/>
-                <a:sym typeface="Courier"/>
-              </a:defRPr>
-            </a:pPr>
-            <a:r>
-              <a:t>Zhu, Zhuotun and Wang, Xinggang and Bai, Song and Yao, Cong and Bai, Xiang : Deep learning representation using autoencoder for 3D shape retrieval</a:t>
-            </a:r>
-          </a:p>
-          <a:p>
-            <a:pPr marL="396874" indent="-396874" defTabSz="457200">
-              <a:spcBef>
-                <a:spcPts val="0"/>
-              </a:spcBef>
-              <a:defRPr sz="3000">
-                <a:latin typeface="Courier"/>
-                <a:ea typeface="Courier"/>
-                <a:cs typeface="Courier"/>
-                <a:sym typeface="Courier"/>
-              </a:defRPr>
-            </a:pPr>
-            <a:r>
-              <a:t>Bickel, Sebastian and Sauer, Christopher and Schleich, Benjamin and Wartzack, Sandro: Comparing CAD part models for geometrical similarity: A concept using machine learning algorithms</a:t>
-            </a:r>
-          </a:p>
-          <a:p>
-            <a:pPr marL="396874" indent="-396874" defTabSz="457200">
-              <a:spcBef>
-                <a:spcPts val="0"/>
-              </a:spcBef>
-              <a:defRPr sz="3000">
-                <a:latin typeface="Courier"/>
-                <a:ea typeface="Courier"/>
-                <a:cs typeface="Courier"/>
-                <a:sym typeface="Courier"/>
-              </a:defRPr>
-            </a:pPr>
-            <a:r>
-              <a:t>Ohbuchi, Ryutarou and Osada, Kunio and Furuya, Takahiko and Banno, Tomohisa: Salient local visual features for shape-based 3D model retrieval</a:t>
-            </a:r>
-          </a:p>
-          <a:p>
-            <a:pPr marL="396874" indent="-396874" algn="just" defTabSz="457200">
-              <a:spcBef>
-                <a:spcPts val="0"/>
-              </a:spcBef>
-              <a:defRPr sz="3000">
-                <a:solidFill>
-                  <a:srgbClr val="333333"/>
-                </a:solidFill>
-                <a:latin typeface="Courier"/>
-                <a:ea typeface="Courier"/>
-                <a:cs typeface="Courier"/>
-                <a:sym typeface="Courier"/>
-              </a:defRPr>
-            </a:pPr>
-            <a:r>
-              <a:t>Koch, Sebastian and Matveev, Albert and Jiang, Zhongshi and Williams, Francis and Artemov, Alexey and Burnaev, Evgeny and Alexa, Marc and Zorin, Denis and Panozzo, Daniele:ABC: A Big CAD Model Dataset For Geometric Deep Learning</a:t>
-            </a:r>
-          </a:p>
-          <a:p>
-            <a:pPr marL="396874" indent="-396874" algn="just" defTabSz="457200">
-              <a:spcBef>
-                <a:spcPts val="0"/>
-              </a:spcBef>
-              <a:defRPr sz="3000">
-                <a:solidFill>
-                  <a:srgbClr val="333333"/>
-                </a:solidFill>
-                <a:latin typeface="Courier"/>
-                <a:ea typeface="Courier"/>
-                <a:cs typeface="Courier"/>
-                <a:sym typeface="Courier"/>
-              </a:defRPr>
-            </a:pPr>
-            <a:r>
-              <a:rPr u="sng">
-                <a:hlinkClick r:id="rId2"/>
-              </a:rPr>
-              <a:t>https://www.baeldung.com/cs/deep-belief-network</a:t>
-            </a:r>
-          </a:p>
-          <a:p>
-            <a:pPr marL="396874" indent="-396874" algn="just" defTabSz="457200">
-              <a:spcBef>
-                <a:spcPts val="0"/>
-              </a:spcBef>
-              <a:defRPr sz="3000">
-                <a:solidFill>
-                  <a:srgbClr val="333333"/>
-                </a:solidFill>
-                <a:latin typeface="Courier"/>
-                <a:ea typeface="Courier"/>
-                <a:cs typeface="Courier"/>
-                <a:sym typeface="Courier"/>
-              </a:defRPr>
-            </a:pPr>
-            <a:r>
-              <a:t>Mei, Guofeng, et al. "Unsupervised learning on 3d point clouds by clustering and contrasting." arXiv preprint arXiv:2202.02543 (2022)</a:t>
-            </a:r>
-          </a:p>
-        </p:txBody>
-      </p:sp>
-      <p:sp>
-        <p:nvSpPr>
-          <p:cNvPr id="230" name="Slide Number"/>
+          <p:cNvPr id="217" name="Slide Number"/>
           <p:cNvSpPr txBox="1">
             <a:spLocks noGrp="1"/>
           </p:cNvSpPr>
@@ -12915,7 +13097,7 @@
           </a:prstGeom>
           <a:extLst>
             <a:ext uri="{C572A759-6A51-4108-AA02-DFA0A04FC94B}">
-              <ma14:wrappingTextBoxFlag xmlns="" xmlns:m="http://schemas.openxmlformats.org/officeDocument/2006/math" xmlns:a14="http://schemas.microsoft.com/office/drawing/2010/main" xmlns:ma14="http://schemas.microsoft.com/office/mac/drawingml/2011/main" val="1"/>
+              <ma14:wrappingTextBoxFlag xmlns:ma14="http://schemas.microsoft.com/office/mac/drawingml/2011/main" xmlns:a14="http://schemas.microsoft.com/office/drawing/2010/main" xmlns:m="http://schemas.openxmlformats.org/officeDocument/2006/math" xmlns="" val="1"/>
             </a:ext>
           </a:extLst>
         </p:spPr>
@@ -12930,7 +13112,645 @@
           </a:p>
         </p:txBody>
       </p:sp>
+      <p:grpSp>
+        <p:nvGrpSpPr>
+          <p:cNvPr id="5" name="Group 4"/>
+          <p:cNvGrpSpPr/>
+          <p:nvPr/>
+        </p:nvGrpSpPr>
+        <p:grpSpPr>
+          <a:xfrm>
+            <a:off x="11235661" y="3182610"/>
+            <a:ext cx="10591246" cy="817245"/>
+            <a:chOff x="12716989" y="7498249"/>
+            <a:chExt cx="10591246" cy="817245"/>
+          </a:xfrm>
+        </p:grpSpPr>
+        <p:sp>
+          <p:nvSpPr>
+            <p:cNvPr id="4" name="Rounded Rectangle 3"/>
+            <p:cNvSpPr/>
+            <p:nvPr/>
+          </p:nvSpPr>
+          <p:spPr>
+            <a:xfrm>
+              <a:off x="12716989" y="7498249"/>
+              <a:ext cx="5060023" cy="817245"/>
+            </a:xfrm>
+            <a:prstGeom prst="roundRect">
+              <a:avLst/>
+            </a:prstGeom>
+            <a:solidFill>
+              <a:schemeClr val="accent1"/>
+            </a:solidFill>
+            <a:ln w="12700" cap="flat">
+              <a:noFill/>
+              <a:miter lim="400000"/>
+            </a:ln>
+            <a:effectLst/>
+            <a:sp3d/>
+          </p:spPr>
+          <p:style>
+            <a:lnRef idx="0">
+              <a:scrgbClr r="0" g="0" b="0"/>
+            </a:lnRef>
+            <a:fillRef idx="0">
+              <a:scrgbClr r="0" g="0" b="0"/>
+            </a:fillRef>
+            <a:effectRef idx="0">
+              <a:scrgbClr r="0" g="0" b="0"/>
+            </a:effectRef>
+            <a:fontRef idx="none"/>
+          </p:style>
+          <p:txBody>
+            <a:bodyPr rot="0" spcFirstLastPara="1" vertOverflow="overflow" horzOverflow="overflow" vert="horz" wrap="square" lIns="0" tIns="0" rIns="0" bIns="0" numCol="1" spcCol="38100" rtlCol="0" anchor="ctr">
+              <a:spAutoFit/>
+            </a:bodyPr>
+            <a:lstStyle/>
+            <a:p>
+              <a:pPr marL="0" marR="0" indent="0" algn="ctr" defTabSz="825500" rtl="0" fontAlgn="auto" latinLnBrk="0" hangingPunct="0">
+                <a:lnSpc>
+                  <a:spcPct val="100000"/>
+                </a:lnSpc>
+                <a:spcBef>
+                  <a:spcPts val="0"/>
+                </a:spcBef>
+                <a:spcAft>
+                  <a:spcPts val="0"/>
+                </a:spcAft>
+                <a:buClrTx/>
+                <a:buSzTx/>
+                <a:buFontTx/>
+                <a:buNone/>
+                <a:tabLst/>
+              </a:pPr>
+              <a:r>
+                <a:rPr kumimoji="0" lang="de-DE" b="0" i="0" u="none" strike="noStrike" cap="none" spc="0" normalizeH="0" baseline="0" dirty="0" smtClean="0">
+                  <a:ln>
+                    <a:noFill/>
+                  </a:ln>
+                  <a:solidFill>
+                    <a:srgbClr val="FFFFFF"/>
+                  </a:solidFill>
+                  <a:effectLst/>
+                  <a:uFillTx/>
+                  <a:latin typeface="+mn-lt"/>
+                  <a:ea typeface="+mn-ea"/>
+                  <a:cs typeface="+mn-cs"/>
+                  <a:sym typeface="Helvetica Neue Medium"/>
+                </a:rPr>
+                <a:t>PointNet</a:t>
+              </a:r>
+              <a:endParaRPr kumimoji="0" lang="de-DE" b="0" i="0" u="none" strike="noStrike" cap="none" spc="0" normalizeH="0" baseline="0" dirty="0">
+                <a:ln>
+                  <a:noFill/>
+                </a:ln>
+                <a:solidFill>
+                  <a:srgbClr val="FFFFFF"/>
+                </a:solidFill>
+                <a:effectLst/>
+                <a:uFillTx/>
+                <a:latin typeface="+mn-lt"/>
+                <a:ea typeface="+mn-ea"/>
+                <a:cs typeface="+mn-cs"/>
+                <a:sym typeface="Helvetica Neue Medium"/>
+              </a:endParaRPr>
+            </a:p>
+          </p:txBody>
+        </p:sp>
+        <p:sp>
+          <p:nvSpPr>
+            <p:cNvPr id="10" name="Rounded Rectangle 9"/>
+            <p:cNvSpPr/>
+            <p:nvPr/>
+          </p:nvSpPr>
+          <p:spPr>
+            <a:xfrm>
+              <a:off x="18248212" y="7498249"/>
+              <a:ext cx="5060023" cy="817245"/>
+            </a:xfrm>
+            <a:prstGeom prst="roundRect">
+              <a:avLst/>
+            </a:prstGeom>
+            <a:solidFill>
+              <a:schemeClr val="accent1"/>
+            </a:solidFill>
+            <a:ln w="12700" cap="flat">
+              <a:noFill/>
+              <a:miter lim="400000"/>
+            </a:ln>
+            <a:effectLst/>
+            <a:sp3d/>
+          </p:spPr>
+          <p:style>
+            <a:lnRef idx="0">
+              <a:scrgbClr r="0" g="0" b="0"/>
+            </a:lnRef>
+            <a:fillRef idx="0">
+              <a:scrgbClr r="0" g="0" b="0"/>
+            </a:fillRef>
+            <a:effectRef idx="0">
+              <a:scrgbClr r="0" g="0" b="0"/>
+            </a:effectRef>
+            <a:fontRef idx="none"/>
+          </p:style>
+          <p:txBody>
+            <a:bodyPr rot="0" spcFirstLastPara="1" vertOverflow="overflow" horzOverflow="overflow" vert="horz" wrap="square" lIns="0" tIns="0" rIns="0" bIns="0" numCol="1" spcCol="38100" rtlCol="0" anchor="ctr">
+              <a:spAutoFit/>
+            </a:bodyPr>
+            <a:lstStyle/>
+            <a:p>
+              <a:pPr marL="0" marR="0" indent="0" algn="ctr" defTabSz="825500" rtl="0" fontAlgn="auto" latinLnBrk="0" hangingPunct="0">
+                <a:lnSpc>
+                  <a:spcPct val="100000"/>
+                </a:lnSpc>
+                <a:spcBef>
+                  <a:spcPts val="0"/>
+                </a:spcBef>
+                <a:spcAft>
+                  <a:spcPts val="0"/>
+                </a:spcAft>
+                <a:buClrTx/>
+                <a:buSzTx/>
+                <a:buFontTx/>
+                <a:buNone/>
+                <a:tabLst/>
+              </a:pPr>
+              <a:r>
+                <a:rPr kumimoji="0" lang="de-DE" b="0" i="0" u="none" strike="noStrike" cap="none" spc="0" normalizeH="0" baseline="0" dirty="0" smtClean="0">
+                  <a:ln>
+                    <a:noFill/>
+                  </a:ln>
+                  <a:solidFill>
+                    <a:srgbClr val="FFFFFF"/>
+                  </a:solidFill>
+                  <a:effectLst/>
+                  <a:uFillTx/>
+                  <a:latin typeface="+mn-lt"/>
+                  <a:ea typeface="+mn-ea"/>
+                  <a:cs typeface="+mn-cs"/>
+                  <a:sym typeface="Helvetica Neue Medium"/>
+                </a:rPr>
+                <a:t>DGCNN</a:t>
+              </a:r>
+              <a:endParaRPr kumimoji="0" lang="de-DE" b="0" i="0" u="none" strike="noStrike" cap="none" spc="0" normalizeH="0" baseline="0" dirty="0">
+                <a:ln>
+                  <a:noFill/>
+                </a:ln>
+                <a:solidFill>
+                  <a:srgbClr val="FFFFFF"/>
+                </a:solidFill>
+                <a:effectLst/>
+                <a:uFillTx/>
+                <a:latin typeface="+mn-lt"/>
+                <a:ea typeface="+mn-ea"/>
+                <a:cs typeface="+mn-cs"/>
+                <a:sym typeface="Helvetica Neue Medium"/>
+              </a:endParaRPr>
+            </a:p>
+          </p:txBody>
+        </p:sp>
+      </p:grpSp>
+      <p:sp>
+        <p:nvSpPr>
+          <p:cNvPr id="8" name="TextBox 7"/>
+          <p:cNvSpPr txBox="1"/>
+          <p:nvPr/>
+        </p:nvSpPr>
+        <p:spPr>
+          <a:xfrm>
+            <a:off x="1689100" y="9046490"/>
+            <a:ext cx="7392931" cy="2336537"/>
+          </a:xfrm>
+          <a:prstGeom prst="rect">
+            <a:avLst/>
+          </a:prstGeom>
+          <a:noFill/>
+          <a:ln w="12700" cap="flat">
+            <a:noFill/>
+            <a:miter lim="400000"/>
+          </a:ln>
+          <a:effectLst/>
+          <a:sp3d/>
+        </p:spPr>
+        <p:style>
+          <a:lnRef idx="0">
+            <a:scrgbClr r="0" g="0" b="0"/>
+          </a:lnRef>
+          <a:fillRef idx="0">
+            <a:scrgbClr r="0" g="0" b="0"/>
+          </a:fillRef>
+          <a:effectRef idx="0">
+            <a:scrgbClr r="0" g="0" b="0"/>
+          </a:effectRef>
+          <a:fontRef idx="none"/>
+        </p:style>
+        <p:txBody>
+          <a:bodyPr rot="0" spcFirstLastPara="1" vertOverflow="overflow" horzOverflow="overflow" vert="horz" wrap="square" lIns="50800" tIns="50800" rIns="50800" bIns="50800" numCol="1" spcCol="38100" rtlCol="0" anchor="t" anchorCtr="0">
+            <a:spAutoFit/>
+          </a:bodyPr>
+          <a:lstStyle/>
+          <a:p>
+            <a:pPr marL="685800" marR="0" indent="-685800" algn="l" defTabSz="825500" rtl="0" fontAlgn="auto" latinLnBrk="0" hangingPunct="0">
+              <a:lnSpc>
+                <a:spcPct val="100000"/>
+              </a:lnSpc>
+              <a:spcBef>
+                <a:spcPts val="5900"/>
+              </a:spcBef>
+              <a:spcAft>
+                <a:spcPts val="0"/>
+              </a:spcAft>
+              <a:buClrTx/>
+              <a:buSzTx/>
+              <a:buFont typeface="Arial" panose="020B0604020202020204" pitchFamily="34" charset="0"/>
+              <a:buChar char="•"/>
+              <a:tabLst/>
+            </a:pPr>
+            <a:r>
+              <a:rPr kumimoji="0" lang="de-DE" sz="4800" b="0" i="0" u="none" strike="noStrike" cap="none" spc="0" normalizeH="0" baseline="0" dirty="0" smtClean="0">
+                <a:ln>
+                  <a:noFill/>
+                </a:ln>
+                <a:solidFill>
+                  <a:srgbClr val="000000"/>
+                </a:solidFill>
+                <a:effectLst/>
+                <a:uFillTx/>
+                <a:latin typeface="Helvetica Neue"/>
+                <a:ea typeface="Helvetica Neue"/>
+                <a:cs typeface="Helvetica Neue"/>
+                <a:sym typeface="Helvetica Neue"/>
+              </a:rPr>
+              <a:t>DBCV: Density based Clustering Evaluation</a:t>
+            </a:r>
+            <a:endParaRPr kumimoji="0" lang="de-DE" sz="4800" b="0" i="0" u="none" strike="noStrike" cap="none" spc="0" normalizeH="0" baseline="0" dirty="0">
+              <a:ln>
+                <a:noFill/>
+              </a:ln>
+              <a:solidFill>
+                <a:srgbClr val="000000"/>
+              </a:solidFill>
+              <a:effectLst/>
+              <a:uFillTx/>
+              <a:latin typeface="Helvetica Neue"/>
+              <a:ea typeface="Helvetica Neue"/>
+              <a:cs typeface="Helvetica Neue"/>
+              <a:sym typeface="Helvetica Neue"/>
+            </a:endParaRPr>
+          </a:p>
+        </p:txBody>
+      </p:sp>
+      <p:sp>
+        <p:nvSpPr>
+          <p:cNvPr id="9" name="TextBox 8"/>
+          <p:cNvSpPr txBox="1"/>
+          <p:nvPr/>
+        </p:nvSpPr>
+        <p:spPr>
+          <a:xfrm>
+            <a:off x="989149" y="8389966"/>
+            <a:ext cx="8092882" cy="933076"/>
+          </a:xfrm>
+          <a:prstGeom prst="rect">
+            <a:avLst/>
+          </a:prstGeom>
+          <a:noFill/>
+          <a:ln w="12700" cap="flat">
+            <a:noFill/>
+            <a:miter lim="400000"/>
+          </a:ln>
+          <a:effectLst/>
+          <a:sp3d/>
+        </p:spPr>
+        <p:style>
+          <a:lnRef idx="0">
+            <a:scrgbClr r="0" g="0" b="0"/>
+          </a:lnRef>
+          <a:fillRef idx="0">
+            <a:scrgbClr r="0" g="0" b="0"/>
+          </a:fillRef>
+          <a:effectRef idx="0">
+            <a:scrgbClr r="0" g="0" b="0"/>
+          </a:effectRef>
+          <a:fontRef idx="none"/>
+        </p:style>
+        <p:txBody>
+          <a:bodyPr rot="0" spcFirstLastPara="1" vertOverflow="overflow" horzOverflow="overflow" vert="horz" wrap="square" lIns="50800" tIns="50800" rIns="50800" bIns="50800" numCol="1" spcCol="38100" rtlCol="0" anchor="ctr">
+            <a:spAutoFit/>
+          </a:bodyPr>
+          <a:lstStyle/>
+          <a:p>
+            <a:pPr>
+              <a:lnSpc>
+                <a:spcPct val="10000"/>
+              </a:lnSpc>
+            </a:pPr>
+            <a:r>
+              <a:rPr lang="fr-FR" dirty="0" smtClean="0"/>
+              <a:t>Evaluation </a:t>
+            </a:r>
+            <a:r>
+              <a:rPr lang="fr-FR" dirty="0" err="1" smtClean="0"/>
+              <a:t>metrics</a:t>
+            </a:r>
+            <a:r>
+              <a:rPr lang="fr-FR" dirty="0" smtClean="0"/>
+              <a:t> - </a:t>
+            </a:r>
+            <a:endParaRPr lang="fr-FR" dirty="0"/>
+          </a:p>
+        </p:txBody>
+      </p:sp>
+      <p:sp>
+        <p:nvSpPr>
+          <p:cNvPr id="2" name="TextBox 1"/>
+          <p:cNvSpPr txBox="1"/>
+          <p:nvPr/>
+        </p:nvSpPr>
+        <p:spPr>
+          <a:xfrm>
+            <a:off x="17777012" y="12375075"/>
+            <a:ext cx="6400800" cy="1166986"/>
+          </a:xfrm>
+          <a:prstGeom prst="rect">
+            <a:avLst/>
+          </a:prstGeom>
+          <a:noFill/>
+          <a:ln w="12700" cap="flat">
+            <a:noFill/>
+            <a:miter lim="400000"/>
+          </a:ln>
+          <a:effectLst/>
+          <a:sp3d/>
+        </p:spPr>
+        <p:style>
+          <a:lnRef idx="0">
+            <a:scrgbClr r="0" g="0" b="0"/>
+          </a:lnRef>
+          <a:fillRef idx="0">
+            <a:scrgbClr r="0" g="0" b="0"/>
+          </a:fillRef>
+          <a:effectRef idx="0">
+            <a:scrgbClr r="0" g="0" b="0"/>
+          </a:effectRef>
+          <a:fontRef idx="none"/>
+        </p:style>
+        <p:txBody>
+          <a:bodyPr rot="0" spcFirstLastPara="1" vertOverflow="overflow" horzOverflow="overflow" vert="horz" wrap="square" lIns="50800" tIns="50800" rIns="50800" bIns="50800" numCol="1" spcCol="38100" rtlCol="0" anchor="ctr">
+            <a:spAutoFit/>
+          </a:bodyPr>
+          <a:lstStyle/>
+          <a:p>
+            <a:pPr marL="0" marR="0" indent="0" algn="l" defTabSz="825500" rtl="0" fontAlgn="auto" latinLnBrk="0" hangingPunct="0">
+              <a:lnSpc>
+                <a:spcPct val="100000"/>
+              </a:lnSpc>
+              <a:spcBef>
+                <a:spcPts val="5900"/>
+              </a:spcBef>
+              <a:spcAft>
+                <a:spcPts val="0"/>
+              </a:spcAft>
+              <a:buClrTx/>
+              <a:buSzTx/>
+              <a:buFontTx/>
+              <a:buNone/>
+              <a:tabLst/>
+            </a:pPr>
+            <a:r>
+              <a:rPr kumimoji="0" lang="de-DE" sz="2000" b="0" i="0" u="none" strike="noStrike" cap="none" spc="0" normalizeH="0" baseline="0" dirty="0" smtClean="0">
+                <a:ln>
+                  <a:noFill/>
+                </a:ln>
+                <a:solidFill>
+                  <a:srgbClr val="000000"/>
+                </a:solidFill>
+                <a:effectLst/>
+                <a:uFillTx/>
+                <a:latin typeface="Helvetica Neue"/>
+                <a:ea typeface="Helvetica Neue"/>
+                <a:cs typeface="Helvetica Neue"/>
+                <a:sym typeface="Helvetica Neue"/>
+              </a:rPr>
+              <a:t>DGCNN:Dynamic Graph Convolutional Neural Network</a:t>
+            </a:r>
+            <a:endParaRPr kumimoji="0" lang="de-DE" sz="2000" b="0" i="0" u="none" strike="noStrike" cap="none" spc="0" normalizeH="0" baseline="0" dirty="0">
+              <a:ln>
+                <a:noFill/>
+              </a:ln>
+              <a:solidFill>
+                <a:srgbClr val="000000"/>
+              </a:solidFill>
+              <a:effectLst/>
+              <a:uFillTx/>
+              <a:latin typeface="Helvetica Neue"/>
+              <a:ea typeface="Helvetica Neue"/>
+              <a:cs typeface="Helvetica Neue"/>
+              <a:sym typeface="Helvetica Neue"/>
+            </a:endParaRPr>
+          </a:p>
+        </p:txBody>
+      </p:sp>
+      <p:cxnSp>
+        <p:nvCxnSpPr>
+          <p:cNvPr id="6" name="Straight Arrow Connector 5"/>
+          <p:cNvCxnSpPr/>
+          <p:nvPr/>
+        </p:nvCxnSpPr>
+        <p:spPr>
+          <a:xfrm flipH="1" flipV="1">
+            <a:off x="15675429" y="4158343"/>
+            <a:ext cx="326571" cy="457200"/>
+          </a:xfrm>
+          <a:prstGeom prst="straightConnector1">
+            <a:avLst/>
+          </a:prstGeom>
+          <a:noFill/>
+          <a:ln w="25400" cap="flat">
+            <a:solidFill>
+              <a:srgbClr val="000000"/>
+            </a:solidFill>
+            <a:prstDash val="solid"/>
+            <a:miter lim="400000"/>
+            <a:tailEnd type="triangle"/>
+          </a:ln>
+          <a:effectLst/>
+          <a:sp3d/>
+        </p:spPr>
+        <p:style>
+          <a:lnRef idx="0">
+            <a:scrgbClr r="0" g="0" b="0"/>
+          </a:lnRef>
+          <a:fillRef idx="0">
+            <a:scrgbClr r="0" g="0" b="0"/>
+          </a:fillRef>
+          <a:effectRef idx="0">
+            <a:scrgbClr r="0" g="0" b="0"/>
+          </a:effectRef>
+          <a:fontRef idx="none"/>
+        </p:style>
+      </p:cxnSp>
+      <p:cxnSp>
+        <p:nvCxnSpPr>
+          <p:cNvPr id="15" name="Straight Arrow Connector 14"/>
+          <p:cNvCxnSpPr/>
+          <p:nvPr/>
+        </p:nvCxnSpPr>
+        <p:spPr>
+          <a:xfrm flipV="1">
+            <a:off x="17541490" y="4123867"/>
+            <a:ext cx="328450" cy="416998"/>
+          </a:xfrm>
+          <a:prstGeom prst="straightConnector1">
+            <a:avLst/>
+          </a:prstGeom>
+          <a:noFill/>
+          <a:ln w="25400" cap="flat">
+            <a:solidFill>
+              <a:srgbClr val="000000"/>
+            </a:solidFill>
+            <a:prstDash val="solid"/>
+            <a:miter lim="400000"/>
+            <a:tailEnd type="triangle"/>
+          </a:ln>
+          <a:effectLst/>
+          <a:sp3d/>
+        </p:spPr>
+        <p:style>
+          <a:lnRef idx="0">
+            <a:scrgbClr r="0" g="0" b="0"/>
+          </a:lnRef>
+          <a:fillRef idx="0">
+            <a:scrgbClr r="0" g="0" b="0"/>
+          </a:fillRef>
+          <a:effectRef idx="0">
+            <a:scrgbClr r="0" g="0" b="0"/>
+          </a:effectRef>
+          <a:fontRef idx="none"/>
+        </p:style>
+      </p:cxnSp>
+      <p:sp>
+        <p:nvSpPr>
+          <p:cNvPr id="16" name="Rectangle 15"/>
+          <p:cNvSpPr/>
+          <p:nvPr/>
+        </p:nvSpPr>
+        <p:spPr>
+          <a:xfrm>
+            <a:off x="1689100" y="5960649"/>
+            <a:ext cx="7032171" cy="738664"/>
+          </a:xfrm>
+          <a:prstGeom prst="rect">
+            <a:avLst/>
+          </a:prstGeom>
+          <a:solidFill>
+            <a:schemeClr val="bg1"/>
+          </a:solidFill>
+          <a:ln w="12700" cap="flat">
+            <a:noFill/>
+            <a:miter lim="400000"/>
+          </a:ln>
+          <a:effectLst/>
+          <a:sp3d/>
+        </p:spPr>
+        <p:style>
+          <a:lnRef idx="0">
+            <a:scrgbClr r="0" g="0" b="0"/>
+          </a:lnRef>
+          <a:fillRef idx="0">
+            <a:scrgbClr r="0" g="0" b="0"/>
+          </a:fillRef>
+          <a:effectRef idx="0">
+            <a:scrgbClr r="0" g="0" b="0"/>
+          </a:effectRef>
+          <a:fontRef idx="none"/>
+        </p:style>
+        <p:txBody>
+          <a:bodyPr rot="0" spcFirstLastPara="1" vertOverflow="overflow" horzOverflow="overflow" vert="horz" wrap="square" lIns="0" tIns="0" rIns="0" bIns="0" numCol="1" spcCol="38100" rtlCol="0" anchor="ctr">
+            <a:spAutoFit/>
+          </a:bodyPr>
+          <a:lstStyle/>
+          <a:p>
+            <a:pPr marL="685800" marR="0" indent="-685800" defTabSz="825500" rtl="0" fontAlgn="auto" latinLnBrk="0" hangingPunct="0">
+              <a:lnSpc>
+                <a:spcPct val="100000"/>
+              </a:lnSpc>
+              <a:spcBef>
+                <a:spcPts val="0"/>
+              </a:spcBef>
+              <a:spcAft>
+                <a:spcPts val="0"/>
+              </a:spcAft>
+              <a:buClrTx/>
+              <a:buSzTx/>
+              <a:buFont typeface="Arial" panose="020B0604020202020204" pitchFamily="34" charset="0"/>
+              <a:buChar char="•"/>
+              <a:tabLst/>
+            </a:pPr>
+            <a:r>
+              <a:rPr kumimoji="0" lang="de-DE" b="0" i="0" u="none" strike="noStrike" cap="none" spc="0" normalizeH="0" baseline="0" dirty="0" smtClean="0">
+                <a:ln>
+                  <a:noFill/>
+                </a:ln>
+                <a:solidFill>
+                  <a:schemeClr val="accent3">
+                    <a:lumMod val="75000"/>
+                  </a:schemeClr>
+                </a:solidFill>
+                <a:effectLst/>
+                <a:uFillTx/>
+                <a:latin typeface="+mn-lt"/>
+                <a:ea typeface="+mn-ea"/>
+                <a:cs typeface="+mn-cs"/>
+                <a:sym typeface="Helvetica Neue Medium"/>
+              </a:rPr>
+              <a:t>Multi-level</a:t>
+            </a:r>
+            <a:r>
+              <a:rPr kumimoji="0" lang="de-DE" b="0" i="0" u="none" strike="noStrike" cap="none" spc="0" normalizeH="0" dirty="0" smtClean="0">
+                <a:ln>
+                  <a:noFill/>
+                </a:ln>
+                <a:solidFill>
+                  <a:schemeClr val="accent3">
+                    <a:lumMod val="75000"/>
+                  </a:schemeClr>
+                </a:solidFill>
+                <a:effectLst/>
+                <a:uFillTx/>
+                <a:latin typeface="+mn-lt"/>
+                <a:ea typeface="+mn-ea"/>
+                <a:cs typeface="+mn-cs"/>
+                <a:sym typeface="Helvetica Neue Medium"/>
+              </a:rPr>
+              <a:t> HDBSCAN</a:t>
+            </a:r>
+            <a:endParaRPr kumimoji="0" lang="de-DE" b="0" i="0" u="none" strike="noStrike" cap="none" spc="0" normalizeH="0" baseline="0" dirty="0">
+              <a:ln>
+                <a:noFill/>
+              </a:ln>
+              <a:solidFill>
+                <a:schemeClr val="accent3">
+                  <a:lumMod val="75000"/>
+                </a:schemeClr>
+              </a:solidFill>
+              <a:effectLst/>
+              <a:uFillTx/>
+              <a:latin typeface="+mn-lt"/>
+              <a:ea typeface="+mn-ea"/>
+              <a:cs typeface="+mn-cs"/>
+              <a:sym typeface="Helvetica Neue Medium"/>
+            </a:endParaRPr>
+          </a:p>
+        </p:txBody>
+      </p:sp>
     </p:spTree>
+    <p:extLst>
+      <p:ext uri="{BB962C8B-B14F-4D97-AF65-F5344CB8AC3E}">
+        <p14:creationId xmlns:p14="http://schemas.microsoft.com/office/powerpoint/2010/main" val="2920890374"/>
+      </p:ext>
+    </p:extLst>
   </p:cSld>
   <p:clrMapOvr>
     <a:masterClrMapping/>
@@ -12939,9 +13759,154 @@
   <p:timing>
     <p:tnLst>
       <p:par>
-        <p:cTn id="1" dur="indefinite" restart="never" nodeType="tmRoot"/>
+        <p:cTn id="1" dur="indefinite" restart="never" nodeType="tmRoot">
+          <p:childTnLst>
+            <p:seq concurrent="1" nextAc="seek">
+              <p:cTn id="2" dur="indefinite" nodeType="mainSeq">
+                <p:childTnLst>
+                  <p:par>
+                    <p:cTn id="3" fill="hold">
+                      <p:stCondLst>
+                        <p:cond delay="indefinite"/>
+                      </p:stCondLst>
+                      <p:childTnLst>
+                        <p:par>
+                          <p:cTn id="4" fill="hold">
+                            <p:stCondLst>
+                              <p:cond delay="0"/>
+                            </p:stCondLst>
+                            <p:childTnLst>
+                              <p:par>
+                                <p:cTn id="5" presetID="1" presetClass="exit" presetSubtype="0" fill="hold" grpId="0" nodeType="clickEffect">
+                                  <p:stCondLst>
+                                    <p:cond delay="0"/>
+                                  </p:stCondLst>
+                                  <p:childTnLst>
+                                    <p:set>
+                                      <p:cBhvr>
+                                        <p:cTn id="6" dur="1" fill="hold">
+                                          <p:stCondLst>
+                                            <p:cond delay="0"/>
+                                          </p:stCondLst>
+                                        </p:cTn>
+                                        <p:tgtEl>
+                                          <p:spTgt spid="216"/>
+                                        </p:tgtEl>
+                                        <p:attrNameLst>
+                                          <p:attrName>style.visibility</p:attrName>
+                                        </p:attrNameLst>
+                                      </p:cBhvr>
+                                      <p:to>
+                                        <p:strVal val="hidden"/>
+                                      </p:to>
+                                    </p:set>
+                                  </p:childTnLst>
+                                </p:cTn>
+                              </p:par>
+                              <p:par>
+                                <p:cTn id="7" presetID="1" presetClass="entr" presetSubtype="0" fill="hold" grpId="0" nodeType="withEffect">
+                                  <p:stCondLst>
+                                    <p:cond delay="0"/>
+                                  </p:stCondLst>
+                                  <p:childTnLst>
+                                    <p:set>
+                                      <p:cBhvr>
+                                        <p:cTn id="8" dur="1" fill="hold">
+                                          <p:stCondLst>
+                                            <p:cond delay="0"/>
+                                          </p:stCondLst>
+                                        </p:cTn>
+                                        <p:tgtEl>
+                                          <p:spTgt spid="20"/>
+                                        </p:tgtEl>
+                                        <p:attrNameLst>
+                                          <p:attrName>style.visibility</p:attrName>
+                                        </p:attrNameLst>
+                                      </p:cBhvr>
+                                      <p:to>
+                                        <p:strVal val="visible"/>
+                                      </p:to>
+                                    </p:set>
+                                  </p:childTnLst>
+                                </p:cTn>
+                              </p:par>
+                            </p:childTnLst>
+                          </p:cTn>
+                        </p:par>
+                      </p:childTnLst>
+                    </p:cTn>
+                  </p:par>
+                  <p:par>
+                    <p:cTn id="9" fill="hold">
+                      <p:stCondLst>
+                        <p:cond delay="indefinite"/>
+                      </p:stCondLst>
+                      <p:childTnLst>
+                        <p:par>
+                          <p:cTn id="10" fill="hold">
+                            <p:stCondLst>
+                              <p:cond delay="0"/>
+                            </p:stCondLst>
+                            <p:childTnLst>
+                              <p:par>
+                                <p:cTn id="11" presetID="1" presetClass="entr" presetSubtype="0" fill="hold" grpId="0" nodeType="clickEffect">
+                                  <p:stCondLst>
+                                    <p:cond delay="0"/>
+                                  </p:stCondLst>
+                                  <p:childTnLst>
+                                    <p:set>
+                                      <p:cBhvr>
+                                        <p:cTn id="12" dur="1" fill="hold">
+                                          <p:stCondLst>
+                                            <p:cond delay="0"/>
+                                          </p:stCondLst>
+                                        </p:cTn>
+                                        <p:tgtEl>
+                                          <p:spTgt spid="16"/>
+                                        </p:tgtEl>
+                                        <p:attrNameLst>
+                                          <p:attrName>style.visibility</p:attrName>
+                                        </p:attrNameLst>
+                                      </p:cBhvr>
+                                      <p:to>
+                                        <p:strVal val="visible"/>
+                                      </p:to>
+                                    </p:set>
+                                  </p:childTnLst>
+                                </p:cTn>
+                              </p:par>
+                            </p:childTnLst>
+                          </p:cTn>
+                        </p:par>
+                      </p:childTnLst>
+                    </p:cTn>
+                  </p:par>
+                </p:childTnLst>
+              </p:cTn>
+              <p:prevCondLst>
+                <p:cond evt="onPrev" delay="0">
+                  <p:tgtEl>
+                    <p:sldTgt/>
+                  </p:tgtEl>
+                </p:cond>
+              </p:prevCondLst>
+              <p:nextCondLst>
+                <p:cond evt="onNext" delay="0">
+                  <p:tgtEl>
+                    <p:sldTgt/>
+                  </p:tgtEl>
+                </p:cond>
+              </p:nextCondLst>
+            </p:seq>
+          </p:childTnLst>
+        </p:cTn>
       </p:par>
     </p:tnLst>
+    <p:bldLst>
+      <p:bldP spid="20" grpId="0" animBg="1"/>
+      <p:bldP spid="216" grpId="0" animBg="1"/>
+      <p:bldP spid="16" grpId="0" animBg="1"/>
+    </p:bldLst>
   </p:timing>
 </p:sld>
 </file>
@@ -13124,7 +14089,7 @@
           </a:prstGeom>
           <a:extLst>
             <a:ext uri="{C572A759-6A51-4108-AA02-DFA0A04FC94B}">
-              <ma14:wrappingTextBoxFlag xmlns="" xmlns:m="http://schemas.openxmlformats.org/officeDocument/2006/math" xmlns:a14="http://schemas.microsoft.com/office/drawing/2010/main" xmlns:ma14="http://schemas.microsoft.com/office/mac/drawingml/2011/main" val="1"/>
+              <ma14:wrappingTextBoxFlag xmlns:ma14="http://schemas.microsoft.com/office/mac/drawingml/2011/main" xmlns:a14="http://schemas.microsoft.com/office/drawing/2010/main" xmlns:m="http://schemas.openxmlformats.org/officeDocument/2006/math" xmlns="" val="1"/>
             </a:ext>
           </a:extLst>
         </p:spPr>
@@ -13687,6 +14652,7581 @@
 </p:sld>
 </file>
 
+<file path=ppt/slides/slide20.xml><?xml version="1.0" encoding="utf-8"?>
+<p:sld xmlns:a="http://schemas.openxmlformats.org/drawingml/2006/main" xmlns:r="http://schemas.openxmlformats.org/officeDocument/2006/relationships" xmlns:p="http://schemas.openxmlformats.org/presentationml/2006/main">
+  <p:cSld>
+    <p:spTree>
+      <p:nvGrpSpPr>
+        <p:cNvPr id="1" name=""/>
+        <p:cNvGrpSpPr/>
+        <p:nvPr/>
+      </p:nvGrpSpPr>
+      <p:grpSpPr>
+        <a:xfrm>
+          <a:off x="0" y="0"/>
+          <a:ext cx="0" cy="0"/>
+          <a:chOff x="0" y="0"/>
+          <a:chExt cx="0" cy="0"/>
+        </a:xfrm>
+      </p:grpSpPr>
+      <p:sp>
+        <p:nvSpPr>
+          <p:cNvPr id="86" name="Oval 85"/>
+          <p:cNvSpPr/>
+          <p:nvPr/>
+        </p:nvSpPr>
+        <p:spPr>
+          <a:xfrm>
+            <a:off x="3716361" y="7600938"/>
+            <a:ext cx="1256325" cy="1564610"/>
+          </a:xfrm>
+          <a:prstGeom prst="ellipse">
+            <a:avLst/>
+          </a:prstGeom>
+          <a:ln>
+            <a:solidFill>
+              <a:schemeClr val="tx1"/>
+            </a:solidFill>
+          </a:ln>
+        </p:spPr>
+        <p:style>
+          <a:lnRef idx="2">
+            <a:schemeClr val="accent1"/>
+          </a:lnRef>
+          <a:fillRef idx="1">
+            <a:schemeClr val="lt1"/>
+          </a:fillRef>
+          <a:effectRef idx="0">
+            <a:schemeClr val="accent1"/>
+          </a:effectRef>
+          <a:fontRef idx="minor">
+            <a:schemeClr val="dk1"/>
+          </a:fontRef>
+        </p:style>
+        <p:txBody>
+          <a:bodyPr rot="0" spcFirstLastPara="1" vertOverflow="overflow" horzOverflow="overflow" vert="horz" wrap="square" lIns="0" tIns="0" rIns="0" bIns="0" numCol="1" spcCol="38100" rtlCol="0" anchor="ctr">
+            <a:spAutoFit/>
+          </a:bodyPr>
+          <a:lstStyle/>
+          <a:p>
+            <a:pPr marL="0" marR="0" indent="0" algn="ctr" defTabSz="825500" rtl="0" fontAlgn="auto" latinLnBrk="0" hangingPunct="0">
+              <a:lnSpc>
+                <a:spcPct val="100000"/>
+              </a:lnSpc>
+              <a:spcBef>
+                <a:spcPts val="0"/>
+              </a:spcBef>
+              <a:spcAft>
+                <a:spcPts val="0"/>
+              </a:spcAft>
+              <a:buClrTx/>
+              <a:buSzTx/>
+              <a:buFontTx/>
+              <a:buNone/>
+              <a:tabLst/>
+            </a:pPr>
+            <a:endParaRPr kumimoji="0" lang="de-DE" sz="3200" b="0" i="0" u="none" strike="noStrike" cap="none" spc="0" normalizeH="0" baseline="0">
+              <a:ln>
+                <a:noFill/>
+              </a:ln>
+              <a:solidFill>
+                <a:srgbClr val="FFFFFF"/>
+              </a:solidFill>
+              <a:effectLst/>
+              <a:uFillTx/>
+              <a:latin typeface="+mn-lt"/>
+              <a:ea typeface="+mn-ea"/>
+              <a:cs typeface="+mn-cs"/>
+              <a:sym typeface="Helvetica Neue Medium"/>
+            </a:endParaRPr>
+          </a:p>
+        </p:txBody>
+      </p:sp>
+      <p:sp>
+        <p:nvSpPr>
+          <p:cNvPr id="2" name="Title 1"/>
+          <p:cNvSpPr>
+            <a:spLocks noGrp="1"/>
+          </p:cNvSpPr>
+          <p:nvPr>
+            <p:ph type="title"/>
+          </p:nvPr>
+        </p:nvSpPr>
+        <p:spPr/>
+        <p:txBody>
+          <a:bodyPr/>
+          <a:lstStyle/>
+          <a:p>
+            <a:r>
+              <a:rPr lang="de-DE" dirty="0" smtClean="0"/>
+              <a:t>Multi-level HDBSCAN</a:t>
+            </a:r>
+            <a:endParaRPr lang="de-DE" dirty="0"/>
+          </a:p>
+        </p:txBody>
+      </p:sp>
+      <p:grpSp>
+        <p:nvGrpSpPr>
+          <p:cNvPr id="105" name="Group 104"/>
+          <p:cNvGrpSpPr/>
+          <p:nvPr/>
+        </p:nvGrpSpPr>
+        <p:grpSpPr>
+          <a:xfrm>
+            <a:off x="1424544" y="10125524"/>
+            <a:ext cx="21270356" cy="2046520"/>
+            <a:chOff x="1424544" y="10125524"/>
+            <a:chExt cx="21270356" cy="2046520"/>
+          </a:xfrm>
+        </p:grpSpPr>
+        <p:sp>
+          <p:nvSpPr>
+            <p:cNvPr id="7" name="Oval 6"/>
+            <p:cNvSpPr/>
+            <p:nvPr/>
+          </p:nvSpPr>
+          <p:spPr>
+            <a:xfrm>
+              <a:off x="1424544" y="10125524"/>
+              <a:ext cx="2378529" cy="1915886"/>
+            </a:xfrm>
+            <a:prstGeom prst="ellipse">
+              <a:avLst/>
+            </a:prstGeom>
+            <a:ln/>
+          </p:spPr>
+          <p:style>
+            <a:lnRef idx="2">
+              <a:schemeClr val="accent1"/>
+            </a:lnRef>
+            <a:fillRef idx="1">
+              <a:schemeClr val="lt1"/>
+            </a:fillRef>
+            <a:effectRef idx="0">
+              <a:schemeClr val="accent1"/>
+            </a:effectRef>
+            <a:fontRef idx="minor">
+              <a:schemeClr val="dk1"/>
+            </a:fontRef>
+          </p:style>
+          <p:txBody>
+            <a:bodyPr rot="0" spcFirstLastPara="1" vertOverflow="overflow" horzOverflow="overflow" vert="horz" wrap="square" lIns="0" tIns="0" rIns="0" bIns="0" numCol="1" spcCol="38100" rtlCol="0" anchor="ctr">
+              <a:spAutoFit/>
+            </a:bodyPr>
+            <a:lstStyle/>
+            <a:p>
+              <a:pPr marL="0" marR="0" indent="0" algn="ctr" defTabSz="825500" rtl="0" fontAlgn="auto" latinLnBrk="0" hangingPunct="0">
+                <a:lnSpc>
+                  <a:spcPct val="100000"/>
+                </a:lnSpc>
+                <a:spcBef>
+                  <a:spcPts val="0"/>
+                </a:spcBef>
+                <a:spcAft>
+                  <a:spcPts val="0"/>
+                </a:spcAft>
+                <a:buClrTx/>
+                <a:buSzTx/>
+                <a:buFontTx/>
+                <a:buNone/>
+                <a:tabLst/>
+              </a:pPr>
+              <a:endParaRPr kumimoji="0" lang="de-DE" sz="3200" b="0" i="0" u="none" strike="noStrike" cap="none" spc="0" normalizeH="0" baseline="0">
+                <a:ln>
+                  <a:noFill/>
+                </a:ln>
+                <a:solidFill>
+                  <a:srgbClr val="FFFFFF"/>
+                </a:solidFill>
+                <a:effectLst/>
+                <a:uFillTx/>
+                <a:latin typeface="+mn-lt"/>
+                <a:ea typeface="+mn-ea"/>
+                <a:cs typeface="+mn-cs"/>
+                <a:sym typeface="Helvetica Neue Medium"/>
+              </a:endParaRPr>
+            </a:p>
+          </p:txBody>
+        </p:sp>
+        <p:sp>
+          <p:nvSpPr>
+            <p:cNvPr id="11" name="Oval 10"/>
+            <p:cNvSpPr/>
+            <p:nvPr/>
+          </p:nvSpPr>
+          <p:spPr>
+            <a:xfrm>
+              <a:off x="20316371" y="10174513"/>
+              <a:ext cx="2378529" cy="1915886"/>
+            </a:xfrm>
+            <a:prstGeom prst="ellipse">
+              <a:avLst/>
+            </a:prstGeom>
+            <a:ln/>
+          </p:spPr>
+          <p:style>
+            <a:lnRef idx="2">
+              <a:schemeClr val="accent1"/>
+            </a:lnRef>
+            <a:fillRef idx="1">
+              <a:schemeClr val="lt1"/>
+            </a:fillRef>
+            <a:effectRef idx="0">
+              <a:schemeClr val="accent1"/>
+            </a:effectRef>
+            <a:fontRef idx="minor">
+              <a:schemeClr val="dk1"/>
+            </a:fontRef>
+          </p:style>
+          <p:txBody>
+            <a:bodyPr rot="0" spcFirstLastPara="1" vertOverflow="overflow" horzOverflow="overflow" vert="horz" wrap="square" lIns="0" tIns="0" rIns="0" bIns="0" numCol="1" spcCol="38100" rtlCol="0" anchor="ctr">
+              <a:spAutoFit/>
+            </a:bodyPr>
+            <a:lstStyle/>
+            <a:p>
+              <a:pPr marL="0" marR="0" indent="0" algn="ctr" defTabSz="825500" rtl="0" fontAlgn="auto" latinLnBrk="0" hangingPunct="0">
+                <a:lnSpc>
+                  <a:spcPct val="100000"/>
+                </a:lnSpc>
+                <a:spcBef>
+                  <a:spcPts val="0"/>
+                </a:spcBef>
+                <a:spcAft>
+                  <a:spcPts val="0"/>
+                </a:spcAft>
+                <a:buClrTx/>
+                <a:buSzTx/>
+                <a:buFontTx/>
+                <a:buNone/>
+                <a:tabLst/>
+              </a:pPr>
+              <a:endParaRPr kumimoji="0" lang="de-DE" sz="3200" b="0" i="0" u="none" strike="noStrike" cap="none" spc="0" normalizeH="0" baseline="0">
+                <a:ln>
+                  <a:noFill/>
+                </a:ln>
+                <a:solidFill>
+                  <a:srgbClr val="FFFFFF"/>
+                </a:solidFill>
+                <a:effectLst/>
+                <a:uFillTx/>
+                <a:latin typeface="+mn-lt"/>
+                <a:ea typeface="+mn-ea"/>
+                <a:cs typeface="+mn-cs"/>
+                <a:sym typeface="Helvetica Neue Medium"/>
+              </a:endParaRPr>
+            </a:p>
+          </p:txBody>
+        </p:sp>
+        <p:sp>
+          <p:nvSpPr>
+            <p:cNvPr id="12" name="Oval 11"/>
+            <p:cNvSpPr/>
+            <p:nvPr/>
+          </p:nvSpPr>
+          <p:spPr>
+            <a:xfrm>
+              <a:off x="4153855" y="10125524"/>
+              <a:ext cx="2378529" cy="1915886"/>
+            </a:xfrm>
+            <a:prstGeom prst="ellipse">
+              <a:avLst/>
+            </a:prstGeom>
+            <a:ln/>
+          </p:spPr>
+          <p:style>
+            <a:lnRef idx="2">
+              <a:schemeClr val="accent1"/>
+            </a:lnRef>
+            <a:fillRef idx="1">
+              <a:schemeClr val="lt1"/>
+            </a:fillRef>
+            <a:effectRef idx="0">
+              <a:schemeClr val="accent1"/>
+            </a:effectRef>
+            <a:fontRef idx="minor">
+              <a:schemeClr val="dk1"/>
+            </a:fontRef>
+          </p:style>
+          <p:txBody>
+            <a:bodyPr rot="0" spcFirstLastPara="1" vertOverflow="overflow" horzOverflow="overflow" vert="horz" wrap="square" lIns="0" tIns="0" rIns="0" bIns="0" numCol="1" spcCol="38100" rtlCol="0" anchor="ctr">
+              <a:spAutoFit/>
+            </a:bodyPr>
+            <a:lstStyle/>
+            <a:p>
+              <a:pPr marL="0" marR="0" indent="0" algn="ctr" defTabSz="825500" rtl="0" fontAlgn="auto" latinLnBrk="0" hangingPunct="0">
+                <a:lnSpc>
+                  <a:spcPct val="100000"/>
+                </a:lnSpc>
+                <a:spcBef>
+                  <a:spcPts val="0"/>
+                </a:spcBef>
+                <a:spcAft>
+                  <a:spcPts val="0"/>
+                </a:spcAft>
+                <a:buClrTx/>
+                <a:buSzTx/>
+                <a:buFontTx/>
+                <a:buNone/>
+                <a:tabLst/>
+              </a:pPr>
+              <a:endParaRPr kumimoji="0" lang="de-DE" sz="3200" b="0" i="0" u="none" strike="noStrike" cap="none" spc="0" normalizeH="0" baseline="0">
+                <a:ln>
+                  <a:noFill/>
+                </a:ln>
+                <a:solidFill>
+                  <a:srgbClr val="FFFFFF"/>
+                </a:solidFill>
+                <a:effectLst/>
+                <a:uFillTx/>
+                <a:latin typeface="+mn-lt"/>
+                <a:ea typeface="+mn-ea"/>
+                <a:cs typeface="+mn-cs"/>
+                <a:sym typeface="Helvetica Neue Medium"/>
+              </a:endParaRPr>
+            </a:p>
+          </p:txBody>
+        </p:sp>
+        <p:sp>
+          <p:nvSpPr>
+            <p:cNvPr id="13" name="Oval 12"/>
+            <p:cNvSpPr/>
+            <p:nvPr/>
+          </p:nvSpPr>
+          <p:spPr>
+            <a:xfrm>
+              <a:off x="6740745" y="10165440"/>
+              <a:ext cx="2378529" cy="1915886"/>
+            </a:xfrm>
+            <a:prstGeom prst="ellipse">
+              <a:avLst/>
+            </a:prstGeom>
+            <a:ln/>
+          </p:spPr>
+          <p:style>
+            <a:lnRef idx="2">
+              <a:schemeClr val="accent1"/>
+            </a:lnRef>
+            <a:fillRef idx="1">
+              <a:schemeClr val="lt1"/>
+            </a:fillRef>
+            <a:effectRef idx="0">
+              <a:schemeClr val="accent1"/>
+            </a:effectRef>
+            <a:fontRef idx="minor">
+              <a:schemeClr val="dk1"/>
+            </a:fontRef>
+          </p:style>
+          <p:txBody>
+            <a:bodyPr rot="0" spcFirstLastPara="1" vertOverflow="overflow" horzOverflow="overflow" vert="horz" wrap="square" lIns="0" tIns="0" rIns="0" bIns="0" numCol="1" spcCol="38100" rtlCol="0" anchor="ctr">
+              <a:spAutoFit/>
+            </a:bodyPr>
+            <a:lstStyle/>
+            <a:p>
+              <a:pPr marL="0" marR="0" indent="0" algn="ctr" defTabSz="825500" rtl="0" fontAlgn="auto" latinLnBrk="0" hangingPunct="0">
+                <a:lnSpc>
+                  <a:spcPct val="100000"/>
+                </a:lnSpc>
+                <a:spcBef>
+                  <a:spcPts val="0"/>
+                </a:spcBef>
+                <a:spcAft>
+                  <a:spcPts val="0"/>
+                </a:spcAft>
+                <a:buClrTx/>
+                <a:buSzTx/>
+                <a:buFontTx/>
+                <a:buNone/>
+                <a:tabLst/>
+              </a:pPr>
+              <a:endParaRPr kumimoji="0" lang="de-DE" sz="3200" b="0" i="0" u="none" strike="noStrike" cap="none" spc="0" normalizeH="0" baseline="0">
+                <a:ln>
+                  <a:noFill/>
+                </a:ln>
+                <a:solidFill>
+                  <a:srgbClr val="FFFFFF"/>
+                </a:solidFill>
+                <a:effectLst/>
+                <a:uFillTx/>
+                <a:latin typeface="+mn-lt"/>
+                <a:ea typeface="+mn-ea"/>
+                <a:cs typeface="+mn-cs"/>
+                <a:sym typeface="Helvetica Neue Medium"/>
+              </a:endParaRPr>
+            </a:p>
+          </p:txBody>
+        </p:sp>
+        <p:sp>
+          <p:nvSpPr>
+            <p:cNvPr id="14" name="Oval 13"/>
+            <p:cNvSpPr/>
+            <p:nvPr/>
+          </p:nvSpPr>
+          <p:spPr>
+            <a:xfrm>
+              <a:off x="9399127" y="10165440"/>
+              <a:ext cx="2378529" cy="1915886"/>
+            </a:xfrm>
+            <a:prstGeom prst="ellipse">
+              <a:avLst/>
+            </a:prstGeom>
+            <a:ln/>
+          </p:spPr>
+          <p:style>
+            <a:lnRef idx="2">
+              <a:schemeClr val="accent1"/>
+            </a:lnRef>
+            <a:fillRef idx="1">
+              <a:schemeClr val="lt1"/>
+            </a:fillRef>
+            <a:effectRef idx="0">
+              <a:schemeClr val="accent1"/>
+            </a:effectRef>
+            <a:fontRef idx="minor">
+              <a:schemeClr val="dk1"/>
+            </a:fontRef>
+          </p:style>
+          <p:txBody>
+            <a:bodyPr rot="0" spcFirstLastPara="1" vertOverflow="overflow" horzOverflow="overflow" vert="horz" wrap="square" lIns="0" tIns="0" rIns="0" bIns="0" numCol="1" spcCol="38100" rtlCol="0" anchor="ctr">
+              <a:spAutoFit/>
+            </a:bodyPr>
+            <a:lstStyle/>
+            <a:p>
+              <a:pPr marL="0" marR="0" indent="0" algn="ctr" defTabSz="825500" rtl="0" fontAlgn="auto" latinLnBrk="0" hangingPunct="0">
+                <a:lnSpc>
+                  <a:spcPct val="100000"/>
+                </a:lnSpc>
+                <a:spcBef>
+                  <a:spcPts val="0"/>
+                </a:spcBef>
+                <a:spcAft>
+                  <a:spcPts val="0"/>
+                </a:spcAft>
+                <a:buClrTx/>
+                <a:buSzTx/>
+                <a:buFontTx/>
+                <a:buNone/>
+                <a:tabLst/>
+              </a:pPr>
+              <a:endParaRPr kumimoji="0" lang="de-DE" sz="3200" b="0" i="0" u="none" strike="noStrike" cap="none" spc="0" normalizeH="0" baseline="0">
+                <a:ln>
+                  <a:noFill/>
+                </a:ln>
+                <a:solidFill>
+                  <a:srgbClr val="FFFFFF"/>
+                </a:solidFill>
+                <a:effectLst/>
+                <a:uFillTx/>
+                <a:latin typeface="+mn-lt"/>
+                <a:ea typeface="+mn-ea"/>
+                <a:cs typeface="+mn-cs"/>
+                <a:sym typeface="Helvetica Neue Medium"/>
+              </a:endParaRPr>
+            </a:p>
+          </p:txBody>
+        </p:sp>
+        <p:sp>
+          <p:nvSpPr>
+            <p:cNvPr id="15" name="Oval 14"/>
+            <p:cNvSpPr/>
+            <p:nvPr/>
+          </p:nvSpPr>
+          <p:spPr>
+            <a:xfrm>
+              <a:off x="12128438" y="10174513"/>
+              <a:ext cx="2378529" cy="1915886"/>
+            </a:xfrm>
+            <a:prstGeom prst="ellipse">
+              <a:avLst/>
+            </a:prstGeom>
+            <a:ln/>
+          </p:spPr>
+          <p:style>
+            <a:lnRef idx="2">
+              <a:schemeClr val="accent1"/>
+            </a:lnRef>
+            <a:fillRef idx="1">
+              <a:schemeClr val="lt1"/>
+            </a:fillRef>
+            <a:effectRef idx="0">
+              <a:schemeClr val="accent1"/>
+            </a:effectRef>
+            <a:fontRef idx="minor">
+              <a:schemeClr val="dk1"/>
+            </a:fontRef>
+          </p:style>
+          <p:txBody>
+            <a:bodyPr rot="0" spcFirstLastPara="1" vertOverflow="overflow" horzOverflow="overflow" vert="horz" wrap="square" lIns="0" tIns="0" rIns="0" bIns="0" numCol="1" spcCol="38100" rtlCol="0" anchor="ctr">
+              <a:spAutoFit/>
+            </a:bodyPr>
+            <a:lstStyle/>
+            <a:p>
+              <a:pPr marL="0" marR="0" indent="0" algn="ctr" defTabSz="825500" rtl="0" fontAlgn="auto" latinLnBrk="0" hangingPunct="0">
+                <a:lnSpc>
+                  <a:spcPct val="100000"/>
+                </a:lnSpc>
+                <a:spcBef>
+                  <a:spcPts val="0"/>
+                </a:spcBef>
+                <a:spcAft>
+                  <a:spcPts val="0"/>
+                </a:spcAft>
+                <a:buClrTx/>
+                <a:buSzTx/>
+                <a:buFontTx/>
+                <a:buNone/>
+                <a:tabLst/>
+              </a:pPr>
+              <a:endParaRPr kumimoji="0" lang="de-DE" sz="3200" b="0" i="0" u="none" strike="noStrike" cap="none" spc="0" normalizeH="0" baseline="0">
+                <a:ln>
+                  <a:noFill/>
+                </a:ln>
+                <a:solidFill>
+                  <a:srgbClr val="FFFFFF"/>
+                </a:solidFill>
+                <a:effectLst/>
+                <a:uFillTx/>
+                <a:latin typeface="+mn-lt"/>
+                <a:ea typeface="+mn-ea"/>
+                <a:cs typeface="+mn-cs"/>
+                <a:sym typeface="Helvetica Neue Medium"/>
+              </a:endParaRPr>
+            </a:p>
+          </p:txBody>
+        </p:sp>
+        <p:sp>
+          <p:nvSpPr>
+            <p:cNvPr id="16" name="Oval 15"/>
+            <p:cNvSpPr/>
+            <p:nvPr/>
+          </p:nvSpPr>
+          <p:spPr>
+            <a:xfrm>
+              <a:off x="14857749" y="10174513"/>
+              <a:ext cx="2378529" cy="1915886"/>
+            </a:xfrm>
+            <a:prstGeom prst="ellipse">
+              <a:avLst/>
+            </a:prstGeom>
+            <a:ln/>
+          </p:spPr>
+          <p:style>
+            <a:lnRef idx="2">
+              <a:schemeClr val="accent1"/>
+            </a:lnRef>
+            <a:fillRef idx="1">
+              <a:schemeClr val="lt1"/>
+            </a:fillRef>
+            <a:effectRef idx="0">
+              <a:schemeClr val="accent1"/>
+            </a:effectRef>
+            <a:fontRef idx="minor">
+              <a:schemeClr val="dk1"/>
+            </a:fontRef>
+          </p:style>
+          <p:txBody>
+            <a:bodyPr rot="0" spcFirstLastPara="1" vertOverflow="overflow" horzOverflow="overflow" vert="horz" wrap="square" lIns="0" tIns="0" rIns="0" bIns="0" numCol="1" spcCol="38100" rtlCol="0" anchor="ctr">
+              <a:spAutoFit/>
+            </a:bodyPr>
+            <a:lstStyle/>
+            <a:p>
+              <a:pPr marL="0" marR="0" indent="0" algn="ctr" defTabSz="825500" rtl="0" fontAlgn="auto" latinLnBrk="0" hangingPunct="0">
+                <a:lnSpc>
+                  <a:spcPct val="100000"/>
+                </a:lnSpc>
+                <a:spcBef>
+                  <a:spcPts val="0"/>
+                </a:spcBef>
+                <a:spcAft>
+                  <a:spcPts val="0"/>
+                </a:spcAft>
+                <a:buClrTx/>
+                <a:buSzTx/>
+                <a:buFontTx/>
+                <a:buNone/>
+                <a:tabLst/>
+              </a:pPr>
+              <a:endParaRPr kumimoji="0" lang="de-DE" sz="3200" b="0" i="0" u="none" strike="noStrike" cap="none" spc="0" normalizeH="0" baseline="0">
+                <a:ln>
+                  <a:noFill/>
+                </a:ln>
+                <a:solidFill>
+                  <a:srgbClr val="FFFFFF"/>
+                </a:solidFill>
+                <a:effectLst/>
+                <a:uFillTx/>
+                <a:latin typeface="+mn-lt"/>
+                <a:ea typeface="+mn-ea"/>
+                <a:cs typeface="+mn-cs"/>
+                <a:sym typeface="Helvetica Neue Medium"/>
+              </a:endParaRPr>
+            </a:p>
+          </p:txBody>
+        </p:sp>
+        <p:sp>
+          <p:nvSpPr>
+            <p:cNvPr id="17" name="Oval 16"/>
+            <p:cNvSpPr/>
+            <p:nvPr/>
+          </p:nvSpPr>
+          <p:spPr>
+            <a:xfrm>
+              <a:off x="17614359" y="10256158"/>
+              <a:ext cx="2378529" cy="1915886"/>
+            </a:xfrm>
+            <a:prstGeom prst="ellipse">
+              <a:avLst/>
+            </a:prstGeom>
+            <a:ln/>
+          </p:spPr>
+          <p:style>
+            <a:lnRef idx="2">
+              <a:schemeClr val="accent1"/>
+            </a:lnRef>
+            <a:fillRef idx="1">
+              <a:schemeClr val="lt1"/>
+            </a:fillRef>
+            <a:effectRef idx="0">
+              <a:schemeClr val="accent1"/>
+            </a:effectRef>
+            <a:fontRef idx="minor">
+              <a:schemeClr val="dk1"/>
+            </a:fontRef>
+          </p:style>
+          <p:txBody>
+            <a:bodyPr rot="0" spcFirstLastPara="1" vertOverflow="overflow" horzOverflow="overflow" vert="horz" wrap="square" lIns="0" tIns="0" rIns="0" bIns="0" numCol="1" spcCol="38100" rtlCol="0" anchor="ctr">
+              <a:spAutoFit/>
+            </a:bodyPr>
+            <a:lstStyle/>
+            <a:p>
+              <a:pPr marL="0" marR="0" indent="0" algn="ctr" defTabSz="825500" rtl="0" fontAlgn="auto" latinLnBrk="0" hangingPunct="0">
+                <a:lnSpc>
+                  <a:spcPct val="100000"/>
+                </a:lnSpc>
+                <a:spcBef>
+                  <a:spcPts val="0"/>
+                </a:spcBef>
+                <a:spcAft>
+                  <a:spcPts val="0"/>
+                </a:spcAft>
+                <a:buClrTx/>
+                <a:buSzTx/>
+                <a:buFontTx/>
+                <a:buNone/>
+                <a:tabLst/>
+              </a:pPr>
+              <a:endParaRPr kumimoji="0" lang="de-DE" sz="3200" b="0" i="0" u="none" strike="noStrike" cap="none" spc="0" normalizeH="0" baseline="0">
+                <a:ln>
+                  <a:noFill/>
+                </a:ln>
+                <a:solidFill>
+                  <a:srgbClr val="FFFFFF"/>
+                </a:solidFill>
+                <a:effectLst/>
+                <a:uFillTx/>
+                <a:latin typeface="+mn-lt"/>
+                <a:ea typeface="+mn-ea"/>
+                <a:cs typeface="+mn-cs"/>
+                <a:sym typeface="Helvetica Neue Medium"/>
+              </a:endParaRPr>
+            </a:p>
+          </p:txBody>
+        </p:sp>
+        <p:sp>
+          <p:nvSpPr>
+            <p:cNvPr id="18" name="5-Point Star 17"/>
+            <p:cNvSpPr/>
+            <p:nvPr/>
+          </p:nvSpPr>
+          <p:spPr>
+            <a:xfrm>
+              <a:off x="2024743" y="10646229"/>
+              <a:ext cx="522514" cy="437238"/>
+            </a:xfrm>
+            <a:prstGeom prst="star5">
+              <a:avLst/>
+            </a:prstGeom>
+            <a:solidFill>
+              <a:schemeClr val="tx1"/>
+            </a:solidFill>
+            <a:ln w="12700" cap="flat">
+              <a:noFill/>
+              <a:miter lim="400000"/>
+            </a:ln>
+            <a:effectLst/>
+            <a:sp3d/>
+          </p:spPr>
+          <p:style>
+            <a:lnRef idx="0">
+              <a:scrgbClr r="0" g="0" b="0"/>
+            </a:lnRef>
+            <a:fillRef idx="0">
+              <a:scrgbClr r="0" g="0" b="0"/>
+            </a:fillRef>
+            <a:effectRef idx="0">
+              <a:scrgbClr r="0" g="0" b="0"/>
+            </a:effectRef>
+            <a:fontRef idx="none"/>
+          </p:style>
+          <p:txBody>
+            <a:bodyPr rot="0" spcFirstLastPara="1" vertOverflow="overflow" horzOverflow="overflow" vert="horz" wrap="square" lIns="0" tIns="0" rIns="0" bIns="0" numCol="1" spcCol="38100" rtlCol="0" anchor="ctr">
+              <a:spAutoFit/>
+            </a:bodyPr>
+            <a:lstStyle/>
+            <a:p>
+              <a:pPr marL="0" marR="0" indent="0" algn="ctr" defTabSz="825500" rtl="0" fontAlgn="auto" latinLnBrk="0" hangingPunct="0">
+                <a:lnSpc>
+                  <a:spcPct val="100000"/>
+                </a:lnSpc>
+                <a:spcBef>
+                  <a:spcPts val="0"/>
+                </a:spcBef>
+                <a:spcAft>
+                  <a:spcPts val="0"/>
+                </a:spcAft>
+                <a:buClrTx/>
+                <a:buSzTx/>
+                <a:buFontTx/>
+                <a:buNone/>
+                <a:tabLst/>
+              </a:pPr>
+              <a:endParaRPr kumimoji="0" lang="de-DE" sz="3200" b="0" i="0" u="none" strike="noStrike" cap="none" spc="0" normalizeH="0" baseline="0">
+                <a:ln>
+                  <a:noFill/>
+                </a:ln>
+                <a:solidFill>
+                  <a:srgbClr val="FFFFFF"/>
+                </a:solidFill>
+                <a:effectLst/>
+                <a:uFillTx/>
+                <a:latin typeface="+mn-lt"/>
+                <a:ea typeface="+mn-ea"/>
+                <a:cs typeface="+mn-cs"/>
+                <a:sym typeface="Helvetica Neue Medium"/>
+              </a:endParaRPr>
+            </a:p>
+          </p:txBody>
+        </p:sp>
+        <p:sp>
+          <p:nvSpPr>
+            <p:cNvPr id="19" name="5-Point Star 18"/>
+            <p:cNvSpPr/>
+            <p:nvPr/>
+          </p:nvSpPr>
+          <p:spPr>
+            <a:xfrm>
+              <a:off x="2852057" y="10904764"/>
+              <a:ext cx="522514" cy="437238"/>
+            </a:xfrm>
+            <a:prstGeom prst="star5">
+              <a:avLst/>
+            </a:prstGeom>
+            <a:solidFill>
+              <a:schemeClr val="tx1"/>
+            </a:solidFill>
+            <a:ln w="12700" cap="flat">
+              <a:noFill/>
+              <a:miter lim="400000"/>
+            </a:ln>
+            <a:effectLst/>
+            <a:sp3d/>
+          </p:spPr>
+          <p:style>
+            <a:lnRef idx="0">
+              <a:scrgbClr r="0" g="0" b="0"/>
+            </a:lnRef>
+            <a:fillRef idx="0">
+              <a:scrgbClr r="0" g="0" b="0"/>
+            </a:fillRef>
+            <a:effectRef idx="0">
+              <a:scrgbClr r="0" g="0" b="0"/>
+            </a:effectRef>
+            <a:fontRef idx="none"/>
+          </p:style>
+          <p:txBody>
+            <a:bodyPr rot="0" spcFirstLastPara="1" vertOverflow="overflow" horzOverflow="overflow" vert="horz" wrap="square" lIns="0" tIns="0" rIns="0" bIns="0" numCol="1" spcCol="38100" rtlCol="0" anchor="ctr">
+              <a:spAutoFit/>
+            </a:bodyPr>
+            <a:lstStyle/>
+            <a:p>
+              <a:pPr marL="0" marR="0" indent="0" algn="ctr" defTabSz="825500" rtl="0" fontAlgn="auto" latinLnBrk="0" hangingPunct="0">
+                <a:lnSpc>
+                  <a:spcPct val="100000"/>
+                </a:lnSpc>
+                <a:spcBef>
+                  <a:spcPts val="0"/>
+                </a:spcBef>
+                <a:spcAft>
+                  <a:spcPts val="0"/>
+                </a:spcAft>
+                <a:buClrTx/>
+                <a:buSzTx/>
+                <a:buFontTx/>
+                <a:buNone/>
+                <a:tabLst/>
+              </a:pPr>
+              <a:endParaRPr kumimoji="0" lang="de-DE" sz="3200" b="0" i="0" u="none" strike="noStrike" cap="none" spc="0" normalizeH="0" baseline="0">
+                <a:ln>
+                  <a:noFill/>
+                </a:ln>
+                <a:solidFill>
+                  <a:srgbClr val="FFFFFF"/>
+                </a:solidFill>
+                <a:effectLst/>
+                <a:uFillTx/>
+                <a:latin typeface="+mn-lt"/>
+                <a:ea typeface="+mn-ea"/>
+                <a:cs typeface="+mn-cs"/>
+                <a:sym typeface="Helvetica Neue Medium"/>
+              </a:endParaRPr>
+            </a:p>
+          </p:txBody>
+        </p:sp>
+        <p:sp>
+          <p:nvSpPr>
+            <p:cNvPr id="20" name="5-Point Star 19"/>
+            <p:cNvSpPr/>
+            <p:nvPr/>
+          </p:nvSpPr>
+          <p:spPr>
+            <a:xfrm>
+              <a:off x="2590800" y="10427610"/>
+              <a:ext cx="522514" cy="437238"/>
+            </a:xfrm>
+            <a:prstGeom prst="star5">
+              <a:avLst/>
+            </a:prstGeom>
+            <a:solidFill>
+              <a:schemeClr val="accent3">
+                <a:lumMod val="75000"/>
+              </a:schemeClr>
+            </a:solidFill>
+            <a:ln w="12700" cap="flat">
+              <a:noFill/>
+              <a:miter lim="400000"/>
+            </a:ln>
+            <a:effectLst/>
+            <a:sp3d/>
+          </p:spPr>
+          <p:style>
+            <a:lnRef idx="0">
+              <a:scrgbClr r="0" g="0" b="0"/>
+            </a:lnRef>
+            <a:fillRef idx="0">
+              <a:scrgbClr r="0" g="0" b="0"/>
+            </a:fillRef>
+            <a:effectRef idx="0">
+              <a:scrgbClr r="0" g="0" b="0"/>
+            </a:effectRef>
+            <a:fontRef idx="none"/>
+          </p:style>
+          <p:txBody>
+            <a:bodyPr rot="0" spcFirstLastPara="1" vertOverflow="overflow" horzOverflow="overflow" vert="horz" wrap="square" lIns="0" tIns="0" rIns="0" bIns="0" numCol="1" spcCol="38100" rtlCol="0" anchor="ctr">
+              <a:spAutoFit/>
+            </a:bodyPr>
+            <a:lstStyle/>
+            <a:p>
+              <a:pPr marL="0" marR="0" indent="0" algn="ctr" defTabSz="825500" rtl="0" fontAlgn="auto" latinLnBrk="0" hangingPunct="0">
+                <a:lnSpc>
+                  <a:spcPct val="100000"/>
+                </a:lnSpc>
+                <a:spcBef>
+                  <a:spcPts val="0"/>
+                </a:spcBef>
+                <a:spcAft>
+                  <a:spcPts val="0"/>
+                </a:spcAft>
+                <a:buClrTx/>
+                <a:buSzTx/>
+                <a:buFontTx/>
+                <a:buNone/>
+                <a:tabLst/>
+              </a:pPr>
+              <a:endParaRPr kumimoji="0" lang="de-DE" sz="3200" b="0" i="0" u="none" strike="noStrike" cap="none" spc="0" normalizeH="0" baseline="0">
+                <a:ln>
+                  <a:noFill/>
+                </a:ln>
+                <a:solidFill>
+                  <a:srgbClr val="FFFFFF"/>
+                </a:solidFill>
+                <a:effectLst/>
+                <a:uFillTx/>
+                <a:latin typeface="+mn-lt"/>
+                <a:ea typeface="+mn-ea"/>
+                <a:cs typeface="+mn-cs"/>
+                <a:sym typeface="Helvetica Neue Medium"/>
+              </a:endParaRPr>
+            </a:p>
+          </p:txBody>
+        </p:sp>
+        <p:sp>
+          <p:nvSpPr>
+            <p:cNvPr id="21" name="5-Point Star 20"/>
+            <p:cNvSpPr/>
+            <p:nvPr/>
+          </p:nvSpPr>
+          <p:spPr>
+            <a:xfrm>
+              <a:off x="2049690" y="11166022"/>
+              <a:ext cx="522514" cy="437238"/>
+            </a:xfrm>
+            <a:prstGeom prst="star5">
+              <a:avLst/>
+            </a:prstGeom>
+            <a:solidFill>
+              <a:schemeClr val="tx1"/>
+            </a:solidFill>
+            <a:ln w="12700" cap="flat">
+              <a:noFill/>
+              <a:miter lim="400000"/>
+            </a:ln>
+            <a:effectLst/>
+            <a:sp3d/>
+          </p:spPr>
+          <p:style>
+            <a:lnRef idx="0">
+              <a:scrgbClr r="0" g="0" b="0"/>
+            </a:lnRef>
+            <a:fillRef idx="0">
+              <a:scrgbClr r="0" g="0" b="0"/>
+            </a:fillRef>
+            <a:effectRef idx="0">
+              <a:scrgbClr r="0" g="0" b="0"/>
+            </a:effectRef>
+            <a:fontRef idx="none"/>
+          </p:style>
+          <p:txBody>
+            <a:bodyPr rot="0" spcFirstLastPara="1" vertOverflow="overflow" horzOverflow="overflow" vert="horz" wrap="square" lIns="0" tIns="0" rIns="0" bIns="0" numCol="1" spcCol="38100" rtlCol="0" anchor="ctr">
+              <a:spAutoFit/>
+            </a:bodyPr>
+            <a:lstStyle/>
+            <a:p>
+              <a:pPr marL="0" marR="0" indent="0" algn="ctr" defTabSz="825500" rtl="0" fontAlgn="auto" latinLnBrk="0" hangingPunct="0">
+                <a:lnSpc>
+                  <a:spcPct val="100000"/>
+                </a:lnSpc>
+                <a:spcBef>
+                  <a:spcPts val="0"/>
+                </a:spcBef>
+                <a:spcAft>
+                  <a:spcPts val="0"/>
+                </a:spcAft>
+                <a:buClrTx/>
+                <a:buSzTx/>
+                <a:buFontTx/>
+                <a:buNone/>
+                <a:tabLst/>
+              </a:pPr>
+              <a:endParaRPr kumimoji="0" lang="de-DE" sz="3200" b="0" i="0" u="none" strike="noStrike" cap="none" spc="0" normalizeH="0" baseline="0">
+                <a:ln>
+                  <a:noFill/>
+                </a:ln>
+                <a:solidFill>
+                  <a:srgbClr val="FFFFFF"/>
+                </a:solidFill>
+                <a:effectLst/>
+                <a:uFillTx/>
+                <a:latin typeface="+mn-lt"/>
+                <a:ea typeface="+mn-ea"/>
+                <a:cs typeface="+mn-cs"/>
+                <a:sym typeface="Helvetica Neue Medium"/>
+              </a:endParaRPr>
+            </a:p>
+          </p:txBody>
+        </p:sp>
+        <p:sp>
+          <p:nvSpPr>
+            <p:cNvPr id="22" name="5-Point Star 21"/>
+            <p:cNvSpPr/>
+            <p:nvPr/>
+          </p:nvSpPr>
+          <p:spPr>
+            <a:xfrm>
+              <a:off x="2534502" y="11473087"/>
+              <a:ext cx="522514" cy="437238"/>
+            </a:xfrm>
+            <a:prstGeom prst="star5">
+              <a:avLst/>
+            </a:prstGeom>
+            <a:solidFill>
+              <a:schemeClr val="tx1"/>
+            </a:solidFill>
+            <a:ln w="12700" cap="flat">
+              <a:noFill/>
+              <a:miter lim="400000"/>
+            </a:ln>
+            <a:effectLst/>
+            <a:sp3d/>
+          </p:spPr>
+          <p:style>
+            <a:lnRef idx="0">
+              <a:scrgbClr r="0" g="0" b="0"/>
+            </a:lnRef>
+            <a:fillRef idx="0">
+              <a:scrgbClr r="0" g="0" b="0"/>
+            </a:fillRef>
+            <a:effectRef idx="0">
+              <a:scrgbClr r="0" g="0" b="0"/>
+            </a:effectRef>
+            <a:fontRef idx="none"/>
+          </p:style>
+          <p:txBody>
+            <a:bodyPr rot="0" spcFirstLastPara="1" vertOverflow="overflow" horzOverflow="overflow" vert="horz" wrap="square" lIns="0" tIns="0" rIns="0" bIns="0" numCol="1" spcCol="38100" rtlCol="0" anchor="ctr">
+              <a:spAutoFit/>
+            </a:bodyPr>
+            <a:lstStyle/>
+            <a:p>
+              <a:pPr marL="0" marR="0" indent="0" algn="ctr" defTabSz="825500" rtl="0" fontAlgn="auto" latinLnBrk="0" hangingPunct="0">
+                <a:lnSpc>
+                  <a:spcPct val="100000"/>
+                </a:lnSpc>
+                <a:spcBef>
+                  <a:spcPts val="0"/>
+                </a:spcBef>
+                <a:spcAft>
+                  <a:spcPts val="0"/>
+                </a:spcAft>
+                <a:buClrTx/>
+                <a:buSzTx/>
+                <a:buFontTx/>
+                <a:buNone/>
+                <a:tabLst/>
+              </a:pPr>
+              <a:endParaRPr kumimoji="0" lang="de-DE" sz="3200" b="0" i="0" u="none" strike="noStrike" cap="none" spc="0" normalizeH="0" baseline="0">
+                <a:ln>
+                  <a:noFill/>
+                </a:ln>
+                <a:solidFill>
+                  <a:srgbClr val="FFFFFF"/>
+                </a:solidFill>
+                <a:effectLst/>
+                <a:uFillTx/>
+                <a:latin typeface="+mn-lt"/>
+                <a:ea typeface="+mn-ea"/>
+                <a:cs typeface="+mn-cs"/>
+                <a:sym typeface="Helvetica Neue Medium"/>
+              </a:endParaRPr>
+            </a:p>
+          </p:txBody>
+        </p:sp>
+        <p:sp>
+          <p:nvSpPr>
+            <p:cNvPr id="23" name="Moon 22"/>
+            <p:cNvSpPr/>
+            <p:nvPr/>
+          </p:nvSpPr>
+          <p:spPr>
+            <a:xfrm>
+              <a:off x="4704773" y="10427610"/>
+              <a:ext cx="385235" cy="437238"/>
+            </a:xfrm>
+            <a:prstGeom prst="moon">
+              <a:avLst/>
+            </a:prstGeom>
+            <a:solidFill>
+              <a:schemeClr val="tx1"/>
+            </a:solidFill>
+            <a:ln w="12700" cap="flat">
+              <a:noFill/>
+              <a:miter lim="400000"/>
+            </a:ln>
+            <a:effectLst/>
+            <a:sp3d/>
+          </p:spPr>
+          <p:style>
+            <a:lnRef idx="0">
+              <a:scrgbClr r="0" g="0" b="0"/>
+            </a:lnRef>
+            <a:fillRef idx="0">
+              <a:scrgbClr r="0" g="0" b="0"/>
+            </a:fillRef>
+            <a:effectRef idx="0">
+              <a:scrgbClr r="0" g="0" b="0"/>
+            </a:effectRef>
+            <a:fontRef idx="none"/>
+          </p:style>
+          <p:txBody>
+            <a:bodyPr rot="0" spcFirstLastPara="1" vertOverflow="overflow" horzOverflow="overflow" vert="horz" wrap="square" lIns="0" tIns="0" rIns="0" bIns="0" numCol="1" spcCol="38100" rtlCol="0" anchor="ctr">
+              <a:spAutoFit/>
+            </a:bodyPr>
+            <a:lstStyle/>
+            <a:p>
+              <a:pPr marL="0" marR="0" indent="0" algn="ctr" defTabSz="825500" rtl="0" fontAlgn="auto" latinLnBrk="0" hangingPunct="0">
+                <a:lnSpc>
+                  <a:spcPct val="100000"/>
+                </a:lnSpc>
+                <a:spcBef>
+                  <a:spcPts val="0"/>
+                </a:spcBef>
+                <a:spcAft>
+                  <a:spcPts val="0"/>
+                </a:spcAft>
+                <a:buClrTx/>
+                <a:buSzTx/>
+                <a:buFontTx/>
+                <a:buNone/>
+                <a:tabLst/>
+              </a:pPr>
+              <a:endParaRPr kumimoji="0" lang="de-DE" sz="3200" b="0" i="0" u="none" strike="noStrike" cap="none" spc="0" normalizeH="0" baseline="0">
+                <a:ln>
+                  <a:noFill/>
+                </a:ln>
+                <a:solidFill>
+                  <a:srgbClr val="FFFFFF"/>
+                </a:solidFill>
+                <a:effectLst/>
+                <a:uFillTx/>
+                <a:latin typeface="+mn-lt"/>
+                <a:ea typeface="+mn-ea"/>
+                <a:cs typeface="+mn-cs"/>
+                <a:sym typeface="Helvetica Neue Medium"/>
+              </a:endParaRPr>
+            </a:p>
+          </p:txBody>
+        </p:sp>
+        <p:sp>
+          <p:nvSpPr>
+            <p:cNvPr id="24" name="Moon 23"/>
+            <p:cNvSpPr/>
+            <p:nvPr/>
+          </p:nvSpPr>
+          <p:spPr>
+            <a:xfrm>
+              <a:off x="5161946" y="10386339"/>
+              <a:ext cx="385235" cy="437238"/>
+            </a:xfrm>
+            <a:prstGeom prst="moon">
+              <a:avLst/>
+            </a:prstGeom>
+            <a:solidFill>
+              <a:schemeClr val="accent3">
+                <a:lumMod val="75000"/>
+              </a:schemeClr>
+            </a:solidFill>
+            <a:ln w="12700" cap="flat">
+              <a:noFill/>
+              <a:miter lim="400000"/>
+            </a:ln>
+            <a:effectLst/>
+            <a:sp3d/>
+          </p:spPr>
+          <p:style>
+            <a:lnRef idx="0">
+              <a:scrgbClr r="0" g="0" b="0"/>
+            </a:lnRef>
+            <a:fillRef idx="0">
+              <a:scrgbClr r="0" g="0" b="0"/>
+            </a:fillRef>
+            <a:effectRef idx="0">
+              <a:scrgbClr r="0" g="0" b="0"/>
+            </a:effectRef>
+            <a:fontRef idx="none"/>
+          </p:style>
+          <p:txBody>
+            <a:bodyPr rot="0" spcFirstLastPara="1" vertOverflow="overflow" horzOverflow="overflow" vert="horz" wrap="square" lIns="0" tIns="0" rIns="0" bIns="0" numCol="1" spcCol="38100" rtlCol="0" anchor="ctr">
+              <a:spAutoFit/>
+            </a:bodyPr>
+            <a:lstStyle/>
+            <a:p>
+              <a:pPr marL="0" marR="0" indent="0" algn="ctr" defTabSz="825500" rtl="0" fontAlgn="auto" latinLnBrk="0" hangingPunct="0">
+                <a:lnSpc>
+                  <a:spcPct val="100000"/>
+                </a:lnSpc>
+                <a:spcBef>
+                  <a:spcPts val="0"/>
+                </a:spcBef>
+                <a:spcAft>
+                  <a:spcPts val="0"/>
+                </a:spcAft>
+                <a:buClrTx/>
+                <a:buSzTx/>
+                <a:buFontTx/>
+                <a:buNone/>
+                <a:tabLst/>
+              </a:pPr>
+              <a:endParaRPr kumimoji="0" lang="de-DE" sz="3200" b="0" i="0" u="none" strike="noStrike" cap="none" spc="0" normalizeH="0" baseline="0">
+                <a:ln>
+                  <a:noFill/>
+                </a:ln>
+                <a:solidFill>
+                  <a:srgbClr val="FFFFFF"/>
+                </a:solidFill>
+                <a:effectLst/>
+                <a:uFillTx/>
+                <a:latin typeface="+mn-lt"/>
+                <a:ea typeface="+mn-ea"/>
+                <a:cs typeface="+mn-cs"/>
+                <a:sym typeface="Helvetica Neue Medium"/>
+              </a:endParaRPr>
+            </a:p>
+          </p:txBody>
+        </p:sp>
+        <p:sp>
+          <p:nvSpPr>
+            <p:cNvPr id="25" name="Moon 24"/>
+            <p:cNvSpPr/>
+            <p:nvPr/>
+          </p:nvSpPr>
+          <p:spPr>
+            <a:xfrm>
+              <a:off x="5031480" y="11219543"/>
+              <a:ext cx="385235" cy="437238"/>
+            </a:xfrm>
+            <a:prstGeom prst="moon">
+              <a:avLst/>
+            </a:prstGeom>
+            <a:solidFill>
+              <a:schemeClr val="tx1"/>
+            </a:solidFill>
+            <a:ln w="12700" cap="flat">
+              <a:noFill/>
+              <a:miter lim="400000"/>
+            </a:ln>
+            <a:effectLst/>
+            <a:sp3d/>
+          </p:spPr>
+          <p:style>
+            <a:lnRef idx="0">
+              <a:scrgbClr r="0" g="0" b="0"/>
+            </a:lnRef>
+            <a:fillRef idx="0">
+              <a:scrgbClr r="0" g="0" b="0"/>
+            </a:fillRef>
+            <a:effectRef idx="0">
+              <a:scrgbClr r="0" g="0" b="0"/>
+            </a:effectRef>
+            <a:fontRef idx="none"/>
+          </p:style>
+          <p:txBody>
+            <a:bodyPr rot="0" spcFirstLastPara="1" vertOverflow="overflow" horzOverflow="overflow" vert="horz" wrap="square" lIns="0" tIns="0" rIns="0" bIns="0" numCol="1" spcCol="38100" rtlCol="0" anchor="ctr">
+              <a:spAutoFit/>
+            </a:bodyPr>
+            <a:lstStyle/>
+            <a:p>
+              <a:pPr marL="0" marR="0" indent="0" algn="ctr" defTabSz="825500" rtl="0" fontAlgn="auto" latinLnBrk="0" hangingPunct="0">
+                <a:lnSpc>
+                  <a:spcPct val="100000"/>
+                </a:lnSpc>
+                <a:spcBef>
+                  <a:spcPts val="0"/>
+                </a:spcBef>
+                <a:spcAft>
+                  <a:spcPts val="0"/>
+                </a:spcAft>
+                <a:buClrTx/>
+                <a:buSzTx/>
+                <a:buFontTx/>
+                <a:buNone/>
+                <a:tabLst/>
+              </a:pPr>
+              <a:endParaRPr kumimoji="0" lang="de-DE" sz="3200" b="0" i="0" u="none" strike="noStrike" cap="none" spc="0" normalizeH="0" baseline="0">
+                <a:ln>
+                  <a:noFill/>
+                </a:ln>
+                <a:solidFill>
+                  <a:srgbClr val="FFFFFF"/>
+                </a:solidFill>
+                <a:effectLst/>
+                <a:uFillTx/>
+                <a:latin typeface="+mn-lt"/>
+                <a:ea typeface="+mn-ea"/>
+                <a:cs typeface="+mn-cs"/>
+                <a:sym typeface="Helvetica Neue Medium"/>
+              </a:endParaRPr>
+            </a:p>
+          </p:txBody>
+        </p:sp>
+        <p:sp>
+          <p:nvSpPr>
+            <p:cNvPr id="26" name="Moon 25"/>
+            <p:cNvSpPr/>
+            <p:nvPr/>
+          </p:nvSpPr>
+          <p:spPr>
+            <a:xfrm>
+              <a:off x="4548138" y="11000924"/>
+              <a:ext cx="385235" cy="437238"/>
+            </a:xfrm>
+            <a:prstGeom prst="moon">
+              <a:avLst/>
+            </a:prstGeom>
+            <a:solidFill>
+              <a:schemeClr val="tx1"/>
+            </a:solidFill>
+            <a:ln w="12700" cap="flat">
+              <a:noFill/>
+              <a:miter lim="400000"/>
+            </a:ln>
+            <a:effectLst/>
+            <a:sp3d/>
+          </p:spPr>
+          <p:style>
+            <a:lnRef idx="0">
+              <a:scrgbClr r="0" g="0" b="0"/>
+            </a:lnRef>
+            <a:fillRef idx="0">
+              <a:scrgbClr r="0" g="0" b="0"/>
+            </a:fillRef>
+            <a:effectRef idx="0">
+              <a:scrgbClr r="0" g="0" b="0"/>
+            </a:effectRef>
+            <a:fontRef idx="none"/>
+          </p:style>
+          <p:txBody>
+            <a:bodyPr rot="0" spcFirstLastPara="1" vertOverflow="overflow" horzOverflow="overflow" vert="horz" wrap="square" lIns="0" tIns="0" rIns="0" bIns="0" numCol="1" spcCol="38100" rtlCol="0" anchor="ctr">
+              <a:spAutoFit/>
+            </a:bodyPr>
+            <a:lstStyle/>
+            <a:p>
+              <a:pPr marL="0" marR="0" indent="0" algn="ctr" defTabSz="825500" rtl="0" fontAlgn="auto" latinLnBrk="0" hangingPunct="0">
+                <a:lnSpc>
+                  <a:spcPct val="100000"/>
+                </a:lnSpc>
+                <a:spcBef>
+                  <a:spcPts val="0"/>
+                </a:spcBef>
+                <a:spcAft>
+                  <a:spcPts val="0"/>
+                </a:spcAft>
+                <a:buClrTx/>
+                <a:buSzTx/>
+                <a:buFontTx/>
+                <a:buNone/>
+                <a:tabLst/>
+              </a:pPr>
+              <a:endParaRPr kumimoji="0" lang="de-DE" sz="3200" b="0" i="0" u="none" strike="noStrike" cap="none" spc="0" normalizeH="0" baseline="0">
+                <a:ln>
+                  <a:noFill/>
+                </a:ln>
+                <a:solidFill>
+                  <a:srgbClr val="FFFFFF"/>
+                </a:solidFill>
+                <a:effectLst/>
+                <a:uFillTx/>
+                <a:latin typeface="+mn-lt"/>
+                <a:ea typeface="+mn-ea"/>
+                <a:cs typeface="+mn-cs"/>
+                <a:sym typeface="Helvetica Neue Medium"/>
+              </a:endParaRPr>
+            </a:p>
+          </p:txBody>
+        </p:sp>
+        <p:sp>
+          <p:nvSpPr>
+            <p:cNvPr id="27" name="Moon 26"/>
+            <p:cNvSpPr/>
+            <p:nvPr/>
+          </p:nvSpPr>
+          <p:spPr>
+            <a:xfrm>
+              <a:off x="5488653" y="11094363"/>
+              <a:ext cx="385235" cy="437238"/>
+            </a:xfrm>
+            <a:prstGeom prst="moon">
+              <a:avLst/>
+            </a:prstGeom>
+            <a:solidFill>
+              <a:schemeClr val="tx1"/>
+            </a:solidFill>
+            <a:ln w="12700" cap="flat">
+              <a:noFill/>
+              <a:miter lim="400000"/>
+            </a:ln>
+            <a:effectLst/>
+            <a:sp3d/>
+          </p:spPr>
+          <p:style>
+            <a:lnRef idx="0">
+              <a:scrgbClr r="0" g="0" b="0"/>
+            </a:lnRef>
+            <a:fillRef idx="0">
+              <a:scrgbClr r="0" g="0" b="0"/>
+            </a:fillRef>
+            <a:effectRef idx="0">
+              <a:scrgbClr r="0" g="0" b="0"/>
+            </a:effectRef>
+            <a:fontRef idx="none"/>
+          </p:style>
+          <p:txBody>
+            <a:bodyPr rot="0" spcFirstLastPara="1" vertOverflow="overflow" horzOverflow="overflow" vert="horz" wrap="square" lIns="0" tIns="0" rIns="0" bIns="0" numCol="1" spcCol="38100" rtlCol="0" anchor="ctr">
+              <a:spAutoFit/>
+            </a:bodyPr>
+            <a:lstStyle/>
+            <a:p>
+              <a:pPr marL="0" marR="0" indent="0" algn="ctr" defTabSz="825500" rtl="0" fontAlgn="auto" latinLnBrk="0" hangingPunct="0">
+                <a:lnSpc>
+                  <a:spcPct val="100000"/>
+                </a:lnSpc>
+                <a:spcBef>
+                  <a:spcPts val="0"/>
+                </a:spcBef>
+                <a:spcAft>
+                  <a:spcPts val="0"/>
+                </a:spcAft>
+                <a:buClrTx/>
+                <a:buSzTx/>
+                <a:buFontTx/>
+                <a:buNone/>
+                <a:tabLst/>
+              </a:pPr>
+              <a:endParaRPr kumimoji="0" lang="de-DE" sz="3200" b="0" i="0" u="none" strike="noStrike" cap="none" spc="0" normalizeH="0" baseline="0">
+                <a:ln>
+                  <a:noFill/>
+                </a:ln>
+                <a:solidFill>
+                  <a:srgbClr val="FFFFFF"/>
+                </a:solidFill>
+                <a:effectLst/>
+                <a:uFillTx/>
+                <a:latin typeface="+mn-lt"/>
+                <a:ea typeface="+mn-ea"/>
+                <a:cs typeface="+mn-cs"/>
+                <a:sym typeface="Helvetica Neue Medium"/>
+              </a:endParaRPr>
+            </a:p>
+          </p:txBody>
+        </p:sp>
+        <p:sp>
+          <p:nvSpPr>
+            <p:cNvPr id="28" name="Moon 27"/>
+            <p:cNvSpPr/>
+            <p:nvPr/>
+          </p:nvSpPr>
+          <p:spPr>
+            <a:xfrm>
+              <a:off x="5619119" y="10580010"/>
+              <a:ext cx="385235" cy="437238"/>
+            </a:xfrm>
+            <a:prstGeom prst="moon">
+              <a:avLst/>
+            </a:prstGeom>
+            <a:solidFill>
+              <a:schemeClr val="tx1"/>
+            </a:solidFill>
+            <a:ln w="12700" cap="flat">
+              <a:noFill/>
+              <a:miter lim="400000"/>
+            </a:ln>
+            <a:effectLst/>
+            <a:sp3d/>
+          </p:spPr>
+          <p:style>
+            <a:lnRef idx="0">
+              <a:scrgbClr r="0" g="0" b="0"/>
+            </a:lnRef>
+            <a:fillRef idx="0">
+              <a:scrgbClr r="0" g="0" b="0"/>
+            </a:fillRef>
+            <a:effectRef idx="0">
+              <a:scrgbClr r="0" g="0" b="0"/>
+            </a:effectRef>
+            <a:fontRef idx="none"/>
+          </p:style>
+          <p:txBody>
+            <a:bodyPr rot="0" spcFirstLastPara="1" vertOverflow="overflow" horzOverflow="overflow" vert="horz" wrap="square" lIns="0" tIns="0" rIns="0" bIns="0" numCol="1" spcCol="38100" rtlCol="0" anchor="ctr">
+              <a:spAutoFit/>
+            </a:bodyPr>
+            <a:lstStyle/>
+            <a:p>
+              <a:pPr marL="0" marR="0" indent="0" algn="ctr" defTabSz="825500" rtl="0" fontAlgn="auto" latinLnBrk="0" hangingPunct="0">
+                <a:lnSpc>
+                  <a:spcPct val="100000"/>
+                </a:lnSpc>
+                <a:spcBef>
+                  <a:spcPts val="0"/>
+                </a:spcBef>
+                <a:spcAft>
+                  <a:spcPts val="0"/>
+                </a:spcAft>
+                <a:buClrTx/>
+                <a:buSzTx/>
+                <a:buFontTx/>
+                <a:buNone/>
+                <a:tabLst/>
+              </a:pPr>
+              <a:endParaRPr kumimoji="0" lang="de-DE" sz="3200" b="0" i="0" u="none" strike="noStrike" cap="none" spc="0" normalizeH="0" baseline="0">
+                <a:ln>
+                  <a:noFill/>
+                </a:ln>
+                <a:solidFill>
+                  <a:srgbClr val="FFFFFF"/>
+                </a:solidFill>
+                <a:effectLst/>
+                <a:uFillTx/>
+                <a:latin typeface="+mn-lt"/>
+                <a:ea typeface="+mn-ea"/>
+                <a:cs typeface="+mn-cs"/>
+                <a:sym typeface="Helvetica Neue Medium"/>
+              </a:endParaRPr>
+            </a:p>
+          </p:txBody>
+        </p:sp>
+        <p:sp>
+          <p:nvSpPr>
+            <p:cNvPr id="29" name="Lightning Bolt 28"/>
+            <p:cNvSpPr/>
+            <p:nvPr/>
+          </p:nvSpPr>
+          <p:spPr>
+            <a:xfrm>
+              <a:off x="7526985" y="10383617"/>
+              <a:ext cx="532528" cy="486227"/>
+            </a:xfrm>
+            <a:prstGeom prst="lightningBolt">
+              <a:avLst/>
+            </a:prstGeom>
+            <a:solidFill>
+              <a:schemeClr val="accent3">
+                <a:lumMod val="75000"/>
+              </a:schemeClr>
+            </a:solidFill>
+            <a:ln w="12700" cap="flat">
+              <a:noFill/>
+              <a:miter lim="400000"/>
+            </a:ln>
+            <a:effectLst/>
+            <a:sp3d/>
+          </p:spPr>
+          <p:style>
+            <a:lnRef idx="0">
+              <a:scrgbClr r="0" g="0" b="0"/>
+            </a:lnRef>
+            <a:fillRef idx="0">
+              <a:scrgbClr r="0" g="0" b="0"/>
+            </a:fillRef>
+            <a:effectRef idx="0">
+              <a:scrgbClr r="0" g="0" b="0"/>
+            </a:effectRef>
+            <a:fontRef idx="none"/>
+          </p:style>
+          <p:txBody>
+            <a:bodyPr rot="0" spcFirstLastPara="1" vertOverflow="overflow" horzOverflow="overflow" vert="horz" wrap="square" lIns="0" tIns="0" rIns="0" bIns="0" numCol="1" spcCol="38100" rtlCol="0" anchor="ctr">
+              <a:spAutoFit/>
+            </a:bodyPr>
+            <a:lstStyle/>
+            <a:p>
+              <a:pPr marL="0" marR="0" indent="0" algn="ctr" defTabSz="825500" rtl="0" fontAlgn="auto" latinLnBrk="0" hangingPunct="0">
+                <a:lnSpc>
+                  <a:spcPct val="100000"/>
+                </a:lnSpc>
+                <a:spcBef>
+                  <a:spcPts val="0"/>
+                </a:spcBef>
+                <a:spcAft>
+                  <a:spcPts val="0"/>
+                </a:spcAft>
+                <a:buClrTx/>
+                <a:buSzTx/>
+                <a:buFontTx/>
+                <a:buNone/>
+                <a:tabLst/>
+              </a:pPr>
+              <a:endParaRPr kumimoji="0" lang="de-DE" sz="3200" b="0" i="0" u="none" strike="noStrike" cap="none" spc="0" normalizeH="0" baseline="0">
+                <a:ln>
+                  <a:noFill/>
+                </a:ln>
+                <a:solidFill>
+                  <a:srgbClr val="FFFFFF"/>
+                </a:solidFill>
+                <a:effectLst/>
+                <a:uFillTx/>
+                <a:latin typeface="+mn-lt"/>
+                <a:ea typeface="+mn-ea"/>
+                <a:cs typeface="+mn-cs"/>
+                <a:sym typeface="Helvetica Neue Medium"/>
+              </a:endParaRPr>
+            </a:p>
+          </p:txBody>
+        </p:sp>
+        <p:sp>
+          <p:nvSpPr>
+            <p:cNvPr id="30" name="Lightning Bolt 29"/>
+            <p:cNvSpPr/>
+            <p:nvPr/>
+          </p:nvSpPr>
+          <p:spPr>
+            <a:xfrm>
+              <a:off x="8139040" y="10733316"/>
+              <a:ext cx="532528" cy="486227"/>
+            </a:xfrm>
+            <a:prstGeom prst="lightningBolt">
+              <a:avLst/>
+            </a:prstGeom>
+            <a:solidFill>
+              <a:schemeClr val="tx1"/>
+            </a:solidFill>
+            <a:ln w="12700" cap="flat">
+              <a:noFill/>
+              <a:miter lim="400000"/>
+            </a:ln>
+            <a:effectLst/>
+            <a:sp3d/>
+          </p:spPr>
+          <p:style>
+            <a:lnRef idx="0">
+              <a:scrgbClr r="0" g="0" b="0"/>
+            </a:lnRef>
+            <a:fillRef idx="0">
+              <a:scrgbClr r="0" g="0" b="0"/>
+            </a:fillRef>
+            <a:effectRef idx="0">
+              <a:scrgbClr r="0" g="0" b="0"/>
+            </a:effectRef>
+            <a:fontRef idx="none"/>
+          </p:style>
+          <p:txBody>
+            <a:bodyPr rot="0" spcFirstLastPara="1" vertOverflow="overflow" horzOverflow="overflow" vert="horz" wrap="square" lIns="0" tIns="0" rIns="0" bIns="0" numCol="1" spcCol="38100" rtlCol="0" anchor="ctr">
+              <a:spAutoFit/>
+            </a:bodyPr>
+            <a:lstStyle/>
+            <a:p>
+              <a:pPr marL="0" marR="0" indent="0" algn="ctr" defTabSz="825500" rtl="0" fontAlgn="auto" latinLnBrk="0" hangingPunct="0">
+                <a:lnSpc>
+                  <a:spcPct val="100000"/>
+                </a:lnSpc>
+                <a:spcBef>
+                  <a:spcPts val="0"/>
+                </a:spcBef>
+                <a:spcAft>
+                  <a:spcPts val="0"/>
+                </a:spcAft>
+                <a:buClrTx/>
+                <a:buSzTx/>
+                <a:buFontTx/>
+                <a:buNone/>
+                <a:tabLst/>
+              </a:pPr>
+              <a:endParaRPr kumimoji="0" lang="de-DE" sz="3200" b="0" i="0" u="none" strike="noStrike" cap="none" spc="0" normalizeH="0" baseline="0">
+                <a:ln>
+                  <a:noFill/>
+                </a:ln>
+                <a:solidFill>
+                  <a:srgbClr val="FFFFFF"/>
+                </a:solidFill>
+                <a:effectLst/>
+                <a:uFillTx/>
+                <a:latin typeface="+mn-lt"/>
+                <a:ea typeface="+mn-ea"/>
+                <a:cs typeface="+mn-cs"/>
+                <a:sym typeface="Helvetica Neue Medium"/>
+              </a:endParaRPr>
+            </a:p>
+          </p:txBody>
+        </p:sp>
+        <p:sp>
+          <p:nvSpPr>
+            <p:cNvPr id="31" name="Lightning Bolt 30"/>
+            <p:cNvSpPr/>
+            <p:nvPr/>
+          </p:nvSpPr>
+          <p:spPr>
+            <a:xfrm>
+              <a:off x="7788889" y="11193699"/>
+              <a:ext cx="532528" cy="486227"/>
+            </a:xfrm>
+            <a:prstGeom prst="lightningBolt">
+              <a:avLst/>
+            </a:prstGeom>
+            <a:solidFill>
+              <a:schemeClr val="tx1"/>
+            </a:solidFill>
+            <a:ln w="12700" cap="flat">
+              <a:noFill/>
+              <a:miter lim="400000"/>
+            </a:ln>
+            <a:effectLst/>
+            <a:sp3d/>
+          </p:spPr>
+          <p:style>
+            <a:lnRef idx="0">
+              <a:scrgbClr r="0" g="0" b="0"/>
+            </a:lnRef>
+            <a:fillRef idx="0">
+              <a:scrgbClr r="0" g="0" b="0"/>
+            </a:fillRef>
+            <a:effectRef idx="0">
+              <a:scrgbClr r="0" g="0" b="0"/>
+            </a:effectRef>
+            <a:fontRef idx="none"/>
+          </p:style>
+          <p:txBody>
+            <a:bodyPr rot="0" spcFirstLastPara="1" vertOverflow="overflow" horzOverflow="overflow" vert="horz" wrap="square" lIns="0" tIns="0" rIns="0" bIns="0" numCol="1" spcCol="38100" rtlCol="0" anchor="ctr">
+              <a:spAutoFit/>
+            </a:bodyPr>
+            <a:lstStyle/>
+            <a:p>
+              <a:pPr marL="0" marR="0" indent="0" algn="ctr" defTabSz="825500" rtl="0" fontAlgn="auto" latinLnBrk="0" hangingPunct="0">
+                <a:lnSpc>
+                  <a:spcPct val="100000"/>
+                </a:lnSpc>
+                <a:spcBef>
+                  <a:spcPts val="0"/>
+                </a:spcBef>
+                <a:spcAft>
+                  <a:spcPts val="0"/>
+                </a:spcAft>
+                <a:buClrTx/>
+                <a:buSzTx/>
+                <a:buFontTx/>
+                <a:buNone/>
+                <a:tabLst/>
+              </a:pPr>
+              <a:endParaRPr kumimoji="0" lang="de-DE" sz="3200" b="0" i="0" u="none" strike="noStrike" cap="none" spc="0" normalizeH="0" baseline="0">
+                <a:ln>
+                  <a:noFill/>
+                </a:ln>
+                <a:solidFill>
+                  <a:srgbClr val="FFFFFF"/>
+                </a:solidFill>
+                <a:effectLst/>
+                <a:uFillTx/>
+                <a:latin typeface="+mn-lt"/>
+                <a:ea typeface="+mn-ea"/>
+                <a:cs typeface="+mn-cs"/>
+                <a:sym typeface="Helvetica Neue Medium"/>
+              </a:endParaRPr>
+            </a:p>
+          </p:txBody>
+        </p:sp>
+        <p:sp>
+          <p:nvSpPr>
+            <p:cNvPr id="32" name="Lightning Bolt 31"/>
+            <p:cNvSpPr/>
+            <p:nvPr/>
+          </p:nvSpPr>
+          <p:spPr>
+            <a:xfrm>
+              <a:off x="7223057" y="11193700"/>
+              <a:ext cx="532528" cy="486227"/>
+            </a:xfrm>
+            <a:prstGeom prst="lightningBolt">
+              <a:avLst/>
+            </a:prstGeom>
+            <a:solidFill>
+              <a:schemeClr val="tx1"/>
+            </a:solidFill>
+            <a:ln w="12700" cap="flat">
+              <a:noFill/>
+              <a:miter lim="400000"/>
+            </a:ln>
+            <a:effectLst/>
+            <a:sp3d/>
+          </p:spPr>
+          <p:style>
+            <a:lnRef idx="0">
+              <a:scrgbClr r="0" g="0" b="0"/>
+            </a:lnRef>
+            <a:fillRef idx="0">
+              <a:scrgbClr r="0" g="0" b="0"/>
+            </a:fillRef>
+            <a:effectRef idx="0">
+              <a:scrgbClr r="0" g="0" b="0"/>
+            </a:effectRef>
+            <a:fontRef idx="none"/>
+          </p:style>
+          <p:txBody>
+            <a:bodyPr rot="0" spcFirstLastPara="1" vertOverflow="overflow" horzOverflow="overflow" vert="horz" wrap="square" lIns="0" tIns="0" rIns="0" bIns="0" numCol="1" spcCol="38100" rtlCol="0" anchor="ctr">
+              <a:spAutoFit/>
+            </a:bodyPr>
+            <a:lstStyle/>
+            <a:p>
+              <a:pPr marL="0" marR="0" indent="0" algn="ctr" defTabSz="825500" rtl="0" fontAlgn="auto" latinLnBrk="0" hangingPunct="0">
+                <a:lnSpc>
+                  <a:spcPct val="100000"/>
+                </a:lnSpc>
+                <a:spcBef>
+                  <a:spcPts val="0"/>
+                </a:spcBef>
+                <a:spcAft>
+                  <a:spcPts val="0"/>
+                </a:spcAft>
+                <a:buClrTx/>
+                <a:buSzTx/>
+                <a:buFontTx/>
+                <a:buNone/>
+                <a:tabLst/>
+              </a:pPr>
+              <a:endParaRPr kumimoji="0" lang="de-DE" sz="3200" b="0" i="0" u="none" strike="noStrike" cap="none" spc="0" normalizeH="0" baseline="0">
+                <a:ln>
+                  <a:noFill/>
+                </a:ln>
+                <a:solidFill>
+                  <a:srgbClr val="FFFFFF"/>
+                </a:solidFill>
+                <a:effectLst/>
+                <a:uFillTx/>
+                <a:latin typeface="+mn-lt"/>
+                <a:ea typeface="+mn-ea"/>
+                <a:cs typeface="+mn-cs"/>
+                <a:sym typeface="Helvetica Neue Medium"/>
+              </a:endParaRPr>
+            </a:p>
+          </p:txBody>
+        </p:sp>
+        <p:sp>
+          <p:nvSpPr>
+            <p:cNvPr id="33" name="Lightning Bolt 32"/>
+            <p:cNvSpPr/>
+            <p:nvPr/>
+          </p:nvSpPr>
+          <p:spPr>
+            <a:xfrm>
+              <a:off x="7090896" y="10580010"/>
+              <a:ext cx="532528" cy="486227"/>
+            </a:xfrm>
+            <a:prstGeom prst="lightningBolt">
+              <a:avLst/>
+            </a:prstGeom>
+            <a:solidFill>
+              <a:schemeClr val="tx1"/>
+            </a:solidFill>
+            <a:ln w="12700" cap="flat">
+              <a:noFill/>
+              <a:miter lim="400000"/>
+            </a:ln>
+            <a:effectLst/>
+            <a:sp3d/>
+          </p:spPr>
+          <p:style>
+            <a:lnRef idx="0">
+              <a:scrgbClr r="0" g="0" b="0"/>
+            </a:lnRef>
+            <a:fillRef idx="0">
+              <a:scrgbClr r="0" g="0" b="0"/>
+            </a:fillRef>
+            <a:effectRef idx="0">
+              <a:scrgbClr r="0" g="0" b="0"/>
+            </a:effectRef>
+            <a:fontRef idx="none"/>
+          </p:style>
+          <p:txBody>
+            <a:bodyPr rot="0" spcFirstLastPara="1" vertOverflow="overflow" horzOverflow="overflow" vert="horz" wrap="square" lIns="0" tIns="0" rIns="0" bIns="0" numCol="1" spcCol="38100" rtlCol="0" anchor="ctr">
+              <a:spAutoFit/>
+            </a:bodyPr>
+            <a:lstStyle/>
+            <a:p>
+              <a:pPr marL="0" marR="0" indent="0" algn="ctr" defTabSz="825500" rtl="0" fontAlgn="auto" latinLnBrk="0" hangingPunct="0">
+                <a:lnSpc>
+                  <a:spcPct val="100000"/>
+                </a:lnSpc>
+                <a:spcBef>
+                  <a:spcPts val="0"/>
+                </a:spcBef>
+                <a:spcAft>
+                  <a:spcPts val="0"/>
+                </a:spcAft>
+                <a:buClrTx/>
+                <a:buSzTx/>
+                <a:buFontTx/>
+                <a:buNone/>
+                <a:tabLst/>
+              </a:pPr>
+              <a:endParaRPr kumimoji="0" lang="de-DE" sz="3200" b="0" i="0" u="none" strike="noStrike" cap="none" spc="0" normalizeH="0" baseline="0">
+                <a:ln>
+                  <a:noFill/>
+                </a:ln>
+                <a:solidFill>
+                  <a:srgbClr val="FFFFFF"/>
+                </a:solidFill>
+                <a:effectLst/>
+                <a:uFillTx/>
+                <a:latin typeface="+mn-lt"/>
+                <a:ea typeface="+mn-ea"/>
+                <a:cs typeface="+mn-cs"/>
+                <a:sym typeface="Helvetica Neue Medium"/>
+              </a:endParaRPr>
+            </a:p>
+          </p:txBody>
+        </p:sp>
+        <p:sp>
+          <p:nvSpPr>
+            <p:cNvPr id="34" name="Cloud 33"/>
+            <p:cNvSpPr/>
+            <p:nvPr/>
+          </p:nvSpPr>
+          <p:spPr>
+            <a:xfrm>
+              <a:off x="9985018" y="10522857"/>
+              <a:ext cx="708239" cy="494391"/>
+            </a:xfrm>
+            <a:prstGeom prst="cloud">
+              <a:avLst/>
+            </a:prstGeom>
+            <a:solidFill>
+              <a:schemeClr val="accent3">
+                <a:lumMod val="75000"/>
+              </a:schemeClr>
+            </a:solidFill>
+            <a:ln w="12700" cap="flat">
+              <a:noFill/>
+              <a:miter lim="400000"/>
+            </a:ln>
+            <a:effectLst/>
+            <a:sp3d/>
+          </p:spPr>
+          <p:style>
+            <a:lnRef idx="0">
+              <a:scrgbClr r="0" g="0" b="0"/>
+            </a:lnRef>
+            <a:fillRef idx="0">
+              <a:scrgbClr r="0" g="0" b="0"/>
+            </a:fillRef>
+            <a:effectRef idx="0">
+              <a:scrgbClr r="0" g="0" b="0"/>
+            </a:effectRef>
+            <a:fontRef idx="none"/>
+          </p:style>
+          <p:txBody>
+            <a:bodyPr rot="0" spcFirstLastPara="1" vertOverflow="overflow" horzOverflow="overflow" vert="horz" wrap="square" lIns="0" tIns="0" rIns="0" bIns="0" numCol="1" spcCol="38100" rtlCol="0" anchor="ctr">
+              <a:spAutoFit/>
+            </a:bodyPr>
+            <a:lstStyle/>
+            <a:p>
+              <a:pPr marL="0" marR="0" indent="0" algn="ctr" defTabSz="825500" rtl="0" fontAlgn="auto" latinLnBrk="0" hangingPunct="0">
+                <a:lnSpc>
+                  <a:spcPct val="100000"/>
+                </a:lnSpc>
+                <a:spcBef>
+                  <a:spcPts val="0"/>
+                </a:spcBef>
+                <a:spcAft>
+                  <a:spcPts val="0"/>
+                </a:spcAft>
+                <a:buClrTx/>
+                <a:buSzTx/>
+                <a:buFontTx/>
+                <a:buNone/>
+                <a:tabLst/>
+              </a:pPr>
+              <a:endParaRPr kumimoji="0" lang="de-DE" sz="3200" b="0" i="0" u="none" strike="noStrike" cap="none" spc="0" normalizeH="0" baseline="0">
+                <a:ln>
+                  <a:noFill/>
+                </a:ln>
+                <a:solidFill>
+                  <a:srgbClr val="FFFFFF"/>
+                </a:solidFill>
+                <a:effectLst/>
+                <a:uFillTx/>
+                <a:latin typeface="+mn-lt"/>
+                <a:ea typeface="+mn-ea"/>
+                <a:cs typeface="+mn-cs"/>
+                <a:sym typeface="Helvetica Neue Medium"/>
+              </a:endParaRPr>
+            </a:p>
+          </p:txBody>
+        </p:sp>
+        <p:sp>
+          <p:nvSpPr>
+            <p:cNvPr id="36" name="Cloud 35"/>
+            <p:cNvSpPr/>
+            <p:nvPr/>
+          </p:nvSpPr>
+          <p:spPr>
+            <a:xfrm>
+              <a:off x="10400947" y="11110230"/>
+              <a:ext cx="708239" cy="494391"/>
+            </a:xfrm>
+            <a:prstGeom prst="cloud">
+              <a:avLst/>
+            </a:prstGeom>
+            <a:solidFill>
+              <a:schemeClr val="tx1"/>
+            </a:solidFill>
+            <a:ln w="12700" cap="flat">
+              <a:noFill/>
+              <a:miter lim="400000"/>
+            </a:ln>
+            <a:effectLst/>
+            <a:sp3d/>
+          </p:spPr>
+          <p:style>
+            <a:lnRef idx="0">
+              <a:scrgbClr r="0" g="0" b="0"/>
+            </a:lnRef>
+            <a:fillRef idx="0">
+              <a:scrgbClr r="0" g="0" b="0"/>
+            </a:fillRef>
+            <a:effectRef idx="0">
+              <a:scrgbClr r="0" g="0" b="0"/>
+            </a:effectRef>
+            <a:fontRef idx="none"/>
+          </p:style>
+          <p:txBody>
+            <a:bodyPr rot="0" spcFirstLastPara="1" vertOverflow="overflow" horzOverflow="overflow" vert="horz" wrap="square" lIns="0" tIns="0" rIns="0" bIns="0" numCol="1" spcCol="38100" rtlCol="0" anchor="ctr">
+              <a:spAutoFit/>
+            </a:bodyPr>
+            <a:lstStyle/>
+            <a:p>
+              <a:pPr marL="0" marR="0" indent="0" algn="ctr" defTabSz="825500" rtl="0" fontAlgn="auto" latinLnBrk="0" hangingPunct="0">
+                <a:lnSpc>
+                  <a:spcPct val="100000"/>
+                </a:lnSpc>
+                <a:spcBef>
+                  <a:spcPts val="0"/>
+                </a:spcBef>
+                <a:spcAft>
+                  <a:spcPts val="0"/>
+                </a:spcAft>
+                <a:buClrTx/>
+                <a:buSzTx/>
+                <a:buFontTx/>
+                <a:buNone/>
+                <a:tabLst/>
+              </a:pPr>
+              <a:endParaRPr kumimoji="0" lang="de-DE" sz="3200" b="0" i="0" u="none" strike="noStrike" cap="none" spc="0" normalizeH="0" baseline="0">
+                <a:ln>
+                  <a:noFill/>
+                </a:ln>
+                <a:solidFill>
+                  <a:srgbClr val="FFFFFF"/>
+                </a:solidFill>
+                <a:effectLst/>
+                <a:uFillTx/>
+                <a:latin typeface="+mn-lt"/>
+                <a:ea typeface="+mn-ea"/>
+                <a:cs typeface="+mn-cs"/>
+                <a:sym typeface="Helvetica Neue Medium"/>
+              </a:endParaRPr>
+            </a:p>
+          </p:txBody>
+        </p:sp>
+        <p:sp>
+          <p:nvSpPr>
+            <p:cNvPr id="37" name="Sun 36"/>
+            <p:cNvSpPr/>
+            <p:nvPr/>
+          </p:nvSpPr>
+          <p:spPr>
+            <a:xfrm>
+              <a:off x="12590774" y="10733316"/>
+              <a:ext cx="833603" cy="486227"/>
+            </a:xfrm>
+            <a:prstGeom prst="sun">
+              <a:avLst/>
+            </a:prstGeom>
+            <a:solidFill>
+              <a:schemeClr val="tx1"/>
+            </a:solidFill>
+            <a:ln w="12700" cap="flat">
+              <a:noFill/>
+              <a:miter lim="400000"/>
+            </a:ln>
+            <a:effectLst/>
+            <a:sp3d/>
+          </p:spPr>
+          <p:style>
+            <a:lnRef idx="0">
+              <a:scrgbClr r="0" g="0" b="0"/>
+            </a:lnRef>
+            <a:fillRef idx="0">
+              <a:scrgbClr r="0" g="0" b="0"/>
+            </a:fillRef>
+            <a:effectRef idx="0">
+              <a:scrgbClr r="0" g="0" b="0"/>
+            </a:effectRef>
+            <a:fontRef idx="none"/>
+          </p:style>
+          <p:txBody>
+            <a:bodyPr rot="0" spcFirstLastPara="1" vertOverflow="overflow" horzOverflow="overflow" vert="horz" wrap="square" lIns="0" tIns="0" rIns="0" bIns="0" numCol="1" spcCol="38100" rtlCol="0" anchor="ctr">
+              <a:spAutoFit/>
+            </a:bodyPr>
+            <a:lstStyle/>
+            <a:p>
+              <a:pPr marL="0" marR="0" indent="0" algn="ctr" defTabSz="825500" rtl="0" fontAlgn="auto" latinLnBrk="0" hangingPunct="0">
+                <a:lnSpc>
+                  <a:spcPct val="100000"/>
+                </a:lnSpc>
+                <a:spcBef>
+                  <a:spcPts val="0"/>
+                </a:spcBef>
+                <a:spcAft>
+                  <a:spcPts val="0"/>
+                </a:spcAft>
+                <a:buClrTx/>
+                <a:buSzTx/>
+                <a:buFontTx/>
+                <a:buNone/>
+                <a:tabLst/>
+              </a:pPr>
+              <a:endParaRPr kumimoji="0" lang="de-DE" sz="3200" b="0" i="0" u="none" strike="noStrike" cap="none" spc="0" normalizeH="0" baseline="0">
+                <a:ln>
+                  <a:noFill/>
+                </a:ln>
+                <a:solidFill>
+                  <a:srgbClr val="FFFFFF"/>
+                </a:solidFill>
+                <a:effectLst/>
+                <a:uFillTx/>
+                <a:latin typeface="+mn-lt"/>
+                <a:ea typeface="+mn-ea"/>
+                <a:cs typeface="+mn-cs"/>
+                <a:sym typeface="Helvetica Neue Medium"/>
+              </a:endParaRPr>
+            </a:p>
+          </p:txBody>
+        </p:sp>
+        <p:sp>
+          <p:nvSpPr>
+            <p:cNvPr id="38" name="Sun 37"/>
+            <p:cNvSpPr/>
+            <p:nvPr/>
+          </p:nvSpPr>
+          <p:spPr>
+            <a:xfrm>
+              <a:off x="13182967" y="10314212"/>
+              <a:ext cx="833603" cy="486227"/>
+            </a:xfrm>
+            <a:prstGeom prst="sun">
+              <a:avLst/>
+            </a:prstGeom>
+            <a:solidFill>
+              <a:schemeClr val="accent3">
+                <a:lumMod val="75000"/>
+              </a:schemeClr>
+            </a:solidFill>
+            <a:ln w="12700" cap="flat">
+              <a:noFill/>
+              <a:miter lim="400000"/>
+            </a:ln>
+            <a:effectLst/>
+            <a:sp3d/>
+          </p:spPr>
+          <p:style>
+            <a:lnRef idx="0">
+              <a:scrgbClr r="0" g="0" b="0"/>
+            </a:lnRef>
+            <a:fillRef idx="0">
+              <a:scrgbClr r="0" g="0" b="0"/>
+            </a:fillRef>
+            <a:effectRef idx="0">
+              <a:scrgbClr r="0" g="0" b="0"/>
+            </a:effectRef>
+            <a:fontRef idx="none"/>
+          </p:style>
+          <p:txBody>
+            <a:bodyPr rot="0" spcFirstLastPara="1" vertOverflow="overflow" horzOverflow="overflow" vert="horz" wrap="square" lIns="0" tIns="0" rIns="0" bIns="0" numCol="1" spcCol="38100" rtlCol="0" anchor="ctr">
+              <a:spAutoFit/>
+            </a:bodyPr>
+            <a:lstStyle/>
+            <a:p>
+              <a:pPr marL="0" marR="0" indent="0" algn="ctr" defTabSz="825500" rtl="0" fontAlgn="auto" latinLnBrk="0" hangingPunct="0">
+                <a:lnSpc>
+                  <a:spcPct val="100000"/>
+                </a:lnSpc>
+                <a:spcBef>
+                  <a:spcPts val="0"/>
+                </a:spcBef>
+                <a:spcAft>
+                  <a:spcPts val="0"/>
+                </a:spcAft>
+                <a:buClrTx/>
+                <a:buSzTx/>
+                <a:buFontTx/>
+                <a:buNone/>
+                <a:tabLst/>
+              </a:pPr>
+              <a:endParaRPr kumimoji="0" lang="de-DE" sz="3200" b="0" i="0" u="none" strike="noStrike" cap="none" spc="0" normalizeH="0" baseline="0">
+                <a:ln>
+                  <a:noFill/>
+                </a:ln>
+                <a:solidFill>
+                  <a:srgbClr val="FFFFFF"/>
+                </a:solidFill>
+                <a:effectLst/>
+                <a:uFillTx/>
+                <a:latin typeface="+mn-lt"/>
+                <a:ea typeface="+mn-ea"/>
+                <a:cs typeface="+mn-cs"/>
+                <a:sym typeface="Helvetica Neue Medium"/>
+              </a:endParaRPr>
+            </a:p>
+          </p:txBody>
+        </p:sp>
+        <p:sp>
+          <p:nvSpPr>
+            <p:cNvPr id="39" name="Sun 38"/>
+            <p:cNvSpPr/>
+            <p:nvPr/>
+          </p:nvSpPr>
+          <p:spPr>
+            <a:xfrm>
+              <a:off x="13468655" y="10905671"/>
+              <a:ext cx="833603" cy="486227"/>
+            </a:xfrm>
+            <a:prstGeom prst="sun">
+              <a:avLst/>
+            </a:prstGeom>
+            <a:solidFill>
+              <a:schemeClr val="tx1"/>
+            </a:solidFill>
+            <a:ln w="12700" cap="flat">
+              <a:noFill/>
+              <a:miter lim="400000"/>
+            </a:ln>
+            <a:effectLst/>
+            <a:sp3d/>
+          </p:spPr>
+          <p:style>
+            <a:lnRef idx="0">
+              <a:scrgbClr r="0" g="0" b="0"/>
+            </a:lnRef>
+            <a:fillRef idx="0">
+              <a:scrgbClr r="0" g="0" b="0"/>
+            </a:fillRef>
+            <a:effectRef idx="0">
+              <a:scrgbClr r="0" g="0" b="0"/>
+            </a:effectRef>
+            <a:fontRef idx="none"/>
+          </p:style>
+          <p:txBody>
+            <a:bodyPr rot="0" spcFirstLastPara="1" vertOverflow="overflow" horzOverflow="overflow" vert="horz" wrap="square" lIns="0" tIns="0" rIns="0" bIns="0" numCol="1" spcCol="38100" rtlCol="0" anchor="ctr">
+              <a:spAutoFit/>
+            </a:bodyPr>
+            <a:lstStyle/>
+            <a:p>
+              <a:pPr marL="0" marR="0" indent="0" algn="ctr" defTabSz="825500" rtl="0" fontAlgn="auto" latinLnBrk="0" hangingPunct="0">
+                <a:lnSpc>
+                  <a:spcPct val="100000"/>
+                </a:lnSpc>
+                <a:spcBef>
+                  <a:spcPts val="0"/>
+                </a:spcBef>
+                <a:spcAft>
+                  <a:spcPts val="0"/>
+                </a:spcAft>
+                <a:buClrTx/>
+                <a:buSzTx/>
+                <a:buFontTx/>
+                <a:buNone/>
+                <a:tabLst/>
+              </a:pPr>
+              <a:endParaRPr kumimoji="0" lang="de-DE" sz="3200" b="0" i="0" u="none" strike="noStrike" cap="none" spc="0" normalizeH="0" baseline="0">
+                <a:ln>
+                  <a:noFill/>
+                </a:ln>
+                <a:solidFill>
+                  <a:srgbClr val="FFFFFF"/>
+                </a:solidFill>
+                <a:effectLst/>
+                <a:uFillTx/>
+                <a:latin typeface="+mn-lt"/>
+                <a:ea typeface="+mn-ea"/>
+                <a:cs typeface="+mn-cs"/>
+                <a:sym typeface="Helvetica Neue Medium"/>
+              </a:endParaRPr>
+            </a:p>
+          </p:txBody>
+        </p:sp>
+        <p:sp>
+          <p:nvSpPr>
+            <p:cNvPr id="40" name="Sun 39"/>
+            <p:cNvSpPr/>
+            <p:nvPr/>
+          </p:nvSpPr>
+          <p:spPr>
+            <a:xfrm>
+              <a:off x="12856615" y="11322054"/>
+              <a:ext cx="833603" cy="486227"/>
+            </a:xfrm>
+            <a:prstGeom prst="sun">
+              <a:avLst/>
+            </a:prstGeom>
+            <a:solidFill>
+              <a:schemeClr val="tx1"/>
+            </a:solidFill>
+            <a:ln w="12700" cap="flat">
+              <a:noFill/>
+              <a:miter lim="400000"/>
+            </a:ln>
+            <a:effectLst/>
+            <a:sp3d/>
+          </p:spPr>
+          <p:style>
+            <a:lnRef idx="0">
+              <a:scrgbClr r="0" g="0" b="0"/>
+            </a:lnRef>
+            <a:fillRef idx="0">
+              <a:scrgbClr r="0" g="0" b="0"/>
+            </a:fillRef>
+            <a:effectRef idx="0">
+              <a:scrgbClr r="0" g="0" b="0"/>
+            </a:effectRef>
+            <a:fontRef idx="none"/>
+          </p:style>
+          <p:txBody>
+            <a:bodyPr rot="0" spcFirstLastPara="1" vertOverflow="overflow" horzOverflow="overflow" vert="horz" wrap="square" lIns="0" tIns="0" rIns="0" bIns="0" numCol="1" spcCol="38100" rtlCol="0" anchor="ctr">
+              <a:spAutoFit/>
+            </a:bodyPr>
+            <a:lstStyle/>
+            <a:p>
+              <a:pPr marL="0" marR="0" indent="0" algn="ctr" defTabSz="825500" rtl="0" fontAlgn="auto" latinLnBrk="0" hangingPunct="0">
+                <a:lnSpc>
+                  <a:spcPct val="100000"/>
+                </a:lnSpc>
+                <a:spcBef>
+                  <a:spcPts val="0"/>
+                </a:spcBef>
+                <a:spcAft>
+                  <a:spcPts val="0"/>
+                </a:spcAft>
+                <a:buClrTx/>
+                <a:buSzTx/>
+                <a:buFontTx/>
+                <a:buNone/>
+                <a:tabLst/>
+              </a:pPr>
+              <a:endParaRPr kumimoji="0" lang="de-DE" sz="3200" b="0" i="0" u="none" strike="noStrike" cap="none" spc="0" normalizeH="0" baseline="0">
+                <a:ln>
+                  <a:noFill/>
+                </a:ln>
+                <a:solidFill>
+                  <a:srgbClr val="FFFFFF"/>
+                </a:solidFill>
+                <a:effectLst/>
+                <a:uFillTx/>
+                <a:latin typeface="+mn-lt"/>
+                <a:ea typeface="+mn-ea"/>
+                <a:cs typeface="+mn-cs"/>
+                <a:sym typeface="Helvetica Neue Medium"/>
+              </a:endParaRPr>
+            </a:p>
+          </p:txBody>
+        </p:sp>
+        <p:sp>
+          <p:nvSpPr>
+            <p:cNvPr id="41" name="&quot;No&quot; Symbol 40"/>
+            <p:cNvSpPr/>
+            <p:nvPr/>
+          </p:nvSpPr>
+          <p:spPr>
+            <a:xfrm>
+              <a:off x="15250885" y="10646229"/>
+              <a:ext cx="796128" cy="330200"/>
+            </a:xfrm>
+            <a:prstGeom prst="noSmoking">
+              <a:avLst/>
+            </a:prstGeom>
+            <a:solidFill>
+              <a:schemeClr val="accent2">
+                <a:lumMod val="75000"/>
+              </a:schemeClr>
+            </a:solidFill>
+            <a:ln w="12700" cap="flat">
+              <a:noFill/>
+              <a:miter lim="400000"/>
+            </a:ln>
+            <a:effectLst/>
+            <a:sp3d/>
+          </p:spPr>
+          <p:style>
+            <a:lnRef idx="0">
+              <a:scrgbClr r="0" g="0" b="0"/>
+            </a:lnRef>
+            <a:fillRef idx="0">
+              <a:scrgbClr r="0" g="0" b="0"/>
+            </a:fillRef>
+            <a:effectRef idx="0">
+              <a:scrgbClr r="0" g="0" b="0"/>
+            </a:effectRef>
+            <a:fontRef idx="none"/>
+          </p:style>
+          <p:txBody>
+            <a:bodyPr rot="0" spcFirstLastPara="1" vertOverflow="overflow" horzOverflow="overflow" vert="horz" wrap="square" lIns="0" tIns="0" rIns="0" bIns="0" numCol="1" spcCol="38100" rtlCol="0" anchor="ctr">
+              <a:spAutoFit/>
+            </a:bodyPr>
+            <a:lstStyle/>
+            <a:p>
+              <a:pPr marL="0" marR="0" indent="0" algn="ctr" defTabSz="825500" rtl="0" fontAlgn="auto" latinLnBrk="0" hangingPunct="0">
+                <a:lnSpc>
+                  <a:spcPct val="100000"/>
+                </a:lnSpc>
+                <a:spcBef>
+                  <a:spcPts val="0"/>
+                </a:spcBef>
+                <a:spcAft>
+                  <a:spcPts val="0"/>
+                </a:spcAft>
+                <a:buClrTx/>
+                <a:buSzTx/>
+                <a:buFontTx/>
+                <a:buNone/>
+                <a:tabLst/>
+              </a:pPr>
+              <a:endParaRPr kumimoji="0" lang="de-DE" sz="3200" b="0" i="0" u="none" strike="noStrike" cap="none" spc="0" normalizeH="0" baseline="0">
+                <a:ln>
+                  <a:noFill/>
+                </a:ln>
+                <a:solidFill>
+                  <a:srgbClr val="FFFFFF"/>
+                </a:solidFill>
+                <a:effectLst/>
+                <a:uFillTx/>
+                <a:latin typeface="+mn-lt"/>
+                <a:ea typeface="+mn-ea"/>
+                <a:cs typeface="+mn-cs"/>
+                <a:sym typeface="Helvetica Neue Medium"/>
+              </a:endParaRPr>
+            </a:p>
+          </p:txBody>
+        </p:sp>
+        <p:sp>
+          <p:nvSpPr>
+            <p:cNvPr id="43" name="&quot;No&quot; Symbol 42"/>
+            <p:cNvSpPr/>
+            <p:nvPr/>
+          </p:nvSpPr>
+          <p:spPr>
+            <a:xfrm>
+              <a:off x="15286595" y="11166022"/>
+              <a:ext cx="796128" cy="330200"/>
+            </a:xfrm>
+            <a:prstGeom prst="noSmoking">
+              <a:avLst/>
+            </a:prstGeom>
+            <a:solidFill>
+              <a:schemeClr val="tx1"/>
+            </a:solidFill>
+            <a:ln w="12700" cap="flat">
+              <a:noFill/>
+              <a:miter lim="400000"/>
+            </a:ln>
+            <a:effectLst/>
+            <a:sp3d/>
+          </p:spPr>
+          <p:style>
+            <a:lnRef idx="0">
+              <a:scrgbClr r="0" g="0" b="0"/>
+            </a:lnRef>
+            <a:fillRef idx="0">
+              <a:scrgbClr r="0" g="0" b="0"/>
+            </a:fillRef>
+            <a:effectRef idx="0">
+              <a:scrgbClr r="0" g="0" b="0"/>
+            </a:effectRef>
+            <a:fontRef idx="none"/>
+          </p:style>
+          <p:txBody>
+            <a:bodyPr rot="0" spcFirstLastPara="1" vertOverflow="overflow" horzOverflow="overflow" vert="horz" wrap="square" lIns="0" tIns="0" rIns="0" bIns="0" numCol="1" spcCol="38100" rtlCol="0" anchor="ctr">
+              <a:spAutoFit/>
+            </a:bodyPr>
+            <a:lstStyle/>
+            <a:p>
+              <a:pPr marL="0" marR="0" indent="0" algn="ctr" defTabSz="825500" rtl="0" fontAlgn="auto" latinLnBrk="0" hangingPunct="0">
+                <a:lnSpc>
+                  <a:spcPct val="100000"/>
+                </a:lnSpc>
+                <a:spcBef>
+                  <a:spcPts val="0"/>
+                </a:spcBef>
+                <a:spcAft>
+                  <a:spcPts val="0"/>
+                </a:spcAft>
+                <a:buClrTx/>
+                <a:buSzTx/>
+                <a:buFontTx/>
+                <a:buNone/>
+                <a:tabLst/>
+              </a:pPr>
+              <a:endParaRPr kumimoji="0" lang="de-DE" sz="3200" b="0" i="0" u="none" strike="noStrike" cap="none" spc="0" normalizeH="0" baseline="0">
+                <a:ln>
+                  <a:noFill/>
+                </a:ln>
+                <a:solidFill>
+                  <a:srgbClr val="FFFFFF"/>
+                </a:solidFill>
+                <a:effectLst/>
+                <a:uFillTx/>
+                <a:latin typeface="+mn-lt"/>
+                <a:ea typeface="+mn-ea"/>
+                <a:cs typeface="+mn-cs"/>
+                <a:sym typeface="Helvetica Neue Medium"/>
+              </a:endParaRPr>
+            </a:p>
+          </p:txBody>
+        </p:sp>
+        <p:sp>
+          <p:nvSpPr>
+            <p:cNvPr id="44" name="&quot;No&quot; Symbol 43"/>
+            <p:cNvSpPr/>
+            <p:nvPr/>
+          </p:nvSpPr>
+          <p:spPr>
+            <a:xfrm>
+              <a:off x="16169784" y="11319333"/>
+              <a:ext cx="796128" cy="330200"/>
+            </a:xfrm>
+            <a:prstGeom prst="noSmoking">
+              <a:avLst/>
+            </a:prstGeom>
+            <a:solidFill>
+              <a:schemeClr val="tx1"/>
+            </a:solidFill>
+            <a:ln w="12700" cap="flat">
+              <a:noFill/>
+              <a:miter lim="400000"/>
+            </a:ln>
+            <a:effectLst/>
+            <a:sp3d/>
+          </p:spPr>
+          <p:style>
+            <a:lnRef idx="0">
+              <a:scrgbClr r="0" g="0" b="0"/>
+            </a:lnRef>
+            <a:fillRef idx="0">
+              <a:scrgbClr r="0" g="0" b="0"/>
+            </a:fillRef>
+            <a:effectRef idx="0">
+              <a:scrgbClr r="0" g="0" b="0"/>
+            </a:effectRef>
+            <a:fontRef idx="none"/>
+          </p:style>
+          <p:txBody>
+            <a:bodyPr rot="0" spcFirstLastPara="1" vertOverflow="overflow" horzOverflow="overflow" vert="horz" wrap="square" lIns="0" tIns="0" rIns="0" bIns="0" numCol="1" spcCol="38100" rtlCol="0" anchor="ctr">
+              <a:spAutoFit/>
+            </a:bodyPr>
+            <a:lstStyle/>
+            <a:p>
+              <a:pPr marL="0" marR="0" indent="0" algn="ctr" defTabSz="825500" rtl="0" fontAlgn="auto" latinLnBrk="0" hangingPunct="0">
+                <a:lnSpc>
+                  <a:spcPct val="100000"/>
+                </a:lnSpc>
+                <a:spcBef>
+                  <a:spcPts val="0"/>
+                </a:spcBef>
+                <a:spcAft>
+                  <a:spcPts val="0"/>
+                </a:spcAft>
+                <a:buClrTx/>
+                <a:buSzTx/>
+                <a:buFontTx/>
+                <a:buNone/>
+                <a:tabLst/>
+              </a:pPr>
+              <a:endParaRPr kumimoji="0" lang="de-DE" sz="3200" b="0" i="0" u="none" strike="noStrike" cap="none" spc="0" normalizeH="0" baseline="0">
+                <a:ln>
+                  <a:noFill/>
+                </a:ln>
+                <a:solidFill>
+                  <a:srgbClr val="FFFFFF"/>
+                </a:solidFill>
+                <a:effectLst/>
+                <a:uFillTx/>
+                <a:latin typeface="+mn-lt"/>
+                <a:ea typeface="+mn-ea"/>
+                <a:cs typeface="+mn-cs"/>
+                <a:sym typeface="Helvetica Neue Medium"/>
+              </a:endParaRPr>
+            </a:p>
+          </p:txBody>
+        </p:sp>
+        <p:sp>
+          <p:nvSpPr>
+            <p:cNvPr id="45" name="Block Arc 44"/>
+            <p:cNvSpPr/>
+            <p:nvPr/>
+          </p:nvSpPr>
+          <p:spPr>
+            <a:xfrm>
+              <a:off x="18546073" y="10604958"/>
+              <a:ext cx="379467" cy="625927"/>
+            </a:xfrm>
+            <a:prstGeom prst="blockArc">
+              <a:avLst/>
+            </a:prstGeom>
+            <a:solidFill>
+              <a:schemeClr val="accent3">
+                <a:lumMod val="75000"/>
+              </a:schemeClr>
+            </a:solidFill>
+            <a:ln w="12700" cap="flat">
+              <a:noFill/>
+              <a:miter lim="400000"/>
+            </a:ln>
+            <a:effectLst/>
+            <a:sp3d/>
+          </p:spPr>
+          <p:style>
+            <a:lnRef idx="0">
+              <a:scrgbClr r="0" g="0" b="0"/>
+            </a:lnRef>
+            <a:fillRef idx="0">
+              <a:scrgbClr r="0" g="0" b="0"/>
+            </a:fillRef>
+            <a:effectRef idx="0">
+              <a:scrgbClr r="0" g="0" b="0"/>
+            </a:effectRef>
+            <a:fontRef idx="none"/>
+          </p:style>
+          <p:txBody>
+            <a:bodyPr rot="0" spcFirstLastPara="1" vertOverflow="overflow" horzOverflow="overflow" vert="horz" wrap="square" lIns="0" tIns="0" rIns="0" bIns="0" numCol="1" spcCol="38100" rtlCol="0" anchor="ctr">
+              <a:spAutoFit/>
+            </a:bodyPr>
+            <a:lstStyle/>
+            <a:p>
+              <a:pPr marL="0" marR="0" indent="0" algn="ctr" defTabSz="825500" rtl="0" fontAlgn="auto" latinLnBrk="0" hangingPunct="0">
+                <a:lnSpc>
+                  <a:spcPct val="100000"/>
+                </a:lnSpc>
+                <a:spcBef>
+                  <a:spcPts val="0"/>
+                </a:spcBef>
+                <a:spcAft>
+                  <a:spcPts val="0"/>
+                </a:spcAft>
+                <a:buClrTx/>
+                <a:buSzTx/>
+                <a:buFontTx/>
+                <a:buNone/>
+                <a:tabLst/>
+              </a:pPr>
+              <a:endParaRPr kumimoji="0" lang="de-DE" sz="3200" b="0" i="0" u="none" strike="noStrike" cap="none" spc="0" normalizeH="0" baseline="0">
+                <a:ln>
+                  <a:noFill/>
+                </a:ln>
+                <a:solidFill>
+                  <a:srgbClr val="FFFFFF"/>
+                </a:solidFill>
+                <a:effectLst/>
+                <a:uFillTx/>
+                <a:latin typeface="+mn-lt"/>
+                <a:ea typeface="+mn-ea"/>
+                <a:cs typeface="+mn-cs"/>
+                <a:sym typeface="Helvetica Neue Medium"/>
+              </a:endParaRPr>
+            </a:p>
+          </p:txBody>
+        </p:sp>
+        <p:sp>
+          <p:nvSpPr>
+            <p:cNvPr id="46" name="Block Arc 45"/>
+            <p:cNvSpPr/>
+            <p:nvPr/>
+          </p:nvSpPr>
+          <p:spPr>
+            <a:xfrm>
+              <a:off x="17968545" y="10588174"/>
+              <a:ext cx="379467" cy="625927"/>
+            </a:xfrm>
+            <a:prstGeom prst="blockArc">
+              <a:avLst/>
+            </a:prstGeom>
+            <a:solidFill>
+              <a:schemeClr val="tx1"/>
+            </a:solidFill>
+            <a:ln w="12700" cap="flat">
+              <a:noFill/>
+              <a:miter lim="400000"/>
+            </a:ln>
+            <a:effectLst/>
+            <a:sp3d/>
+          </p:spPr>
+          <p:style>
+            <a:lnRef idx="0">
+              <a:scrgbClr r="0" g="0" b="0"/>
+            </a:lnRef>
+            <a:fillRef idx="0">
+              <a:scrgbClr r="0" g="0" b="0"/>
+            </a:fillRef>
+            <a:effectRef idx="0">
+              <a:scrgbClr r="0" g="0" b="0"/>
+            </a:effectRef>
+            <a:fontRef idx="none"/>
+          </p:style>
+          <p:txBody>
+            <a:bodyPr rot="0" spcFirstLastPara="1" vertOverflow="overflow" horzOverflow="overflow" vert="horz" wrap="square" lIns="0" tIns="0" rIns="0" bIns="0" numCol="1" spcCol="38100" rtlCol="0" anchor="ctr">
+              <a:spAutoFit/>
+            </a:bodyPr>
+            <a:lstStyle/>
+            <a:p>
+              <a:pPr marL="0" marR="0" indent="0" algn="ctr" defTabSz="825500" rtl="0" fontAlgn="auto" latinLnBrk="0" hangingPunct="0">
+                <a:lnSpc>
+                  <a:spcPct val="100000"/>
+                </a:lnSpc>
+                <a:spcBef>
+                  <a:spcPts val="0"/>
+                </a:spcBef>
+                <a:spcAft>
+                  <a:spcPts val="0"/>
+                </a:spcAft>
+                <a:buClrTx/>
+                <a:buSzTx/>
+                <a:buFontTx/>
+                <a:buNone/>
+                <a:tabLst/>
+              </a:pPr>
+              <a:endParaRPr kumimoji="0" lang="de-DE" sz="3200" b="0" i="0" u="none" strike="noStrike" cap="none" spc="0" normalizeH="0" baseline="0">
+                <a:ln>
+                  <a:noFill/>
+                </a:ln>
+                <a:solidFill>
+                  <a:srgbClr val="FFFFFF"/>
+                </a:solidFill>
+                <a:effectLst/>
+                <a:uFillTx/>
+                <a:latin typeface="+mn-lt"/>
+                <a:ea typeface="+mn-ea"/>
+                <a:cs typeface="+mn-cs"/>
+                <a:sym typeface="Helvetica Neue Medium"/>
+              </a:endParaRPr>
+            </a:p>
+          </p:txBody>
+        </p:sp>
+        <p:sp>
+          <p:nvSpPr>
+            <p:cNvPr id="47" name="Block Arc 46"/>
+            <p:cNvSpPr/>
+            <p:nvPr/>
+          </p:nvSpPr>
+          <p:spPr>
+            <a:xfrm flipH="1">
+              <a:off x="18977764" y="11193699"/>
+              <a:ext cx="366088" cy="514353"/>
+            </a:xfrm>
+            <a:prstGeom prst="blockArc">
+              <a:avLst/>
+            </a:prstGeom>
+            <a:solidFill>
+              <a:schemeClr val="tx1"/>
+            </a:solidFill>
+            <a:ln w="12700" cap="flat">
+              <a:noFill/>
+              <a:miter lim="400000"/>
+            </a:ln>
+            <a:effectLst/>
+            <a:sp3d/>
+          </p:spPr>
+          <p:style>
+            <a:lnRef idx="0">
+              <a:scrgbClr r="0" g="0" b="0"/>
+            </a:lnRef>
+            <a:fillRef idx="0">
+              <a:scrgbClr r="0" g="0" b="0"/>
+            </a:fillRef>
+            <a:effectRef idx="0">
+              <a:scrgbClr r="0" g="0" b="0"/>
+            </a:effectRef>
+            <a:fontRef idx="none"/>
+          </p:style>
+          <p:txBody>
+            <a:bodyPr rot="0" spcFirstLastPara="1" vertOverflow="overflow" horzOverflow="overflow" vert="horz" wrap="square" lIns="0" tIns="0" rIns="0" bIns="0" numCol="1" spcCol="38100" rtlCol="0" anchor="ctr">
+              <a:spAutoFit/>
+            </a:bodyPr>
+            <a:lstStyle/>
+            <a:p>
+              <a:pPr marL="0" marR="0" indent="0" algn="ctr" defTabSz="825500" rtl="0" fontAlgn="auto" latinLnBrk="0" hangingPunct="0">
+                <a:lnSpc>
+                  <a:spcPct val="100000"/>
+                </a:lnSpc>
+                <a:spcBef>
+                  <a:spcPts val="0"/>
+                </a:spcBef>
+                <a:spcAft>
+                  <a:spcPts val="0"/>
+                </a:spcAft>
+                <a:buClrTx/>
+                <a:buSzTx/>
+                <a:buFontTx/>
+                <a:buNone/>
+                <a:tabLst/>
+              </a:pPr>
+              <a:endParaRPr kumimoji="0" lang="de-DE" sz="3200" b="0" i="0" u="none" strike="noStrike" cap="none" spc="0" normalizeH="0" baseline="0">
+                <a:ln>
+                  <a:noFill/>
+                </a:ln>
+                <a:solidFill>
+                  <a:srgbClr val="FFFFFF"/>
+                </a:solidFill>
+                <a:effectLst/>
+                <a:uFillTx/>
+                <a:latin typeface="+mn-lt"/>
+                <a:ea typeface="+mn-ea"/>
+                <a:cs typeface="+mn-cs"/>
+                <a:sym typeface="Helvetica Neue Medium"/>
+              </a:endParaRPr>
+            </a:p>
+          </p:txBody>
+        </p:sp>
+        <p:sp>
+          <p:nvSpPr>
+            <p:cNvPr id="48" name="Block Arc 47"/>
+            <p:cNvSpPr/>
+            <p:nvPr/>
+          </p:nvSpPr>
+          <p:spPr>
+            <a:xfrm>
+              <a:off x="17942337" y="11200511"/>
+              <a:ext cx="379467" cy="625927"/>
+            </a:xfrm>
+            <a:prstGeom prst="blockArc">
+              <a:avLst/>
+            </a:prstGeom>
+            <a:solidFill>
+              <a:schemeClr val="tx1"/>
+            </a:solidFill>
+            <a:ln w="12700" cap="flat">
+              <a:noFill/>
+              <a:miter lim="400000"/>
+            </a:ln>
+            <a:effectLst/>
+            <a:sp3d/>
+          </p:spPr>
+          <p:style>
+            <a:lnRef idx="0">
+              <a:scrgbClr r="0" g="0" b="0"/>
+            </a:lnRef>
+            <a:fillRef idx="0">
+              <a:scrgbClr r="0" g="0" b="0"/>
+            </a:fillRef>
+            <a:effectRef idx="0">
+              <a:scrgbClr r="0" g="0" b="0"/>
+            </a:effectRef>
+            <a:fontRef idx="none"/>
+          </p:style>
+          <p:txBody>
+            <a:bodyPr rot="0" spcFirstLastPara="1" vertOverflow="overflow" horzOverflow="overflow" vert="horz" wrap="square" lIns="0" tIns="0" rIns="0" bIns="0" numCol="1" spcCol="38100" rtlCol="0" anchor="ctr">
+              <a:spAutoFit/>
+            </a:bodyPr>
+            <a:lstStyle/>
+            <a:p>
+              <a:pPr marL="0" marR="0" indent="0" algn="ctr" defTabSz="825500" rtl="0" fontAlgn="auto" latinLnBrk="0" hangingPunct="0">
+                <a:lnSpc>
+                  <a:spcPct val="100000"/>
+                </a:lnSpc>
+                <a:spcBef>
+                  <a:spcPts val="0"/>
+                </a:spcBef>
+                <a:spcAft>
+                  <a:spcPts val="0"/>
+                </a:spcAft>
+                <a:buClrTx/>
+                <a:buSzTx/>
+                <a:buFontTx/>
+                <a:buNone/>
+                <a:tabLst/>
+              </a:pPr>
+              <a:endParaRPr kumimoji="0" lang="de-DE" sz="3200" b="0" i="0" u="none" strike="noStrike" cap="none" spc="0" normalizeH="0" baseline="0">
+                <a:ln>
+                  <a:noFill/>
+                </a:ln>
+                <a:solidFill>
+                  <a:srgbClr val="FFFFFF"/>
+                </a:solidFill>
+                <a:effectLst/>
+                <a:uFillTx/>
+                <a:latin typeface="+mn-lt"/>
+                <a:ea typeface="+mn-ea"/>
+                <a:cs typeface="+mn-cs"/>
+                <a:sym typeface="Helvetica Neue Medium"/>
+              </a:endParaRPr>
+            </a:p>
+          </p:txBody>
+        </p:sp>
+        <p:sp>
+          <p:nvSpPr>
+            <p:cNvPr id="49" name="Block Arc 48"/>
+            <p:cNvSpPr/>
+            <p:nvPr/>
+          </p:nvSpPr>
+          <p:spPr>
+            <a:xfrm>
+              <a:off x="19127107" y="10581369"/>
+              <a:ext cx="379467" cy="625927"/>
+            </a:xfrm>
+            <a:prstGeom prst="blockArc">
+              <a:avLst/>
+            </a:prstGeom>
+            <a:solidFill>
+              <a:schemeClr val="tx1"/>
+            </a:solidFill>
+            <a:ln w="12700" cap="flat">
+              <a:noFill/>
+              <a:miter lim="400000"/>
+            </a:ln>
+            <a:effectLst/>
+            <a:sp3d/>
+          </p:spPr>
+          <p:style>
+            <a:lnRef idx="0">
+              <a:scrgbClr r="0" g="0" b="0"/>
+            </a:lnRef>
+            <a:fillRef idx="0">
+              <a:scrgbClr r="0" g="0" b="0"/>
+            </a:fillRef>
+            <a:effectRef idx="0">
+              <a:scrgbClr r="0" g="0" b="0"/>
+            </a:effectRef>
+            <a:fontRef idx="none"/>
+          </p:style>
+          <p:txBody>
+            <a:bodyPr rot="0" spcFirstLastPara="1" vertOverflow="overflow" horzOverflow="overflow" vert="horz" wrap="square" lIns="0" tIns="0" rIns="0" bIns="0" numCol="1" spcCol="38100" rtlCol="0" anchor="ctr">
+              <a:spAutoFit/>
+            </a:bodyPr>
+            <a:lstStyle/>
+            <a:p>
+              <a:pPr marL="0" marR="0" indent="0" algn="ctr" defTabSz="825500" rtl="0" fontAlgn="auto" latinLnBrk="0" hangingPunct="0">
+                <a:lnSpc>
+                  <a:spcPct val="100000"/>
+                </a:lnSpc>
+                <a:spcBef>
+                  <a:spcPts val="0"/>
+                </a:spcBef>
+                <a:spcAft>
+                  <a:spcPts val="0"/>
+                </a:spcAft>
+                <a:buClrTx/>
+                <a:buSzTx/>
+                <a:buFontTx/>
+                <a:buNone/>
+                <a:tabLst/>
+              </a:pPr>
+              <a:endParaRPr kumimoji="0" lang="de-DE" sz="3200" b="0" i="0" u="none" strike="noStrike" cap="none" spc="0" normalizeH="0" baseline="0">
+                <a:ln>
+                  <a:noFill/>
+                </a:ln>
+                <a:solidFill>
+                  <a:srgbClr val="FFFFFF"/>
+                </a:solidFill>
+                <a:effectLst/>
+                <a:uFillTx/>
+                <a:latin typeface="+mn-lt"/>
+                <a:ea typeface="+mn-ea"/>
+                <a:cs typeface="+mn-cs"/>
+                <a:sym typeface="Helvetica Neue Medium"/>
+              </a:endParaRPr>
+            </a:p>
+          </p:txBody>
+        </p:sp>
+        <p:sp>
+          <p:nvSpPr>
+            <p:cNvPr id="51" name="Quad Arrow Callout 50"/>
+            <p:cNvSpPr/>
+            <p:nvPr/>
+          </p:nvSpPr>
+          <p:spPr>
+            <a:xfrm>
+              <a:off x="20944114" y="10557325"/>
+              <a:ext cx="561521" cy="636374"/>
+            </a:xfrm>
+            <a:prstGeom prst="quadArrowCallout">
+              <a:avLst/>
+            </a:prstGeom>
+            <a:solidFill>
+              <a:schemeClr val="accent3">
+                <a:lumMod val="75000"/>
+              </a:schemeClr>
+            </a:solidFill>
+            <a:ln w="12700" cap="flat">
+              <a:noFill/>
+              <a:miter lim="400000"/>
+            </a:ln>
+            <a:effectLst/>
+            <a:sp3d/>
+          </p:spPr>
+          <p:style>
+            <a:lnRef idx="0">
+              <a:scrgbClr r="0" g="0" b="0"/>
+            </a:lnRef>
+            <a:fillRef idx="0">
+              <a:scrgbClr r="0" g="0" b="0"/>
+            </a:fillRef>
+            <a:effectRef idx="0">
+              <a:scrgbClr r="0" g="0" b="0"/>
+            </a:effectRef>
+            <a:fontRef idx="none"/>
+          </p:style>
+          <p:txBody>
+            <a:bodyPr rot="0" spcFirstLastPara="1" vertOverflow="overflow" horzOverflow="overflow" vert="horz" wrap="square" lIns="0" tIns="0" rIns="0" bIns="0" numCol="1" spcCol="38100" rtlCol="0" anchor="ctr">
+              <a:spAutoFit/>
+            </a:bodyPr>
+            <a:lstStyle/>
+            <a:p>
+              <a:pPr marL="0" marR="0" indent="0" algn="ctr" defTabSz="825500" rtl="0" fontAlgn="auto" latinLnBrk="0" hangingPunct="0">
+                <a:lnSpc>
+                  <a:spcPct val="100000"/>
+                </a:lnSpc>
+                <a:spcBef>
+                  <a:spcPts val="0"/>
+                </a:spcBef>
+                <a:spcAft>
+                  <a:spcPts val="0"/>
+                </a:spcAft>
+                <a:buClrTx/>
+                <a:buSzTx/>
+                <a:buFontTx/>
+                <a:buNone/>
+                <a:tabLst/>
+              </a:pPr>
+              <a:endParaRPr kumimoji="0" lang="de-DE" sz="3200" b="0" i="0" u="none" strike="noStrike" cap="none" spc="0" normalizeH="0" baseline="0">
+                <a:ln>
+                  <a:noFill/>
+                </a:ln>
+                <a:solidFill>
+                  <a:srgbClr val="FFFFFF"/>
+                </a:solidFill>
+                <a:effectLst/>
+                <a:uFillTx/>
+                <a:latin typeface="+mn-lt"/>
+                <a:ea typeface="+mn-ea"/>
+                <a:cs typeface="+mn-cs"/>
+                <a:sym typeface="Helvetica Neue Medium"/>
+              </a:endParaRPr>
+            </a:p>
+          </p:txBody>
+        </p:sp>
+        <p:sp>
+          <p:nvSpPr>
+            <p:cNvPr id="52" name="Quad Arrow Callout 51"/>
+            <p:cNvSpPr/>
+            <p:nvPr/>
+          </p:nvSpPr>
+          <p:spPr>
+            <a:xfrm>
+              <a:off x="21660492" y="10966886"/>
+              <a:ext cx="561521" cy="636374"/>
+            </a:xfrm>
+            <a:prstGeom prst="quadArrowCallout">
+              <a:avLst/>
+            </a:prstGeom>
+            <a:solidFill>
+              <a:schemeClr val="tx1"/>
+            </a:solidFill>
+            <a:ln w="12700" cap="flat">
+              <a:noFill/>
+              <a:miter lim="400000"/>
+            </a:ln>
+            <a:effectLst/>
+            <a:sp3d/>
+          </p:spPr>
+          <p:style>
+            <a:lnRef idx="0">
+              <a:scrgbClr r="0" g="0" b="0"/>
+            </a:lnRef>
+            <a:fillRef idx="0">
+              <a:scrgbClr r="0" g="0" b="0"/>
+            </a:fillRef>
+            <a:effectRef idx="0">
+              <a:scrgbClr r="0" g="0" b="0"/>
+            </a:effectRef>
+            <a:fontRef idx="none"/>
+          </p:style>
+          <p:txBody>
+            <a:bodyPr rot="0" spcFirstLastPara="1" vertOverflow="overflow" horzOverflow="overflow" vert="horz" wrap="square" lIns="0" tIns="0" rIns="0" bIns="0" numCol="1" spcCol="38100" rtlCol="0" anchor="ctr">
+              <a:spAutoFit/>
+            </a:bodyPr>
+            <a:lstStyle/>
+            <a:p>
+              <a:pPr marL="0" marR="0" indent="0" algn="ctr" defTabSz="825500" rtl="0" fontAlgn="auto" latinLnBrk="0" hangingPunct="0">
+                <a:lnSpc>
+                  <a:spcPct val="100000"/>
+                </a:lnSpc>
+                <a:spcBef>
+                  <a:spcPts val="0"/>
+                </a:spcBef>
+                <a:spcAft>
+                  <a:spcPts val="0"/>
+                </a:spcAft>
+                <a:buClrTx/>
+                <a:buSzTx/>
+                <a:buFontTx/>
+                <a:buNone/>
+                <a:tabLst/>
+              </a:pPr>
+              <a:endParaRPr kumimoji="0" lang="de-DE" sz="3200" b="0" i="0" u="none" strike="noStrike" cap="none" spc="0" normalizeH="0" baseline="0">
+                <a:ln>
+                  <a:noFill/>
+                </a:ln>
+                <a:solidFill>
+                  <a:srgbClr val="FFFFFF"/>
+                </a:solidFill>
+                <a:effectLst/>
+                <a:uFillTx/>
+                <a:latin typeface="+mn-lt"/>
+                <a:ea typeface="+mn-ea"/>
+                <a:cs typeface="+mn-cs"/>
+                <a:sym typeface="Helvetica Neue Medium"/>
+              </a:endParaRPr>
+            </a:p>
+          </p:txBody>
+        </p:sp>
+        <p:sp>
+          <p:nvSpPr>
+            <p:cNvPr id="83" name="&quot;No&quot; Symbol 82"/>
+            <p:cNvSpPr/>
+            <p:nvPr/>
+          </p:nvSpPr>
+          <p:spPr>
+            <a:xfrm>
+              <a:off x="16209801" y="10883901"/>
+              <a:ext cx="796128" cy="330200"/>
+            </a:xfrm>
+            <a:prstGeom prst="noSmoking">
+              <a:avLst/>
+            </a:prstGeom>
+            <a:solidFill>
+              <a:schemeClr val="tx1"/>
+            </a:solidFill>
+            <a:ln w="12700" cap="flat">
+              <a:noFill/>
+              <a:miter lim="400000"/>
+            </a:ln>
+            <a:effectLst/>
+            <a:sp3d/>
+          </p:spPr>
+          <p:style>
+            <a:lnRef idx="0">
+              <a:scrgbClr r="0" g="0" b="0"/>
+            </a:lnRef>
+            <a:fillRef idx="0">
+              <a:scrgbClr r="0" g="0" b="0"/>
+            </a:fillRef>
+            <a:effectRef idx="0">
+              <a:scrgbClr r="0" g="0" b="0"/>
+            </a:effectRef>
+            <a:fontRef idx="none"/>
+          </p:style>
+          <p:txBody>
+            <a:bodyPr rot="0" spcFirstLastPara="1" vertOverflow="overflow" horzOverflow="overflow" vert="horz" wrap="square" lIns="0" tIns="0" rIns="0" bIns="0" numCol="1" spcCol="38100" rtlCol="0" anchor="ctr">
+              <a:spAutoFit/>
+            </a:bodyPr>
+            <a:lstStyle/>
+            <a:p>
+              <a:pPr marL="0" marR="0" indent="0" algn="ctr" defTabSz="825500" rtl="0" fontAlgn="auto" latinLnBrk="0" hangingPunct="0">
+                <a:lnSpc>
+                  <a:spcPct val="100000"/>
+                </a:lnSpc>
+                <a:spcBef>
+                  <a:spcPts val="0"/>
+                </a:spcBef>
+                <a:spcAft>
+                  <a:spcPts val="0"/>
+                </a:spcAft>
+                <a:buClrTx/>
+                <a:buSzTx/>
+                <a:buFontTx/>
+                <a:buNone/>
+                <a:tabLst/>
+              </a:pPr>
+              <a:endParaRPr kumimoji="0" lang="de-DE" sz="3200" b="0" i="0" u="none" strike="noStrike" cap="none" spc="0" normalizeH="0" baseline="0">
+                <a:ln>
+                  <a:noFill/>
+                </a:ln>
+                <a:solidFill>
+                  <a:srgbClr val="FFFFFF"/>
+                </a:solidFill>
+                <a:effectLst/>
+                <a:uFillTx/>
+                <a:latin typeface="+mn-lt"/>
+                <a:ea typeface="+mn-ea"/>
+                <a:cs typeface="+mn-cs"/>
+                <a:sym typeface="Helvetica Neue Medium"/>
+              </a:endParaRPr>
+            </a:p>
+          </p:txBody>
+        </p:sp>
+        <p:sp>
+          <p:nvSpPr>
+            <p:cNvPr id="102" name="Block Arc 101"/>
+            <p:cNvSpPr/>
+            <p:nvPr/>
+          </p:nvSpPr>
+          <p:spPr>
+            <a:xfrm>
+              <a:off x="18546073" y="11460860"/>
+              <a:ext cx="379467" cy="625927"/>
+            </a:xfrm>
+            <a:prstGeom prst="blockArc">
+              <a:avLst/>
+            </a:prstGeom>
+            <a:solidFill>
+              <a:schemeClr val="tx1"/>
+            </a:solidFill>
+            <a:ln w="12700" cap="flat">
+              <a:noFill/>
+              <a:miter lim="400000"/>
+            </a:ln>
+            <a:effectLst/>
+            <a:sp3d/>
+          </p:spPr>
+          <p:style>
+            <a:lnRef idx="0">
+              <a:scrgbClr r="0" g="0" b="0"/>
+            </a:lnRef>
+            <a:fillRef idx="0">
+              <a:scrgbClr r="0" g="0" b="0"/>
+            </a:fillRef>
+            <a:effectRef idx="0">
+              <a:scrgbClr r="0" g="0" b="0"/>
+            </a:effectRef>
+            <a:fontRef idx="none"/>
+          </p:style>
+          <p:txBody>
+            <a:bodyPr rot="0" spcFirstLastPara="1" vertOverflow="overflow" horzOverflow="overflow" vert="horz" wrap="square" lIns="0" tIns="0" rIns="0" bIns="0" numCol="1" spcCol="38100" rtlCol="0" anchor="ctr">
+              <a:spAutoFit/>
+            </a:bodyPr>
+            <a:lstStyle/>
+            <a:p>
+              <a:pPr marL="0" marR="0" indent="0" algn="ctr" defTabSz="825500" rtl="0" fontAlgn="auto" latinLnBrk="0" hangingPunct="0">
+                <a:lnSpc>
+                  <a:spcPct val="100000"/>
+                </a:lnSpc>
+                <a:spcBef>
+                  <a:spcPts val="0"/>
+                </a:spcBef>
+                <a:spcAft>
+                  <a:spcPts val="0"/>
+                </a:spcAft>
+                <a:buClrTx/>
+                <a:buSzTx/>
+                <a:buFontTx/>
+                <a:buNone/>
+                <a:tabLst/>
+              </a:pPr>
+              <a:endParaRPr kumimoji="0" lang="de-DE" sz="3200" b="0" i="0" u="none" strike="noStrike" cap="none" spc="0" normalizeH="0" baseline="0">
+                <a:ln>
+                  <a:noFill/>
+                </a:ln>
+                <a:solidFill>
+                  <a:srgbClr val="FFFFFF"/>
+                </a:solidFill>
+                <a:effectLst/>
+                <a:uFillTx/>
+                <a:latin typeface="+mn-lt"/>
+                <a:ea typeface="+mn-ea"/>
+                <a:cs typeface="+mn-cs"/>
+                <a:sym typeface="Helvetica Neue Medium"/>
+              </a:endParaRPr>
+            </a:p>
+          </p:txBody>
+        </p:sp>
+      </p:grpSp>
+      <p:grpSp>
+        <p:nvGrpSpPr>
+          <p:cNvPr id="5" name="Group 4"/>
+          <p:cNvGrpSpPr/>
+          <p:nvPr/>
+        </p:nvGrpSpPr>
+        <p:grpSpPr>
+          <a:xfrm>
+            <a:off x="4358463" y="4254726"/>
+            <a:ext cx="14881640" cy="3775880"/>
+            <a:chOff x="4358463" y="4254726"/>
+            <a:chExt cx="14881640" cy="3775880"/>
+          </a:xfrm>
+        </p:grpSpPr>
+        <p:sp>
+          <p:nvSpPr>
+            <p:cNvPr id="4" name="Oval 3"/>
+            <p:cNvSpPr/>
+            <p:nvPr/>
+          </p:nvSpPr>
+          <p:spPr>
+            <a:xfrm>
+              <a:off x="7873148" y="4254726"/>
+              <a:ext cx="4724400" cy="1915886"/>
+            </a:xfrm>
+            <a:prstGeom prst="ellipse">
+              <a:avLst/>
+            </a:prstGeom>
+            <a:ln/>
+          </p:spPr>
+          <p:style>
+            <a:lnRef idx="2">
+              <a:schemeClr val="accent1"/>
+            </a:lnRef>
+            <a:fillRef idx="1">
+              <a:schemeClr val="lt1"/>
+            </a:fillRef>
+            <a:effectRef idx="0">
+              <a:schemeClr val="accent1"/>
+            </a:effectRef>
+            <a:fontRef idx="minor">
+              <a:schemeClr val="dk1"/>
+            </a:fontRef>
+          </p:style>
+          <p:txBody>
+            <a:bodyPr rot="0" spcFirstLastPara="1" vertOverflow="overflow" horzOverflow="overflow" vert="horz" wrap="square" lIns="0" tIns="0" rIns="0" bIns="0" numCol="1" spcCol="38100" rtlCol="0" anchor="ctr">
+              <a:spAutoFit/>
+            </a:bodyPr>
+            <a:lstStyle/>
+            <a:p>
+              <a:pPr marL="0" marR="0" indent="0" algn="ctr" defTabSz="825500" rtl="0" fontAlgn="auto" latinLnBrk="0" hangingPunct="0">
+                <a:lnSpc>
+                  <a:spcPct val="100000"/>
+                </a:lnSpc>
+                <a:spcBef>
+                  <a:spcPts val="0"/>
+                </a:spcBef>
+                <a:spcAft>
+                  <a:spcPts val="0"/>
+                </a:spcAft>
+                <a:buClrTx/>
+                <a:buSzTx/>
+                <a:buFontTx/>
+                <a:buNone/>
+                <a:tabLst/>
+              </a:pPr>
+              <a:endParaRPr kumimoji="0" lang="de-DE" sz="3200" b="0" i="0" u="none" strike="noStrike" cap="none" spc="0" normalizeH="0" baseline="0">
+                <a:ln>
+                  <a:noFill/>
+                </a:ln>
+                <a:solidFill>
+                  <a:srgbClr val="FFFFFF"/>
+                </a:solidFill>
+                <a:effectLst/>
+                <a:uFillTx/>
+                <a:latin typeface="+mn-lt"/>
+                <a:ea typeface="+mn-ea"/>
+                <a:cs typeface="+mn-cs"/>
+                <a:sym typeface="Helvetica Neue Medium"/>
+              </a:endParaRPr>
+            </a:p>
+          </p:txBody>
+        </p:sp>
+        <p:sp>
+          <p:nvSpPr>
+            <p:cNvPr id="88" name="Oval 87"/>
+            <p:cNvSpPr/>
+            <p:nvPr/>
+          </p:nvSpPr>
+          <p:spPr>
+            <a:xfrm>
+              <a:off x="13117891" y="4296851"/>
+              <a:ext cx="4724400" cy="1915886"/>
+            </a:xfrm>
+            <a:prstGeom prst="ellipse">
+              <a:avLst/>
+            </a:prstGeom>
+            <a:ln/>
+          </p:spPr>
+          <p:style>
+            <a:lnRef idx="2">
+              <a:schemeClr val="accent1"/>
+            </a:lnRef>
+            <a:fillRef idx="1">
+              <a:schemeClr val="lt1"/>
+            </a:fillRef>
+            <a:effectRef idx="0">
+              <a:schemeClr val="accent1"/>
+            </a:effectRef>
+            <a:fontRef idx="minor">
+              <a:schemeClr val="dk1"/>
+            </a:fontRef>
+          </p:style>
+          <p:txBody>
+            <a:bodyPr rot="0" spcFirstLastPara="1" vertOverflow="overflow" horzOverflow="overflow" vert="horz" wrap="square" lIns="0" tIns="0" rIns="0" bIns="0" numCol="1" spcCol="38100" rtlCol="0" anchor="ctr">
+              <a:spAutoFit/>
+            </a:bodyPr>
+            <a:lstStyle/>
+            <a:p>
+              <a:pPr marL="0" marR="0" indent="0" algn="ctr" defTabSz="825500" rtl="0" fontAlgn="auto" latinLnBrk="0" hangingPunct="0">
+                <a:lnSpc>
+                  <a:spcPct val="100000"/>
+                </a:lnSpc>
+                <a:spcBef>
+                  <a:spcPts val="0"/>
+                </a:spcBef>
+                <a:spcAft>
+                  <a:spcPts val="0"/>
+                </a:spcAft>
+                <a:buClrTx/>
+                <a:buSzTx/>
+                <a:buFontTx/>
+                <a:buNone/>
+                <a:tabLst/>
+              </a:pPr>
+              <a:endParaRPr kumimoji="0" lang="de-DE" sz="3200" b="0" i="0" u="none" strike="noStrike" cap="none" spc="0" normalizeH="0" baseline="0">
+                <a:ln>
+                  <a:noFill/>
+                </a:ln>
+                <a:solidFill>
+                  <a:srgbClr val="FFFFFF"/>
+                </a:solidFill>
+                <a:effectLst/>
+                <a:uFillTx/>
+                <a:latin typeface="+mn-lt"/>
+                <a:ea typeface="+mn-ea"/>
+                <a:cs typeface="+mn-cs"/>
+                <a:sym typeface="Helvetica Neue Medium"/>
+              </a:endParaRPr>
+            </a:p>
+          </p:txBody>
+        </p:sp>
+        <p:cxnSp>
+          <p:nvCxnSpPr>
+            <p:cNvPr id="90" name="Straight Arrow Connector 89"/>
+            <p:cNvCxnSpPr/>
+            <p:nvPr/>
+          </p:nvCxnSpPr>
+          <p:spPr>
+            <a:xfrm flipV="1">
+              <a:off x="4358463" y="5955257"/>
+              <a:ext cx="3780577" cy="2075349"/>
+            </a:xfrm>
+            <a:prstGeom prst="straightConnector1">
+              <a:avLst/>
+            </a:prstGeom>
+            <a:noFill/>
+            <a:ln w="25400" cap="flat">
+              <a:solidFill>
+                <a:srgbClr val="000000"/>
+              </a:solidFill>
+              <a:prstDash val="solid"/>
+              <a:miter lim="400000"/>
+              <a:tailEnd type="triangle"/>
+            </a:ln>
+            <a:effectLst/>
+            <a:sp3d/>
+          </p:spPr>
+          <p:style>
+            <a:lnRef idx="0">
+              <a:scrgbClr r="0" g="0" b="0"/>
+            </a:lnRef>
+            <a:fillRef idx="0">
+              <a:scrgbClr r="0" g="0" b="0"/>
+            </a:fillRef>
+            <a:effectRef idx="0">
+              <a:scrgbClr r="0" g="0" b="0"/>
+            </a:effectRef>
+            <a:fontRef idx="none"/>
+          </p:style>
+        </p:cxnSp>
+        <p:cxnSp>
+          <p:nvCxnSpPr>
+            <p:cNvPr id="92" name="Straight Arrow Connector 91"/>
+            <p:cNvCxnSpPr/>
+            <p:nvPr/>
+          </p:nvCxnSpPr>
+          <p:spPr>
+            <a:xfrm flipV="1">
+              <a:off x="7711987" y="6341805"/>
+              <a:ext cx="1154467" cy="1513975"/>
+            </a:xfrm>
+            <a:prstGeom prst="straightConnector1">
+              <a:avLst/>
+            </a:prstGeom>
+            <a:noFill/>
+            <a:ln w="25400" cap="flat">
+              <a:solidFill>
+                <a:srgbClr val="000000"/>
+              </a:solidFill>
+              <a:prstDash val="solid"/>
+              <a:miter lim="400000"/>
+              <a:tailEnd type="triangle"/>
+            </a:ln>
+            <a:effectLst/>
+            <a:sp3d/>
+          </p:spPr>
+          <p:style>
+            <a:lnRef idx="0">
+              <a:scrgbClr r="0" g="0" b="0"/>
+            </a:lnRef>
+            <a:fillRef idx="0">
+              <a:scrgbClr r="0" g="0" b="0"/>
+            </a:fillRef>
+            <a:effectRef idx="0">
+              <a:scrgbClr r="0" g="0" b="0"/>
+            </a:effectRef>
+            <a:fontRef idx="none"/>
+          </p:style>
+        </p:cxnSp>
+        <p:cxnSp>
+          <p:nvCxnSpPr>
+            <p:cNvPr id="95" name="Straight Arrow Connector 94"/>
+            <p:cNvCxnSpPr/>
+            <p:nvPr/>
+          </p:nvCxnSpPr>
+          <p:spPr>
+            <a:xfrm flipV="1">
+              <a:off x="12891421" y="6350921"/>
+              <a:ext cx="1966328" cy="1633074"/>
+            </a:xfrm>
+            <a:prstGeom prst="straightConnector1">
+              <a:avLst/>
+            </a:prstGeom>
+            <a:noFill/>
+            <a:ln w="25400" cap="flat">
+              <a:solidFill>
+                <a:srgbClr val="000000"/>
+              </a:solidFill>
+              <a:prstDash val="solid"/>
+              <a:miter lim="400000"/>
+              <a:tailEnd type="triangle"/>
+            </a:ln>
+            <a:effectLst/>
+            <a:sp3d/>
+          </p:spPr>
+          <p:style>
+            <a:lnRef idx="0">
+              <a:scrgbClr r="0" g="0" b="0"/>
+            </a:lnRef>
+            <a:fillRef idx="0">
+              <a:scrgbClr r="0" g="0" b="0"/>
+            </a:fillRef>
+            <a:effectRef idx="0">
+              <a:scrgbClr r="0" g="0" b="0"/>
+            </a:effectRef>
+            <a:fontRef idx="none"/>
+          </p:style>
+        </p:cxnSp>
+        <p:cxnSp>
+          <p:nvCxnSpPr>
+            <p:cNvPr id="97" name="Straight Arrow Connector 96"/>
+            <p:cNvCxnSpPr/>
+            <p:nvPr/>
+          </p:nvCxnSpPr>
+          <p:spPr>
+            <a:xfrm flipH="1" flipV="1">
+              <a:off x="17615821" y="6014720"/>
+              <a:ext cx="1624282" cy="1736307"/>
+            </a:xfrm>
+            <a:prstGeom prst="straightConnector1">
+              <a:avLst/>
+            </a:prstGeom>
+            <a:noFill/>
+            <a:ln w="25400" cap="flat">
+              <a:solidFill>
+                <a:srgbClr val="000000"/>
+              </a:solidFill>
+              <a:prstDash val="solid"/>
+              <a:miter lim="400000"/>
+              <a:tailEnd type="triangle"/>
+            </a:ln>
+            <a:effectLst/>
+            <a:sp3d/>
+          </p:spPr>
+          <p:style>
+            <a:lnRef idx="0">
+              <a:scrgbClr r="0" g="0" b="0"/>
+            </a:lnRef>
+            <a:fillRef idx="0">
+              <a:scrgbClr r="0" g="0" b="0"/>
+            </a:fillRef>
+            <a:effectRef idx="0">
+              <a:scrgbClr r="0" g="0" b="0"/>
+            </a:effectRef>
+            <a:fontRef idx="none"/>
+          </p:style>
+        </p:cxnSp>
+        <p:sp>
+          <p:nvSpPr>
+            <p:cNvPr id="100" name="5-Point Star 99"/>
+            <p:cNvSpPr/>
+            <p:nvPr/>
+          </p:nvSpPr>
+          <p:spPr>
+            <a:xfrm>
+              <a:off x="9399127" y="4750487"/>
+              <a:ext cx="522514" cy="437238"/>
+            </a:xfrm>
+            <a:prstGeom prst="star5">
+              <a:avLst/>
+            </a:prstGeom>
+            <a:solidFill>
+              <a:schemeClr val="tx1"/>
+            </a:solidFill>
+            <a:ln w="12700" cap="flat">
+              <a:noFill/>
+              <a:miter lim="400000"/>
+            </a:ln>
+            <a:effectLst/>
+            <a:sp3d/>
+          </p:spPr>
+          <p:style>
+            <a:lnRef idx="0">
+              <a:scrgbClr r="0" g="0" b="0"/>
+            </a:lnRef>
+            <a:fillRef idx="0">
+              <a:scrgbClr r="0" g="0" b="0"/>
+            </a:fillRef>
+            <a:effectRef idx="0">
+              <a:scrgbClr r="0" g="0" b="0"/>
+            </a:effectRef>
+            <a:fontRef idx="none"/>
+          </p:style>
+          <p:txBody>
+            <a:bodyPr rot="0" spcFirstLastPara="1" vertOverflow="overflow" horzOverflow="overflow" vert="horz" wrap="square" lIns="0" tIns="0" rIns="0" bIns="0" numCol="1" spcCol="38100" rtlCol="0" anchor="ctr">
+              <a:spAutoFit/>
+            </a:bodyPr>
+            <a:lstStyle/>
+            <a:p>
+              <a:pPr marL="0" marR="0" indent="0" algn="ctr" defTabSz="825500" rtl="0" fontAlgn="auto" latinLnBrk="0" hangingPunct="0">
+                <a:lnSpc>
+                  <a:spcPct val="100000"/>
+                </a:lnSpc>
+                <a:spcBef>
+                  <a:spcPts val="0"/>
+                </a:spcBef>
+                <a:spcAft>
+                  <a:spcPts val="0"/>
+                </a:spcAft>
+                <a:buClrTx/>
+                <a:buSzTx/>
+                <a:buFontTx/>
+                <a:buNone/>
+                <a:tabLst/>
+              </a:pPr>
+              <a:endParaRPr kumimoji="0" lang="de-DE" sz="3200" b="0" i="0" u="none" strike="noStrike" cap="none" spc="0" normalizeH="0" baseline="0">
+                <a:ln>
+                  <a:noFill/>
+                </a:ln>
+                <a:solidFill>
+                  <a:srgbClr val="FFFFFF"/>
+                </a:solidFill>
+                <a:effectLst/>
+                <a:uFillTx/>
+                <a:latin typeface="+mn-lt"/>
+                <a:ea typeface="+mn-ea"/>
+                <a:cs typeface="+mn-cs"/>
+                <a:sym typeface="Helvetica Neue Medium"/>
+              </a:endParaRPr>
+            </a:p>
+          </p:txBody>
+        </p:sp>
+        <p:sp>
+          <p:nvSpPr>
+            <p:cNvPr id="101" name="Lightning Bolt 100"/>
+            <p:cNvSpPr/>
+            <p:nvPr/>
+          </p:nvSpPr>
+          <p:spPr>
+            <a:xfrm>
+              <a:off x="10134683" y="4518930"/>
+              <a:ext cx="532528" cy="486227"/>
+            </a:xfrm>
+            <a:prstGeom prst="lightningBolt">
+              <a:avLst/>
+            </a:prstGeom>
+            <a:solidFill>
+              <a:schemeClr val="tx1"/>
+            </a:solidFill>
+            <a:ln w="12700" cap="flat">
+              <a:noFill/>
+              <a:miter lim="400000"/>
+            </a:ln>
+            <a:effectLst/>
+            <a:sp3d/>
+          </p:spPr>
+          <p:style>
+            <a:lnRef idx="0">
+              <a:scrgbClr r="0" g="0" b="0"/>
+            </a:lnRef>
+            <a:fillRef idx="0">
+              <a:scrgbClr r="0" g="0" b="0"/>
+            </a:fillRef>
+            <a:effectRef idx="0">
+              <a:scrgbClr r="0" g="0" b="0"/>
+            </a:effectRef>
+            <a:fontRef idx="none"/>
+          </p:style>
+          <p:txBody>
+            <a:bodyPr rot="0" spcFirstLastPara="1" vertOverflow="overflow" horzOverflow="overflow" vert="horz" wrap="square" lIns="0" tIns="0" rIns="0" bIns="0" numCol="1" spcCol="38100" rtlCol="0" anchor="ctr">
+              <a:spAutoFit/>
+            </a:bodyPr>
+            <a:lstStyle/>
+            <a:p>
+              <a:pPr marL="0" marR="0" indent="0" algn="ctr" defTabSz="825500" rtl="0" fontAlgn="auto" latinLnBrk="0" hangingPunct="0">
+                <a:lnSpc>
+                  <a:spcPct val="100000"/>
+                </a:lnSpc>
+                <a:spcBef>
+                  <a:spcPts val="0"/>
+                </a:spcBef>
+                <a:spcAft>
+                  <a:spcPts val="0"/>
+                </a:spcAft>
+                <a:buClrTx/>
+                <a:buSzTx/>
+                <a:buFontTx/>
+                <a:buNone/>
+                <a:tabLst/>
+              </a:pPr>
+              <a:endParaRPr kumimoji="0" lang="de-DE" sz="3200" b="0" i="0" u="none" strike="noStrike" cap="none" spc="0" normalizeH="0" baseline="0">
+                <a:ln>
+                  <a:noFill/>
+                </a:ln>
+                <a:solidFill>
+                  <a:srgbClr val="FFFFFF"/>
+                </a:solidFill>
+                <a:effectLst/>
+                <a:uFillTx/>
+                <a:latin typeface="+mn-lt"/>
+                <a:ea typeface="+mn-ea"/>
+                <a:cs typeface="+mn-cs"/>
+                <a:sym typeface="Helvetica Neue Medium"/>
+              </a:endParaRPr>
+            </a:p>
+          </p:txBody>
+        </p:sp>
+        <p:sp>
+          <p:nvSpPr>
+            <p:cNvPr id="50" name="Block Arc 49"/>
+            <p:cNvSpPr/>
+            <p:nvPr/>
+          </p:nvSpPr>
+          <p:spPr>
+            <a:xfrm>
+              <a:off x="14668015" y="4844156"/>
+              <a:ext cx="379467" cy="625927"/>
+            </a:xfrm>
+            <a:prstGeom prst="blockArc">
+              <a:avLst/>
+            </a:prstGeom>
+            <a:solidFill>
+              <a:schemeClr val="tx1"/>
+            </a:solidFill>
+            <a:ln w="12700" cap="flat">
+              <a:noFill/>
+              <a:miter lim="400000"/>
+            </a:ln>
+            <a:effectLst/>
+            <a:sp3d/>
+          </p:spPr>
+          <p:style>
+            <a:lnRef idx="0">
+              <a:scrgbClr r="0" g="0" b="0"/>
+            </a:lnRef>
+            <a:fillRef idx="0">
+              <a:scrgbClr r="0" g="0" b="0"/>
+            </a:fillRef>
+            <a:effectRef idx="0">
+              <a:scrgbClr r="0" g="0" b="0"/>
+            </a:effectRef>
+            <a:fontRef idx="none"/>
+          </p:style>
+          <p:txBody>
+            <a:bodyPr rot="0" spcFirstLastPara="1" vertOverflow="overflow" horzOverflow="overflow" vert="horz" wrap="square" lIns="0" tIns="0" rIns="0" bIns="0" numCol="1" spcCol="38100" rtlCol="0" anchor="ctr">
+              <a:spAutoFit/>
+            </a:bodyPr>
+            <a:lstStyle/>
+            <a:p>
+              <a:pPr marL="0" marR="0" indent="0" algn="ctr" defTabSz="825500" rtl="0" fontAlgn="auto" latinLnBrk="0" hangingPunct="0">
+                <a:lnSpc>
+                  <a:spcPct val="100000"/>
+                </a:lnSpc>
+                <a:spcBef>
+                  <a:spcPts val="0"/>
+                </a:spcBef>
+                <a:spcAft>
+                  <a:spcPts val="0"/>
+                </a:spcAft>
+                <a:buClrTx/>
+                <a:buSzTx/>
+                <a:buFontTx/>
+                <a:buNone/>
+                <a:tabLst/>
+              </a:pPr>
+              <a:endParaRPr kumimoji="0" lang="de-DE" sz="3200" b="0" i="0" u="none" strike="noStrike" cap="none" spc="0" normalizeH="0" baseline="0">
+                <a:ln>
+                  <a:noFill/>
+                </a:ln>
+                <a:solidFill>
+                  <a:srgbClr val="FFFFFF"/>
+                </a:solidFill>
+                <a:effectLst/>
+                <a:uFillTx/>
+                <a:latin typeface="+mn-lt"/>
+                <a:ea typeface="+mn-ea"/>
+                <a:cs typeface="+mn-cs"/>
+                <a:sym typeface="Helvetica Neue Medium"/>
+              </a:endParaRPr>
+            </a:p>
+          </p:txBody>
+        </p:sp>
+        <p:sp>
+          <p:nvSpPr>
+            <p:cNvPr id="103" name="&quot;No&quot; Symbol 102"/>
+            <p:cNvSpPr/>
+            <p:nvPr/>
+          </p:nvSpPr>
+          <p:spPr>
+            <a:xfrm>
+              <a:off x="15646062" y="5022625"/>
+              <a:ext cx="796128" cy="330200"/>
+            </a:xfrm>
+            <a:prstGeom prst="noSmoking">
+              <a:avLst/>
+            </a:prstGeom>
+            <a:solidFill>
+              <a:schemeClr val="tx1"/>
+            </a:solidFill>
+            <a:ln w="12700" cap="flat">
+              <a:noFill/>
+              <a:miter lim="400000"/>
+            </a:ln>
+            <a:effectLst/>
+            <a:sp3d/>
+          </p:spPr>
+          <p:style>
+            <a:lnRef idx="0">
+              <a:scrgbClr r="0" g="0" b="0"/>
+            </a:lnRef>
+            <a:fillRef idx="0">
+              <a:scrgbClr r="0" g="0" b="0"/>
+            </a:fillRef>
+            <a:effectRef idx="0">
+              <a:scrgbClr r="0" g="0" b="0"/>
+            </a:effectRef>
+            <a:fontRef idx="none"/>
+          </p:style>
+          <p:txBody>
+            <a:bodyPr rot="0" spcFirstLastPara="1" vertOverflow="overflow" horzOverflow="overflow" vert="horz" wrap="square" lIns="0" tIns="0" rIns="0" bIns="0" numCol="1" spcCol="38100" rtlCol="0" anchor="ctr">
+              <a:spAutoFit/>
+            </a:bodyPr>
+            <a:lstStyle/>
+            <a:p>
+              <a:pPr marL="0" marR="0" indent="0" algn="ctr" defTabSz="825500" rtl="0" fontAlgn="auto" latinLnBrk="0" hangingPunct="0">
+                <a:lnSpc>
+                  <a:spcPct val="100000"/>
+                </a:lnSpc>
+                <a:spcBef>
+                  <a:spcPts val="0"/>
+                </a:spcBef>
+                <a:spcAft>
+                  <a:spcPts val="0"/>
+                </a:spcAft>
+                <a:buClrTx/>
+                <a:buSzTx/>
+                <a:buFontTx/>
+                <a:buNone/>
+                <a:tabLst/>
+              </a:pPr>
+              <a:endParaRPr kumimoji="0" lang="de-DE" sz="3200" b="0" i="0" u="none" strike="noStrike" cap="none" spc="0" normalizeH="0" baseline="0">
+                <a:ln>
+                  <a:noFill/>
+                </a:ln>
+                <a:solidFill>
+                  <a:srgbClr val="FFFFFF"/>
+                </a:solidFill>
+                <a:effectLst/>
+                <a:uFillTx/>
+                <a:latin typeface="+mn-lt"/>
+                <a:ea typeface="+mn-ea"/>
+                <a:cs typeface="+mn-cs"/>
+                <a:sym typeface="Helvetica Neue Medium"/>
+              </a:endParaRPr>
+            </a:p>
+          </p:txBody>
+        </p:sp>
+      </p:grpSp>
+      <p:sp>
+        <p:nvSpPr>
+          <p:cNvPr id="104" name="TextBox 103"/>
+          <p:cNvSpPr txBox="1"/>
+          <p:nvPr/>
+        </p:nvSpPr>
+        <p:spPr>
+          <a:xfrm>
+            <a:off x="263786" y="4718115"/>
+            <a:ext cx="6184041" cy="2336537"/>
+          </a:xfrm>
+          <a:prstGeom prst="rect">
+            <a:avLst/>
+          </a:prstGeom>
+          <a:noFill/>
+          <a:ln w="12700" cap="flat">
+            <a:noFill/>
+            <a:miter lim="400000"/>
+          </a:ln>
+          <a:effectLst/>
+          <a:sp3d/>
+        </p:spPr>
+        <p:style>
+          <a:lnRef idx="0">
+            <a:scrgbClr r="0" g="0" b="0"/>
+          </a:lnRef>
+          <a:fillRef idx="0">
+            <a:scrgbClr r="0" g="0" b="0"/>
+          </a:fillRef>
+          <a:effectRef idx="0">
+            <a:scrgbClr r="0" g="0" b="0"/>
+          </a:effectRef>
+          <a:fontRef idx="none"/>
+        </p:style>
+        <p:txBody>
+          <a:bodyPr rot="0" spcFirstLastPara="1" vertOverflow="overflow" horzOverflow="overflow" vert="horz" wrap="square" lIns="50800" tIns="50800" rIns="50800" bIns="50800" numCol="1" spcCol="38100" rtlCol="0" anchor="ctr">
+            <a:spAutoFit/>
+          </a:bodyPr>
+          <a:lstStyle/>
+          <a:p>
+            <a:pPr marL="0" marR="0" indent="0" algn="l" defTabSz="825500" rtl="0" fontAlgn="auto" latinLnBrk="0" hangingPunct="0">
+              <a:lnSpc>
+                <a:spcPct val="100000"/>
+              </a:lnSpc>
+              <a:spcBef>
+                <a:spcPts val="5900"/>
+              </a:spcBef>
+              <a:spcAft>
+                <a:spcPts val="0"/>
+              </a:spcAft>
+              <a:buClrTx/>
+              <a:buSzTx/>
+              <a:buFontTx/>
+              <a:buNone/>
+              <a:tabLst/>
+            </a:pPr>
+            <a:r>
+              <a:rPr kumimoji="0" lang="de-DE" sz="4800" b="0" i="0" u="none" strike="noStrike" cap="none" spc="0" normalizeH="0" baseline="0" dirty="0" smtClean="0">
+                <a:ln>
+                  <a:noFill/>
+                </a:ln>
+                <a:solidFill>
+                  <a:srgbClr val="000000"/>
+                </a:solidFill>
+                <a:effectLst/>
+                <a:uFillTx/>
+                <a:latin typeface="Helvetica Neue"/>
+                <a:ea typeface="Helvetica Neue"/>
+                <a:cs typeface="Helvetica Neue"/>
+                <a:sym typeface="Helvetica Neue"/>
+              </a:rPr>
+              <a:t>No new outliers from second level!</a:t>
+            </a:r>
+            <a:endParaRPr kumimoji="0" lang="de-DE" sz="4800" b="0" i="0" u="none" strike="noStrike" cap="none" spc="0" normalizeH="0" baseline="0" dirty="0">
+              <a:ln>
+                <a:noFill/>
+              </a:ln>
+              <a:solidFill>
+                <a:srgbClr val="000000"/>
+              </a:solidFill>
+              <a:effectLst/>
+              <a:uFillTx/>
+              <a:latin typeface="Helvetica Neue"/>
+              <a:ea typeface="Helvetica Neue"/>
+              <a:cs typeface="Helvetica Neue"/>
+              <a:sym typeface="Helvetica Neue"/>
+            </a:endParaRPr>
+          </a:p>
+        </p:txBody>
+      </p:sp>
+      <p:grpSp>
+        <p:nvGrpSpPr>
+          <p:cNvPr id="3" name="Group 2"/>
+          <p:cNvGrpSpPr/>
+          <p:nvPr/>
+        </p:nvGrpSpPr>
+        <p:grpSpPr>
+          <a:xfrm>
+            <a:off x="2852057" y="7107688"/>
+            <a:ext cx="18161367" cy="3534355"/>
+            <a:chOff x="2852057" y="7107688"/>
+            <a:chExt cx="18161367" cy="3534355"/>
+          </a:xfrm>
+        </p:grpSpPr>
+        <p:cxnSp>
+          <p:nvCxnSpPr>
+            <p:cNvPr id="67" name="Straight Arrow Connector 66"/>
+            <p:cNvCxnSpPr/>
+            <p:nvPr/>
+          </p:nvCxnSpPr>
+          <p:spPr>
+            <a:xfrm flipH="1" flipV="1">
+              <a:off x="15094949" y="8882625"/>
+              <a:ext cx="3451124" cy="1719159"/>
+            </a:xfrm>
+            <a:prstGeom prst="straightConnector1">
+              <a:avLst/>
+            </a:prstGeom>
+            <a:noFill/>
+            <a:ln w="25400" cap="flat">
+              <a:solidFill>
+                <a:srgbClr val="000000"/>
+              </a:solidFill>
+              <a:prstDash val="solid"/>
+              <a:miter lim="400000"/>
+              <a:tailEnd type="triangle"/>
+            </a:ln>
+            <a:effectLst/>
+            <a:sp3d/>
+          </p:spPr>
+          <p:style>
+            <a:lnRef idx="0">
+              <a:scrgbClr r="0" g="0" b="0"/>
+            </a:lnRef>
+            <a:fillRef idx="0">
+              <a:scrgbClr r="0" g="0" b="0"/>
+            </a:fillRef>
+            <a:effectRef idx="0">
+              <a:scrgbClr r="0" g="0" b="0"/>
+            </a:effectRef>
+            <a:fontRef idx="none"/>
+          </p:style>
+        </p:cxnSp>
+        <p:sp>
+          <p:nvSpPr>
+            <p:cNvPr id="8" name="Oval 7"/>
+            <p:cNvSpPr/>
+            <p:nvPr/>
+          </p:nvSpPr>
+          <p:spPr>
+            <a:xfrm>
+              <a:off x="16289024" y="7107688"/>
+              <a:ext cx="4724400" cy="1915886"/>
+            </a:xfrm>
+            <a:prstGeom prst="ellipse">
+              <a:avLst/>
+            </a:prstGeom>
+            <a:ln/>
+          </p:spPr>
+          <p:style>
+            <a:lnRef idx="2">
+              <a:schemeClr val="accent1"/>
+            </a:lnRef>
+            <a:fillRef idx="1">
+              <a:schemeClr val="lt1"/>
+            </a:fillRef>
+            <a:effectRef idx="0">
+              <a:schemeClr val="accent1"/>
+            </a:effectRef>
+            <a:fontRef idx="minor">
+              <a:schemeClr val="dk1"/>
+            </a:fontRef>
+          </p:style>
+          <p:txBody>
+            <a:bodyPr rot="0" spcFirstLastPara="1" vertOverflow="overflow" horzOverflow="overflow" vert="horz" wrap="square" lIns="0" tIns="0" rIns="0" bIns="0" numCol="1" spcCol="38100" rtlCol="0" anchor="ctr">
+              <a:spAutoFit/>
+            </a:bodyPr>
+            <a:lstStyle/>
+            <a:p>
+              <a:pPr marL="0" marR="0" indent="0" algn="ctr" defTabSz="825500" rtl="0" fontAlgn="auto" latinLnBrk="0" hangingPunct="0">
+                <a:lnSpc>
+                  <a:spcPct val="100000"/>
+                </a:lnSpc>
+                <a:spcBef>
+                  <a:spcPts val="0"/>
+                </a:spcBef>
+                <a:spcAft>
+                  <a:spcPts val="0"/>
+                </a:spcAft>
+                <a:buClrTx/>
+                <a:buSzTx/>
+                <a:buFontTx/>
+                <a:buNone/>
+                <a:tabLst/>
+              </a:pPr>
+              <a:endParaRPr kumimoji="0" lang="de-DE" sz="3200" b="0" i="0" u="none" strike="noStrike" cap="none" spc="0" normalizeH="0" baseline="0">
+                <a:ln>
+                  <a:noFill/>
+                </a:ln>
+                <a:solidFill>
+                  <a:srgbClr val="FFFFFF"/>
+                </a:solidFill>
+                <a:effectLst/>
+                <a:uFillTx/>
+                <a:latin typeface="+mn-lt"/>
+                <a:ea typeface="+mn-ea"/>
+                <a:cs typeface="+mn-cs"/>
+                <a:sym typeface="Helvetica Neue Medium"/>
+              </a:endParaRPr>
+            </a:p>
+          </p:txBody>
+        </p:sp>
+        <p:sp>
+          <p:nvSpPr>
+            <p:cNvPr id="89" name="Oval 88"/>
+            <p:cNvSpPr/>
+            <p:nvPr/>
+          </p:nvSpPr>
+          <p:spPr>
+            <a:xfrm>
+              <a:off x="11209645" y="7368716"/>
+              <a:ext cx="4724400" cy="1915886"/>
+            </a:xfrm>
+            <a:prstGeom prst="ellipse">
+              <a:avLst/>
+            </a:prstGeom>
+            <a:ln/>
+          </p:spPr>
+          <p:style>
+            <a:lnRef idx="2">
+              <a:schemeClr val="accent1"/>
+            </a:lnRef>
+            <a:fillRef idx="1">
+              <a:schemeClr val="lt1"/>
+            </a:fillRef>
+            <a:effectRef idx="0">
+              <a:schemeClr val="accent1"/>
+            </a:effectRef>
+            <a:fontRef idx="minor">
+              <a:schemeClr val="dk1"/>
+            </a:fontRef>
+          </p:style>
+          <p:txBody>
+            <a:bodyPr rot="0" spcFirstLastPara="1" vertOverflow="overflow" horzOverflow="overflow" vert="horz" wrap="square" lIns="0" tIns="0" rIns="0" bIns="0" numCol="1" spcCol="38100" rtlCol="0" anchor="ctr">
+              <a:spAutoFit/>
+            </a:bodyPr>
+            <a:lstStyle/>
+            <a:p>
+              <a:pPr marL="0" marR="0" indent="0" algn="ctr" defTabSz="825500" rtl="0" fontAlgn="auto" latinLnBrk="0" hangingPunct="0">
+                <a:lnSpc>
+                  <a:spcPct val="100000"/>
+                </a:lnSpc>
+                <a:spcBef>
+                  <a:spcPts val="0"/>
+                </a:spcBef>
+                <a:spcAft>
+                  <a:spcPts val="0"/>
+                </a:spcAft>
+                <a:buClrTx/>
+                <a:buSzTx/>
+                <a:buFontTx/>
+                <a:buNone/>
+                <a:tabLst/>
+              </a:pPr>
+              <a:endParaRPr kumimoji="0" lang="de-DE" sz="3200" b="0" i="0" u="none" strike="noStrike" cap="none" spc="0" normalizeH="0" baseline="0">
+                <a:ln>
+                  <a:noFill/>
+                </a:ln>
+                <a:solidFill>
+                  <a:srgbClr val="FFFFFF"/>
+                </a:solidFill>
+                <a:effectLst/>
+                <a:uFillTx/>
+                <a:latin typeface="+mn-lt"/>
+                <a:ea typeface="+mn-ea"/>
+                <a:cs typeface="+mn-cs"/>
+                <a:sym typeface="Helvetica Neue Medium"/>
+              </a:endParaRPr>
+            </a:p>
+          </p:txBody>
+        </p:sp>
+        <p:sp>
+          <p:nvSpPr>
+            <p:cNvPr id="42" name="&quot;No&quot; Symbol 41"/>
+            <p:cNvSpPr/>
+            <p:nvPr/>
+          </p:nvSpPr>
+          <p:spPr>
+            <a:xfrm>
+              <a:off x="18918776" y="7922859"/>
+              <a:ext cx="796128" cy="330200"/>
+            </a:xfrm>
+            <a:prstGeom prst="noSmoking">
+              <a:avLst/>
+            </a:prstGeom>
+            <a:solidFill>
+              <a:schemeClr val="accent2">
+                <a:lumMod val="75000"/>
+              </a:schemeClr>
+            </a:solidFill>
+            <a:ln w="12700" cap="flat">
+              <a:noFill/>
+              <a:miter lim="400000"/>
+            </a:ln>
+            <a:effectLst/>
+            <a:sp3d/>
+          </p:spPr>
+          <p:style>
+            <a:lnRef idx="0">
+              <a:scrgbClr r="0" g="0" b="0"/>
+            </a:lnRef>
+            <a:fillRef idx="0">
+              <a:scrgbClr r="0" g="0" b="0"/>
+            </a:fillRef>
+            <a:effectRef idx="0">
+              <a:scrgbClr r="0" g="0" b="0"/>
+            </a:effectRef>
+            <a:fontRef idx="none"/>
+          </p:style>
+          <p:txBody>
+            <a:bodyPr rot="0" spcFirstLastPara="1" vertOverflow="overflow" horzOverflow="overflow" vert="horz" wrap="square" lIns="0" tIns="0" rIns="0" bIns="0" numCol="1" spcCol="38100" rtlCol="0" anchor="ctr">
+              <a:spAutoFit/>
+            </a:bodyPr>
+            <a:lstStyle/>
+            <a:p>
+              <a:pPr marL="0" marR="0" indent="0" algn="ctr" defTabSz="825500" rtl="0" fontAlgn="auto" latinLnBrk="0" hangingPunct="0">
+                <a:lnSpc>
+                  <a:spcPct val="100000"/>
+                </a:lnSpc>
+                <a:spcBef>
+                  <a:spcPts val="0"/>
+                </a:spcBef>
+                <a:spcAft>
+                  <a:spcPts val="0"/>
+                </a:spcAft>
+                <a:buClrTx/>
+                <a:buSzTx/>
+                <a:buFontTx/>
+                <a:buNone/>
+                <a:tabLst/>
+              </a:pPr>
+              <a:endParaRPr kumimoji="0" lang="de-DE" sz="3200" b="0" i="0" u="none" strike="noStrike" cap="none" spc="0" normalizeH="0" baseline="0">
+                <a:ln>
+                  <a:noFill/>
+                </a:ln>
+                <a:solidFill>
+                  <a:srgbClr val="FFFFFF"/>
+                </a:solidFill>
+                <a:effectLst/>
+                <a:uFillTx/>
+                <a:latin typeface="+mn-lt"/>
+                <a:ea typeface="+mn-ea"/>
+                <a:cs typeface="+mn-cs"/>
+                <a:sym typeface="Helvetica Neue Medium"/>
+              </a:endParaRPr>
+            </a:p>
+          </p:txBody>
+        </p:sp>
+        <p:cxnSp>
+          <p:nvCxnSpPr>
+            <p:cNvPr id="54" name="Straight Arrow Connector 53"/>
+            <p:cNvCxnSpPr/>
+            <p:nvPr/>
+          </p:nvCxnSpPr>
+          <p:spPr>
+            <a:xfrm flipV="1">
+              <a:off x="10755066" y="8739184"/>
+              <a:ext cx="5801083" cy="1818142"/>
+            </a:xfrm>
+            <a:prstGeom prst="straightConnector1">
+              <a:avLst/>
+            </a:prstGeom>
+            <a:noFill/>
+            <a:ln w="25400" cap="flat">
+              <a:solidFill>
+                <a:srgbClr val="000000"/>
+              </a:solidFill>
+              <a:prstDash val="solid"/>
+              <a:miter lim="400000"/>
+              <a:tailEnd type="triangle"/>
+            </a:ln>
+            <a:effectLst/>
+            <a:sp3d/>
+          </p:spPr>
+          <p:style>
+            <a:lnRef idx="0">
+              <a:scrgbClr r="0" g="0" b="0"/>
+            </a:lnRef>
+            <a:fillRef idx="0">
+              <a:scrgbClr r="0" g="0" b="0"/>
+            </a:fillRef>
+            <a:effectRef idx="0">
+              <a:scrgbClr r="0" g="0" b="0"/>
+            </a:effectRef>
+            <a:fontRef idx="none"/>
+          </p:style>
+        </p:cxnSp>
+        <p:cxnSp>
+          <p:nvCxnSpPr>
+            <p:cNvPr id="55" name="Straight Arrow Connector 54"/>
+            <p:cNvCxnSpPr/>
+            <p:nvPr/>
+          </p:nvCxnSpPr>
+          <p:spPr>
+            <a:xfrm flipV="1">
+              <a:off x="13599768" y="9014868"/>
+              <a:ext cx="3699534" cy="1204098"/>
+            </a:xfrm>
+            <a:prstGeom prst="straightConnector1">
+              <a:avLst/>
+            </a:prstGeom>
+            <a:noFill/>
+            <a:ln w="25400" cap="flat">
+              <a:solidFill>
+                <a:srgbClr val="000000"/>
+              </a:solidFill>
+              <a:prstDash val="solid"/>
+              <a:miter lim="400000"/>
+              <a:tailEnd type="triangle"/>
+            </a:ln>
+            <a:effectLst/>
+            <a:sp3d/>
+          </p:spPr>
+          <p:style>
+            <a:lnRef idx="0">
+              <a:scrgbClr r="0" g="0" b="0"/>
+            </a:lnRef>
+            <a:fillRef idx="0">
+              <a:scrgbClr r="0" g="0" b="0"/>
+            </a:fillRef>
+            <a:effectRef idx="0">
+              <a:scrgbClr r="0" g="0" b="0"/>
+            </a:effectRef>
+            <a:fontRef idx="none"/>
+          </p:style>
+        </p:cxnSp>
+        <p:cxnSp>
+          <p:nvCxnSpPr>
+            <p:cNvPr id="61" name="Straight Arrow Connector 60"/>
+            <p:cNvCxnSpPr/>
+            <p:nvPr/>
+          </p:nvCxnSpPr>
+          <p:spPr>
+            <a:xfrm flipV="1">
+              <a:off x="15648950" y="9256482"/>
+              <a:ext cx="2794102" cy="1266376"/>
+            </a:xfrm>
+            <a:prstGeom prst="straightConnector1">
+              <a:avLst/>
+            </a:prstGeom>
+            <a:noFill/>
+            <a:ln w="25400" cap="flat">
+              <a:solidFill>
+                <a:srgbClr val="000000"/>
+              </a:solidFill>
+              <a:prstDash val="solid"/>
+              <a:miter lim="400000"/>
+              <a:tailEnd type="triangle"/>
+            </a:ln>
+            <a:effectLst/>
+            <a:sp3d/>
+          </p:spPr>
+          <p:style>
+            <a:lnRef idx="0">
+              <a:scrgbClr r="0" g="0" b="0"/>
+            </a:lnRef>
+            <a:fillRef idx="0">
+              <a:scrgbClr r="0" g="0" b="0"/>
+            </a:fillRef>
+            <a:effectRef idx="0">
+              <a:scrgbClr r="0" g="0" b="0"/>
+            </a:effectRef>
+            <a:fontRef idx="none"/>
+          </p:style>
+        </p:cxnSp>
+        <p:cxnSp>
+          <p:nvCxnSpPr>
+            <p:cNvPr id="70" name="Straight Arrow Connector 69"/>
+            <p:cNvCxnSpPr/>
+            <p:nvPr/>
+          </p:nvCxnSpPr>
+          <p:spPr>
+            <a:xfrm flipV="1">
+              <a:off x="5352153" y="9047782"/>
+              <a:ext cx="6662703" cy="1270520"/>
+            </a:xfrm>
+            <a:prstGeom prst="straightConnector1">
+              <a:avLst/>
+            </a:prstGeom>
+            <a:noFill/>
+            <a:ln w="25400" cap="flat">
+              <a:solidFill>
+                <a:srgbClr val="000000"/>
+              </a:solidFill>
+              <a:prstDash val="solid"/>
+              <a:miter lim="400000"/>
+              <a:tailEnd type="triangle"/>
+            </a:ln>
+            <a:effectLst/>
+            <a:sp3d/>
+          </p:spPr>
+          <p:style>
+            <a:lnRef idx="0">
+              <a:scrgbClr r="0" g="0" b="0"/>
+            </a:lnRef>
+            <a:fillRef idx="0">
+              <a:scrgbClr r="0" g="0" b="0"/>
+            </a:fillRef>
+            <a:effectRef idx="0">
+              <a:scrgbClr r="0" g="0" b="0"/>
+            </a:effectRef>
+            <a:fontRef idx="none"/>
+          </p:style>
+        </p:cxnSp>
+        <p:sp>
+          <p:nvSpPr>
+            <p:cNvPr id="72" name="Oval 71"/>
+            <p:cNvSpPr/>
+            <p:nvPr/>
+          </p:nvSpPr>
+          <p:spPr>
+            <a:xfrm>
+              <a:off x="6030666" y="7279597"/>
+              <a:ext cx="4724400" cy="1915886"/>
+            </a:xfrm>
+            <a:prstGeom prst="ellipse">
+              <a:avLst/>
+            </a:prstGeom>
+            <a:ln/>
+          </p:spPr>
+          <p:style>
+            <a:lnRef idx="2">
+              <a:schemeClr val="accent1"/>
+            </a:lnRef>
+            <a:fillRef idx="1">
+              <a:schemeClr val="lt1"/>
+            </a:fillRef>
+            <a:effectRef idx="0">
+              <a:schemeClr val="accent1"/>
+            </a:effectRef>
+            <a:fontRef idx="minor">
+              <a:schemeClr val="dk1"/>
+            </a:fontRef>
+          </p:style>
+          <p:txBody>
+            <a:bodyPr rot="0" spcFirstLastPara="1" vertOverflow="overflow" horzOverflow="overflow" vert="horz" wrap="square" lIns="0" tIns="0" rIns="0" bIns="0" numCol="1" spcCol="38100" rtlCol="0" anchor="ctr">
+              <a:spAutoFit/>
+            </a:bodyPr>
+            <a:lstStyle/>
+            <a:p>
+              <a:pPr marL="0" marR="0" indent="0" algn="ctr" defTabSz="825500" rtl="0" fontAlgn="auto" latinLnBrk="0" hangingPunct="0">
+                <a:lnSpc>
+                  <a:spcPct val="100000"/>
+                </a:lnSpc>
+                <a:spcBef>
+                  <a:spcPts val="0"/>
+                </a:spcBef>
+                <a:spcAft>
+                  <a:spcPts val="0"/>
+                </a:spcAft>
+                <a:buClrTx/>
+                <a:buSzTx/>
+                <a:buFontTx/>
+                <a:buNone/>
+                <a:tabLst/>
+              </a:pPr>
+              <a:endParaRPr kumimoji="0" lang="de-DE" sz="3200" b="0" i="0" u="none" strike="noStrike" cap="none" spc="0" normalizeH="0" baseline="0">
+                <a:ln>
+                  <a:noFill/>
+                </a:ln>
+                <a:solidFill>
+                  <a:srgbClr val="FFFFFF"/>
+                </a:solidFill>
+                <a:effectLst/>
+                <a:uFillTx/>
+                <a:latin typeface="+mn-lt"/>
+                <a:ea typeface="+mn-ea"/>
+                <a:cs typeface="+mn-cs"/>
+                <a:sym typeface="Helvetica Neue Medium"/>
+              </a:endParaRPr>
+            </a:p>
+          </p:txBody>
+        </p:sp>
+        <p:cxnSp>
+          <p:nvCxnSpPr>
+            <p:cNvPr id="75" name="Straight Arrow Connector 74"/>
+            <p:cNvCxnSpPr/>
+            <p:nvPr/>
+          </p:nvCxnSpPr>
+          <p:spPr>
+            <a:xfrm flipV="1">
+              <a:off x="2852057" y="9304195"/>
+              <a:ext cx="4447266" cy="1033958"/>
+            </a:xfrm>
+            <a:prstGeom prst="straightConnector1">
+              <a:avLst/>
+            </a:prstGeom>
+            <a:noFill/>
+            <a:ln w="25400" cap="flat">
+              <a:solidFill>
+                <a:srgbClr val="000000"/>
+              </a:solidFill>
+              <a:prstDash val="solid"/>
+              <a:miter lim="400000"/>
+              <a:tailEnd type="triangle"/>
+            </a:ln>
+            <a:effectLst/>
+            <a:sp3d/>
+          </p:spPr>
+          <p:style>
+            <a:lnRef idx="0">
+              <a:scrgbClr r="0" g="0" b="0"/>
+            </a:lnRef>
+            <a:fillRef idx="0">
+              <a:scrgbClr r="0" g="0" b="0"/>
+            </a:fillRef>
+            <a:effectRef idx="0">
+              <a:scrgbClr r="0" g="0" b="0"/>
+            </a:effectRef>
+            <a:fontRef idx="none"/>
+          </p:style>
+        </p:cxnSp>
+        <p:sp>
+          <p:nvSpPr>
+            <p:cNvPr id="78" name="Lightning Bolt 77"/>
+            <p:cNvSpPr/>
+            <p:nvPr/>
+          </p:nvSpPr>
+          <p:spPr>
+            <a:xfrm>
+              <a:off x="4015610" y="7994426"/>
+              <a:ext cx="532528" cy="486227"/>
+            </a:xfrm>
+            <a:prstGeom prst="lightningBolt">
+              <a:avLst/>
+            </a:prstGeom>
+            <a:solidFill>
+              <a:schemeClr val="accent5">
+                <a:lumMod val="75000"/>
+              </a:schemeClr>
+            </a:solidFill>
+            <a:ln w="12700" cap="flat">
+              <a:noFill/>
+              <a:miter lim="400000"/>
+            </a:ln>
+            <a:effectLst/>
+            <a:sp3d/>
+          </p:spPr>
+          <p:style>
+            <a:lnRef idx="0">
+              <a:scrgbClr r="0" g="0" b="0"/>
+            </a:lnRef>
+            <a:fillRef idx="0">
+              <a:scrgbClr r="0" g="0" b="0"/>
+            </a:fillRef>
+            <a:effectRef idx="0">
+              <a:scrgbClr r="0" g="0" b="0"/>
+            </a:effectRef>
+            <a:fontRef idx="none"/>
+          </p:style>
+          <p:txBody>
+            <a:bodyPr rot="0" spcFirstLastPara="1" vertOverflow="overflow" horzOverflow="overflow" vert="horz" wrap="square" lIns="0" tIns="0" rIns="0" bIns="0" numCol="1" spcCol="38100" rtlCol="0" anchor="ctr">
+              <a:spAutoFit/>
+            </a:bodyPr>
+            <a:lstStyle/>
+            <a:p>
+              <a:pPr marL="0" marR="0" indent="0" algn="ctr" defTabSz="825500" rtl="0" fontAlgn="auto" latinLnBrk="0" hangingPunct="0">
+                <a:lnSpc>
+                  <a:spcPct val="100000"/>
+                </a:lnSpc>
+                <a:spcBef>
+                  <a:spcPts val="0"/>
+                </a:spcBef>
+                <a:spcAft>
+                  <a:spcPts val="0"/>
+                </a:spcAft>
+                <a:buClrTx/>
+                <a:buSzTx/>
+                <a:buFontTx/>
+                <a:buNone/>
+                <a:tabLst/>
+              </a:pPr>
+              <a:endParaRPr kumimoji="0" lang="de-DE" sz="3200" b="0" i="0" u="none" strike="noStrike" cap="none" spc="0" normalizeH="0" baseline="0">
+                <a:ln>
+                  <a:noFill/>
+                </a:ln>
+                <a:solidFill>
+                  <a:srgbClr val="FFFFFF"/>
+                </a:solidFill>
+                <a:effectLst/>
+                <a:uFillTx/>
+                <a:latin typeface="+mn-lt"/>
+                <a:ea typeface="+mn-ea"/>
+                <a:cs typeface="+mn-cs"/>
+                <a:sym typeface="Helvetica Neue Medium"/>
+              </a:endParaRPr>
+            </a:p>
+          </p:txBody>
+        </p:sp>
+        <p:sp>
+          <p:nvSpPr>
+            <p:cNvPr id="79" name="5-Point Star 78"/>
+            <p:cNvSpPr/>
+            <p:nvPr/>
+          </p:nvSpPr>
+          <p:spPr>
+            <a:xfrm>
+              <a:off x="7299323" y="7836300"/>
+              <a:ext cx="522514" cy="437238"/>
+            </a:xfrm>
+            <a:prstGeom prst="star5">
+              <a:avLst/>
+            </a:prstGeom>
+            <a:solidFill>
+              <a:schemeClr val="accent3">
+                <a:lumMod val="75000"/>
+              </a:schemeClr>
+            </a:solidFill>
+            <a:ln w="12700" cap="flat">
+              <a:noFill/>
+              <a:miter lim="400000"/>
+            </a:ln>
+            <a:effectLst/>
+            <a:sp3d/>
+          </p:spPr>
+          <p:style>
+            <a:lnRef idx="0">
+              <a:scrgbClr r="0" g="0" b="0"/>
+            </a:lnRef>
+            <a:fillRef idx="0">
+              <a:scrgbClr r="0" g="0" b="0"/>
+            </a:fillRef>
+            <a:effectRef idx="0">
+              <a:scrgbClr r="0" g="0" b="0"/>
+            </a:effectRef>
+            <a:fontRef idx="none"/>
+          </p:style>
+          <p:txBody>
+            <a:bodyPr rot="0" spcFirstLastPara="1" vertOverflow="overflow" horzOverflow="overflow" vert="horz" wrap="square" lIns="0" tIns="0" rIns="0" bIns="0" numCol="1" spcCol="38100" rtlCol="0" anchor="ctr">
+              <a:spAutoFit/>
+            </a:bodyPr>
+            <a:lstStyle/>
+            <a:p>
+              <a:pPr marL="0" marR="0" indent="0" algn="ctr" defTabSz="825500" rtl="0" fontAlgn="auto" latinLnBrk="0" hangingPunct="0">
+                <a:lnSpc>
+                  <a:spcPct val="100000"/>
+                </a:lnSpc>
+                <a:spcBef>
+                  <a:spcPts val="0"/>
+                </a:spcBef>
+                <a:spcAft>
+                  <a:spcPts val="0"/>
+                </a:spcAft>
+                <a:buClrTx/>
+                <a:buSzTx/>
+                <a:buFontTx/>
+                <a:buNone/>
+                <a:tabLst/>
+              </a:pPr>
+              <a:endParaRPr kumimoji="0" lang="de-DE" sz="3200" b="0" i="0" u="none" strike="noStrike" cap="none" spc="0" normalizeH="0" baseline="0">
+                <a:ln>
+                  <a:noFill/>
+                </a:ln>
+                <a:solidFill>
+                  <a:srgbClr val="FFFFFF"/>
+                </a:solidFill>
+                <a:effectLst/>
+                <a:uFillTx/>
+                <a:latin typeface="+mn-lt"/>
+                <a:ea typeface="+mn-ea"/>
+                <a:cs typeface="+mn-cs"/>
+                <a:sym typeface="Helvetica Neue Medium"/>
+              </a:endParaRPr>
+            </a:p>
+          </p:txBody>
+        </p:sp>
+        <p:sp>
+          <p:nvSpPr>
+            <p:cNvPr id="80" name="Quad Arrow Callout 79"/>
+            <p:cNvSpPr/>
+            <p:nvPr/>
+          </p:nvSpPr>
+          <p:spPr>
+            <a:xfrm>
+              <a:off x="8557753" y="7856390"/>
+              <a:ext cx="561521" cy="636374"/>
+            </a:xfrm>
+            <a:prstGeom prst="quadArrowCallout">
+              <a:avLst/>
+            </a:prstGeom>
+            <a:solidFill>
+              <a:schemeClr val="tx1"/>
+            </a:solidFill>
+            <a:ln w="12700" cap="flat">
+              <a:noFill/>
+              <a:miter lim="400000"/>
+            </a:ln>
+            <a:effectLst/>
+            <a:sp3d/>
+          </p:spPr>
+          <p:style>
+            <a:lnRef idx="0">
+              <a:scrgbClr r="0" g="0" b="0"/>
+            </a:lnRef>
+            <a:fillRef idx="0">
+              <a:scrgbClr r="0" g="0" b="0"/>
+            </a:fillRef>
+            <a:effectRef idx="0">
+              <a:scrgbClr r="0" g="0" b="0"/>
+            </a:effectRef>
+            <a:fontRef idx="none"/>
+          </p:style>
+          <p:txBody>
+            <a:bodyPr rot="0" spcFirstLastPara="1" vertOverflow="overflow" horzOverflow="overflow" vert="horz" wrap="square" lIns="0" tIns="0" rIns="0" bIns="0" numCol="1" spcCol="38100" rtlCol="0" anchor="ctr">
+              <a:spAutoFit/>
+            </a:bodyPr>
+            <a:lstStyle/>
+            <a:p>
+              <a:pPr marL="0" marR="0" indent="0" algn="ctr" defTabSz="825500" rtl="0" fontAlgn="auto" latinLnBrk="0" hangingPunct="0">
+                <a:lnSpc>
+                  <a:spcPct val="100000"/>
+                </a:lnSpc>
+                <a:spcBef>
+                  <a:spcPts val="0"/>
+                </a:spcBef>
+                <a:spcAft>
+                  <a:spcPts val="0"/>
+                </a:spcAft>
+                <a:buClrTx/>
+                <a:buSzTx/>
+                <a:buFontTx/>
+                <a:buNone/>
+                <a:tabLst/>
+              </a:pPr>
+              <a:endParaRPr kumimoji="0" lang="de-DE" sz="3200" b="0" i="0" u="none" strike="noStrike" cap="none" spc="0" normalizeH="0" baseline="0">
+                <a:ln>
+                  <a:noFill/>
+                </a:ln>
+                <a:solidFill>
+                  <a:srgbClr val="FFFFFF"/>
+                </a:solidFill>
+                <a:effectLst/>
+                <a:uFillTx/>
+                <a:latin typeface="+mn-lt"/>
+                <a:ea typeface="+mn-ea"/>
+                <a:cs typeface="+mn-cs"/>
+                <a:sym typeface="Helvetica Neue Medium"/>
+              </a:endParaRPr>
+            </a:p>
+          </p:txBody>
+        </p:sp>
+        <p:sp>
+          <p:nvSpPr>
+            <p:cNvPr id="81" name="Cloud 80"/>
+            <p:cNvSpPr/>
+            <p:nvPr/>
+          </p:nvSpPr>
+          <p:spPr>
+            <a:xfrm>
+              <a:off x="17176341" y="7736799"/>
+              <a:ext cx="708239" cy="494391"/>
+            </a:xfrm>
+            <a:prstGeom prst="cloud">
+              <a:avLst/>
+            </a:prstGeom>
+            <a:solidFill>
+              <a:schemeClr val="tx1"/>
+            </a:solidFill>
+            <a:ln w="12700" cap="flat">
+              <a:noFill/>
+              <a:miter lim="400000"/>
+            </a:ln>
+            <a:effectLst/>
+            <a:sp3d/>
+          </p:spPr>
+          <p:style>
+            <a:lnRef idx="0">
+              <a:scrgbClr r="0" g="0" b="0"/>
+            </a:lnRef>
+            <a:fillRef idx="0">
+              <a:scrgbClr r="0" g="0" b="0"/>
+            </a:fillRef>
+            <a:effectRef idx="0">
+              <a:scrgbClr r="0" g="0" b="0"/>
+            </a:effectRef>
+            <a:fontRef idx="none"/>
+          </p:style>
+          <p:txBody>
+            <a:bodyPr rot="0" spcFirstLastPara="1" vertOverflow="overflow" horzOverflow="overflow" vert="horz" wrap="square" lIns="0" tIns="0" rIns="0" bIns="0" numCol="1" spcCol="38100" rtlCol="0" anchor="ctr">
+              <a:spAutoFit/>
+            </a:bodyPr>
+            <a:lstStyle/>
+            <a:p>
+              <a:pPr marL="0" marR="0" indent="0" algn="ctr" defTabSz="825500" rtl="0" fontAlgn="auto" latinLnBrk="0" hangingPunct="0">
+                <a:lnSpc>
+                  <a:spcPct val="100000"/>
+                </a:lnSpc>
+                <a:spcBef>
+                  <a:spcPts val="0"/>
+                </a:spcBef>
+                <a:spcAft>
+                  <a:spcPts val="0"/>
+                </a:spcAft>
+                <a:buClrTx/>
+                <a:buSzTx/>
+                <a:buFontTx/>
+                <a:buNone/>
+                <a:tabLst/>
+              </a:pPr>
+              <a:endParaRPr kumimoji="0" lang="de-DE" sz="3200" b="0" i="0" u="none" strike="noStrike" cap="none" spc="0" normalizeH="0" baseline="0">
+                <a:ln>
+                  <a:noFill/>
+                </a:ln>
+                <a:solidFill>
+                  <a:srgbClr val="FFFFFF"/>
+                </a:solidFill>
+                <a:effectLst/>
+                <a:uFillTx/>
+                <a:latin typeface="+mn-lt"/>
+                <a:ea typeface="+mn-ea"/>
+                <a:cs typeface="+mn-cs"/>
+                <a:sym typeface="Helvetica Neue Medium"/>
+              </a:endParaRPr>
+            </a:p>
+          </p:txBody>
+        </p:sp>
+        <p:sp>
+          <p:nvSpPr>
+            <p:cNvPr id="82" name="Sun 81"/>
+            <p:cNvSpPr/>
+            <p:nvPr/>
+          </p:nvSpPr>
+          <p:spPr>
+            <a:xfrm>
+              <a:off x="18145540" y="7443342"/>
+              <a:ext cx="833603" cy="486227"/>
+            </a:xfrm>
+            <a:prstGeom prst="sun">
+              <a:avLst/>
+            </a:prstGeom>
+            <a:solidFill>
+              <a:schemeClr val="tx1"/>
+            </a:solidFill>
+            <a:ln w="12700" cap="flat">
+              <a:noFill/>
+              <a:miter lim="400000"/>
+            </a:ln>
+            <a:effectLst/>
+            <a:sp3d/>
+          </p:spPr>
+          <p:style>
+            <a:lnRef idx="0">
+              <a:scrgbClr r="0" g="0" b="0"/>
+            </a:lnRef>
+            <a:fillRef idx="0">
+              <a:scrgbClr r="0" g="0" b="0"/>
+            </a:fillRef>
+            <a:effectRef idx="0">
+              <a:scrgbClr r="0" g="0" b="0"/>
+            </a:effectRef>
+            <a:fontRef idx="none"/>
+          </p:style>
+          <p:txBody>
+            <a:bodyPr rot="0" spcFirstLastPara="1" vertOverflow="overflow" horzOverflow="overflow" vert="horz" wrap="square" lIns="0" tIns="0" rIns="0" bIns="0" numCol="1" spcCol="38100" rtlCol="0" anchor="ctr">
+              <a:spAutoFit/>
+            </a:bodyPr>
+            <a:lstStyle/>
+            <a:p>
+              <a:pPr marL="0" marR="0" indent="0" algn="ctr" defTabSz="825500" rtl="0" fontAlgn="auto" latinLnBrk="0" hangingPunct="0">
+                <a:lnSpc>
+                  <a:spcPct val="100000"/>
+                </a:lnSpc>
+                <a:spcBef>
+                  <a:spcPts val="0"/>
+                </a:spcBef>
+                <a:spcAft>
+                  <a:spcPts val="0"/>
+                </a:spcAft>
+                <a:buClrTx/>
+                <a:buSzTx/>
+                <a:buFontTx/>
+                <a:buNone/>
+                <a:tabLst/>
+              </a:pPr>
+              <a:endParaRPr kumimoji="0" lang="de-DE" sz="3200" b="0" i="0" u="none" strike="noStrike" cap="none" spc="0" normalizeH="0" baseline="0">
+                <a:ln>
+                  <a:noFill/>
+                </a:ln>
+                <a:solidFill>
+                  <a:srgbClr val="FFFFFF"/>
+                </a:solidFill>
+                <a:effectLst/>
+                <a:uFillTx/>
+                <a:latin typeface="+mn-lt"/>
+                <a:ea typeface="+mn-ea"/>
+                <a:cs typeface="+mn-cs"/>
+                <a:sym typeface="Helvetica Neue Medium"/>
+              </a:endParaRPr>
+            </a:p>
+          </p:txBody>
+        </p:sp>
+        <p:sp>
+          <p:nvSpPr>
+            <p:cNvPr id="84" name="Block Arc 83"/>
+            <p:cNvSpPr/>
+            <p:nvPr/>
+          </p:nvSpPr>
+          <p:spPr>
+            <a:xfrm>
+              <a:off x="12628108" y="8109071"/>
+              <a:ext cx="379467" cy="625927"/>
+            </a:xfrm>
+            <a:prstGeom prst="blockArc">
+              <a:avLst/>
+            </a:prstGeom>
+            <a:solidFill>
+              <a:schemeClr val="accent3">
+                <a:lumMod val="75000"/>
+              </a:schemeClr>
+            </a:solidFill>
+            <a:ln w="12700" cap="flat">
+              <a:noFill/>
+              <a:miter lim="400000"/>
+            </a:ln>
+            <a:effectLst/>
+            <a:sp3d/>
+          </p:spPr>
+          <p:style>
+            <a:lnRef idx="0">
+              <a:scrgbClr r="0" g="0" b="0"/>
+            </a:lnRef>
+            <a:fillRef idx="0">
+              <a:scrgbClr r="0" g="0" b="0"/>
+            </a:fillRef>
+            <a:effectRef idx="0">
+              <a:scrgbClr r="0" g="0" b="0"/>
+            </a:effectRef>
+            <a:fontRef idx="none"/>
+          </p:style>
+          <p:txBody>
+            <a:bodyPr rot="0" spcFirstLastPara="1" vertOverflow="overflow" horzOverflow="overflow" vert="horz" wrap="square" lIns="0" tIns="0" rIns="0" bIns="0" numCol="1" spcCol="38100" rtlCol="0" anchor="ctr">
+              <a:spAutoFit/>
+            </a:bodyPr>
+            <a:lstStyle/>
+            <a:p>
+              <a:pPr marL="0" marR="0" indent="0" algn="ctr" defTabSz="825500" rtl="0" fontAlgn="auto" latinLnBrk="0" hangingPunct="0">
+                <a:lnSpc>
+                  <a:spcPct val="100000"/>
+                </a:lnSpc>
+                <a:spcBef>
+                  <a:spcPts val="0"/>
+                </a:spcBef>
+                <a:spcAft>
+                  <a:spcPts val="0"/>
+                </a:spcAft>
+                <a:buClrTx/>
+                <a:buSzTx/>
+                <a:buFontTx/>
+                <a:buNone/>
+                <a:tabLst/>
+              </a:pPr>
+              <a:endParaRPr kumimoji="0" lang="de-DE" sz="3200" b="0" i="0" u="none" strike="noStrike" cap="none" spc="0" normalizeH="0" baseline="0">
+                <a:ln>
+                  <a:noFill/>
+                </a:ln>
+                <a:solidFill>
+                  <a:srgbClr val="FFFFFF"/>
+                </a:solidFill>
+                <a:effectLst/>
+                <a:uFillTx/>
+                <a:latin typeface="+mn-lt"/>
+                <a:ea typeface="+mn-ea"/>
+                <a:cs typeface="+mn-cs"/>
+                <a:sym typeface="Helvetica Neue Medium"/>
+              </a:endParaRPr>
+            </a:p>
+          </p:txBody>
+        </p:sp>
+        <p:sp>
+          <p:nvSpPr>
+            <p:cNvPr id="85" name="Moon 84"/>
+            <p:cNvSpPr/>
+            <p:nvPr/>
+          </p:nvSpPr>
+          <p:spPr>
+            <a:xfrm>
+              <a:off x="13419105" y="8054919"/>
+              <a:ext cx="385235" cy="437238"/>
+            </a:xfrm>
+            <a:prstGeom prst="moon">
+              <a:avLst/>
+            </a:prstGeom>
+            <a:solidFill>
+              <a:schemeClr val="tx1"/>
+            </a:solidFill>
+            <a:ln w="12700" cap="flat">
+              <a:noFill/>
+              <a:miter lim="400000"/>
+            </a:ln>
+            <a:effectLst/>
+            <a:sp3d/>
+          </p:spPr>
+          <p:style>
+            <a:lnRef idx="0">
+              <a:scrgbClr r="0" g="0" b="0"/>
+            </a:lnRef>
+            <a:fillRef idx="0">
+              <a:scrgbClr r="0" g="0" b="0"/>
+            </a:fillRef>
+            <a:effectRef idx="0">
+              <a:scrgbClr r="0" g="0" b="0"/>
+            </a:effectRef>
+            <a:fontRef idx="none"/>
+          </p:style>
+          <p:txBody>
+            <a:bodyPr rot="0" spcFirstLastPara="1" vertOverflow="overflow" horzOverflow="overflow" vert="horz" wrap="square" lIns="0" tIns="0" rIns="0" bIns="0" numCol="1" spcCol="38100" rtlCol="0" anchor="ctr">
+              <a:spAutoFit/>
+            </a:bodyPr>
+            <a:lstStyle/>
+            <a:p>
+              <a:pPr marL="0" marR="0" indent="0" algn="ctr" defTabSz="825500" rtl="0" fontAlgn="auto" latinLnBrk="0" hangingPunct="0">
+                <a:lnSpc>
+                  <a:spcPct val="100000"/>
+                </a:lnSpc>
+                <a:spcBef>
+                  <a:spcPts val="0"/>
+                </a:spcBef>
+                <a:spcAft>
+                  <a:spcPts val="0"/>
+                </a:spcAft>
+                <a:buClrTx/>
+                <a:buSzTx/>
+                <a:buFontTx/>
+                <a:buNone/>
+                <a:tabLst/>
+              </a:pPr>
+              <a:endParaRPr kumimoji="0" lang="de-DE" sz="3200" b="0" i="0" u="none" strike="noStrike" cap="none" spc="0" normalizeH="0" baseline="0">
+                <a:ln>
+                  <a:noFill/>
+                </a:ln>
+                <a:solidFill>
+                  <a:srgbClr val="FFFFFF"/>
+                </a:solidFill>
+                <a:effectLst/>
+                <a:uFillTx/>
+                <a:latin typeface="+mn-lt"/>
+                <a:ea typeface="+mn-ea"/>
+                <a:cs typeface="+mn-cs"/>
+                <a:sym typeface="Helvetica Neue Medium"/>
+              </a:endParaRPr>
+            </a:p>
+          </p:txBody>
+        </p:sp>
+        <p:cxnSp>
+          <p:nvCxnSpPr>
+            <p:cNvPr id="73" name="Straight Arrow Connector 72"/>
+            <p:cNvCxnSpPr/>
+            <p:nvPr/>
+          </p:nvCxnSpPr>
+          <p:spPr>
+            <a:xfrm flipH="1" flipV="1">
+              <a:off x="10588391" y="8858189"/>
+              <a:ext cx="10419819" cy="1783854"/>
+            </a:xfrm>
+            <a:prstGeom prst="straightConnector1">
+              <a:avLst/>
+            </a:prstGeom>
+            <a:noFill/>
+            <a:ln w="25400" cap="flat">
+              <a:solidFill>
+                <a:srgbClr val="000000"/>
+              </a:solidFill>
+              <a:prstDash val="solid"/>
+              <a:miter lim="400000"/>
+              <a:tailEnd type="triangle"/>
+            </a:ln>
+            <a:effectLst/>
+            <a:sp3d/>
+          </p:spPr>
+          <p:style>
+            <a:lnRef idx="0">
+              <a:scrgbClr r="0" g="0" b="0"/>
+            </a:lnRef>
+            <a:fillRef idx="0">
+              <a:scrgbClr r="0" g="0" b="0"/>
+            </a:fillRef>
+            <a:effectRef idx="0">
+              <a:scrgbClr r="0" g="0" b="0"/>
+            </a:effectRef>
+            <a:fontRef idx="none"/>
+          </p:style>
+        </p:cxnSp>
+      </p:grpSp>
+    </p:spTree>
+    <p:extLst>
+      <p:ext uri="{BB962C8B-B14F-4D97-AF65-F5344CB8AC3E}">
+        <p14:creationId xmlns:p14="http://schemas.microsoft.com/office/powerpoint/2010/main" val="761408484"/>
+      </p:ext>
+    </p:extLst>
+  </p:cSld>
+  <p:clrMapOvr>
+    <a:masterClrMapping/>
+  </p:clrMapOvr>
+  <p:transition spd="med"/>
+  <p:timing>
+    <p:tnLst>
+      <p:par>
+        <p:cTn id="1" dur="indefinite" restart="never" nodeType="tmRoot">
+          <p:childTnLst>
+            <p:seq concurrent="1" nextAc="seek">
+              <p:cTn id="2" dur="indefinite" nodeType="mainSeq">
+                <p:childTnLst>
+                  <p:par>
+                    <p:cTn id="3" fill="hold">
+                      <p:stCondLst>
+                        <p:cond delay="indefinite"/>
+                      </p:stCondLst>
+                      <p:childTnLst>
+                        <p:par>
+                          <p:cTn id="4" fill="hold">
+                            <p:stCondLst>
+                              <p:cond delay="0"/>
+                            </p:stCondLst>
+                            <p:childTnLst>
+                              <p:par>
+                                <p:cTn id="5" presetID="1" presetClass="entr" presetSubtype="0" fill="hold" nodeType="clickEffect">
+                                  <p:stCondLst>
+                                    <p:cond delay="0"/>
+                                  </p:stCondLst>
+                                  <p:childTnLst>
+                                    <p:set>
+                                      <p:cBhvr>
+                                        <p:cTn id="6" dur="1" fill="hold">
+                                          <p:stCondLst>
+                                            <p:cond delay="0"/>
+                                          </p:stCondLst>
+                                        </p:cTn>
+                                        <p:tgtEl>
+                                          <p:spTgt spid="105"/>
+                                        </p:tgtEl>
+                                        <p:attrNameLst>
+                                          <p:attrName>style.visibility</p:attrName>
+                                        </p:attrNameLst>
+                                      </p:cBhvr>
+                                      <p:to>
+                                        <p:strVal val="visible"/>
+                                      </p:to>
+                                    </p:set>
+                                  </p:childTnLst>
+                                </p:cTn>
+                              </p:par>
+                            </p:childTnLst>
+                          </p:cTn>
+                        </p:par>
+                      </p:childTnLst>
+                    </p:cTn>
+                  </p:par>
+                  <p:par>
+                    <p:cTn id="7" fill="hold">
+                      <p:stCondLst>
+                        <p:cond delay="indefinite"/>
+                      </p:stCondLst>
+                      <p:childTnLst>
+                        <p:par>
+                          <p:cTn id="8" fill="hold">
+                            <p:stCondLst>
+                              <p:cond delay="0"/>
+                            </p:stCondLst>
+                            <p:childTnLst>
+                              <p:par>
+                                <p:cTn id="9" presetID="1" presetClass="entr" presetSubtype="0" fill="hold" nodeType="clickEffect">
+                                  <p:stCondLst>
+                                    <p:cond delay="0"/>
+                                  </p:stCondLst>
+                                  <p:childTnLst>
+                                    <p:set>
+                                      <p:cBhvr>
+                                        <p:cTn id="10" dur="1" fill="hold">
+                                          <p:stCondLst>
+                                            <p:cond delay="0"/>
+                                          </p:stCondLst>
+                                        </p:cTn>
+                                        <p:tgtEl>
+                                          <p:spTgt spid="3"/>
+                                        </p:tgtEl>
+                                        <p:attrNameLst>
+                                          <p:attrName>style.visibility</p:attrName>
+                                        </p:attrNameLst>
+                                      </p:cBhvr>
+                                      <p:to>
+                                        <p:strVal val="visible"/>
+                                      </p:to>
+                                    </p:set>
+                                  </p:childTnLst>
+                                </p:cTn>
+                              </p:par>
+                            </p:childTnLst>
+                          </p:cTn>
+                        </p:par>
+                      </p:childTnLst>
+                    </p:cTn>
+                  </p:par>
+                  <p:par>
+                    <p:cTn id="11" fill="hold">
+                      <p:stCondLst>
+                        <p:cond delay="indefinite"/>
+                      </p:stCondLst>
+                      <p:childTnLst>
+                        <p:par>
+                          <p:cTn id="12" fill="hold">
+                            <p:stCondLst>
+                              <p:cond delay="0"/>
+                            </p:stCondLst>
+                            <p:childTnLst>
+                              <p:par>
+                                <p:cTn id="13" presetID="1" presetClass="entr" presetSubtype="0" fill="hold" grpId="0" nodeType="clickEffect">
+                                  <p:stCondLst>
+                                    <p:cond delay="0"/>
+                                  </p:stCondLst>
+                                  <p:childTnLst>
+                                    <p:set>
+                                      <p:cBhvr>
+                                        <p:cTn id="14" dur="1" fill="hold">
+                                          <p:stCondLst>
+                                            <p:cond delay="0"/>
+                                          </p:stCondLst>
+                                        </p:cTn>
+                                        <p:tgtEl>
+                                          <p:spTgt spid="86"/>
+                                        </p:tgtEl>
+                                        <p:attrNameLst>
+                                          <p:attrName>style.visibility</p:attrName>
+                                        </p:attrNameLst>
+                                      </p:cBhvr>
+                                      <p:to>
+                                        <p:strVal val="visible"/>
+                                      </p:to>
+                                    </p:set>
+                                  </p:childTnLst>
+                                </p:cTn>
+                              </p:par>
+                              <p:par>
+                                <p:cTn id="15" presetID="1" presetClass="entr" presetSubtype="0" fill="hold" grpId="0" nodeType="withEffect">
+                                  <p:stCondLst>
+                                    <p:cond delay="0"/>
+                                  </p:stCondLst>
+                                  <p:childTnLst>
+                                    <p:set>
+                                      <p:cBhvr>
+                                        <p:cTn id="16" dur="1" fill="hold">
+                                          <p:stCondLst>
+                                            <p:cond delay="0"/>
+                                          </p:stCondLst>
+                                        </p:cTn>
+                                        <p:tgtEl>
+                                          <p:spTgt spid="104"/>
+                                        </p:tgtEl>
+                                        <p:attrNameLst>
+                                          <p:attrName>style.visibility</p:attrName>
+                                        </p:attrNameLst>
+                                      </p:cBhvr>
+                                      <p:to>
+                                        <p:strVal val="visible"/>
+                                      </p:to>
+                                    </p:set>
+                                  </p:childTnLst>
+                                </p:cTn>
+                              </p:par>
+                            </p:childTnLst>
+                          </p:cTn>
+                        </p:par>
+                      </p:childTnLst>
+                    </p:cTn>
+                  </p:par>
+                  <p:par>
+                    <p:cTn id="17" fill="hold">
+                      <p:stCondLst>
+                        <p:cond delay="indefinite"/>
+                      </p:stCondLst>
+                      <p:childTnLst>
+                        <p:par>
+                          <p:cTn id="18" fill="hold">
+                            <p:stCondLst>
+                              <p:cond delay="0"/>
+                            </p:stCondLst>
+                            <p:childTnLst>
+                              <p:par>
+                                <p:cTn id="19" presetID="1" presetClass="entr" presetSubtype="0" fill="hold" nodeType="clickEffect">
+                                  <p:stCondLst>
+                                    <p:cond delay="0"/>
+                                  </p:stCondLst>
+                                  <p:childTnLst>
+                                    <p:set>
+                                      <p:cBhvr>
+                                        <p:cTn id="20" dur="1" fill="hold">
+                                          <p:stCondLst>
+                                            <p:cond delay="0"/>
+                                          </p:stCondLst>
+                                        </p:cTn>
+                                        <p:tgtEl>
+                                          <p:spTgt spid="5"/>
+                                        </p:tgtEl>
+                                        <p:attrNameLst>
+                                          <p:attrName>style.visibility</p:attrName>
+                                        </p:attrNameLst>
+                                      </p:cBhvr>
+                                      <p:to>
+                                        <p:strVal val="visible"/>
+                                      </p:to>
+                                    </p:set>
+                                  </p:childTnLst>
+                                </p:cTn>
+                              </p:par>
+                            </p:childTnLst>
+                          </p:cTn>
+                        </p:par>
+                      </p:childTnLst>
+                    </p:cTn>
+                  </p:par>
+                </p:childTnLst>
+              </p:cTn>
+              <p:prevCondLst>
+                <p:cond evt="onPrev" delay="0">
+                  <p:tgtEl>
+                    <p:sldTgt/>
+                  </p:tgtEl>
+                </p:cond>
+              </p:prevCondLst>
+              <p:nextCondLst>
+                <p:cond evt="onNext" delay="0">
+                  <p:tgtEl>
+                    <p:sldTgt/>
+                  </p:tgtEl>
+                </p:cond>
+              </p:nextCondLst>
+            </p:seq>
+          </p:childTnLst>
+        </p:cTn>
+      </p:par>
+    </p:tnLst>
+    <p:bldLst>
+      <p:bldP spid="86" grpId="0" animBg="1"/>
+      <p:bldP spid="104" grpId="0"/>
+    </p:bldLst>
+  </p:timing>
+</p:sld>
+</file>
+
+<file path=ppt/slides/slide21.xml><?xml version="1.0" encoding="utf-8"?>
+<p:sld xmlns:a="http://schemas.openxmlformats.org/drawingml/2006/main" xmlns:r="http://schemas.openxmlformats.org/officeDocument/2006/relationships" xmlns:p="http://schemas.openxmlformats.org/presentationml/2006/main">
+  <p:cSld>
+    <p:spTree>
+      <p:nvGrpSpPr>
+        <p:cNvPr id="1" name=""/>
+        <p:cNvGrpSpPr/>
+        <p:nvPr/>
+      </p:nvGrpSpPr>
+      <p:grpSpPr>
+        <a:xfrm>
+          <a:off x="0" y="0"/>
+          <a:ext cx="0" cy="0"/>
+          <a:chOff x="0" y="0"/>
+          <a:chExt cx="0" cy="0"/>
+        </a:xfrm>
+      </p:grpSpPr>
+      <p:sp>
+        <p:nvSpPr>
+          <p:cNvPr id="2" name="Title 1"/>
+          <p:cNvSpPr>
+            <a:spLocks noGrp="1"/>
+          </p:cNvSpPr>
+          <p:nvPr>
+            <p:ph type="title"/>
+          </p:nvPr>
+        </p:nvSpPr>
+        <p:spPr/>
+        <p:txBody>
+          <a:bodyPr/>
+          <a:lstStyle/>
+          <a:p>
+            <a:r>
+              <a:rPr lang="de-DE" dirty="0" smtClean="0"/>
+              <a:t>Experiments</a:t>
+            </a:r>
+            <a:endParaRPr lang="de-DE" dirty="0"/>
+          </a:p>
+        </p:txBody>
+      </p:sp>
+      <p:sp>
+        <p:nvSpPr>
+          <p:cNvPr id="5" name="TextBox 4"/>
+          <p:cNvSpPr txBox="1"/>
+          <p:nvPr/>
+        </p:nvSpPr>
+        <p:spPr>
+          <a:xfrm>
+            <a:off x="5913260" y="1842663"/>
+            <a:ext cx="12397052" cy="1597873"/>
+          </a:xfrm>
+          <a:prstGeom prst="rect">
+            <a:avLst/>
+          </a:prstGeom>
+          <a:noFill/>
+          <a:ln w="12700" cap="flat">
+            <a:noFill/>
+            <a:miter lim="400000"/>
+          </a:ln>
+          <a:effectLst/>
+          <a:sp3d/>
+        </p:spPr>
+        <p:style>
+          <a:lnRef idx="0">
+            <a:scrgbClr r="0" g="0" b="0"/>
+          </a:lnRef>
+          <a:fillRef idx="0">
+            <a:scrgbClr r="0" g="0" b="0"/>
+          </a:fillRef>
+          <a:effectRef idx="0">
+            <a:scrgbClr r="0" g="0" b="0"/>
+          </a:effectRef>
+          <a:fontRef idx="none"/>
+        </p:style>
+        <p:txBody>
+          <a:bodyPr rot="0" spcFirstLastPara="1" vertOverflow="overflow" horzOverflow="overflow" vert="horz" wrap="square" lIns="50800" tIns="50800" rIns="50800" bIns="50800" numCol="1" spcCol="38100" rtlCol="0" anchor="ctr">
+            <a:spAutoFit/>
+          </a:bodyPr>
+          <a:lstStyle/>
+          <a:p>
+            <a:pPr marL="0" marR="0" indent="0" algn="ctr" defTabSz="825500" rtl="0" fontAlgn="auto" latinLnBrk="0" hangingPunct="0">
+              <a:lnSpc>
+                <a:spcPct val="100000"/>
+              </a:lnSpc>
+              <a:spcBef>
+                <a:spcPts val="5900"/>
+              </a:spcBef>
+              <a:spcAft>
+                <a:spcPts val="0"/>
+              </a:spcAft>
+              <a:buClrTx/>
+              <a:buSzTx/>
+              <a:buFontTx/>
+              <a:buNone/>
+              <a:tabLst/>
+            </a:pPr>
+            <a:r>
+              <a:rPr kumimoji="0" lang="de-DE" sz="4800" b="0" i="0" u="none" strike="noStrike" cap="none" spc="0" normalizeH="0" baseline="0" dirty="0" smtClean="0">
+                <a:ln>
+                  <a:noFill/>
+                </a:ln>
+                <a:solidFill>
+                  <a:srgbClr val="000000"/>
+                </a:solidFill>
+                <a:effectLst/>
+                <a:uFillTx/>
+                <a:latin typeface="Helvetica Neue"/>
+                <a:ea typeface="Helvetica Neue"/>
+                <a:cs typeface="Helvetica Neue"/>
+                <a:sym typeface="Helvetica Neue"/>
+              </a:rPr>
+              <a:t>Hyperparameter: Dimension</a:t>
+            </a:r>
+            <a:r>
+              <a:rPr kumimoji="0" lang="de-DE" sz="4800" b="0" i="0" u="none" strike="noStrike" cap="none" spc="0" normalizeH="0" dirty="0" smtClean="0">
+                <a:ln>
+                  <a:noFill/>
+                </a:ln>
+                <a:solidFill>
+                  <a:srgbClr val="000000"/>
+                </a:solidFill>
+                <a:effectLst/>
+                <a:uFillTx/>
+                <a:latin typeface="Helvetica Neue"/>
+                <a:ea typeface="Helvetica Neue"/>
+                <a:cs typeface="Helvetica Neue"/>
+                <a:sym typeface="Helvetica Neue"/>
+              </a:rPr>
+              <a:t> size</a:t>
+            </a:r>
+            <a:endParaRPr kumimoji="0" lang="de-DE" sz="4800" b="0" i="0" u="none" strike="noStrike" cap="none" spc="0" normalizeH="0" baseline="0" dirty="0">
+              <a:ln>
+                <a:noFill/>
+              </a:ln>
+              <a:solidFill>
+                <a:srgbClr val="000000"/>
+              </a:solidFill>
+              <a:effectLst/>
+              <a:uFillTx/>
+              <a:latin typeface="Helvetica Neue"/>
+              <a:ea typeface="Helvetica Neue"/>
+              <a:cs typeface="Helvetica Neue"/>
+              <a:sym typeface="Helvetica Neue"/>
+            </a:endParaRPr>
+          </a:p>
+        </p:txBody>
+      </p:sp>
+      <p:sp>
+        <p:nvSpPr>
+          <p:cNvPr id="7" name="TextBox 6"/>
+          <p:cNvSpPr txBox="1"/>
+          <p:nvPr/>
+        </p:nvSpPr>
+        <p:spPr>
+          <a:xfrm>
+            <a:off x="5993474" y="11332010"/>
+            <a:ext cx="12397052" cy="1597873"/>
+          </a:xfrm>
+          <a:prstGeom prst="rect">
+            <a:avLst/>
+          </a:prstGeom>
+          <a:noFill/>
+          <a:ln w="12700" cap="flat">
+            <a:noFill/>
+            <a:miter lim="400000"/>
+          </a:ln>
+          <a:effectLst/>
+          <a:sp3d/>
+        </p:spPr>
+        <p:style>
+          <a:lnRef idx="0">
+            <a:scrgbClr r="0" g="0" b="0"/>
+          </a:lnRef>
+          <a:fillRef idx="0">
+            <a:scrgbClr r="0" g="0" b="0"/>
+          </a:fillRef>
+          <a:effectRef idx="0">
+            <a:scrgbClr r="0" g="0" b="0"/>
+          </a:effectRef>
+          <a:fontRef idx="none"/>
+        </p:style>
+        <p:txBody>
+          <a:bodyPr rot="0" spcFirstLastPara="1" vertOverflow="overflow" horzOverflow="overflow" vert="horz" wrap="square" lIns="50800" tIns="50800" rIns="50800" bIns="50800" numCol="1" spcCol="38100" rtlCol="0" anchor="ctr">
+            <a:spAutoFit/>
+          </a:bodyPr>
+          <a:lstStyle/>
+          <a:p>
+            <a:pPr marL="0" marR="0" indent="0" algn="ctr" defTabSz="825500" rtl="0" fontAlgn="auto" latinLnBrk="0" hangingPunct="0">
+              <a:lnSpc>
+                <a:spcPct val="100000"/>
+              </a:lnSpc>
+              <a:spcBef>
+                <a:spcPts val="5900"/>
+              </a:spcBef>
+              <a:spcAft>
+                <a:spcPts val="0"/>
+              </a:spcAft>
+              <a:buClrTx/>
+              <a:buSzTx/>
+              <a:buFontTx/>
+              <a:buNone/>
+              <a:tabLst/>
+            </a:pPr>
+            <a:r>
+              <a:rPr kumimoji="0" lang="de-DE" sz="4800" b="0" i="0" u="none" strike="noStrike" cap="none" spc="0" normalizeH="0" baseline="0" dirty="0" smtClean="0">
+                <a:ln>
+                  <a:noFill/>
+                </a:ln>
+                <a:solidFill>
+                  <a:srgbClr val="000000"/>
+                </a:solidFill>
+                <a:effectLst/>
+                <a:uFillTx/>
+                <a:latin typeface="Helvetica Neue"/>
+                <a:ea typeface="Helvetica Neue"/>
+                <a:cs typeface="Helvetica Neue"/>
+                <a:sym typeface="Helvetica Neue"/>
+              </a:rPr>
+              <a:t>Dimension</a:t>
+            </a:r>
+            <a:r>
+              <a:rPr kumimoji="0" lang="de-DE" sz="4800" b="0" i="0" u="none" strike="noStrike" cap="none" spc="0" normalizeH="0" dirty="0" smtClean="0">
+                <a:ln>
+                  <a:noFill/>
+                </a:ln>
+                <a:solidFill>
+                  <a:srgbClr val="000000"/>
+                </a:solidFill>
+                <a:effectLst/>
+                <a:uFillTx/>
+                <a:latin typeface="Helvetica Neue"/>
+                <a:ea typeface="Helvetica Neue"/>
+                <a:cs typeface="Helvetica Neue"/>
+                <a:sym typeface="Helvetica Neue"/>
+              </a:rPr>
+              <a:t> 512 gives the best results</a:t>
+            </a:r>
+            <a:endParaRPr kumimoji="0" lang="de-DE" sz="4800" b="0" i="0" u="none" strike="noStrike" cap="none" spc="0" normalizeH="0" baseline="0" dirty="0">
+              <a:ln>
+                <a:noFill/>
+              </a:ln>
+              <a:solidFill>
+                <a:srgbClr val="000000"/>
+              </a:solidFill>
+              <a:effectLst/>
+              <a:uFillTx/>
+              <a:latin typeface="Helvetica Neue"/>
+              <a:ea typeface="Helvetica Neue"/>
+              <a:cs typeface="Helvetica Neue"/>
+              <a:sym typeface="Helvetica Neue"/>
+            </a:endParaRPr>
+          </a:p>
+        </p:txBody>
+      </p:sp>
+      <p:pic>
+        <p:nvPicPr>
+          <p:cNvPr id="8" name="Picture 7"/>
+          <p:cNvPicPr>
+            <a:picLocks noChangeAspect="1"/>
+          </p:cNvPicPr>
+          <p:nvPr/>
+        </p:nvPicPr>
+        <p:blipFill>
+          <a:blip r:embed="rId2">
+            <a:extLst>
+              <a:ext uri="{28A0092B-C50C-407E-A947-70E740481C1C}">
+                <a14:useLocalDpi xmlns:a14="http://schemas.microsoft.com/office/drawing/2010/main" val="0"/>
+              </a:ext>
+            </a:extLst>
+          </a:blip>
+          <a:stretch>
+            <a:fillRect/>
+          </a:stretch>
+        </p:blipFill>
+        <p:spPr>
+          <a:xfrm>
+            <a:off x="619150" y="3818271"/>
+            <a:ext cx="22993314" cy="7120974"/>
+          </a:xfrm>
+          <a:prstGeom prst="rect">
+            <a:avLst/>
+          </a:prstGeom>
+        </p:spPr>
+      </p:pic>
+    </p:spTree>
+    <p:extLst>
+      <p:ext uri="{BB962C8B-B14F-4D97-AF65-F5344CB8AC3E}">
+        <p14:creationId xmlns:p14="http://schemas.microsoft.com/office/powerpoint/2010/main" val="357042975"/>
+      </p:ext>
+    </p:extLst>
+  </p:cSld>
+  <p:clrMapOvr>
+    <a:masterClrMapping/>
+  </p:clrMapOvr>
+  <p:transition spd="med"/>
+  <p:timing>
+    <p:tnLst>
+      <p:par>
+        <p:cTn id="1" dur="indefinite" restart="never" nodeType="tmRoot"/>
+      </p:par>
+    </p:tnLst>
+  </p:timing>
+</p:sld>
+</file>
+
+<file path=ppt/slides/slide22.xml><?xml version="1.0" encoding="utf-8"?>
+<p:sld xmlns:a="http://schemas.openxmlformats.org/drawingml/2006/main" xmlns:r="http://schemas.openxmlformats.org/officeDocument/2006/relationships" xmlns:p="http://schemas.openxmlformats.org/presentationml/2006/main">
+  <p:cSld>
+    <p:spTree>
+      <p:nvGrpSpPr>
+        <p:cNvPr id="1" name=""/>
+        <p:cNvGrpSpPr/>
+        <p:nvPr/>
+      </p:nvGrpSpPr>
+      <p:grpSpPr>
+        <a:xfrm>
+          <a:off x="0" y="0"/>
+          <a:ext cx="0" cy="0"/>
+          <a:chOff x="0" y="0"/>
+          <a:chExt cx="0" cy="0"/>
+        </a:xfrm>
+      </p:grpSpPr>
+      <p:sp>
+        <p:nvSpPr>
+          <p:cNvPr id="2" name="Title 1"/>
+          <p:cNvSpPr>
+            <a:spLocks noGrp="1"/>
+          </p:cNvSpPr>
+          <p:nvPr>
+            <p:ph type="title"/>
+          </p:nvPr>
+        </p:nvSpPr>
+        <p:spPr/>
+        <p:txBody>
+          <a:bodyPr/>
+          <a:lstStyle/>
+          <a:p>
+            <a:r>
+              <a:rPr lang="de-DE" dirty="0" smtClean="0"/>
+              <a:t>Experiments</a:t>
+            </a:r>
+            <a:endParaRPr lang="de-DE" dirty="0"/>
+          </a:p>
+        </p:txBody>
+      </p:sp>
+      <p:sp>
+        <p:nvSpPr>
+          <p:cNvPr id="5" name="TextBox 4"/>
+          <p:cNvSpPr txBox="1"/>
+          <p:nvPr/>
+        </p:nvSpPr>
+        <p:spPr>
+          <a:xfrm>
+            <a:off x="5913260" y="1842663"/>
+            <a:ext cx="12397052" cy="1597873"/>
+          </a:xfrm>
+          <a:prstGeom prst="rect">
+            <a:avLst/>
+          </a:prstGeom>
+          <a:noFill/>
+          <a:ln w="12700" cap="flat">
+            <a:noFill/>
+            <a:miter lim="400000"/>
+          </a:ln>
+          <a:effectLst/>
+          <a:sp3d/>
+        </p:spPr>
+        <p:style>
+          <a:lnRef idx="0">
+            <a:scrgbClr r="0" g="0" b="0"/>
+          </a:lnRef>
+          <a:fillRef idx="0">
+            <a:scrgbClr r="0" g="0" b="0"/>
+          </a:fillRef>
+          <a:effectRef idx="0">
+            <a:scrgbClr r="0" g="0" b="0"/>
+          </a:effectRef>
+          <a:fontRef idx="none"/>
+        </p:style>
+        <p:txBody>
+          <a:bodyPr rot="0" spcFirstLastPara="1" vertOverflow="overflow" horzOverflow="overflow" vert="horz" wrap="square" lIns="50800" tIns="50800" rIns="50800" bIns="50800" numCol="1" spcCol="38100" rtlCol="0" anchor="ctr">
+            <a:spAutoFit/>
+          </a:bodyPr>
+          <a:lstStyle/>
+          <a:p>
+            <a:pPr marL="0" marR="0" indent="0" algn="ctr" defTabSz="825500" rtl="0" fontAlgn="auto" latinLnBrk="0" hangingPunct="0">
+              <a:lnSpc>
+                <a:spcPct val="100000"/>
+              </a:lnSpc>
+              <a:spcBef>
+                <a:spcPts val="5900"/>
+              </a:spcBef>
+              <a:spcAft>
+                <a:spcPts val="0"/>
+              </a:spcAft>
+              <a:buClrTx/>
+              <a:buSzTx/>
+              <a:buFontTx/>
+              <a:buNone/>
+              <a:tabLst/>
+            </a:pPr>
+            <a:r>
+              <a:rPr kumimoji="0" lang="de-DE" sz="4800" b="0" i="0" u="none" strike="noStrike" cap="none" spc="0" normalizeH="0" baseline="0" dirty="0" smtClean="0">
+                <a:ln>
+                  <a:noFill/>
+                </a:ln>
+                <a:solidFill>
+                  <a:srgbClr val="000000"/>
+                </a:solidFill>
+                <a:effectLst/>
+                <a:uFillTx/>
+                <a:latin typeface="Helvetica Neue"/>
+                <a:ea typeface="Helvetica Neue"/>
+                <a:cs typeface="Helvetica Neue"/>
+                <a:sym typeface="Helvetica Neue"/>
+              </a:rPr>
+              <a:t>Hyperparameter: Dimension</a:t>
+            </a:r>
+            <a:r>
+              <a:rPr kumimoji="0" lang="de-DE" sz="4800" b="0" i="0" u="none" strike="noStrike" cap="none" spc="0" normalizeH="0" dirty="0" smtClean="0">
+                <a:ln>
+                  <a:noFill/>
+                </a:ln>
+                <a:solidFill>
+                  <a:srgbClr val="000000"/>
+                </a:solidFill>
+                <a:effectLst/>
+                <a:uFillTx/>
+                <a:latin typeface="Helvetica Neue"/>
+                <a:ea typeface="Helvetica Neue"/>
+                <a:cs typeface="Helvetica Neue"/>
+                <a:sym typeface="Helvetica Neue"/>
+              </a:rPr>
+              <a:t> size</a:t>
+            </a:r>
+            <a:endParaRPr kumimoji="0" lang="de-DE" sz="4800" b="0" i="0" u="none" strike="noStrike" cap="none" spc="0" normalizeH="0" baseline="0" dirty="0">
+              <a:ln>
+                <a:noFill/>
+              </a:ln>
+              <a:solidFill>
+                <a:srgbClr val="000000"/>
+              </a:solidFill>
+              <a:effectLst/>
+              <a:uFillTx/>
+              <a:latin typeface="Helvetica Neue"/>
+              <a:ea typeface="Helvetica Neue"/>
+              <a:cs typeface="Helvetica Neue"/>
+              <a:sym typeface="Helvetica Neue"/>
+            </a:endParaRPr>
+          </a:p>
+        </p:txBody>
+      </p:sp>
+      <p:sp>
+        <p:nvSpPr>
+          <p:cNvPr id="7" name="TextBox 6"/>
+          <p:cNvSpPr txBox="1"/>
+          <p:nvPr/>
+        </p:nvSpPr>
+        <p:spPr>
+          <a:xfrm>
+            <a:off x="5913260" y="10040105"/>
+            <a:ext cx="12397052" cy="1597873"/>
+          </a:xfrm>
+          <a:prstGeom prst="rect">
+            <a:avLst/>
+          </a:prstGeom>
+          <a:noFill/>
+          <a:ln w="12700" cap="flat">
+            <a:noFill/>
+            <a:miter lim="400000"/>
+          </a:ln>
+          <a:effectLst/>
+          <a:sp3d/>
+        </p:spPr>
+        <p:style>
+          <a:lnRef idx="0">
+            <a:scrgbClr r="0" g="0" b="0"/>
+          </a:lnRef>
+          <a:fillRef idx="0">
+            <a:scrgbClr r="0" g="0" b="0"/>
+          </a:fillRef>
+          <a:effectRef idx="0">
+            <a:scrgbClr r="0" g="0" b="0"/>
+          </a:effectRef>
+          <a:fontRef idx="none"/>
+        </p:style>
+        <p:txBody>
+          <a:bodyPr rot="0" spcFirstLastPara="1" vertOverflow="overflow" horzOverflow="overflow" vert="horz" wrap="square" lIns="50800" tIns="50800" rIns="50800" bIns="50800" numCol="1" spcCol="38100" rtlCol="0" anchor="ctr">
+            <a:spAutoFit/>
+          </a:bodyPr>
+          <a:lstStyle/>
+          <a:p>
+            <a:pPr marL="0" marR="0" indent="0" algn="ctr" defTabSz="825500" rtl="0" fontAlgn="auto" latinLnBrk="0" hangingPunct="0">
+              <a:lnSpc>
+                <a:spcPct val="100000"/>
+              </a:lnSpc>
+              <a:spcBef>
+                <a:spcPts val="5900"/>
+              </a:spcBef>
+              <a:spcAft>
+                <a:spcPts val="0"/>
+              </a:spcAft>
+              <a:buClrTx/>
+              <a:buSzTx/>
+              <a:buFontTx/>
+              <a:buNone/>
+              <a:tabLst/>
+            </a:pPr>
+            <a:r>
+              <a:rPr kumimoji="0" lang="de-DE" sz="4800" b="0" i="0" u="none" strike="noStrike" cap="none" spc="0" normalizeH="0" baseline="0" dirty="0" smtClean="0">
+                <a:ln>
+                  <a:noFill/>
+                </a:ln>
+                <a:solidFill>
+                  <a:srgbClr val="000000"/>
+                </a:solidFill>
+                <a:effectLst/>
+                <a:uFillTx/>
+                <a:latin typeface="Helvetica Neue"/>
+                <a:ea typeface="Helvetica Neue"/>
+                <a:cs typeface="Helvetica Neue"/>
+                <a:sym typeface="Helvetica Neue"/>
+              </a:rPr>
+              <a:t>Dimension</a:t>
+            </a:r>
+            <a:r>
+              <a:rPr kumimoji="0" lang="de-DE" sz="4800" b="0" i="0" u="none" strike="noStrike" cap="none" spc="0" normalizeH="0" dirty="0" smtClean="0">
+                <a:ln>
+                  <a:noFill/>
+                </a:ln>
+                <a:solidFill>
+                  <a:srgbClr val="000000"/>
+                </a:solidFill>
+                <a:effectLst/>
+                <a:uFillTx/>
+                <a:latin typeface="Helvetica Neue"/>
+                <a:ea typeface="Helvetica Neue"/>
+                <a:cs typeface="Helvetica Neue"/>
+                <a:sym typeface="Helvetica Neue"/>
+              </a:rPr>
+              <a:t> 512 gives the best results</a:t>
+            </a:r>
+            <a:endParaRPr kumimoji="0" lang="de-DE" sz="4800" b="0" i="0" u="none" strike="noStrike" cap="none" spc="0" normalizeH="0" baseline="0" dirty="0">
+              <a:ln>
+                <a:noFill/>
+              </a:ln>
+              <a:solidFill>
+                <a:srgbClr val="000000"/>
+              </a:solidFill>
+              <a:effectLst/>
+              <a:uFillTx/>
+              <a:latin typeface="Helvetica Neue"/>
+              <a:ea typeface="Helvetica Neue"/>
+              <a:cs typeface="Helvetica Neue"/>
+              <a:sym typeface="Helvetica Neue"/>
+            </a:endParaRPr>
+          </a:p>
+        </p:txBody>
+      </p:sp>
+      <p:pic>
+        <p:nvPicPr>
+          <p:cNvPr id="3" name="Picture 2"/>
+          <p:cNvPicPr>
+            <a:picLocks noChangeAspect="1"/>
+          </p:cNvPicPr>
+          <p:nvPr/>
+        </p:nvPicPr>
+        <p:blipFill>
+          <a:blip r:embed="rId2">
+            <a:extLst>
+              <a:ext uri="{28A0092B-C50C-407E-A947-70E740481C1C}">
+                <a14:useLocalDpi xmlns:a14="http://schemas.microsoft.com/office/drawing/2010/main" val="0"/>
+              </a:ext>
+            </a:extLst>
+          </a:blip>
+          <a:stretch>
+            <a:fillRect/>
+          </a:stretch>
+        </p:blipFill>
+        <p:spPr>
+          <a:xfrm>
+            <a:off x="519972" y="4614378"/>
+            <a:ext cx="23183628" cy="5150408"/>
+          </a:xfrm>
+          <a:prstGeom prst="rect">
+            <a:avLst/>
+          </a:prstGeom>
+        </p:spPr>
+      </p:pic>
+    </p:spTree>
+    <p:extLst>
+      <p:ext uri="{BB962C8B-B14F-4D97-AF65-F5344CB8AC3E}">
+        <p14:creationId xmlns:p14="http://schemas.microsoft.com/office/powerpoint/2010/main" val="2556686470"/>
+      </p:ext>
+    </p:extLst>
+  </p:cSld>
+  <p:clrMapOvr>
+    <a:masterClrMapping/>
+  </p:clrMapOvr>
+  <p:transition spd="med"/>
+  <p:timing>
+    <p:tnLst>
+      <p:par>
+        <p:cTn id="1" dur="indefinite" restart="never" nodeType="tmRoot"/>
+      </p:par>
+    </p:tnLst>
+  </p:timing>
+</p:sld>
+</file>
+
+<file path=ppt/slides/slide23.xml><?xml version="1.0" encoding="utf-8"?>
+<p:sld xmlns:a="http://schemas.openxmlformats.org/drawingml/2006/main" xmlns:r="http://schemas.openxmlformats.org/officeDocument/2006/relationships" xmlns:p="http://schemas.openxmlformats.org/presentationml/2006/main">
+  <p:cSld>
+    <p:spTree>
+      <p:nvGrpSpPr>
+        <p:cNvPr id="1" name=""/>
+        <p:cNvGrpSpPr/>
+        <p:nvPr/>
+      </p:nvGrpSpPr>
+      <p:grpSpPr>
+        <a:xfrm>
+          <a:off x="0" y="0"/>
+          <a:ext cx="0" cy="0"/>
+          <a:chOff x="0" y="0"/>
+          <a:chExt cx="0" cy="0"/>
+        </a:xfrm>
+      </p:grpSpPr>
+      <p:sp>
+        <p:nvSpPr>
+          <p:cNvPr id="2" name="Title 1"/>
+          <p:cNvSpPr>
+            <a:spLocks noGrp="1"/>
+          </p:cNvSpPr>
+          <p:nvPr>
+            <p:ph type="title"/>
+          </p:nvPr>
+        </p:nvSpPr>
+        <p:spPr/>
+        <p:txBody>
+          <a:bodyPr/>
+          <a:lstStyle/>
+          <a:p>
+            <a:r>
+              <a:rPr lang="de-DE" dirty="0" smtClean="0"/>
+              <a:t>Experiments</a:t>
+            </a:r>
+            <a:endParaRPr lang="de-DE" dirty="0"/>
+          </a:p>
+        </p:txBody>
+      </p:sp>
+      <p:sp>
+        <p:nvSpPr>
+          <p:cNvPr id="5" name="TextBox 4"/>
+          <p:cNvSpPr txBox="1"/>
+          <p:nvPr/>
+        </p:nvSpPr>
+        <p:spPr>
+          <a:xfrm>
+            <a:off x="5913260" y="1842663"/>
+            <a:ext cx="12397052" cy="1597873"/>
+          </a:xfrm>
+          <a:prstGeom prst="rect">
+            <a:avLst/>
+          </a:prstGeom>
+          <a:noFill/>
+          <a:ln w="12700" cap="flat">
+            <a:noFill/>
+            <a:miter lim="400000"/>
+          </a:ln>
+          <a:effectLst/>
+          <a:sp3d/>
+        </p:spPr>
+        <p:style>
+          <a:lnRef idx="0">
+            <a:scrgbClr r="0" g="0" b="0"/>
+          </a:lnRef>
+          <a:fillRef idx="0">
+            <a:scrgbClr r="0" g="0" b="0"/>
+          </a:fillRef>
+          <a:effectRef idx="0">
+            <a:scrgbClr r="0" g="0" b="0"/>
+          </a:effectRef>
+          <a:fontRef idx="none"/>
+        </p:style>
+        <p:txBody>
+          <a:bodyPr rot="0" spcFirstLastPara="1" vertOverflow="overflow" horzOverflow="overflow" vert="horz" wrap="square" lIns="50800" tIns="50800" rIns="50800" bIns="50800" numCol="1" spcCol="38100" rtlCol="0" anchor="ctr">
+            <a:spAutoFit/>
+          </a:bodyPr>
+          <a:lstStyle/>
+          <a:p>
+            <a:pPr marL="0" marR="0" indent="0" algn="ctr" defTabSz="825500" rtl="0" fontAlgn="auto" latinLnBrk="0" hangingPunct="0">
+              <a:lnSpc>
+                <a:spcPct val="100000"/>
+              </a:lnSpc>
+              <a:spcBef>
+                <a:spcPts val="5900"/>
+              </a:spcBef>
+              <a:spcAft>
+                <a:spcPts val="0"/>
+              </a:spcAft>
+              <a:buClrTx/>
+              <a:buSzTx/>
+              <a:buFontTx/>
+              <a:buNone/>
+              <a:tabLst/>
+            </a:pPr>
+            <a:r>
+              <a:rPr kumimoji="0" lang="de-DE" sz="4800" b="0" i="0" u="none" strike="noStrike" cap="none" spc="0" normalizeH="0" baseline="0" dirty="0" smtClean="0">
+                <a:ln>
+                  <a:noFill/>
+                </a:ln>
+                <a:solidFill>
+                  <a:srgbClr val="000000"/>
+                </a:solidFill>
+                <a:effectLst/>
+                <a:uFillTx/>
+                <a:latin typeface="Helvetica Neue"/>
+                <a:ea typeface="Helvetica Neue"/>
+                <a:cs typeface="Helvetica Neue"/>
+                <a:sym typeface="Helvetica Neue"/>
+              </a:rPr>
+              <a:t>Hyperparameter: Partition</a:t>
+            </a:r>
+            <a:r>
+              <a:rPr kumimoji="0" lang="de-DE" sz="4800" b="0" i="0" u="none" strike="noStrike" cap="none" spc="0" normalizeH="0" dirty="0" smtClean="0">
+                <a:ln>
+                  <a:noFill/>
+                </a:ln>
+                <a:solidFill>
+                  <a:srgbClr val="000000"/>
+                </a:solidFill>
+                <a:effectLst/>
+                <a:uFillTx/>
+                <a:latin typeface="Helvetica Neue"/>
+                <a:ea typeface="Helvetica Neue"/>
+                <a:cs typeface="Helvetica Neue"/>
+                <a:sym typeface="Helvetica Neue"/>
+              </a:rPr>
+              <a:t> size</a:t>
+            </a:r>
+            <a:endParaRPr kumimoji="0" lang="de-DE" sz="4800" b="0" i="0" u="none" strike="noStrike" cap="none" spc="0" normalizeH="0" baseline="0" dirty="0">
+              <a:ln>
+                <a:noFill/>
+              </a:ln>
+              <a:solidFill>
+                <a:srgbClr val="000000"/>
+              </a:solidFill>
+              <a:effectLst/>
+              <a:uFillTx/>
+              <a:latin typeface="Helvetica Neue"/>
+              <a:ea typeface="Helvetica Neue"/>
+              <a:cs typeface="Helvetica Neue"/>
+              <a:sym typeface="Helvetica Neue"/>
+            </a:endParaRPr>
+          </a:p>
+        </p:txBody>
+      </p:sp>
+      <p:sp>
+        <p:nvSpPr>
+          <p:cNvPr id="7" name="TextBox 6"/>
+          <p:cNvSpPr txBox="1"/>
+          <p:nvPr/>
+        </p:nvSpPr>
+        <p:spPr>
+          <a:xfrm>
+            <a:off x="4182381" y="11332010"/>
+            <a:ext cx="16019238" cy="1597873"/>
+          </a:xfrm>
+          <a:prstGeom prst="rect">
+            <a:avLst/>
+          </a:prstGeom>
+          <a:noFill/>
+          <a:ln w="12700" cap="flat">
+            <a:noFill/>
+            <a:miter lim="400000"/>
+          </a:ln>
+          <a:effectLst/>
+          <a:sp3d/>
+        </p:spPr>
+        <p:style>
+          <a:lnRef idx="0">
+            <a:scrgbClr r="0" g="0" b="0"/>
+          </a:lnRef>
+          <a:fillRef idx="0">
+            <a:scrgbClr r="0" g="0" b="0"/>
+          </a:fillRef>
+          <a:effectRef idx="0">
+            <a:scrgbClr r="0" g="0" b="0"/>
+          </a:effectRef>
+          <a:fontRef idx="none"/>
+        </p:style>
+        <p:txBody>
+          <a:bodyPr rot="0" spcFirstLastPara="1" vertOverflow="overflow" horzOverflow="overflow" vert="horz" wrap="square" lIns="50800" tIns="50800" rIns="50800" bIns="50800" numCol="1" spcCol="38100" rtlCol="0" anchor="ctr">
+            <a:spAutoFit/>
+          </a:bodyPr>
+          <a:lstStyle/>
+          <a:p>
+            <a:pPr marL="0" marR="0" indent="0" algn="ctr" defTabSz="825500" rtl="0" fontAlgn="auto" latinLnBrk="0" hangingPunct="0">
+              <a:lnSpc>
+                <a:spcPct val="100000"/>
+              </a:lnSpc>
+              <a:spcBef>
+                <a:spcPts val="5900"/>
+              </a:spcBef>
+              <a:spcAft>
+                <a:spcPts val="0"/>
+              </a:spcAft>
+              <a:buClrTx/>
+              <a:buSzTx/>
+              <a:buFontTx/>
+              <a:buNone/>
+              <a:tabLst/>
+            </a:pPr>
+            <a:r>
+              <a:rPr kumimoji="0" lang="de-DE" sz="4800" b="0" i="0" u="none" strike="noStrike" cap="none" spc="0" normalizeH="0" baseline="0" dirty="0" smtClean="0">
+                <a:ln>
+                  <a:noFill/>
+                </a:ln>
+                <a:solidFill>
+                  <a:srgbClr val="000000"/>
+                </a:solidFill>
+                <a:effectLst/>
+                <a:uFillTx/>
+                <a:latin typeface="Helvetica Neue"/>
+                <a:ea typeface="Helvetica Neue"/>
+                <a:cs typeface="Helvetica Neue"/>
+                <a:sym typeface="Helvetica Neue"/>
+              </a:rPr>
+              <a:t>For dimension</a:t>
+            </a:r>
+            <a:r>
+              <a:rPr kumimoji="0" lang="de-DE" sz="4800" b="0" i="0" u="none" strike="noStrike" cap="none" spc="0" normalizeH="0" dirty="0" smtClean="0">
+                <a:ln>
+                  <a:noFill/>
+                </a:ln>
+                <a:solidFill>
+                  <a:srgbClr val="000000"/>
+                </a:solidFill>
+                <a:effectLst/>
+                <a:uFillTx/>
+                <a:latin typeface="Helvetica Neue"/>
+                <a:ea typeface="Helvetica Neue"/>
+                <a:cs typeface="Helvetica Neue"/>
+                <a:sym typeface="Helvetica Neue"/>
+              </a:rPr>
+              <a:t> 512: 32 already gives the decent results</a:t>
+            </a:r>
+            <a:endParaRPr kumimoji="0" lang="de-DE" sz="4800" b="0" i="0" u="none" strike="noStrike" cap="none" spc="0" normalizeH="0" baseline="0" dirty="0">
+              <a:ln>
+                <a:noFill/>
+              </a:ln>
+              <a:solidFill>
+                <a:srgbClr val="000000"/>
+              </a:solidFill>
+              <a:effectLst/>
+              <a:uFillTx/>
+              <a:latin typeface="Helvetica Neue"/>
+              <a:ea typeface="Helvetica Neue"/>
+              <a:cs typeface="Helvetica Neue"/>
+              <a:sym typeface="Helvetica Neue"/>
+            </a:endParaRPr>
+          </a:p>
+        </p:txBody>
+      </p:sp>
+      <p:pic>
+        <p:nvPicPr>
+          <p:cNvPr id="3" name="Picture 2"/>
+          <p:cNvPicPr>
+            <a:picLocks noChangeAspect="1"/>
+          </p:cNvPicPr>
+          <p:nvPr/>
+        </p:nvPicPr>
+        <p:blipFill>
+          <a:blip r:embed="rId2">
+            <a:extLst>
+              <a:ext uri="{28A0092B-C50C-407E-A947-70E740481C1C}">
+                <a14:useLocalDpi xmlns:a14="http://schemas.microsoft.com/office/drawing/2010/main" val="0"/>
+              </a:ext>
+            </a:extLst>
+          </a:blip>
+          <a:stretch>
+            <a:fillRect/>
+          </a:stretch>
+        </p:blipFill>
+        <p:spPr>
+          <a:xfrm>
+            <a:off x="426132" y="4236134"/>
+            <a:ext cx="23366950" cy="6384328"/>
+          </a:xfrm>
+          <a:prstGeom prst="rect">
+            <a:avLst/>
+          </a:prstGeom>
+        </p:spPr>
+      </p:pic>
+    </p:spTree>
+    <p:extLst>
+      <p:ext uri="{BB962C8B-B14F-4D97-AF65-F5344CB8AC3E}">
+        <p14:creationId xmlns:p14="http://schemas.microsoft.com/office/powerpoint/2010/main" val="2704516044"/>
+      </p:ext>
+    </p:extLst>
+  </p:cSld>
+  <p:clrMapOvr>
+    <a:masterClrMapping/>
+  </p:clrMapOvr>
+  <p:transition spd="med"/>
+  <p:timing>
+    <p:tnLst>
+      <p:par>
+        <p:cTn id="1" dur="indefinite" restart="never" nodeType="tmRoot"/>
+      </p:par>
+    </p:tnLst>
+  </p:timing>
+</p:sld>
+</file>
+
+<file path=ppt/slides/slide24.xml><?xml version="1.0" encoding="utf-8"?>
+<p:sld xmlns:a="http://schemas.openxmlformats.org/drawingml/2006/main" xmlns:r="http://schemas.openxmlformats.org/officeDocument/2006/relationships" xmlns:p="http://schemas.openxmlformats.org/presentationml/2006/main">
+  <p:cSld>
+    <p:spTree>
+      <p:nvGrpSpPr>
+        <p:cNvPr id="1" name=""/>
+        <p:cNvGrpSpPr/>
+        <p:nvPr/>
+      </p:nvGrpSpPr>
+      <p:grpSpPr>
+        <a:xfrm>
+          <a:off x="0" y="0"/>
+          <a:ext cx="0" cy="0"/>
+          <a:chOff x="0" y="0"/>
+          <a:chExt cx="0" cy="0"/>
+        </a:xfrm>
+      </p:grpSpPr>
+      <p:sp>
+        <p:nvSpPr>
+          <p:cNvPr id="2" name="Title 1"/>
+          <p:cNvSpPr>
+            <a:spLocks noGrp="1"/>
+          </p:cNvSpPr>
+          <p:nvPr>
+            <p:ph type="title"/>
+          </p:nvPr>
+        </p:nvSpPr>
+        <p:spPr/>
+        <p:txBody>
+          <a:bodyPr/>
+          <a:lstStyle/>
+          <a:p>
+            <a:r>
+              <a:rPr lang="de-DE" dirty="0" smtClean="0"/>
+              <a:t>Experiments</a:t>
+            </a:r>
+            <a:endParaRPr lang="de-DE" dirty="0"/>
+          </a:p>
+        </p:txBody>
+      </p:sp>
+      <p:sp>
+        <p:nvSpPr>
+          <p:cNvPr id="5" name="TextBox 4"/>
+          <p:cNvSpPr txBox="1"/>
+          <p:nvPr/>
+        </p:nvSpPr>
+        <p:spPr>
+          <a:xfrm>
+            <a:off x="5913260" y="1842663"/>
+            <a:ext cx="12397052" cy="1597873"/>
+          </a:xfrm>
+          <a:prstGeom prst="rect">
+            <a:avLst/>
+          </a:prstGeom>
+          <a:noFill/>
+          <a:ln w="12700" cap="flat">
+            <a:noFill/>
+            <a:miter lim="400000"/>
+          </a:ln>
+          <a:effectLst/>
+          <a:sp3d/>
+        </p:spPr>
+        <p:style>
+          <a:lnRef idx="0">
+            <a:scrgbClr r="0" g="0" b="0"/>
+          </a:lnRef>
+          <a:fillRef idx="0">
+            <a:scrgbClr r="0" g="0" b="0"/>
+          </a:fillRef>
+          <a:effectRef idx="0">
+            <a:scrgbClr r="0" g="0" b="0"/>
+          </a:effectRef>
+          <a:fontRef idx="none"/>
+        </p:style>
+        <p:txBody>
+          <a:bodyPr rot="0" spcFirstLastPara="1" vertOverflow="overflow" horzOverflow="overflow" vert="horz" wrap="square" lIns="50800" tIns="50800" rIns="50800" bIns="50800" numCol="1" spcCol="38100" rtlCol="0" anchor="ctr">
+            <a:spAutoFit/>
+          </a:bodyPr>
+          <a:lstStyle/>
+          <a:p>
+            <a:pPr marL="0" marR="0" indent="0" algn="ctr" defTabSz="825500" rtl="0" fontAlgn="auto" latinLnBrk="0" hangingPunct="0">
+              <a:lnSpc>
+                <a:spcPct val="100000"/>
+              </a:lnSpc>
+              <a:spcBef>
+                <a:spcPts val="5900"/>
+              </a:spcBef>
+              <a:spcAft>
+                <a:spcPts val="0"/>
+              </a:spcAft>
+              <a:buClrTx/>
+              <a:buSzTx/>
+              <a:buFontTx/>
+              <a:buNone/>
+              <a:tabLst/>
+            </a:pPr>
+            <a:r>
+              <a:rPr kumimoji="0" lang="de-DE" sz="4800" b="0" i="0" u="none" strike="noStrike" cap="none" spc="0" normalizeH="0" baseline="0" dirty="0" smtClean="0">
+                <a:ln>
+                  <a:noFill/>
+                </a:ln>
+                <a:solidFill>
+                  <a:srgbClr val="000000"/>
+                </a:solidFill>
+                <a:effectLst/>
+                <a:uFillTx/>
+                <a:latin typeface="Helvetica Neue"/>
+                <a:ea typeface="Helvetica Neue"/>
+                <a:cs typeface="Helvetica Neue"/>
+                <a:sym typeface="Helvetica Neue"/>
+              </a:rPr>
+              <a:t>Hyperparameter: Partition</a:t>
+            </a:r>
+            <a:r>
+              <a:rPr kumimoji="0" lang="de-DE" sz="4800" b="0" i="0" u="none" strike="noStrike" cap="none" spc="0" normalizeH="0" dirty="0" smtClean="0">
+                <a:ln>
+                  <a:noFill/>
+                </a:ln>
+                <a:solidFill>
+                  <a:srgbClr val="000000"/>
+                </a:solidFill>
+                <a:effectLst/>
+                <a:uFillTx/>
+                <a:latin typeface="Helvetica Neue"/>
+                <a:ea typeface="Helvetica Neue"/>
+                <a:cs typeface="Helvetica Neue"/>
+                <a:sym typeface="Helvetica Neue"/>
+              </a:rPr>
+              <a:t> size</a:t>
+            </a:r>
+            <a:endParaRPr kumimoji="0" lang="de-DE" sz="4800" b="0" i="0" u="none" strike="noStrike" cap="none" spc="0" normalizeH="0" baseline="0" dirty="0">
+              <a:ln>
+                <a:noFill/>
+              </a:ln>
+              <a:solidFill>
+                <a:srgbClr val="000000"/>
+              </a:solidFill>
+              <a:effectLst/>
+              <a:uFillTx/>
+              <a:latin typeface="Helvetica Neue"/>
+              <a:ea typeface="Helvetica Neue"/>
+              <a:cs typeface="Helvetica Neue"/>
+              <a:sym typeface="Helvetica Neue"/>
+            </a:endParaRPr>
+          </a:p>
+        </p:txBody>
+      </p:sp>
+      <p:sp>
+        <p:nvSpPr>
+          <p:cNvPr id="7" name="TextBox 6"/>
+          <p:cNvSpPr txBox="1"/>
+          <p:nvPr/>
+        </p:nvSpPr>
+        <p:spPr>
+          <a:xfrm>
+            <a:off x="4182381" y="11332010"/>
+            <a:ext cx="16019238" cy="1597873"/>
+          </a:xfrm>
+          <a:prstGeom prst="rect">
+            <a:avLst/>
+          </a:prstGeom>
+          <a:noFill/>
+          <a:ln w="12700" cap="flat">
+            <a:noFill/>
+            <a:miter lim="400000"/>
+          </a:ln>
+          <a:effectLst/>
+          <a:sp3d/>
+        </p:spPr>
+        <p:style>
+          <a:lnRef idx="0">
+            <a:scrgbClr r="0" g="0" b="0"/>
+          </a:lnRef>
+          <a:fillRef idx="0">
+            <a:scrgbClr r="0" g="0" b="0"/>
+          </a:fillRef>
+          <a:effectRef idx="0">
+            <a:scrgbClr r="0" g="0" b="0"/>
+          </a:effectRef>
+          <a:fontRef idx="none"/>
+        </p:style>
+        <p:txBody>
+          <a:bodyPr rot="0" spcFirstLastPara="1" vertOverflow="overflow" horzOverflow="overflow" vert="horz" wrap="square" lIns="50800" tIns="50800" rIns="50800" bIns="50800" numCol="1" spcCol="38100" rtlCol="0" anchor="ctr">
+            <a:spAutoFit/>
+          </a:bodyPr>
+          <a:lstStyle/>
+          <a:p>
+            <a:pPr marL="0" marR="0" indent="0" algn="ctr" defTabSz="825500" rtl="0" fontAlgn="auto" latinLnBrk="0" hangingPunct="0">
+              <a:lnSpc>
+                <a:spcPct val="100000"/>
+              </a:lnSpc>
+              <a:spcBef>
+                <a:spcPts val="5900"/>
+              </a:spcBef>
+              <a:spcAft>
+                <a:spcPts val="0"/>
+              </a:spcAft>
+              <a:buClrTx/>
+              <a:buSzTx/>
+              <a:buFontTx/>
+              <a:buNone/>
+              <a:tabLst/>
+            </a:pPr>
+            <a:r>
+              <a:rPr kumimoji="0" lang="de-DE" sz="4800" b="0" i="0" u="none" strike="noStrike" cap="none" spc="0" normalizeH="0" baseline="0" dirty="0" smtClean="0">
+                <a:ln>
+                  <a:noFill/>
+                </a:ln>
+                <a:solidFill>
+                  <a:srgbClr val="000000"/>
+                </a:solidFill>
+                <a:effectLst/>
+                <a:uFillTx/>
+                <a:latin typeface="Helvetica Neue"/>
+                <a:ea typeface="Helvetica Neue"/>
+                <a:cs typeface="Helvetica Neue"/>
+                <a:sym typeface="Helvetica Neue"/>
+              </a:rPr>
+              <a:t>For dimension</a:t>
+            </a:r>
+            <a:r>
+              <a:rPr kumimoji="0" lang="de-DE" sz="4800" b="0" i="0" u="none" strike="noStrike" cap="none" spc="0" normalizeH="0" dirty="0" smtClean="0">
+                <a:ln>
+                  <a:noFill/>
+                </a:ln>
+                <a:solidFill>
+                  <a:srgbClr val="000000"/>
+                </a:solidFill>
+                <a:effectLst/>
+                <a:uFillTx/>
+                <a:latin typeface="Helvetica Neue"/>
+                <a:ea typeface="Helvetica Neue"/>
+                <a:cs typeface="Helvetica Neue"/>
+                <a:sym typeface="Helvetica Neue"/>
+              </a:rPr>
+              <a:t> 512: 32 already gives the decent results</a:t>
+            </a:r>
+            <a:endParaRPr kumimoji="0" lang="de-DE" sz="4800" b="0" i="0" u="none" strike="noStrike" cap="none" spc="0" normalizeH="0" baseline="0" dirty="0">
+              <a:ln>
+                <a:noFill/>
+              </a:ln>
+              <a:solidFill>
+                <a:srgbClr val="000000"/>
+              </a:solidFill>
+              <a:effectLst/>
+              <a:uFillTx/>
+              <a:latin typeface="Helvetica Neue"/>
+              <a:ea typeface="Helvetica Neue"/>
+              <a:cs typeface="Helvetica Neue"/>
+              <a:sym typeface="Helvetica Neue"/>
+            </a:endParaRPr>
+          </a:p>
+        </p:txBody>
+      </p:sp>
+      <p:pic>
+        <p:nvPicPr>
+          <p:cNvPr id="4" name="Picture 3"/>
+          <p:cNvPicPr>
+            <a:picLocks noChangeAspect="1"/>
+          </p:cNvPicPr>
+          <p:nvPr/>
+        </p:nvPicPr>
+        <p:blipFill>
+          <a:blip r:embed="rId2">
+            <a:extLst>
+              <a:ext uri="{28A0092B-C50C-407E-A947-70E740481C1C}">
+                <a14:useLocalDpi xmlns:a14="http://schemas.microsoft.com/office/drawing/2010/main" val="0"/>
+              </a:ext>
+            </a:extLst>
+          </a:blip>
+          <a:stretch>
+            <a:fillRect/>
+          </a:stretch>
+        </p:blipFill>
+        <p:spPr>
+          <a:xfrm>
+            <a:off x="1048505" y="4479720"/>
+            <a:ext cx="22286990" cy="4899172"/>
+          </a:xfrm>
+          <a:prstGeom prst="rect">
+            <a:avLst/>
+          </a:prstGeom>
+        </p:spPr>
+      </p:pic>
+    </p:spTree>
+    <p:extLst>
+      <p:ext uri="{BB962C8B-B14F-4D97-AF65-F5344CB8AC3E}">
+        <p14:creationId xmlns:p14="http://schemas.microsoft.com/office/powerpoint/2010/main" val="3335873186"/>
+      </p:ext>
+    </p:extLst>
+  </p:cSld>
+  <p:clrMapOvr>
+    <a:masterClrMapping/>
+  </p:clrMapOvr>
+  <p:transition spd="med"/>
+  <p:timing>
+    <p:tnLst>
+      <p:par>
+        <p:cTn id="1" dur="indefinite" restart="never" nodeType="tmRoot"/>
+      </p:par>
+    </p:tnLst>
+  </p:timing>
+</p:sld>
+</file>
+
+<file path=ppt/slides/slide25.xml><?xml version="1.0" encoding="utf-8"?>
+<p:sld xmlns:a="http://schemas.openxmlformats.org/drawingml/2006/main" xmlns:r="http://schemas.openxmlformats.org/officeDocument/2006/relationships" xmlns:p="http://schemas.openxmlformats.org/presentationml/2006/main">
+  <p:cSld>
+    <p:spTree>
+      <p:nvGrpSpPr>
+        <p:cNvPr id="1" name=""/>
+        <p:cNvGrpSpPr/>
+        <p:nvPr/>
+      </p:nvGrpSpPr>
+      <p:grpSpPr>
+        <a:xfrm>
+          <a:off x="0" y="0"/>
+          <a:ext cx="0" cy="0"/>
+          <a:chOff x="0" y="0"/>
+          <a:chExt cx="0" cy="0"/>
+        </a:xfrm>
+      </p:grpSpPr>
+      <p:sp>
+        <p:nvSpPr>
+          <p:cNvPr id="2" name="Title 1"/>
+          <p:cNvSpPr>
+            <a:spLocks noGrp="1"/>
+          </p:cNvSpPr>
+          <p:nvPr>
+            <p:ph type="title"/>
+          </p:nvPr>
+        </p:nvSpPr>
+        <p:spPr/>
+        <p:txBody>
+          <a:bodyPr/>
+          <a:lstStyle/>
+          <a:p>
+            <a:r>
+              <a:rPr lang="de-DE" dirty="0" smtClean="0"/>
+              <a:t>Experiments</a:t>
+            </a:r>
+            <a:endParaRPr lang="de-DE" dirty="0"/>
+          </a:p>
+        </p:txBody>
+      </p:sp>
+      <p:sp>
+        <p:nvSpPr>
+          <p:cNvPr id="5" name="TextBox 4"/>
+          <p:cNvSpPr txBox="1"/>
+          <p:nvPr/>
+        </p:nvSpPr>
+        <p:spPr>
+          <a:xfrm>
+            <a:off x="5913260" y="1842663"/>
+            <a:ext cx="12397052" cy="1597873"/>
+          </a:xfrm>
+          <a:prstGeom prst="rect">
+            <a:avLst/>
+          </a:prstGeom>
+          <a:noFill/>
+          <a:ln w="12700" cap="flat">
+            <a:noFill/>
+            <a:miter lim="400000"/>
+          </a:ln>
+          <a:effectLst/>
+          <a:sp3d/>
+        </p:spPr>
+        <p:style>
+          <a:lnRef idx="0">
+            <a:scrgbClr r="0" g="0" b="0"/>
+          </a:lnRef>
+          <a:fillRef idx="0">
+            <a:scrgbClr r="0" g="0" b="0"/>
+          </a:fillRef>
+          <a:effectRef idx="0">
+            <a:scrgbClr r="0" g="0" b="0"/>
+          </a:effectRef>
+          <a:fontRef idx="none"/>
+        </p:style>
+        <p:txBody>
+          <a:bodyPr rot="0" spcFirstLastPara="1" vertOverflow="overflow" horzOverflow="overflow" vert="horz" wrap="square" lIns="50800" tIns="50800" rIns="50800" bIns="50800" numCol="1" spcCol="38100" rtlCol="0" anchor="ctr">
+            <a:spAutoFit/>
+          </a:bodyPr>
+          <a:lstStyle/>
+          <a:p>
+            <a:pPr marL="0" marR="0" indent="0" algn="ctr" defTabSz="825500" rtl="0" fontAlgn="auto" latinLnBrk="0" hangingPunct="0">
+              <a:lnSpc>
+                <a:spcPct val="100000"/>
+              </a:lnSpc>
+              <a:spcBef>
+                <a:spcPts val="5900"/>
+              </a:spcBef>
+              <a:spcAft>
+                <a:spcPts val="0"/>
+              </a:spcAft>
+              <a:buClrTx/>
+              <a:buSzTx/>
+              <a:buFontTx/>
+              <a:buNone/>
+              <a:tabLst/>
+            </a:pPr>
+            <a:r>
+              <a:rPr kumimoji="0" lang="de-DE" sz="4800" b="0" i="0" u="none" strike="noStrike" cap="none" spc="0" normalizeH="0" baseline="0" dirty="0" smtClean="0">
+                <a:ln>
+                  <a:noFill/>
+                </a:ln>
+                <a:solidFill>
+                  <a:srgbClr val="000000"/>
+                </a:solidFill>
+                <a:effectLst/>
+                <a:uFillTx/>
+                <a:latin typeface="Helvetica Neue"/>
+                <a:ea typeface="Helvetica Neue"/>
+                <a:cs typeface="Helvetica Neue"/>
+                <a:sym typeface="Helvetica Neue"/>
+              </a:rPr>
+              <a:t>Hyperparameter: Batch</a:t>
+            </a:r>
+            <a:r>
+              <a:rPr kumimoji="0" lang="de-DE" sz="4800" b="0" i="0" u="none" strike="noStrike" cap="none" spc="0" normalizeH="0" dirty="0" smtClean="0">
+                <a:ln>
+                  <a:noFill/>
+                </a:ln>
+                <a:solidFill>
+                  <a:srgbClr val="000000"/>
+                </a:solidFill>
+                <a:effectLst/>
+                <a:uFillTx/>
+                <a:latin typeface="Helvetica Neue"/>
+                <a:ea typeface="Helvetica Neue"/>
+                <a:cs typeface="Helvetica Neue"/>
+                <a:sym typeface="Helvetica Neue"/>
+              </a:rPr>
+              <a:t> size</a:t>
+            </a:r>
+            <a:endParaRPr kumimoji="0" lang="de-DE" sz="4800" b="0" i="0" u="none" strike="noStrike" cap="none" spc="0" normalizeH="0" baseline="0" dirty="0">
+              <a:ln>
+                <a:noFill/>
+              </a:ln>
+              <a:solidFill>
+                <a:srgbClr val="000000"/>
+              </a:solidFill>
+              <a:effectLst/>
+              <a:uFillTx/>
+              <a:latin typeface="Helvetica Neue"/>
+              <a:ea typeface="Helvetica Neue"/>
+              <a:cs typeface="Helvetica Neue"/>
+              <a:sym typeface="Helvetica Neue"/>
+            </a:endParaRPr>
+          </a:p>
+        </p:txBody>
+      </p:sp>
+      <p:sp>
+        <p:nvSpPr>
+          <p:cNvPr id="7" name="TextBox 6"/>
+          <p:cNvSpPr txBox="1"/>
+          <p:nvPr/>
+        </p:nvSpPr>
+        <p:spPr>
+          <a:xfrm>
+            <a:off x="4102167" y="11332009"/>
+            <a:ext cx="16019238" cy="1597873"/>
+          </a:xfrm>
+          <a:prstGeom prst="rect">
+            <a:avLst/>
+          </a:prstGeom>
+          <a:noFill/>
+          <a:ln w="12700" cap="flat">
+            <a:noFill/>
+            <a:miter lim="400000"/>
+          </a:ln>
+          <a:effectLst/>
+          <a:sp3d/>
+        </p:spPr>
+        <p:style>
+          <a:lnRef idx="0">
+            <a:scrgbClr r="0" g="0" b="0"/>
+          </a:lnRef>
+          <a:fillRef idx="0">
+            <a:scrgbClr r="0" g="0" b="0"/>
+          </a:fillRef>
+          <a:effectRef idx="0">
+            <a:scrgbClr r="0" g="0" b="0"/>
+          </a:effectRef>
+          <a:fontRef idx="none"/>
+        </p:style>
+        <p:txBody>
+          <a:bodyPr rot="0" spcFirstLastPara="1" vertOverflow="overflow" horzOverflow="overflow" vert="horz" wrap="square" lIns="50800" tIns="50800" rIns="50800" bIns="50800" numCol="1" spcCol="38100" rtlCol="0" anchor="ctr">
+            <a:spAutoFit/>
+          </a:bodyPr>
+          <a:lstStyle/>
+          <a:p>
+            <a:pPr marL="0" marR="0" indent="0" algn="ctr" defTabSz="825500" rtl="0" fontAlgn="auto" latinLnBrk="0" hangingPunct="0">
+              <a:lnSpc>
+                <a:spcPct val="100000"/>
+              </a:lnSpc>
+              <a:spcBef>
+                <a:spcPts val="5900"/>
+              </a:spcBef>
+              <a:spcAft>
+                <a:spcPts val="0"/>
+              </a:spcAft>
+              <a:buClrTx/>
+              <a:buSzTx/>
+              <a:buFontTx/>
+              <a:buNone/>
+              <a:tabLst/>
+            </a:pPr>
+            <a:r>
+              <a:rPr kumimoji="0" lang="de-DE" sz="4800" b="0" i="0" u="none" strike="noStrike" cap="none" spc="0" normalizeH="0" baseline="0" dirty="0" smtClean="0">
+                <a:ln>
+                  <a:noFill/>
+                </a:ln>
+                <a:solidFill>
+                  <a:srgbClr val="000000"/>
+                </a:solidFill>
+                <a:effectLst/>
+                <a:uFillTx/>
+                <a:latin typeface="Helvetica Neue"/>
+                <a:ea typeface="Helvetica Neue"/>
+                <a:cs typeface="Helvetica Neue"/>
+                <a:sym typeface="Helvetica Neue"/>
+              </a:rPr>
+              <a:t>256 is the maximum batch size possible</a:t>
+            </a:r>
+            <a:endParaRPr kumimoji="0" lang="de-DE" sz="4800" b="0" i="0" u="none" strike="noStrike" cap="none" spc="0" normalizeH="0" baseline="0" dirty="0">
+              <a:ln>
+                <a:noFill/>
+              </a:ln>
+              <a:solidFill>
+                <a:srgbClr val="000000"/>
+              </a:solidFill>
+              <a:effectLst/>
+              <a:uFillTx/>
+              <a:latin typeface="Helvetica Neue"/>
+              <a:ea typeface="Helvetica Neue"/>
+              <a:cs typeface="Helvetica Neue"/>
+              <a:sym typeface="Helvetica Neue"/>
+            </a:endParaRPr>
+          </a:p>
+        </p:txBody>
+      </p:sp>
+      <p:pic>
+        <p:nvPicPr>
+          <p:cNvPr id="4" name="Picture 3"/>
+          <p:cNvPicPr>
+            <a:picLocks noChangeAspect="1"/>
+          </p:cNvPicPr>
+          <p:nvPr/>
+        </p:nvPicPr>
+        <p:blipFill>
+          <a:blip r:embed="rId2">
+            <a:extLst>
+              <a:ext uri="{28A0092B-C50C-407E-A947-70E740481C1C}">
+                <a14:useLocalDpi xmlns:a14="http://schemas.microsoft.com/office/drawing/2010/main" val="0"/>
+              </a:ext>
+            </a:extLst>
+          </a:blip>
+          <a:stretch>
+            <a:fillRect/>
+          </a:stretch>
+        </p:blipFill>
+        <p:spPr>
+          <a:xfrm>
+            <a:off x="537369" y="3994038"/>
+            <a:ext cx="23309262" cy="5985533"/>
+          </a:xfrm>
+          <a:prstGeom prst="rect">
+            <a:avLst/>
+          </a:prstGeom>
+        </p:spPr>
+      </p:pic>
+    </p:spTree>
+    <p:extLst>
+      <p:ext uri="{BB962C8B-B14F-4D97-AF65-F5344CB8AC3E}">
+        <p14:creationId xmlns:p14="http://schemas.microsoft.com/office/powerpoint/2010/main" val="3213555017"/>
+      </p:ext>
+    </p:extLst>
+  </p:cSld>
+  <p:clrMapOvr>
+    <a:masterClrMapping/>
+  </p:clrMapOvr>
+  <p:transition spd="med"/>
+  <p:timing>
+    <p:tnLst>
+      <p:par>
+        <p:cTn id="1" dur="indefinite" restart="never" nodeType="tmRoot"/>
+      </p:par>
+    </p:tnLst>
+  </p:timing>
+</p:sld>
+</file>
+
+<file path=ppt/slides/slide26.xml><?xml version="1.0" encoding="utf-8"?>
+<p:sld xmlns:a="http://schemas.openxmlformats.org/drawingml/2006/main" xmlns:r="http://schemas.openxmlformats.org/officeDocument/2006/relationships" xmlns:p="http://schemas.openxmlformats.org/presentationml/2006/main">
+  <p:cSld>
+    <p:spTree>
+      <p:nvGrpSpPr>
+        <p:cNvPr id="1" name=""/>
+        <p:cNvGrpSpPr/>
+        <p:nvPr/>
+      </p:nvGrpSpPr>
+      <p:grpSpPr>
+        <a:xfrm>
+          <a:off x="0" y="0"/>
+          <a:ext cx="0" cy="0"/>
+          <a:chOff x="0" y="0"/>
+          <a:chExt cx="0" cy="0"/>
+        </a:xfrm>
+      </p:grpSpPr>
+      <p:sp>
+        <p:nvSpPr>
+          <p:cNvPr id="2" name="Title 1"/>
+          <p:cNvSpPr>
+            <a:spLocks noGrp="1"/>
+          </p:cNvSpPr>
+          <p:nvPr>
+            <p:ph type="title"/>
+          </p:nvPr>
+        </p:nvSpPr>
+        <p:spPr/>
+        <p:txBody>
+          <a:bodyPr/>
+          <a:lstStyle/>
+          <a:p>
+            <a:r>
+              <a:rPr lang="de-DE" dirty="0" smtClean="0"/>
+              <a:t>Experiments</a:t>
+            </a:r>
+            <a:endParaRPr lang="de-DE" dirty="0"/>
+          </a:p>
+        </p:txBody>
+      </p:sp>
+      <p:sp>
+        <p:nvSpPr>
+          <p:cNvPr id="5" name="TextBox 4"/>
+          <p:cNvSpPr txBox="1"/>
+          <p:nvPr/>
+        </p:nvSpPr>
+        <p:spPr>
+          <a:xfrm>
+            <a:off x="5913260" y="1842663"/>
+            <a:ext cx="12397052" cy="1597873"/>
+          </a:xfrm>
+          <a:prstGeom prst="rect">
+            <a:avLst/>
+          </a:prstGeom>
+          <a:noFill/>
+          <a:ln w="12700" cap="flat">
+            <a:noFill/>
+            <a:miter lim="400000"/>
+          </a:ln>
+          <a:effectLst/>
+          <a:sp3d/>
+        </p:spPr>
+        <p:style>
+          <a:lnRef idx="0">
+            <a:scrgbClr r="0" g="0" b="0"/>
+          </a:lnRef>
+          <a:fillRef idx="0">
+            <a:scrgbClr r="0" g="0" b="0"/>
+          </a:fillRef>
+          <a:effectRef idx="0">
+            <a:scrgbClr r="0" g="0" b="0"/>
+          </a:effectRef>
+          <a:fontRef idx="none"/>
+        </p:style>
+        <p:txBody>
+          <a:bodyPr rot="0" spcFirstLastPara="1" vertOverflow="overflow" horzOverflow="overflow" vert="horz" wrap="square" lIns="50800" tIns="50800" rIns="50800" bIns="50800" numCol="1" spcCol="38100" rtlCol="0" anchor="ctr">
+            <a:spAutoFit/>
+          </a:bodyPr>
+          <a:lstStyle/>
+          <a:p>
+            <a:pPr marL="0" marR="0" indent="0" algn="ctr" defTabSz="825500" rtl="0" fontAlgn="auto" latinLnBrk="0" hangingPunct="0">
+              <a:lnSpc>
+                <a:spcPct val="100000"/>
+              </a:lnSpc>
+              <a:spcBef>
+                <a:spcPts val="5900"/>
+              </a:spcBef>
+              <a:spcAft>
+                <a:spcPts val="0"/>
+              </a:spcAft>
+              <a:buClrTx/>
+              <a:buSzTx/>
+              <a:buFontTx/>
+              <a:buNone/>
+              <a:tabLst/>
+            </a:pPr>
+            <a:r>
+              <a:rPr kumimoji="0" lang="de-DE" sz="4800" b="0" i="0" u="none" strike="noStrike" cap="none" spc="0" normalizeH="0" baseline="0" dirty="0" smtClean="0">
+                <a:ln>
+                  <a:noFill/>
+                </a:ln>
+                <a:solidFill>
+                  <a:srgbClr val="000000"/>
+                </a:solidFill>
+                <a:effectLst/>
+                <a:uFillTx/>
+                <a:latin typeface="Helvetica Neue"/>
+                <a:ea typeface="Helvetica Neue"/>
+                <a:cs typeface="Helvetica Neue"/>
+                <a:sym typeface="Helvetica Neue"/>
+              </a:rPr>
+              <a:t>Hyperparameter: Batch</a:t>
+            </a:r>
+            <a:r>
+              <a:rPr kumimoji="0" lang="de-DE" sz="4800" b="0" i="0" u="none" strike="noStrike" cap="none" spc="0" normalizeH="0" dirty="0" smtClean="0">
+                <a:ln>
+                  <a:noFill/>
+                </a:ln>
+                <a:solidFill>
+                  <a:srgbClr val="000000"/>
+                </a:solidFill>
+                <a:effectLst/>
+                <a:uFillTx/>
+                <a:latin typeface="Helvetica Neue"/>
+                <a:ea typeface="Helvetica Neue"/>
+                <a:cs typeface="Helvetica Neue"/>
+                <a:sym typeface="Helvetica Neue"/>
+              </a:rPr>
+              <a:t> size</a:t>
+            </a:r>
+            <a:endParaRPr kumimoji="0" lang="de-DE" sz="4800" b="0" i="0" u="none" strike="noStrike" cap="none" spc="0" normalizeH="0" baseline="0" dirty="0">
+              <a:ln>
+                <a:noFill/>
+              </a:ln>
+              <a:solidFill>
+                <a:srgbClr val="000000"/>
+              </a:solidFill>
+              <a:effectLst/>
+              <a:uFillTx/>
+              <a:latin typeface="Helvetica Neue"/>
+              <a:ea typeface="Helvetica Neue"/>
+              <a:cs typeface="Helvetica Neue"/>
+              <a:sym typeface="Helvetica Neue"/>
+            </a:endParaRPr>
+          </a:p>
+        </p:txBody>
+      </p:sp>
+      <p:sp>
+        <p:nvSpPr>
+          <p:cNvPr id="7" name="TextBox 6"/>
+          <p:cNvSpPr txBox="1"/>
+          <p:nvPr/>
+        </p:nvSpPr>
+        <p:spPr>
+          <a:xfrm>
+            <a:off x="4102167" y="11332009"/>
+            <a:ext cx="16019238" cy="1597873"/>
+          </a:xfrm>
+          <a:prstGeom prst="rect">
+            <a:avLst/>
+          </a:prstGeom>
+          <a:noFill/>
+          <a:ln w="12700" cap="flat">
+            <a:noFill/>
+            <a:miter lim="400000"/>
+          </a:ln>
+          <a:effectLst/>
+          <a:sp3d/>
+        </p:spPr>
+        <p:style>
+          <a:lnRef idx="0">
+            <a:scrgbClr r="0" g="0" b="0"/>
+          </a:lnRef>
+          <a:fillRef idx="0">
+            <a:scrgbClr r="0" g="0" b="0"/>
+          </a:fillRef>
+          <a:effectRef idx="0">
+            <a:scrgbClr r="0" g="0" b="0"/>
+          </a:effectRef>
+          <a:fontRef idx="none"/>
+        </p:style>
+        <p:txBody>
+          <a:bodyPr rot="0" spcFirstLastPara="1" vertOverflow="overflow" horzOverflow="overflow" vert="horz" wrap="square" lIns="50800" tIns="50800" rIns="50800" bIns="50800" numCol="1" spcCol="38100" rtlCol="0" anchor="ctr">
+            <a:spAutoFit/>
+          </a:bodyPr>
+          <a:lstStyle/>
+          <a:p>
+            <a:pPr marL="0" marR="0" indent="0" algn="ctr" defTabSz="825500" rtl="0" fontAlgn="auto" latinLnBrk="0" hangingPunct="0">
+              <a:lnSpc>
+                <a:spcPct val="100000"/>
+              </a:lnSpc>
+              <a:spcBef>
+                <a:spcPts val="5900"/>
+              </a:spcBef>
+              <a:spcAft>
+                <a:spcPts val="0"/>
+              </a:spcAft>
+              <a:buClrTx/>
+              <a:buSzTx/>
+              <a:buFontTx/>
+              <a:buNone/>
+              <a:tabLst/>
+            </a:pPr>
+            <a:r>
+              <a:rPr kumimoji="0" lang="de-DE" sz="4800" b="0" i="0" u="none" strike="noStrike" cap="none" spc="0" normalizeH="0" baseline="0" dirty="0" smtClean="0">
+                <a:ln>
+                  <a:noFill/>
+                </a:ln>
+                <a:solidFill>
+                  <a:srgbClr val="000000"/>
+                </a:solidFill>
+                <a:effectLst/>
+                <a:uFillTx/>
+                <a:latin typeface="Helvetica Neue"/>
+                <a:ea typeface="Helvetica Neue"/>
+                <a:cs typeface="Helvetica Neue"/>
+                <a:sym typeface="Helvetica Neue"/>
+              </a:rPr>
+              <a:t>256 is the maximum batch size possible</a:t>
+            </a:r>
+            <a:endParaRPr kumimoji="0" lang="de-DE" sz="4800" b="0" i="0" u="none" strike="noStrike" cap="none" spc="0" normalizeH="0" baseline="0" dirty="0">
+              <a:ln>
+                <a:noFill/>
+              </a:ln>
+              <a:solidFill>
+                <a:srgbClr val="000000"/>
+              </a:solidFill>
+              <a:effectLst/>
+              <a:uFillTx/>
+              <a:latin typeface="Helvetica Neue"/>
+              <a:ea typeface="Helvetica Neue"/>
+              <a:cs typeface="Helvetica Neue"/>
+              <a:sym typeface="Helvetica Neue"/>
+            </a:endParaRPr>
+          </a:p>
+        </p:txBody>
+      </p:sp>
+      <p:pic>
+        <p:nvPicPr>
+          <p:cNvPr id="3" name="Picture 2"/>
+          <p:cNvPicPr>
+            <a:picLocks noChangeAspect="1"/>
+          </p:cNvPicPr>
+          <p:nvPr/>
+        </p:nvPicPr>
+        <p:blipFill>
+          <a:blip r:embed="rId2">
+            <a:extLst>
+              <a:ext uri="{28A0092B-C50C-407E-A947-70E740481C1C}">
+                <a14:useLocalDpi xmlns:a14="http://schemas.microsoft.com/office/drawing/2010/main" val="0"/>
+              </a:ext>
+            </a:extLst>
+          </a:blip>
+          <a:stretch>
+            <a:fillRect/>
+          </a:stretch>
+        </p:blipFill>
+        <p:spPr>
+          <a:xfrm>
+            <a:off x="3975792" y="3668382"/>
+            <a:ext cx="16271988" cy="7950760"/>
+          </a:xfrm>
+          <a:prstGeom prst="rect">
+            <a:avLst/>
+          </a:prstGeom>
+        </p:spPr>
+      </p:pic>
+      <p:sp>
+        <p:nvSpPr>
+          <p:cNvPr id="6" name="Rectangle 5"/>
+          <p:cNvSpPr/>
+          <p:nvPr/>
+        </p:nvSpPr>
+        <p:spPr>
+          <a:xfrm>
+            <a:off x="16685703" y="4496499"/>
+            <a:ext cx="1828800" cy="276837"/>
+          </a:xfrm>
+          <a:prstGeom prst="rect">
+            <a:avLst/>
+          </a:prstGeom>
+          <a:noFill/>
+          <a:ln w="57150" cap="flat">
+            <a:solidFill>
+              <a:schemeClr val="accent3"/>
+            </a:solidFill>
+            <a:miter lim="400000"/>
+          </a:ln>
+          <a:effectLst/>
+          <a:sp3d/>
+        </p:spPr>
+        <p:style>
+          <a:lnRef idx="0">
+            <a:scrgbClr r="0" g="0" b="0"/>
+          </a:lnRef>
+          <a:fillRef idx="0">
+            <a:scrgbClr r="0" g="0" b="0"/>
+          </a:fillRef>
+          <a:effectRef idx="0">
+            <a:scrgbClr r="0" g="0" b="0"/>
+          </a:effectRef>
+          <a:fontRef idx="none"/>
+        </p:style>
+        <p:txBody>
+          <a:bodyPr rot="0" spcFirstLastPara="1" vertOverflow="overflow" horzOverflow="overflow" vert="horz" wrap="square" lIns="0" tIns="0" rIns="0" bIns="0" numCol="1" spcCol="38100" rtlCol="0" anchor="ctr">
+            <a:spAutoFit/>
+          </a:bodyPr>
+          <a:lstStyle/>
+          <a:p>
+            <a:pPr marL="0" marR="0" indent="0" algn="ctr" defTabSz="825500" rtl="0" fontAlgn="auto" latinLnBrk="0" hangingPunct="0">
+              <a:lnSpc>
+                <a:spcPct val="100000"/>
+              </a:lnSpc>
+              <a:spcBef>
+                <a:spcPts val="0"/>
+              </a:spcBef>
+              <a:spcAft>
+                <a:spcPts val="0"/>
+              </a:spcAft>
+              <a:buClrTx/>
+              <a:buSzTx/>
+              <a:buFontTx/>
+              <a:buNone/>
+              <a:tabLst/>
+            </a:pPr>
+            <a:endParaRPr kumimoji="0" lang="de-DE" sz="3200" b="0" i="0" u="none" strike="noStrike" cap="none" spc="0" normalizeH="0" baseline="0">
+              <a:ln>
+                <a:noFill/>
+              </a:ln>
+              <a:solidFill>
+                <a:srgbClr val="FFFFFF"/>
+              </a:solidFill>
+              <a:effectLst/>
+              <a:uFillTx/>
+              <a:latin typeface="+mn-lt"/>
+              <a:ea typeface="+mn-ea"/>
+              <a:cs typeface="+mn-cs"/>
+              <a:sym typeface="Helvetica Neue Medium"/>
+            </a:endParaRPr>
+          </a:p>
+        </p:txBody>
+      </p:sp>
+      <p:sp>
+        <p:nvSpPr>
+          <p:cNvPr id="8" name="Rectangle 7"/>
+          <p:cNvSpPr/>
+          <p:nvPr/>
+        </p:nvSpPr>
+        <p:spPr>
+          <a:xfrm>
+            <a:off x="16702481" y="9439012"/>
+            <a:ext cx="1828800" cy="276837"/>
+          </a:xfrm>
+          <a:prstGeom prst="rect">
+            <a:avLst/>
+          </a:prstGeom>
+          <a:noFill/>
+          <a:ln w="57150" cap="flat">
+            <a:solidFill>
+              <a:schemeClr val="accent5"/>
+            </a:solidFill>
+            <a:miter lim="400000"/>
+          </a:ln>
+          <a:effectLst/>
+          <a:sp3d/>
+        </p:spPr>
+        <p:style>
+          <a:lnRef idx="0">
+            <a:scrgbClr r="0" g="0" b="0"/>
+          </a:lnRef>
+          <a:fillRef idx="0">
+            <a:scrgbClr r="0" g="0" b="0"/>
+          </a:fillRef>
+          <a:effectRef idx="0">
+            <a:scrgbClr r="0" g="0" b="0"/>
+          </a:effectRef>
+          <a:fontRef idx="none"/>
+        </p:style>
+        <p:txBody>
+          <a:bodyPr rot="0" spcFirstLastPara="1" vertOverflow="overflow" horzOverflow="overflow" vert="horz" wrap="square" lIns="0" tIns="0" rIns="0" bIns="0" numCol="1" spcCol="38100" rtlCol="0" anchor="ctr">
+            <a:spAutoFit/>
+          </a:bodyPr>
+          <a:lstStyle/>
+          <a:p>
+            <a:pPr marL="0" marR="0" indent="0" algn="ctr" defTabSz="825500" rtl="0" fontAlgn="auto" latinLnBrk="0" hangingPunct="0">
+              <a:lnSpc>
+                <a:spcPct val="100000"/>
+              </a:lnSpc>
+              <a:spcBef>
+                <a:spcPts val="0"/>
+              </a:spcBef>
+              <a:spcAft>
+                <a:spcPts val="0"/>
+              </a:spcAft>
+              <a:buClrTx/>
+              <a:buSzTx/>
+              <a:buFontTx/>
+              <a:buNone/>
+              <a:tabLst/>
+            </a:pPr>
+            <a:endParaRPr kumimoji="0" lang="de-DE" sz="3200" b="0" i="0" u="none" strike="noStrike" cap="none" spc="0" normalizeH="0" baseline="0">
+              <a:ln>
+                <a:noFill/>
+              </a:ln>
+              <a:solidFill>
+                <a:srgbClr val="FFFFFF"/>
+              </a:solidFill>
+              <a:effectLst/>
+              <a:uFillTx/>
+              <a:latin typeface="+mn-lt"/>
+              <a:ea typeface="+mn-ea"/>
+              <a:cs typeface="+mn-cs"/>
+              <a:sym typeface="Helvetica Neue Medium"/>
+            </a:endParaRPr>
+          </a:p>
+        </p:txBody>
+      </p:sp>
+    </p:spTree>
+    <p:extLst>
+      <p:ext uri="{BB962C8B-B14F-4D97-AF65-F5344CB8AC3E}">
+        <p14:creationId xmlns:p14="http://schemas.microsoft.com/office/powerpoint/2010/main" val="520298581"/>
+      </p:ext>
+    </p:extLst>
+  </p:cSld>
+  <p:clrMapOvr>
+    <a:masterClrMapping/>
+  </p:clrMapOvr>
+  <p:transition spd="med"/>
+  <p:timing>
+    <p:tnLst>
+      <p:par>
+        <p:cTn id="1" dur="indefinite" restart="never" nodeType="tmRoot"/>
+      </p:par>
+    </p:tnLst>
+  </p:timing>
+</p:sld>
+</file>
+
+<file path=ppt/slides/slide27.xml><?xml version="1.0" encoding="utf-8"?>
+<p:sld xmlns:a="http://schemas.openxmlformats.org/drawingml/2006/main" xmlns:r="http://schemas.openxmlformats.org/officeDocument/2006/relationships" xmlns:p="http://schemas.openxmlformats.org/presentationml/2006/main">
+  <p:cSld>
+    <p:spTree>
+      <p:nvGrpSpPr>
+        <p:cNvPr id="1" name=""/>
+        <p:cNvGrpSpPr/>
+        <p:nvPr/>
+      </p:nvGrpSpPr>
+      <p:grpSpPr>
+        <a:xfrm>
+          <a:off x="0" y="0"/>
+          <a:ext cx="0" cy="0"/>
+          <a:chOff x="0" y="0"/>
+          <a:chExt cx="0" cy="0"/>
+        </a:xfrm>
+      </p:grpSpPr>
+      <p:sp>
+        <p:nvSpPr>
+          <p:cNvPr id="2" name="Title 1"/>
+          <p:cNvSpPr>
+            <a:spLocks noGrp="1"/>
+          </p:cNvSpPr>
+          <p:nvPr>
+            <p:ph type="title"/>
+          </p:nvPr>
+        </p:nvSpPr>
+        <p:spPr/>
+        <p:txBody>
+          <a:bodyPr/>
+          <a:lstStyle/>
+          <a:p>
+            <a:r>
+              <a:rPr lang="de-DE" dirty="0" smtClean="0"/>
+              <a:t>Experiments</a:t>
+            </a:r>
+            <a:endParaRPr lang="de-DE" dirty="0"/>
+          </a:p>
+        </p:txBody>
+      </p:sp>
+      <p:sp>
+        <p:nvSpPr>
+          <p:cNvPr id="3" name="Text Placeholder 2"/>
+          <p:cNvSpPr>
+            <a:spLocks noGrp="1"/>
+          </p:cNvSpPr>
+          <p:nvPr>
+            <p:ph type="body" idx="1"/>
+          </p:nvPr>
+        </p:nvSpPr>
+        <p:spPr/>
+        <p:txBody>
+          <a:bodyPr/>
+          <a:lstStyle/>
+          <a:p>
+            <a:r>
+              <a:rPr lang="de-DE" dirty="0" smtClean="0"/>
+              <a:t>In Progress</a:t>
+            </a:r>
+          </a:p>
+          <a:p>
+            <a:pPr lvl="1"/>
+            <a:r>
+              <a:rPr lang="de-DE" dirty="0" smtClean="0"/>
+              <a:t>Finding the representative objects</a:t>
+            </a:r>
+          </a:p>
+          <a:p>
+            <a:pPr lvl="1"/>
+            <a:r>
+              <a:rPr lang="de-DE" dirty="0" smtClean="0"/>
+              <a:t>Experiments on DGCNN</a:t>
+            </a:r>
+          </a:p>
+          <a:p>
+            <a:pPr lvl="1"/>
+            <a:r>
+              <a:rPr lang="de-DE" dirty="0" smtClean="0"/>
+              <a:t>Experiments on PointNet: Lower batch size</a:t>
+            </a:r>
+            <a:endParaRPr lang="de-DE" dirty="0"/>
+          </a:p>
+        </p:txBody>
+      </p:sp>
+    </p:spTree>
+    <p:extLst>
+      <p:ext uri="{BB962C8B-B14F-4D97-AF65-F5344CB8AC3E}">
+        <p14:creationId xmlns:p14="http://schemas.microsoft.com/office/powerpoint/2010/main" val="1523696645"/>
+      </p:ext>
+    </p:extLst>
+  </p:cSld>
+  <p:clrMapOvr>
+    <a:masterClrMapping/>
+  </p:clrMapOvr>
+  <p:transition spd="med"/>
+  <p:timing>
+    <p:tnLst>
+      <p:par>
+        <p:cTn id="1" dur="indefinite" restart="never" nodeType="tmRoot"/>
+      </p:par>
+    </p:tnLst>
+  </p:timing>
+</p:sld>
+</file>
+
+<file path=ppt/slides/slide28.xml><?xml version="1.0" encoding="utf-8"?>
+<p:sld xmlns:a="http://schemas.openxmlformats.org/drawingml/2006/main" xmlns:r="http://schemas.openxmlformats.org/officeDocument/2006/relationships" xmlns:p="http://schemas.openxmlformats.org/presentationml/2006/main">
+  <p:cSld>
+    <p:spTree>
+      <p:nvGrpSpPr>
+        <p:cNvPr id="1" name=""/>
+        <p:cNvGrpSpPr/>
+        <p:nvPr/>
+      </p:nvGrpSpPr>
+      <p:grpSpPr>
+        <a:xfrm>
+          <a:off x="0" y="0"/>
+          <a:ext cx="0" cy="0"/>
+          <a:chOff x="0" y="0"/>
+          <a:chExt cx="0" cy="0"/>
+        </a:xfrm>
+      </p:grpSpPr>
+      <p:sp>
+        <p:nvSpPr>
+          <p:cNvPr id="228" name="References"/>
+          <p:cNvSpPr txBox="1">
+            <a:spLocks noGrp="1"/>
+          </p:cNvSpPr>
+          <p:nvPr>
+            <p:ph type="title"/>
+          </p:nvPr>
+        </p:nvSpPr>
+        <p:spPr>
+          <a:prstGeom prst="rect">
+            <a:avLst/>
+          </a:prstGeom>
+        </p:spPr>
+        <p:txBody>
+          <a:bodyPr/>
+          <a:lstStyle/>
+          <a:p>
+            <a:r>
+              <a:t>References</a:t>
+            </a:r>
+          </a:p>
+        </p:txBody>
+      </p:sp>
+      <p:sp>
+        <p:nvSpPr>
+          <p:cNvPr id="229" name="Zhu, Zhuotun and Wang, Xinggang and Bai, Song and Yao, Cong and Bai, Xiang : Deep learning representation using autoencoder for 3D shape retrieval…"/>
+          <p:cNvSpPr txBox="1">
+            <a:spLocks noGrp="1"/>
+          </p:cNvSpPr>
+          <p:nvPr>
+            <p:ph type="body" idx="1"/>
+          </p:nvPr>
+        </p:nvSpPr>
+        <p:spPr>
+          <a:xfrm>
+            <a:off x="1689100" y="-1695181"/>
+            <a:ext cx="21005800" cy="14141181"/>
+          </a:xfrm>
+          <a:prstGeom prst="rect">
+            <a:avLst/>
+          </a:prstGeom>
+        </p:spPr>
+        <p:txBody>
+          <a:bodyPr/>
+          <a:lstStyle/>
+          <a:p>
+            <a:pPr marL="396874" indent="-396874" defTabSz="457200">
+              <a:spcBef>
+                <a:spcPts val="0"/>
+              </a:spcBef>
+              <a:defRPr sz="3000">
+                <a:latin typeface="Courier"/>
+                <a:ea typeface="Courier"/>
+                <a:cs typeface="Courier"/>
+                <a:sym typeface="Courier"/>
+              </a:defRPr>
+            </a:pPr>
+            <a:r>
+              <a:t>Zhu, Zhuotun and Wang, Xinggang and Bai, Song and Yao, Cong and Bai, Xiang : Deep learning representation using autoencoder for 3D shape retrieval</a:t>
+            </a:r>
+          </a:p>
+          <a:p>
+            <a:pPr marL="396874" indent="-396874" defTabSz="457200">
+              <a:spcBef>
+                <a:spcPts val="0"/>
+              </a:spcBef>
+              <a:defRPr sz="3000">
+                <a:latin typeface="Courier"/>
+                <a:ea typeface="Courier"/>
+                <a:cs typeface="Courier"/>
+                <a:sym typeface="Courier"/>
+              </a:defRPr>
+            </a:pPr>
+            <a:r>
+              <a:t>Bickel, Sebastian and Sauer, Christopher and Schleich, Benjamin and Wartzack, Sandro: Comparing CAD part models for geometrical similarity: A concept using machine learning algorithms</a:t>
+            </a:r>
+          </a:p>
+          <a:p>
+            <a:pPr marL="396874" indent="-396874" defTabSz="457200">
+              <a:spcBef>
+                <a:spcPts val="0"/>
+              </a:spcBef>
+              <a:defRPr sz="3000">
+                <a:latin typeface="Courier"/>
+                <a:ea typeface="Courier"/>
+                <a:cs typeface="Courier"/>
+                <a:sym typeface="Courier"/>
+              </a:defRPr>
+            </a:pPr>
+            <a:r>
+              <a:t>Ohbuchi, Ryutarou and Osada, Kunio and Furuya, Takahiko and Banno, Tomohisa: Salient local visual features for shape-based 3D model retrieval</a:t>
+            </a:r>
+          </a:p>
+          <a:p>
+            <a:pPr marL="396874" indent="-396874" algn="just" defTabSz="457200">
+              <a:spcBef>
+                <a:spcPts val="0"/>
+              </a:spcBef>
+              <a:defRPr sz="3000">
+                <a:solidFill>
+                  <a:srgbClr val="333333"/>
+                </a:solidFill>
+                <a:latin typeface="Courier"/>
+                <a:ea typeface="Courier"/>
+                <a:cs typeface="Courier"/>
+                <a:sym typeface="Courier"/>
+              </a:defRPr>
+            </a:pPr>
+            <a:r>
+              <a:t>Koch, Sebastian and Matveev, Albert and Jiang, Zhongshi and Williams, Francis and Artemov, Alexey and Burnaev, Evgeny and Alexa, Marc and Zorin, Denis and Panozzo, Daniele:ABC: A Big CAD Model Dataset For Geometric Deep Learning</a:t>
+            </a:r>
+          </a:p>
+          <a:p>
+            <a:pPr marL="396874" indent="-396874" algn="just" defTabSz="457200">
+              <a:spcBef>
+                <a:spcPts val="0"/>
+              </a:spcBef>
+              <a:defRPr sz="3000">
+                <a:solidFill>
+                  <a:srgbClr val="333333"/>
+                </a:solidFill>
+                <a:latin typeface="Courier"/>
+                <a:ea typeface="Courier"/>
+                <a:cs typeface="Courier"/>
+                <a:sym typeface="Courier"/>
+              </a:defRPr>
+            </a:pPr>
+            <a:r>
+              <a:rPr u="sng">
+                <a:hlinkClick r:id="rId2"/>
+              </a:rPr>
+              <a:t>https://www.baeldung.com/cs/deep-belief-network</a:t>
+            </a:r>
+          </a:p>
+          <a:p>
+            <a:pPr marL="396874" indent="-396874" algn="just" defTabSz="457200">
+              <a:spcBef>
+                <a:spcPts val="0"/>
+              </a:spcBef>
+              <a:defRPr sz="3000">
+                <a:solidFill>
+                  <a:srgbClr val="333333"/>
+                </a:solidFill>
+                <a:latin typeface="Courier"/>
+                <a:ea typeface="Courier"/>
+                <a:cs typeface="Courier"/>
+                <a:sym typeface="Courier"/>
+              </a:defRPr>
+            </a:pPr>
+            <a:r>
+              <a:t>Mei, Guofeng, et al. "Unsupervised learning on 3d point clouds by clustering and contrasting." arXiv preprint arXiv:2202.02543 (2022)</a:t>
+            </a:r>
+          </a:p>
+        </p:txBody>
+      </p:sp>
+      <p:sp>
+        <p:nvSpPr>
+          <p:cNvPr id="230" name="Slide Number"/>
+          <p:cNvSpPr txBox="1">
+            <a:spLocks noGrp="1"/>
+          </p:cNvSpPr>
+          <p:nvPr>
+            <p:ph type="sldNum" sz="quarter" idx="4294967295"/>
+          </p:nvPr>
+        </p:nvSpPr>
+        <p:spPr>
+          <a:prstGeom prst="rect">
+            <a:avLst/>
+          </a:prstGeom>
+          <a:extLst>
+            <a:ext uri="{C572A759-6A51-4108-AA02-DFA0A04FC94B}">
+              <ma14:wrappingTextBoxFlag xmlns:ma14="http://schemas.microsoft.com/office/mac/drawingml/2011/main" xmlns:a14="http://schemas.microsoft.com/office/drawing/2010/main" xmlns:m="http://schemas.openxmlformats.org/officeDocument/2006/math" xmlns="" val="1"/>
+            </a:ext>
+          </a:extLst>
+        </p:spPr>
+        <p:txBody>
+          <a:bodyPr/>
+          <a:lstStyle/>
+          <a:p>
+            <a:fld id="{86CB4B4D-7CA3-9044-876B-883B54F8677D}" type="slidenum">
+              <a:t>28</a:t>
+            </a:fld>
+            <a:endParaRPr/>
+          </a:p>
+        </p:txBody>
+      </p:sp>
+    </p:spTree>
+  </p:cSld>
+  <p:clrMapOvr>
+    <a:masterClrMapping/>
+  </p:clrMapOvr>
+  <p:transition spd="med"/>
+  <p:timing>
+    <p:tnLst>
+      <p:par>
+        <p:cTn id="1" dur="indefinite" restart="never" nodeType="tmRoot"/>
+      </p:par>
+    </p:tnLst>
+  </p:timing>
+</p:sld>
+</file>
+
 <file path=ppt/slides/slide3.xml><?xml version="1.0" encoding="utf-8"?>
 <p:sld xmlns:a="http://schemas.openxmlformats.org/drawingml/2006/main" xmlns:r="http://schemas.openxmlformats.org/officeDocument/2006/relationships" xmlns:p="http://schemas.openxmlformats.org/presentationml/2006/main">
   <p:cSld>
@@ -14097,7 +22637,7 @@
           </a:prstGeom>
           <a:extLst>
             <a:ext uri="{C572A759-6A51-4108-AA02-DFA0A04FC94B}">
-              <ma14:wrappingTextBoxFlag xmlns="" xmlns:m="http://schemas.openxmlformats.org/officeDocument/2006/math" xmlns:a14="http://schemas.microsoft.com/office/drawing/2010/main" xmlns:ma14="http://schemas.microsoft.com/office/mac/drawingml/2011/main" val="1"/>
+              <ma14:wrappingTextBoxFlag xmlns:ma14="http://schemas.microsoft.com/office/mac/drawingml/2011/main" xmlns:a14="http://schemas.microsoft.com/office/drawing/2010/main" xmlns:m="http://schemas.openxmlformats.org/officeDocument/2006/math" xmlns="" val="1"/>
             </a:ext>
           </a:extLst>
         </p:spPr>
@@ -15016,7 +23556,7 @@
           </a:prstGeom>
           <a:extLst>
             <a:ext uri="{C572A759-6A51-4108-AA02-DFA0A04FC94B}">
-              <ma14:wrappingTextBoxFlag xmlns="" xmlns:m="http://schemas.openxmlformats.org/officeDocument/2006/math" xmlns:a14="http://schemas.microsoft.com/office/drawing/2010/main" xmlns:ma14="http://schemas.microsoft.com/office/mac/drawingml/2011/main" val="1"/>
+              <ma14:wrappingTextBoxFlag xmlns:ma14="http://schemas.microsoft.com/office/mac/drawingml/2011/main" xmlns:a14="http://schemas.microsoft.com/office/drawing/2010/main" xmlns:m="http://schemas.openxmlformats.org/officeDocument/2006/math" xmlns="" val="1"/>
             </a:ext>
           </a:extLst>
         </p:spPr>
@@ -15646,7 +24186,7 @@
           </a:ln>
           <a:extLst>
             <a:ext uri="{C572A759-6A51-4108-AA02-DFA0A04FC94B}">
-              <ma14:wrappingTextBoxFlag xmlns="" xmlns:m="http://schemas.openxmlformats.org/officeDocument/2006/math" xmlns:a14="http://schemas.microsoft.com/office/drawing/2010/main" xmlns:ma14="http://schemas.microsoft.com/office/mac/drawingml/2011/main" val="1"/>
+              <ma14:wrappingTextBoxFlag xmlns:ma14="http://schemas.microsoft.com/office/mac/drawingml/2011/main" xmlns:a14="http://schemas.microsoft.com/office/drawing/2010/main" xmlns:m="http://schemas.openxmlformats.org/officeDocument/2006/math" xmlns="" val="1"/>
             </a:ext>
           </a:extLst>
         </p:spPr>
@@ -15762,7 +24302,7 @@
             <a:effectLst/>
             <a:extLst>
               <a:ext uri="{C572A759-6A51-4108-AA02-DFA0A04FC94B}">
-                <ma14:wrappingTextBoxFlag xmlns="" xmlns:m="http://schemas.openxmlformats.org/officeDocument/2006/math" xmlns:a14="http://schemas.microsoft.com/office/drawing/2010/main" xmlns:ma14="http://schemas.microsoft.com/office/mac/drawingml/2011/main" val="1"/>
+                <ma14:wrappingTextBoxFlag xmlns:ma14="http://schemas.microsoft.com/office/mac/drawingml/2011/main" xmlns:a14="http://schemas.microsoft.com/office/drawing/2010/main" xmlns:m="http://schemas.openxmlformats.org/officeDocument/2006/math" xmlns="" val="1"/>
               </a:ext>
             </a:extLst>
           </p:spPr>
@@ -15807,7 +24347,7 @@
           </a:prstGeom>
           <a:extLst>
             <a:ext uri="{C572A759-6A51-4108-AA02-DFA0A04FC94B}">
-              <ma14:wrappingTextBoxFlag xmlns="" xmlns:m="http://schemas.openxmlformats.org/officeDocument/2006/math" xmlns:a14="http://schemas.microsoft.com/office/drawing/2010/main" xmlns:ma14="http://schemas.microsoft.com/office/mac/drawingml/2011/main" val="1"/>
+              <ma14:wrappingTextBoxFlag xmlns:ma14="http://schemas.microsoft.com/office/mac/drawingml/2011/main" xmlns:a14="http://schemas.microsoft.com/office/drawing/2010/main" xmlns:m="http://schemas.openxmlformats.org/officeDocument/2006/math" xmlns="" val="1"/>
             </a:ext>
           </a:extLst>
         </p:spPr>
@@ -16072,7 +24612,7 @@
           </a:ln>
           <a:extLst>
             <a:ext uri="{C572A759-6A51-4108-AA02-DFA0A04FC94B}">
-              <ma14:wrappingTextBoxFlag xmlns="" xmlns:m="http://schemas.openxmlformats.org/officeDocument/2006/math" xmlns:a14="http://schemas.microsoft.com/office/drawing/2010/main" xmlns:ma14="http://schemas.microsoft.com/office/mac/drawingml/2011/main" val="1"/>
+              <ma14:wrappingTextBoxFlag xmlns:ma14="http://schemas.microsoft.com/office/mac/drawingml/2011/main" xmlns:a14="http://schemas.microsoft.com/office/drawing/2010/main" xmlns:m="http://schemas.openxmlformats.org/officeDocument/2006/math" xmlns="" val="1"/>
             </a:ext>
           </a:extLst>
         </p:spPr>
@@ -16159,7 +24699,7 @@
             <a:effectLst/>
             <a:extLst>
               <a:ext uri="{C572A759-6A51-4108-AA02-DFA0A04FC94B}">
-                <ma14:wrappingTextBoxFlag xmlns="" xmlns:m="http://schemas.openxmlformats.org/officeDocument/2006/math" xmlns:a14="http://schemas.microsoft.com/office/drawing/2010/main" xmlns:ma14="http://schemas.microsoft.com/office/mac/drawingml/2011/main" val="1"/>
+                <ma14:wrappingTextBoxFlag xmlns:ma14="http://schemas.microsoft.com/office/mac/drawingml/2011/main" xmlns:a14="http://schemas.microsoft.com/office/drawing/2010/main" xmlns:m="http://schemas.openxmlformats.org/officeDocument/2006/math" xmlns="" val="1"/>
               </a:ext>
             </a:extLst>
           </p:spPr>
@@ -16243,7 +24783,7 @@
             <a:effectLst/>
             <a:extLst>
               <a:ext uri="{C572A759-6A51-4108-AA02-DFA0A04FC94B}">
-                <ma14:wrappingTextBoxFlag xmlns="" xmlns:m="http://schemas.openxmlformats.org/officeDocument/2006/math" xmlns:a14="http://schemas.microsoft.com/office/drawing/2010/main" xmlns:ma14="http://schemas.microsoft.com/office/mac/drawingml/2011/main" val="1"/>
+                <ma14:wrappingTextBoxFlag xmlns:ma14="http://schemas.microsoft.com/office/mac/drawingml/2011/main" xmlns:a14="http://schemas.microsoft.com/office/drawing/2010/main" xmlns:m="http://schemas.openxmlformats.org/officeDocument/2006/math" xmlns="" val="1"/>
               </a:ext>
             </a:extLst>
           </p:spPr>
@@ -16280,7 +24820,7 @@
           </a:prstGeom>
           <a:extLst>
             <a:ext uri="{C572A759-6A51-4108-AA02-DFA0A04FC94B}">
-              <ma14:wrappingTextBoxFlag xmlns="" xmlns:m="http://schemas.openxmlformats.org/officeDocument/2006/math" xmlns:a14="http://schemas.microsoft.com/office/drawing/2010/main" xmlns:ma14="http://schemas.microsoft.com/office/mac/drawingml/2011/main" val="1"/>
+              <ma14:wrappingTextBoxFlag xmlns:ma14="http://schemas.microsoft.com/office/mac/drawingml/2011/main" xmlns:a14="http://schemas.microsoft.com/office/drawing/2010/main" xmlns:m="http://schemas.openxmlformats.org/officeDocument/2006/math" xmlns="" val="1"/>
             </a:ext>
           </a:extLst>
         </p:spPr>
@@ -16531,7 +25071,7 @@
           </a:ln>
           <a:extLst>
             <a:ext uri="{C572A759-6A51-4108-AA02-DFA0A04FC94B}">
-              <ma14:wrappingTextBoxFlag xmlns="" xmlns:m="http://schemas.openxmlformats.org/officeDocument/2006/math" xmlns:a14="http://schemas.microsoft.com/office/drawing/2010/main" xmlns:ma14="http://schemas.microsoft.com/office/mac/drawingml/2011/main" val="1"/>
+              <ma14:wrappingTextBoxFlag xmlns:ma14="http://schemas.microsoft.com/office/mac/drawingml/2011/main" xmlns:a14="http://schemas.microsoft.com/office/drawing/2010/main" xmlns:m="http://schemas.openxmlformats.org/officeDocument/2006/math" xmlns="" val="1"/>
             </a:ext>
           </a:extLst>
         </p:spPr>
@@ -16785,7 +25325,7 @@
           </a:ln>
           <a:extLst>
             <a:ext uri="{C572A759-6A51-4108-AA02-DFA0A04FC94B}">
-              <ma14:wrappingTextBoxFlag xmlns="" xmlns:m="http://schemas.openxmlformats.org/officeDocument/2006/math" xmlns:a14="http://schemas.microsoft.com/office/drawing/2010/main" xmlns:ma14="http://schemas.microsoft.com/office/mac/drawingml/2011/main" val="1"/>
+              <ma14:wrappingTextBoxFlag xmlns:ma14="http://schemas.microsoft.com/office/mac/drawingml/2011/main" xmlns:a14="http://schemas.microsoft.com/office/drawing/2010/main" xmlns:m="http://schemas.openxmlformats.org/officeDocument/2006/math" xmlns="" val="1"/>
             </a:ext>
           </a:extLst>
         </p:spPr>
@@ -16828,7 +25368,7 @@
           </a:prstGeom>
           <a:extLst>
             <a:ext uri="{C572A759-6A51-4108-AA02-DFA0A04FC94B}">
-              <ma14:wrappingTextBoxFlag xmlns="" xmlns:m="http://schemas.openxmlformats.org/officeDocument/2006/math" xmlns:a14="http://schemas.microsoft.com/office/drawing/2010/main" xmlns:ma14="http://schemas.microsoft.com/office/mac/drawingml/2011/main" val="1"/>
+              <ma14:wrappingTextBoxFlag xmlns:ma14="http://schemas.microsoft.com/office/mac/drawingml/2011/main" xmlns:a14="http://schemas.microsoft.com/office/drawing/2010/main" xmlns:m="http://schemas.openxmlformats.org/officeDocument/2006/math" xmlns="" val="1"/>
             </a:ext>
           </a:extLst>
         </p:spPr>
@@ -16949,7 +25489,7 @@
           </a:ln>
           <a:extLst>
             <a:ext uri="{C572A759-6A51-4108-AA02-DFA0A04FC94B}">
-              <ma14:wrappingTextBoxFlag xmlns="" xmlns:m="http://schemas.openxmlformats.org/officeDocument/2006/math" xmlns:a14="http://schemas.microsoft.com/office/drawing/2010/main" xmlns:ma14="http://schemas.microsoft.com/office/mac/drawingml/2011/main" val="1"/>
+              <ma14:wrappingTextBoxFlag xmlns:ma14="http://schemas.microsoft.com/office/mac/drawingml/2011/main" xmlns:a14="http://schemas.microsoft.com/office/drawing/2010/main" xmlns:m="http://schemas.openxmlformats.org/officeDocument/2006/math" xmlns="" val="1"/>
             </a:ext>
           </a:extLst>
         </p:spPr>
@@ -16993,7 +25533,7 @@
           </a:prstGeom>
           <a:extLst>
             <a:ext uri="{C572A759-6A51-4108-AA02-DFA0A04FC94B}">
-              <ma14:wrappingTextBoxFlag xmlns="" xmlns:m="http://schemas.openxmlformats.org/officeDocument/2006/math" xmlns:a14="http://schemas.microsoft.com/office/drawing/2010/main" xmlns:ma14="http://schemas.microsoft.com/office/mac/drawingml/2011/main" val="1"/>
+              <ma14:wrappingTextBoxFlag xmlns:ma14="http://schemas.microsoft.com/office/mac/drawingml/2011/main" xmlns:a14="http://schemas.microsoft.com/office/drawing/2010/main" xmlns:m="http://schemas.openxmlformats.org/officeDocument/2006/math" xmlns="" val="1"/>
             </a:ext>
           </a:extLst>
         </p:spPr>

--- a/workshop_presentation.pptx
+++ b/workshop_presentation.pptx
@@ -5,7 +5,7 @@
     <p:sldMasterId id="2147483648" r:id="rId1"/>
   </p:sldMasterIdLst>
   <p:notesMasterIdLst>
-    <p:notesMasterId r:id="rId30"/>
+    <p:notesMasterId r:id="rId31"/>
   </p:notesMasterIdLst>
   <p:sldIdLst>
     <p:sldId id="256" r:id="rId2"/>
@@ -35,7 +35,8 @@
     <p:sldId id="281" r:id="rId26"/>
     <p:sldId id="282" r:id="rId27"/>
     <p:sldId id="283" r:id="rId28"/>
-    <p:sldId id="268" r:id="rId29"/>
+    <p:sldId id="284" r:id="rId29"/>
+    <p:sldId id="268" r:id="rId30"/>
   </p:sldIdLst>
   <p:sldSz cx="24384000" cy="13716000"/>
   <p:notesSz cx="6858000" cy="9144000"/>
@@ -2571,7 +2572,7 @@
           </a:ln>
           <a:extLst>
             <a:ext uri="{C572A759-6A51-4108-AA02-DFA0A04FC94B}">
-              <ma14:wrappingTextBoxFlag xmlns:ma14="http://schemas.microsoft.com/office/mac/drawingml/2011/main" xmlns:a14="http://schemas.microsoft.com/office/drawing/2010/main" xmlns:m="http://schemas.openxmlformats.org/officeDocument/2006/math" xmlns="" val="1"/>
+              <ma14:wrappingTextBoxFlag xmlns="" xmlns:m="http://schemas.openxmlformats.org/officeDocument/2006/math" xmlns:a14="http://schemas.microsoft.com/office/drawing/2010/main" xmlns:ma14="http://schemas.microsoft.com/office/mac/drawingml/2011/main" val="1"/>
             </a:ext>
           </a:extLst>
         </p:spPr>
@@ -2610,7 +2611,7 @@
           </a:ln>
           <a:extLst>
             <a:ext uri="{C572A759-6A51-4108-AA02-DFA0A04FC94B}">
-              <ma14:wrappingTextBoxFlag xmlns:ma14="http://schemas.microsoft.com/office/mac/drawingml/2011/main" xmlns:a14="http://schemas.microsoft.com/office/drawing/2010/main" xmlns:m="http://schemas.openxmlformats.org/officeDocument/2006/math" xmlns="" val="1"/>
+              <ma14:wrappingTextBoxFlag xmlns="" xmlns:m="http://schemas.openxmlformats.org/officeDocument/2006/math" xmlns:a14="http://schemas.microsoft.com/office/drawing/2010/main" xmlns:ma14="http://schemas.microsoft.com/office/mac/drawingml/2011/main" val="1"/>
             </a:ext>
           </a:extLst>
         </p:spPr>
@@ -3607,7 +3608,7 @@
           </a:ln>
           <a:extLst>
             <a:ext uri="{C572A759-6A51-4108-AA02-DFA0A04FC94B}">
-              <ma14:wrappingTextBoxFlag xmlns:ma14="http://schemas.microsoft.com/office/mac/drawingml/2011/main" xmlns:a14="http://schemas.microsoft.com/office/drawing/2010/main" xmlns:m="http://schemas.openxmlformats.org/officeDocument/2006/math" xmlns="" val="1"/>
+              <ma14:wrappingTextBoxFlag xmlns="" xmlns:m="http://schemas.openxmlformats.org/officeDocument/2006/math" xmlns:a14="http://schemas.microsoft.com/office/drawing/2010/main" xmlns:ma14="http://schemas.microsoft.com/office/mac/drawingml/2011/main" val="1"/>
             </a:ext>
           </a:extLst>
         </p:spPr>
@@ -3646,7 +3647,7 @@
           </a:ln>
           <a:extLst>
             <a:ext uri="{C572A759-6A51-4108-AA02-DFA0A04FC94B}">
-              <ma14:wrappingTextBoxFlag xmlns:ma14="http://schemas.microsoft.com/office/mac/drawingml/2011/main" xmlns:a14="http://schemas.microsoft.com/office/drawing/2010/main" xmlns:m="http://schemas.openxmlformats.org/officeDocument/2006/math" xmlns="" val="1"/>
+              <ma14:wrappingTextBoxFlag xmlns="" xmlns:m="http://schemas.openxmlformats.org/officeDocument/2006/math" xmlns:a14="http://schemas.microsoft.com/office/drawing/2010/main" xmlns:ma14="http://schemas.microsoft.com/office/mac/drawingml/2011/main" val="1"/>
             </a:ext>
           </a:extLst>
         </p:spPr>
@@ -3709,7 +3710,7 @@
           </a:prstGeom>
           <a:extLst>
             <a:ext uri="{C572A759-6A51-4108-AA02-DFA0A04FC94B}">
-              <ma14:wrappingTextBoxFlag xmlns:ma14="http://schemas.microsoft.com/office/mac/drawingml/2011/main" xmlns:a14="http://schemas.microsoft.com/office/drawing/2010/main" xmlns:m="http://schemas.openxmlformats.org/officeDocument/2006/math" xmlns="" val="1"/>
+              <ma14:wrappingTextBoxFlag xmlns="" xmlns:m="http://schemas.openxmlformats.org/officeDocument/2006/math" xmlns:a14="http://schemas.microsoft.com/office/drawing/2010/main" xmlns:ma14="http://schemas.microsoft.com/office/mac/drawingml/2011/main" val="1"/>
             </a:ext>
           </a:extLst>
         </p:spPr>
@@ -4002,7 +4003,7 @@
           </a:ln>
           <a:extLst>
             <a:ext uri="{C572A759-6A51-4108-AA02-DFA0A04FC94B}">
-              <ma14:wrappingTextBoxFlag xmlns:ma14="http://schemas.microsoft.com/office/mac/drawingml/2011/main" xmlns:a14="http://schemas.microsoft.com/office/drawing/2010/main" xmlns:m="http://schemas.openxmlformats.org/officeDocument/2006/math" xmlns="" val="1"/>
+              <ma14:wrappingTextBoxFlag xmlns="" xmlns:m="http://schemas.openxmlformats.org/officeDocument/2006/math" xmlns:a14="http://schemas.microsoft.com/office/drawing/2010/main" xmlns:ma14="http://schemas.microsoft.com/office/mac/drawingml/2011/main" val="1"/>
             </a:ext>
           </a:extLst>
         </p:spPr>
@@ -4151,7 +4152,7 @@
           </a:prstGeom>
           <a:extLst>
             <a:ext uri="{C572A759-6A51-4108-AA02-DFA0A04FC94B}">
-              <ma14:wrappingTextBoxFlag xmlns:ma14="http://schemas.microsoft.com/office/mac/drawingml/2011/main" xmlns:a14="http://schemas.microsoft.com/office/drawing/2010/main" xmlns:m="http://schemas.openxmlformats.org/officeDocument/2006/math" xmlns="" val="1"/>
+              <ma14:wrappingTextBoxFlag xmlns="" xmlns:m="http://schemas.openxmlformats.org/officeDocument/2006/math" xmlns:a14="http://schemas.microsoft.com/office/drawing/2010/main" xmlns:ma14="http://schemas.microsoft.com/office/mac/drawingml/2011/main" val="1"/>
             </a:ext>
           </a:extLst>
         </p:spPr>
@@ -4315,7 +4316,7 @@
           </a:ln>
           <a:extLst>
             <a:ext uri="{C572A759-6A51-4108-AA02-DFA0A04FC94B}">
-              <ma14:wrappingTextBoxFlag xmlns:ma14="http://schemas.microsoft.com/office/mac/drawingml/2011/main" xmlns:a14="http://schemas.microsoft.com/office/drawing/2010/main" xmlns:m="http://schemas.openxmlformats.org/officeDocument/2006/math" xmlns="" val="1"/>
+              <ma14:wrappingTextBoxFlag xmlns="" xmlns:m="http://schemas.openxmlformats.org/officeDocument/2006/math" xmlns:a14="http://schemas.microsoft.com/office/drawing/2010/main" xmlns:ma14="http://schemas.microsoft.com/office/mac/drawingml/2011/main" val="1"/>
             </a:ext>
           </a:extLst>
         </p:spPr>
@@ -4398,7 +4399,7 @@
           </a:ln>
           <a:extLst>
             <a:ext uri="{C572A759-6A51-4108-AA02-DFA0A04FC94B}">
-              <ma14:wrappingTextBoxFlag xmlns:ma14="http://schemas.microsoft.com/office/mac/drawingml/2011/main" xmlns:a14="http://schemas.microsoft.com/office/drawing/2010/main" xmlns:m="http://schemas.openxmlformats.org/officeDocument/2006/math" xmlns="" val="1"/>
+              <ma14:wrappingTextBoxFlag xmlns="" xmlns:m="http://schemas.openxmlformats.org/officeDocument/2006/math" xmlns:a14="http://schemas.microsoft.com/office/drawing/2010/main" xmlns:ma14="http://schemas.microsoft.com/office/mac/drawingml/2011/main" val="1"/>
             </a:ext>
           </a:extLst>
         </p:spPr>
@@ -4434,7 +4435,7 @@
           </a:ln>
           <a:extLst>
             <a:ext uri="{C572A759-6A51-4108-AA02-DFA0A04FC94B}">
-              <ma14:wrappingTextBoxFlag xmlns:ma14="http://schemas.microsoft.com/office/mac/drawingml/2011/main" xmlns:a14="http://schemas.microsoft.com/office/drawing/2010/main" xmlns:m="http://schemas.openxmlformats.org/officeDocument/2006/math" xmlns="" val="1"/>
+              <ma14:wrappingTextBoxFlag xmlns="" xmlns:m="http://schemas.openxmlformats.org/officeDocument/2006/math" xmlns:a14="http://schemas.microsoft.com/office/drawing/2010/main" xmlns:ma14="http://schemas.microsoft.com/office/mac/drawingml/2011/main" val="1"/>
             </a:ext>
           </a:extLst>
         </p:spPr>
@@ -4478,7 +4479,7 @@
           </a:prstGeom>
           <a:extLst>
             <a:ext uri="{C572A759-6A51-4108-AA02-DFA0A04FC94B}">
-              <ma14:wrappingTextBoxFlag xmlns:ma14="http://schemas.microsoft.com/office/mac/drawingml/2011/main" xmlns:a14="http://schemas.microsoft.com/office/drawing/2010/main" xmlns:m="http://schemas.openxmlformats.org/officeDocument/2006/math" xmlns="" val="1"/>
+              <ma14:wrappingTextBoxFlag xmlns="" xmlns:m="http://schemas.openxmlformats.org/officeDocument/2006/math" xmlns:a14="http://schemas.microsoft.com/office/drawing/2010/main" xmlns:ma14="http://schemas.microsoft.com/office/mac/drawingml/2011/main" val="1"/>
             </a:ext>
           </a:extLst>
         </p:spPr>
@@ -4712,7 +4713,7 @@
           </a:ln>
           <a:extLst>
             <a:ext uri="{C572A759-6A51-4108-AA02-DFA0A04FC94B}">
-              <ma14:wrappingTextBoxFlag xmlns:ma14="http://schemas.microsoft.com/office/mac/drawingml/2011/main" xmlns:a14="http://schemas.microsoft.com/office/drawing/2010/main" xmlns:m="http://schemas.openxmlformats.org/officeDocument/2006/math" xmlns="" val="1"/>
+              <ma14:wrappingTextBoxFlag xmlns="" xmlns:m="http://schemas.openxmlformats.org/officeDocument/2006/math" xmlns:a14="http://schemas.microsoft.com/office/drawing/2010/main" xmlns:ma14="http://schemas.microsoft.com/office/mac/drawingml/2011/main" val="1"/>
             </a:ext>
           </a:extLst>
         </p:spPr>
@@ -4808,7 +4809,7 @@
           </a:prstGeom>
           <a:extLst>
             <a:ext uri="{C572A759-6A51-4108-AA02-DFA0A04FC94B}">
-              <ma14:wrappingTextBoxFlag xmlns:ma14="http://schemas.microsoft.com/office/mac/drawingml/2011/main" xmlns:a14="http://schemas.microsoft.com/office/drawing/2010/main" xmlns:m="http://schemas.openxmlformats.org/officeDocument/2006/math" xmlns="" val="1"/>
+              <ma14:wrappingTextBoxFlag xmlns="" xmlns:m="http://schemas.openxmlformats.org/officeDocument/2006/math" xmlns:a14="http://schemas.microsoft.com/office/drawing/2010/main" xmlns:ma14="http://schemas.microsoft.com/office/mac/drawingml/2011/main" val="1"/>
             </a:ext>
           </a:extLst>
         </p:spPr>
@@ -5637,7 +5638,7 @@
           </a:ln>
           <a:extLst>
             <a:ext uri="{C572A759-6A51-4108-AA02-DFA0A04FC94B}">
-              <ma14:wrappingTextBoxFlag xmlns:ma14="http://schemas.microsoft.com/office/mac/drawingml/2011/main" xmlns:a14="http://schemas.microsoft.com/office/drawing/2010/main" xmlns:m="http://schemas.openxmlformats.org/officeDocument/2006/math" xmlns="" val="1"/>
+              <ma14:wrappingTextBoxFlag xmlns="" xmlns:m="http://schemas.openxmlformats.org/officeDocument/2006/math" xmlns:a14="http://schemas.microsoft.com/office/drawing/2010/main" xmlns:ma14="http://schemas.microsoft.com/office/mac/drawingml/2011/main" val="1"/>
             </a:ext>
           </a:extLst>
         </p:spPr>
@@ -5720,7 +5721,7 @@
           </a:ln>
           <a:extLst>
             <a:ext uri="{C572A759-6A51-4108-AA02-DFA0A04FC94B}">
-              <ma14:wrappingTextBoxFlag xmlns:ma14="http://schemas.microsoft.com/office/mac/drawingml/2011/main" xmlns:a14="http://schemas.microsoft.com/office/drawing/2010/main" xmlns:m="http://schemas.openxmlformats.org/officeDocument/2006/math" xmlns="" val="1"/>
+              <ma14:wrappingTextBoxFlag xmlns="" xmlns:m="http://schemas.openxmlformats.org/officeDocument/2006/math" xmlns:a14="http://schemas.microsoft.com/office/drawing/2010/main" xmlns:ma14="http://schemas.microsoft.com/office/mac/drawingml/2011/main" val="1"/>
             </a:ext>
           </a:extLst>
         </p:spPr>
@@ -5756,7 +5757,7 @@
           </a:ln>
           <a:extLst>
             <a:ext uri="{C572A759-6A51-4108-AA02-DFA0A04FC94B}">
-              <ma14:wrappingTextBoxFlag xmlns:ma14="http://schemas.microsoft.com/office/mac/drawingml/2011/main" xmlns:a14="http://schemas.microsoft.com/office/drawing/2010/main" xmlns:m="http://schemas.openxmlformats.org/officeDocument/2006/math" xmlns="" val="1"/>
+              <ma14:wrappingTextBoxFlag xmlns="" xmlns:m="http://schemas.openxmlformats.org/officeDocument/2006/math" xmlns:a14="http://schemas.microsoft.com/office/drawing/2010/main" xmlns:ma14="http://schemas.microsoft.com/office/mac/drawingml/2011/main" val="1"/>
             </a:ext>
           </a:extLst>
         </p:spPr>
@@ -5800,7 +5801,7 @@
           </a:prstGeom>
           <a:extLst>
             <a:ext uri="{C572A759-6A51-4108-AA02-DFA0A04FC94B}">
-              <ma14:wrappingTextBoxFlag xmlns:ma14="http://schemas.microsoft.com/office/mac/drawingml/2011/main" xmlns:a14="http://schemas.microsoft.com/office/drawing/2010/main" xmlns:m="http://schemas.openxmlformats.org/officeDocument/2006/math" xmlns="" val="1"/>
+              <ma14:wrappingTextBoxFlag xmlns="" xmlns:m="http://schemas.openxmlformats.org/officeDocument/2006/math" xmlns:a14="http://schemas.microsoft.com/office/drawing/2010/main" xmlns:ma14="http://schemas.microsoft.com/office/mac/drawingml/2011/main" val="1"/>
             </a:ext>
           </a:extLst>
         </p:spPr>
@@ -12836,7 +12837,7 @@
           </a:ln>
           <a:extLst>
             <a:ext uri="{C572A759-6A51-4108-AA02-DFA0A04FC94B}">
-              <ma14:wrappingTextBoxFlag xmlns:ma14="http://schemas.microsoft.com/office/mac/drawingml/2011/main" xmlns:a14="http://schemas.microsoft.com/office/drawing/2010/main" xmlns:m="http://schemas.openxmlformats.org/officeDocument/2006/math" xmlns="" val="1"/>
+              <ma14:wrappingTextBoxFlag xmlns="" xmlns:m="http://schemas.openxmlformats.org/officeDocument/2006/math" xmlns:a14="http://schemas.microsoft.com/office/drawing/2010/main" xmlns:ma14="http://schemas.microsoft.com/office/mac/drawingml/2011/main" val="1"/>
             </a:ext>
           </a:extLst>
         </p:spPr>
@@ -13001,7 +13002,7 @@
           </a:ln>
           <a:extLst>
             <a:ext uri="{C572A759-6A51-4108-AA02-DFA0A04FC94B}">
-              <ma14:wrappingTextBoxFlag xmlns:ma14="http://schemas.microsoft.com/office/mac/drawingml/2011/main" xmlns:a14="http://schemas.microsoft.com/office/drawing/2010/main" xmlns:m="http://schemas.openxmlformats.org/officeDocument/2006/math" xmlns="" val="1"/>
+              <ma14:wrappingTextBoxFlag xmlns="" xmlns:m="http://schemas.openxmlformats.org/officeDocument/2006/math" xmlns:a14="http://schemas.microsoft.com/office/drawing/2010/main" xmlns:ma14="http://schemas.microsoft.com/office/mac/drawingml/2011/main" val="1"/>
             </a:ext>
           </a:extLst>
         </p:spPr>
@@ -13097,7 +13098,7 @@
           </a:prstGeom>
           <a:extLst>
             <a:ext uri="{C572A759-6A51-4108-AA02-DFA0A04FC94B}">
-              <ma14:wrappingTextBoxFlag xmlns:ma14="http://schemas.microsoft.com/office/mac/drawingml/2011/main" xmlns:a14="http://schemas.microsoft.com/office/drawing/2010/main" xmlns:m="http://schemas.openxmlformats.org/officeDocument/2006/math" xmlns="" val="1"/>
+              <ma14:wrappingTextBoxFlag xmlns="" xmlns:m="http://schemas.openxmlformats.org/officeDocument/2006/math" xmlns:a14="http://schemas.microsoft.com/office/drawing/2010/main" xmlns:ma14="http://schemas.microsoft.com/office/mac/drawingml/2011/main" val="1"/>
             </a:ext>
           </a:extLst>
         </p:spPr>
@@ -14089,7 +14090,7 @@
           </a:prstGeom>
           <a:extLst>
             <a:ext uri="{C572A759-6A51-4108-AA02-DFA0A04FC94B}">
-              <ma14:wrappingTextBoxFlag xmlns:ma14="http://schemas.microsoft.com/office/mac/drawingml/2011/main" xmlns:a14="http://schemas.microsoft.com/office/drawing/2010/main" xmlns:m="http://schemas.openxmlformats.org/officeDocument/2006/math" xmlns="" val="1"/>
+              <ma14:wrappingTextBoxFlag xmlns="" xmlns:m="http://schemas.openxmlformats.org/officeDocument/2006/math" xmlns:a14="http://schemas.microsoft.com/office/drawing/2010/main" xmlns:ma14="http://schemas.microsoft.com/office/mac/drawingml/2011/main" val="1"/>
             </a:ext>
           </a:extLst>
         </p:spPr>
@@ -22025,6 +22026,75 @@
       </p:grpSpPr>
       <p:sp>
         <p:nvSpPr>
+          <p:cNvPr id="2" name="Title 1"/>
+          <p:cNvSpPr>
+            <a:spLocks noGrp="1"/>
+          </p:cNvSpPr>
+          <p:nvPr>
+            <p:ph type="title"/>
+          </p:nvPr>
+        </p:nvSpPr>
+        <p:spPr/>
+        <p:txBody>
+          <a:bodyPr/>
+          <a:lstStyle/>
+          <a:p>
+            <a:endParaRPr lang="de-DE"/>
+          </a:p>
+        </p:txBody>
+      </p:sp>
+      <p:sp>
+        <p:nvSpPr>
+          <p:cNvPr id="3" name="Text Placeholder 2"/>
+          <p:cNvSpPr>
+            <a:spLocks noGrp="1"/>
+          </p:cNvSpPr>
+          <p:nvPr>
+            <p:ph type="body" idx="1"/>
+          </p:nvPr>
+        </p:nvSpPr>
+        <p:spPr/>
+        <p:txBody>
+          <a:bodyPr/>
+          <a:lstStyle/>
+          <a:p>
+            <a:endParaRPr lang="de-DE" dirty="0"/>
+          </a:p>
+        </p:txBody>
+      </p:sp>
+    </p:spTree>
+    <p:extLst>
+      <p:ext uri="{BB962C8B-B14F-4D97-AF65-F5344CB8AC3E}">
+        <p14:creationId xmlns:p14="http://schemas.microsoft.com/office/powerpoint/2010/main" val="2073439927"/>
+      </p:ext>
+    </p:extLst>
+  </p:cSld>
+  <p:clrMapOvr>
+    <a:masterClrMapping/>
+  </p:clrMapOvr>
+  <p:transition spd="med"/>
+</p:sld>
+</file>
+
+<file path=ppt/slides/slide29.xml><?xml version="1.0" encoding="utf-8"?>
+<p:sld xmlns:a="http://schemas.openxmlformats.org/drawingml/2006/main" xmlns:r="http://schemas.openxmlformats.org/officeDocument/2006/relationships" xmlns:p="http://schemas.openxmlformats.org/presentationml/2006/main">
+  <p:cSld>
+    <p:spTree>
+      <p:nvGrpSpPr>
+        <p:cNvPr id="1" name=""/>
+        <p:cNvGrpSpPr/>
+        <p:nvPr/>
+      </p:nvGrpSpPr>
+      <p:grpSpPr>
+        <a:xfrm>
+          <a:off x="0" y="0"/>
+          <a:ext cx="0" cy="0"/>
+          <a:chOff x="0" y="0"/>
+          <a:chExt cx="0" cy="0"/>
+        </a:xfrm>
+      </p:grpSpPr>
+      <p:sp>
+        <p:nvSpPr>
           <p:cNvPr id="228" name="References"/>
           <p:cNvSpPr txBox="1">
             <a:spLocks noGrp="1"/>
@@ -22196,7 +22266,7 @@
           </a:prstGeom>
           <a:extLst>
             <a:ext uri="{C572A759-6A51-4108-AA02-DFA0A04FC94B}">
-              <ma14:wrappingTextBoxFlag xmlns:ma14="http://schemas.microsoft.com/office/mac/drawingml/2011/main" xmlns:a14="http://schemas.microsoft.com/office/drawing/2010/main" xmlns:m="http://schemas.openxmlformats.org/officeDocument/2006/math" xmlns="" val="1"/>
+              <ma14:wrappingTextBoxFlag xmlns="" xmlns:m="http://schemas.openxmlformats.org/officeDocument/2006/math" xmlns:a14="http://schemas.microsoft.com/office/drawing/2010/main" xmlns:ma14="http://schemas.microsoft.com/office/mac/drawingml/2011/main" val="1"/>
             </a:ext>
           </a:extLst>
         </p:spPr>
@@ -22205,7 +22275,7 @@
           <a:lstStyle/>
           <a:p>
             <a:fld id="{86CB4B4D-7CA3-9044-876B-883B54F8677D}" type="slidenum">
-              <a:t>28</a:t>
+              <a:t>29</a:t>
             </a:fld>
             <a:endParaRPr/>
           </a:p>
@@ -22637,7 +22707,7 @@
           </a:prstGeom>
           <a:extLst>
             <a:ext uri="{C572A759-6A51-4108-AA02-DFA0A04FC94B}">
-              <ma14:wrappingTextBoxFlag xmlns:ma14="http://schemas.microsoft.com/office/mac/drawingml/2011/main" xmlns:a14="http://schemas.microsoft.com/office/drawing/2010/main" xmlns:m="http://schemas.openxmlformats.org/officeDocument/2006/math" xmlns="" val="1"/>
+              <ma14:wrappingTextBoxFlag xmlns="" xmlns:m="http://schemas.openxmlformats.org/officeDocument/2006/math" xmlns:a14="http://schemas.microsoft.com/office/drawing/2010/main" xmlns:ma14="http://schemas.microsoft.com/office/mac/drawingml/2011/main" val="1"/>
             </a:ext>
           </a:extLst>
         </p:spPr>
@@ -23556,7 +23626,7 @@
           </a:prstGeom>
           <a:extLst>
             <a:ext uri="{C572A759-6A51-4108-AA02-DFA0A04FC94B}">
-              <ma14:wrappingTextBoxFlag xmlns:ma14="http://schemas.microsoft.com/office/mac/drawingml/2011/main" xmlns:a14="http://schemas.microsoft.com/office/drawing/2010/main" xmlns:m="http://schemas.openxmlformats.org/officeDocument/2006/math" xmlns="" val="1"/>
+              <ma14:wrappingTextBoxFlag xmlns="" xmlns:m="http://schemas.openxmlformats.org/officeDocument/2006/math" xmlns:a14="http://schemas.microsoft.com/office/drawing/2010/main" xmlns:ma14="http://schemas.microsoft.com/office/mac/drawingml/2011/main" val="1"/>
             </a:ext>
           </a:extLst>
         </p:spPr>
@@ -24186,7 +24256,7 @@
           </a:ln>
           <a:extLst>
             <a:ext uri="{C572A759-6A51-4108-AA02-DFA0A04FC94B}">
-              <ma14:wrappingTextBoxFlag xmlns:ma14="http://schemas.microsoft.com/office/mac/drawingml/2011/main" xmlns:a14="http://schemas.microsoft.com/office/drawing/2010/main" xmlns:m="http://schemas.openxmlformats.org/officeDocument/2006/math" xmlns="" val="1"/>
+              <ma14:wrappingTextBoxFlag xmlns="" xmlns:m="http://schemas.openxmlformats.org/officeDocument/2006/math" xmlns:a14="http://schemas.microsoft.com/office/drawing/2010/main" xmlns:ma14="http://schemas.microsoft.com/office/mac/drawingml/2011/main" val="1"/>
             </a:ext>
           </a:extLst>
         </p:spPr>
@@ -24302,7 +24372,7 @@
             <a:effectLst/>
             <a:extLst>
               <a:ext uri="{C572A759-6A51-4108-AA02-DFA0A04FC94B}">
-                <ma14:wrappingTextBoxFlag xmlns:ma14="http://schemas.microsoft.com/office/mac/drawingml/2011/main" xmlns:a14="http://schemas.microsoft.com/office/drawing/2010/main" xmlns:m="http://schemas.openxmlformats.org/officeDocument/2006/math" xmlns="" val="1"/>
+                <ma14:wrappingTextBoxFlag xmlns="" xmlns:m="http://schemas.openxmlformats.org/officeDocument/2006/math" xmlns:a14="http://schemas.microsoft.com/office/drawing/2010/main" xmlns:ma14="http://schemas.microsoft.com/office/mac/drawingml/2011/main" val="1"/>
               </a:ext>
             </a:extLst>
           </p:spPr>
@@ -24347,7 +24417,7 @@
           </a:prstGeom>
           <a:extLst>
             <a:ext uri="{C572A759-6A51-4108-AA02-DFA0A04FC94B}">
-              <ma14:wrappingTextBoxFlag xmlns:ma14="http://schemas.microsoft.com/office/mac/drawingml/2011/main" xmlns:a14="http://schemas.microsoft.com/office/drawing/2010/main" xmlns:m="http://schemas.openxmlformats.org/officeDocument/2006/math" xmlns="" val="1"/>
+              <ma14:wrappingTextBoxFlag xmlns="" xmlns:m="http://schemas.openxmlformats.org/officeDocument/2006/math" xmlns:a14="http://schemas.microsoft.com/office/drawing/2010/main" xmlns:ma14="http://schemas.microsoft.com/office/mac/drawingml/2011/main" val="1"/>
             </a:ext>
           </a:extLst>
         </p:spPr>
@@ -24612,7 +24682,7 @@
           </a:ln>
           <a:extLst>
             <a:ext uri="{C572A759-6A51-4108-AA02-DFA0A04FC94B}">
-              <ma14:wrappingTextBoxFlag xmlns:ma14="http://schemas.microsoft.com/office/mac/drawingml/2011/main" xmlns:a14="http://schemas.microsoft.com/office/drawing/2010/main" xmlns:m="http://schemas.openxmlformats.org/officeDocument/2006/math" xmlns="" val="1"/>
+              <ma14:wrappingTextBoxFlag xmlns="" xmlns:m="http://schemas.openxmlformats.org/officeDocument/2006/math" xmlns:a14="http://schemas.microsoft.com/office/drawing/2010/main" xmlns:ma14="http://schemas.microsoft.com/office/mac/drawingml/2011/main" val="1"/>
             </a:ext>
           </a:extLst>
         </p:spPr>
@@ -24699,7 +24769,7 @@
             <a:effectLst/>
             <a:extLst>
               <a:ext uri="{C572A759-6A51-4108-AA02-DFA0A04FC94B}">
-                <ma14:wrappingTextBoxFlag xmlns:ma14="http://schemas.microsoft.com/office/mac/drawingml/2011/main" xmlns:a14="http://schemas.microsoft.com/office/drawing/2010/main" xmlns:m="http://schemas.openxmlformats.org/officeDocument/2006/math" xmlns="" val="1"/>
+                <ma14:wrappingTextBoxFlag xmlns="" xmlns:m="http://schemas.openxmlformats.org/officeDocument/2006/math" xmlns:a14="http://schemas.microsoft.com/office/drawing/2010/main" xmlns:ma14="http://schemas.microsoft.com/office/mac/drawingml/2011/main" val="1"/>
               </a:ext>
             </a:extLst>
           </p:spPr>
@@ -24783,7 +24853,7 @@
             <a:effectLst/>
             <a:extLst>
               <a:ext uri="{C572A759-6A51-4108-AA02-DFA0A04FC94B}">
-                <ma14:wrappingTextBoxFlag xmlns:ma14="http://schemas.microsoft.com/office/mac/drawingml/2011/main" xmlns:a14="http://schemas.microsoft.com/office/drawing/2010/main" xmlns:m="http://schemas.openxmlformats.org/officeDocument/2006/math" xmlns="" val="1"/>
+                <ma14:wrappingTextBoxFlag xmlns="" xmlns:m="http://schemas.openxmlformats.org/officeDocument/2006/math" xmlns:a14="http://schemas.microsoft.com/office/drawing/2010/main" xmlns:ma14="http://schemas.microsoft.com/office/mac/drawingml/2011/main" val="1"/>
               </a:ext>
             </a:extLst>
           </p:spPr>
@@ -24820,7 +24890,7 @@
           </a:prstGeom>
           <a:extLst>
             <a:ext uri="{C572A759-6A51-4108-AA02-DFA0A04FC94B}">
-              <ma14:wrappingTextBoxFlag xmlns:ma14="http://schemas.microsoft.com/office/mac/drawingml/2011/main" xmlns:a14="http://schemas.microsoft.com/office/drawing/2010/main" xmlns:m="http://schemas.openxmlformats.org/officeDocument/2006/math" xmlns="" val="1"/>
+              <ma14:wrappingTextBoxFlag xmlns="" xmlns:m="http://schemas.openxmlformats.org/officeDocument/2006/math" xmlns:a14="http://schemas.microsoft.com/office/drawing/2010/main" xmlns:ma14="http://schemas.microsoft.com/office/mac/drawingml/2011/main" val="1"/>
             </a:ext>
           </a:extLst>
         </p:spPr>
@@ -25071,7 +25141,7 @@
           </a:ln>
           <a:extLst>
             <a:ext uri="{C572A759-6A51-4108-AA02-DFA0A04FC94B}">
-              <ma14:wrappingTextBoxFlag xmlns:ma14="http://schemas.microsoft.com/office/mac/drawingml/2011/main" xmlns:a14="http://schemas.microsoft.com/office/drawing/2010/main" xmlns:m="http://schemas.openxmlformats.org/officeDocument/2006/math" xmlns="" val="1"/>
+              <ma14:wrappingTextBoxFlag xmlns="" xmlns:m="http://schemas.openxmlformats.org/officeDocument/2006/math" xmlns:a14="http://schemas.microsoft.com/office/drawing/2010/main" xmlns:ma14="http://schemas.microsoft.com/office/mac/drawingml/2011/main" val="1"/>
             </a:ext>
           </a:extLst>
         </p:spPr>
@@ -25325,7 +25395,7 @@
           </a:ln>
           <a:extLst>
             <a:ext uri="{C572A759-6A51-4108-AA02-DFA0A04FC94B}">
-              <ma14:wrappingTextBoxFlag xmlns:ma14="http://schemas.microsoft.com/office/mac/drawingml/2011/main" xmlns:a14="http://schemas.microsoft.com/office/drawing/2010/main" xmlns:m="http://schemas.openxmlformats.org/officeDocument/2006/math" xmlns="" val="1"/>
+              <ma14:wrappingTextBoxFlag xmlns="" xmlns:m="http://schemas.openxmlformats.org/officeDocument/2006/math" xmlns:a14="http://schemas.microsoft.com/office/drawing/2010/main" xmlns:ma14="http://schemas.microsoft.com/office/mac/drawingml/2011/main" val="1"/>
             </a:ext>
           </a:extLst>
         </p:spPr>
@@ -25368,7 +25438,7 @@
           </a:prstGeom>
           <a:extLst>
             <a:ext uri="{C572A759-6A51-4108-AA02-DFA0A04FC94B}">
-              <ma14:wrappingTextBoxFlag xmlns:ma14="http://schemas.microsoft.com/office/mac/drawingml/2011/main" xmlns:a14="http://schemas.microsoft.com/office/drawing/2010/main" xmlns:m="http://schemas.openxmlformats.org/officeDocument/2006/math" xmlns="" val="1"/>
+              <ma14:wrappingTextBoxFlag xmlns="" xmlns:m="http://schemas.openxmlformats.org/officeDocument/2006/math" xmlns:a14="http://schemas.microsoft.com/office/drawing/2010/main" xmlns:ma14="http://schemas.microsoft.com/office/mac/drawingml/2011/main" val="1"/>
             </a:ext>
           </a:extLst>
         </p:spPr>
@@ -25489,7 +25559,7 @@
           </a:ln>
           <a:extLst>
             <a:ext uri="{C572A759-6A51-4108-AA02-DFA0A04FC94B}">
-              <ma14:wrappingTextBoxFlag xmlns:ma14="http://schemas.microsoft.com/office/mac/drawingml/2011/main" xmlns:a14="http://schemas.microsoft.com/office/drawing/2010/main" xmlns:m="http://schemas.openxmlformats.org/officeDocument/2006/math" xmlns="" val="1"/>
+              <ma14:wrappingTextBoxFlag xmlns="" xmlns:m="http://schemas.openxmlformats.org/officeDocument/2006/math" xmlns:a14="http://schemas.microsoft.com/office/drawing/2010/main" xmlns:ma14="http://schemas.microsoft.com/office/mac/drawingml/2011/main" val="1"/>
             </a:ext>
           </a:extLst>
         </p:spPr>
@@ -25533,7 +25603,7 @@
           </a:prstGeom>
           <a:extLst>
             <a:ext uri="{C572A759-6A51-4108-AA02-DFA0A04FC94B}">
-              <ma14:wrappingTextBoxFlag xmlns:ma14="http://schemas.microsoft.com/office/mac/drawingml/2011/main" xmlns:a14="http://schemas.microsoft.com/office/drawing/2010/main" xmlns:m="http://schemas.openxmlformats.org/officeDocument/2006/math" xmlns="" val="1"/>
+              <ma14:wrappingTextBoxFlag xmlns="" xmlns:m="http://schemas.openxmlformats.org/officeDocument/2006/math" xmlns:a14="http://schemas.microsoft.com/office/drawing/2010/main" xmlns:ma14="http://schemas.microsoft.com/office/mac/drawingml/2011/main" val="1"/>
             </a:ext>
           </a:extLst>
         </p:spPr>

--- a/workshop_presentation.pptx
+++ b/workshop_presentation.pptx
@@ -2572,7 +2572,7 @@
           </a:ln>
           <a:extLst>
             <a:ext uri="{C572A759-6A51-4108-AA02-DFA0A04FC94B}">
-              <ma14:wrappingTextBoxFlag xmlns="" xmlns:m="http://schemas.openxmlformats.org/officeDocument/2006/math" xmlns:a14="http://schemas.microsoft.com/office/drawing/2010/main" xmlns:ma14="http://schemas.microsoft.com/office/mac/drawingml/2011/main" val="1"/>
+              <ma14:wrappingTextBoxFlag xmlns:ma14="http://schemas.microsoft.com/office/mac/drawingml/2011/main" xmlns:a14="http://schemas.microsoft.com/office/drawing/2010/main" xmlns:m="http://schemas.openxmlformats.org/officeDocument/2006/math" xmlns="" val="1"/>
             </a:ext>
           </a:extLst>
         </p:spPr>
@@ -2611,7 +2611,7 @@
           </a:ln>
           <a:extLst>
             <a:ext uri="{C572A759-6A51-4108-AA02-DFA0A04FC94B}">
-              <ma14:wrappingTextBoxFlag xmlns="" xmlns:m="http://schemas.openxmlformats.org/officeDocument/2006/math" xmlns:a14="http://schemas.microsoft.com/office/drawing/2010/main" xmlns:ma14="http://schemas.microsoft.com/office/mac/drawingml/2011/main" val="1"/>
+              <ma14:wrappingTextBoxFlag xmlns:ma14="http://schemas.microsoft.com/office/mac/drawingml/2011/main" xmlns:a14="http://schemas.microsoft.com/office/drawing/2010/main" xmlns:m="http://schemas.openxmlformats.org/officeDocument/2006/math" xmlns="" val="1"/>
             </a:ext>
           </a:extLst>
         </p:spPr>
@@ -3504,13 +3504,6 @@
     <a:masterClrMapping/>
   </p:clrMapOvr>
   <p:transition spd="med"/>
-  <p:timing>
-    <p:tnLst>
-      <p:par>
-        <p:cTn id="1" dur="indefinite" restart="never" nodeType="tmRoot"/>
-      </p:par>
-    </p:tnLst>
-  </p:timing>
 </p:sld>
 </file>
 
@@ -3569,9 +3562,7 @@
           <p:nvPr/>
         </p:nvPicPr>
         <p:blipFill>
-          <a:blip r:embed="rId2">
-            <a:extLst/>
-          </a:blip>
+          <a:blip r:embed="rId2"/>
           <a:stretch>
             <a:fillRect/>
           </a:stretch>
@@ -3608,7 +3599,7 @@
           </a:ln>
           <a:extLst>
             <a:ext uri="{C572A759-6A51-4108-AA02-DFA0A04FC94B}">
-              <ma14:wrappingTextBoxFlag xmlns="" xmlns:m="http://schemas.openxmlformats.org/officeDocument/2006/math" xmlns:a14="http://schemas.microsoft.com/office/drawing/2010/main" xmlns:ma14="http://schemas.microsoft.com/office/mac/drawingml/2011/main" val="1"/>
+              <ma14:wrappingTextBoxFlag xmlns:ma14="http://schemas.microsoft.com/office/mac/drawingml/2011/main" xmlns:a14="http://schemas.microsoft.com/office/drawing/2010/main" xmlns:m="http://schemas.openxmlformats.org/officeDocument/2006/math" xmlns="" val="1"/>
             </a:ext>
           </a:extLst>
         </p:spPr>
@@ -3647,7 +3638,7 @@
           </a:ln>
           <a:extLst>
             <a:ext uri="{C572A759-6A51-4108-AA02-DFA0A04FC94B}">
-              <ma14:wrappingTextBoxFlag xmlns="" xmlns:m="http://schemas.openxmlformats.org/officeDocument/2006/math" xmlns:a14="http://schemas.microsoft.com/office/drawing/2010/main" xmlns:ma14="http://schemas.microsoft.com/office/mac/drawingml/2011/main" val="1"/>
+              <ma14:wrappingTextBoxFlag xmlns:ma14="http://schemas.microsoft.com/office/mac/drawingml/2011/main" xmlns:a14="http://schemas.microsoft.com/office/drawing/2010/main" xmlns:m="http://schemas.openxmlformats.org/officeDocument/2006/math" xmlns="" val="1"/>
             </a:ext>
           </a:extLst>
         </p:spPr>
@@ -3710,7 +3701,7 @@
           </a:prstGeom>
           <a:extLst>
             <a:ext uri="{C572A759-6A51-4108-AA02-DFA0A04FC94B}">
-              <ma14:wrappingTextBoxFlag xmlns="" xmlns:m="http://schemas.openxmlformats.org/officeDocument/2006/math" xmlns:a14="http://schemas.microsoft.com/office/drawing/2010/main" xmlns:ma14="http://schemas.microsoft.com/office/mac/drawingml/2011/main" val="1"/>
+              <ma14:wrappingTextBoxFlag xmlns:ma14="http://schemas.microsoft.com/office/mac/drawingml/2011/main" xmlns:a14="http://schemas.microsoft.com/office/drawing/2010/main" xmlns:m="http://schemas.openxmlformats.org/officeDocument/2006/math" xmlns="" val="1"/>
             </a:ext>
           </a:extLst>
         </p:spPr>
@@ -3964,9 +3955,7 @@
           <p:nvPr/>
         </p:nvPicPr>
         <p:blipFill>
-          <a:blip r:embed="rId2">
-            <a:extLst/>
-          </a:blip>
+          <a:blip r:embed="rId2"/>
           <a:stretch>
             <a:fillRect/>
           </a:stretch>
@@ -4003,7 +3992,7 @@
           </a:ln>
           <a:extLst>
             <a:ext uri="{C572A759-6A51-4108-AA02-DFA0A04FC94B}">
-              <ma14:wrappingTextBoxFlag xmlns="" xmlns:m="http://schemas.openxmlformats.org/officeDocument/2006/math" xmlns:a14="http://schemas.microsoft.com/office/drawing/2010/main" xmlns:ma14="http://schemas.microsoft.com/office/mac/drawingml/2011/main" val="1"/>
+              <ma14:wrappingTextBoxFlag xmlns:ma14="http://schemas.microsoft.com/office/mac/drawingml/2011/main" xmlns:a14="http://schemas.microsoft.com/office/drawing/2010/main" xmlns:m="http://schemas.openxmlformats.org/officeDocument/2006/math" xmlns="" val="1"/>
             </a:ext>
           </a:extLst>
         </p:spPr>
@@ -4152,7 +4141,7 @@
           </a:prstGeom>
           <a:extLst>
             <a:ext uri="{C572A759-6A51-4108-AA02-DFA0A04FC94B}">
-              <ma14:wrappingTextBoxFlag xmlns="" xmlns:m="http://schemas.openxmlformats.org/officeDocument/2006/math" xmlns:a14="http://schemas.microsoft.com/office/drawing/2010/main" xmlns:ma14="http://schemas.microsoft.com/office/mac/drawingml/2011/main" val="1"/>
+              <ma14:wrappingTextBoxFlag xmlns:ma14="http://schemas.microsoft.com/office/mac/drawingml/2011/main" xmlns:a14="http://schemas.microsoft.com/office/drawing/2010/main" xmlns:m="http://schemas.openxmlformats.org/officeDocument/2006/math" xmlns="" val="1"/>
             </a:ext>
           </a:extLst>
         </p:spPr>
@@ -4173,13 +4162,6 @@
     <a:masterClrMapping/>
   </p:clrMapOvr>
   <p:transition spd="med"/>
-  <p:timing>
-    <p:tnLst>
-      <p:par>
-        <p:cTn id="1" dur="indefinite" restart="never" nodeType="tmRoot"/>
-      </p:par>
-    </p:tnLst>
-  </p:timing>
 </p:sld>
 </file>
 
@@ -4234,9 +4216,7 @@
           <p:nvPr/>
         </p:nvPicPr>
         <p:blipFill>
-          <a:blip r:embed="rId2">
-            <a:extLst/>
-          </a:blip>
+          <a:blip r:embed="rId2"/>
           <a:stretch>
             <a:fillRect/>
           </a:stretch>
@@ -4316,7 +4296,7 @@
           </a:ln>
           <a:extLst>
             <a:ext uri="{C572A759-6A51-4108-AA02-DFA0A04FC94B}">
-              <ma14:wrappingTextBoxFlag xmlns="" xmlns:m="http://schemas.openxmlformats.org/officeDocument/2006/math" xmlns:a14="http://schemas.microsoft.com/office/drawing/2010/main" xmlns:ma14="http://schemas.microsoft.com/office/mac/drawingml/2011/main" val="1"/>
+              <ma14:wrappingTextBoxFlag xmlns:ma14="http://schemas.microsoft.com/office/mac/drawingml/2011/main" xmlns:a14="http://schemas.microsoft.com/office/drawing/2010/main" xmlns:m="http://schemas.openxmlformats.org/officeDocument/2006/math" xmlns="" val="1"/>
             </a:ext>
           </a:extLst>
         </p:spPr>
@@ -4399,7 +4379,7 @@
           </a:ln>
           <a:extLst>
             <a:ext uri="{C572A759-6A51-4108-AA02-DFA0A04FC94B}">
-              <ma14:wrappingTextBoxFlag xmlns="" xmlns:m="http://schemas.openxmlformats.org/officeDocument/2006/math" xmlns:a14="http://schemas.microsoft.com/office/drawing/2010/main" xmlns:ma14="http://schemas.microsoft.com/office/mac/drawingml/2011/main" val="1"/>
+              <ma14:wrappingTextBoxFlag xmlns:ma14="http://schemas.microsoft.com/office/mac/drawingml/2011/main" xmlns:a14="http://schemas.microsoft.com/office/drawing/2010/main" xmlns:m="http://schemas.openxmlformats.org/officeDocument/2006/math" xmlns="" val="1"/>
             </a:ext>
           </a:extLst>
         </p:spPr>
@@ -4435,7 +4415,7 @@
           </a:ln>
           <a:extLst>
             <a:ext uri="{C572A759-6A51-4108-AA02-DFA0A04FC94B}">
-              <ma14:wrappingTextBoxFlag xmlns="" xmlns:m="http://schemas.openxmlformats.org/officeDocument/2006/math" xmlns:a14="http://schemas.microsoft.com/office/drawing/2010/main" xmlns:ma14="http://schemas.microsoft.com/office/mac/drawingml/2011/main" val="1"/>
+              <ma14:wrappingTextBoxFlag xmlns:ma14="http://schemas.microsoft.com/office/mac/drawingml/2011/main" xmlns:a14="http://schemas.microsoft.com/office/drawing/2010/main" xmlns:m="http://schemas.openxmlformats.org/officeDocument/2006/math" xmlns="" val="1"/>
             </a:ext>
           </a:extLst>
         </p:spPr>
@@ -4479,7 +4459,7 @@
           </a:prstGeom>
           <a:extLst>
             <a:ext uri="{C572A759-6A51-4108-AA02-DFA0A04FC94B}">
-              <ma14:wrappingTextBoxFlag xmlns="" xmlns:m="http://schemas.openxmlformats.org/officeDocument/2006/math" xmlns:a14="http://schemas.microsoft.com/office/drawing/2010/main" xmlns:ma14="http://schemas.microsoft.com/office/mac/drawingml/2011/main" val="1"/>
+              <ma14:wrappingTextBoxFlag xmlns:ma14="http://schemas.microsoft.com/office/mac/drawingml/2011/main" xmlns:a14="http://schemas.microsoft.com/office/drawing/2010/main" xmlns:m="http://schemas.openxmlformats.org/officeDocument/2006/math" xmlns="" val="1"/>
             </a:ext>
           </a:extLst>
         </p:spPr>
@@ -4500,13 +4480,6 @@
     <a:masterClrMapping/>
   </p:clrMapOvr>
   <p:transition spd="med"/>
-  <p:timing>
-    <p:tnLst>
-      <p:par>
-        <p:cTn id="1" dur="indefinite" restart="never" nodeType="tmRoot"/>
-      </p:par>
-    </p:tnLst>
-  </p:timing>
 </p:sld>
 </file>
 
@@ -4575,12 +4548,8 @@
               <a:buChar char="•"/>
             </a:pPr>
             <a:r>
-              <a:rPr lang="fr-FR" dirty="0" smtClean="0"/>
-              <a:t>Silhouette </a:t>
-            </a:r>
-            <a:r>
               <a:rPr lang="fr-FR" dirty="0"/>
-              <a:t>Score</a:t>
+              <a:t>Silhouette Score</a:t>
             </a:r>
           </a:p>
           <a:p>
@@ -4658,7 +4627,7 @@
           <a:lstStyle/>
           <a:p>
             <a:r>
-              <a:rPr lang="de-DE" dirty="0" smtClean="0"/>
+              <a:rPr lang="de-DE" dirty="0"/>
               <a:t>Quick Recap</a:t>
             </a:r>
             <a:endParaRPr dirty="0"/>
@@ -4674,9 +4643,7 @@
           <p:nvPr/>
         </p:nvPicPr>
         <p:blipFill>
-          <a:blip r:embed="rId2">
-            <a:extLst/>
-          </a:blip>
+          <a:blip r:embed="rId2"/>
           <a:stretch>
             <a:fillRect/>
           </a:stretch>
@@ -4713,7 +4680,7 @@
           </a:ln>
           <a:extLst>
             <a:ext uri="{C572A759-6A51-4108-AA02-DFA0A04FC94B}">
-              <ma14:wrappingTextBoxFlag xmlns="" xmlns:m="http://schemas.openxmlformats.org/officeDocument/2006/math" xmlns:a14="http://schemas.microsoft.com/office/drawing/2010/main" xmlns:ma14="http://schemas.microsoft.com/office/mac/drawingml/2011/main" val="1"/>
+              <ma14:wrappingTextBoxFlag xmlns:ma14="http://schemas.microsoft.com/office/mac/drawingml/2011/main" xmlns:a14="http://schemas.microsoft.com/office/drawing/2010/main" xmlns:m="http://schemas.openxmlformats.org/officeDocument/2006/math" xmlns="" val="1"/>
             </a:ext>
           </a:extLst>
         </p:spPr>
@@ -4786,7 +4753,7 @@
               <a:buChar char="•"/>
             </a:pPr>
             <a:r>
-              <a:rPr dirty="0" err="1" smtClean="0"/>
+              <a:rPr dirty="0" err="1"/>
               <a:t>KMeans</a:t>
             </a:r>
             <a:endParaRPr dirty="0"/>
@@ -4809,7 +4776,7 @@
           </a:prstGeom>
           <a:extLst>
             <a:ext uri="{C572A759-6A51-4108-AA02-DFA0A04FC94B}">
-              <ma14:wrappingTextBoxFlag xmlns="" xmlns:m="http://schemas.openxmlformats.org/officeDocument/2006/math" xmlns:a14="http://schemas.microsoft.com/office/drawing/2010/main" xmlns:ma14="http://schemas.microsoft.com/office/mac/drawingml/2011/main" val="1"/>
+              <ma14:wrappingTextBoxFlag xmlns:ma14="http://schemas.microsoft.com/office/mac/drawingml/2011/main" xmlns:a14="http://schemas.microsoft.com/office/drawing/2010/main" xmlns:m="http://schemas.openxmlformats.org/officeDocument/2006/math" xmlns="" val="1"/>
             </a:ext>
           </a:extLst>
         </p:spPr>
@@ -4897,7 +4864,7 @@
                 <a:tabLst/>
               </a:pPr>
               <a:r>
-                <a:rPr kumimoji="0" lang="de-DE" b="0" i="0" u="none" strike="noStrike" cap="none" spc="0" normalizeH="0" baseline="0" dirty="0" smtClean="0">
+                <a:rPr kumimoji="0" lang="de-DE" b="0" i="0" u="none" strike="noStrike" cap="none" spc="0" normalizeH="0" baseline="0" dirty="0">
                   <a:ln>
                     <a:noFill/>
                   </a:ln>
@@ -4913,20 +4880,6 @@
                 </a:rPr>
                 <a:t>PointNet</a:t>
               </a:r>
-              <a:endParaRPr kumimoji="0" lang="de-DE" b="0" i="0" u="none" strike="noStrike" cap="none" spc="0" normalizeH="0" baseline="0" dirty="0">
-                <a:ln>
-                  <a:noFill/>
-                </a:ln>
-                <a:solidFill>
-                  <a:srgbClr val="FFFFFF"/>
-                </a:solidFill>
-                <a:effectLst/>
-                <a:uFillTx/>
-                <a:latin typeface="+mn-lt"/>
-                <a:ea typeface="+mn-ea"/>
-                <a:cs typeface="+mn-cs"/>
-                <a:sym typeface="Helvetica Neue Medium"/>
-              </a:endParaRPr>
             </a:p>
           </p:txBody>
         </p:sp>
@@ -4989,7 +4942,7 @@
                 <a:tabLst/>
               </a:pPr>
               <a:r>
-                <a:rPr kumimoji="0" lang="de-DE" b="0" i="0" u="none" strike="noStrike" cap="none" spc="0" normalizeH="0" baseline="0" dirty="0" smtClean="0">
+                <a:rPr kumimoji="0" lang="de-DE" b="0" i="0" u="none" strike="noStrike" cap="none" spc="0" normalizeH="0" baseline="0" dirty="0">
                   <a:ln>
                     <a:noFill/>
                   </a:ln>
@@ -5005,20 +4958,6 @@
                 </a:rPr>
                 <a:t>DGCNN</a:t>
               </a:r>
-              <a:endParaRPr kumimoji="0" lang="de-DE" b="0" i="0" u="none" strike="noStrike" cap="none" spc="0" normalizeH="0" baseline="0" dirty="0">
-                <a:ln>
-                  <a:noFill/>
-                </a:ln>
-                <a:solidFill>
-                  <a:srgbClr val="FFFFFF"/>
-                </a:solidFill>
-                <a:effectLst/>
-                <a:uFillTx/>
-                <a:latin typeface="+mn-lt"/>
-                <a:ea typeface="+mn-ea"/>
-                <a:cs typeface="+mn-cs"/>
-                <a:sym typeface="Helvetica Neue Medium"/>
-              </a:endParaRPr>
             </a:p>
           </p:txBody>
         </p:sp>
@@ -5080,7 +5019,7 @@
               <a:tabLst/>
             </a:pPr>
             <a:r>
-              <a:rPr kumimoji="0" lang="de-DE" sz="4800" b="0" i="0" u="none" strike="noStrike" cap="none" spc="0" normalizeH="0" baseline="0" dirty="0" smtClean="0">
+              <a:rPr kumimoji="0" lang="de-DE" sz="4800" b="0" i="0" u="none" strike="noStrike" cap="none" spc="0" normalizeH="0" baseline="0" dirty="0">
                 <a:ln>
                   <a:noFill/>
                 </a:ln>
@@ -5096,20 +5035,6 @@
               </a:rPr>
               <a:t>DBCV: Density based Clustering Evaluation</a:t>
             </a:r>
-            <a:endParaRPr kumimoji="0" lang="de-DE" sz="4800" b="0" i="0" u="none" strike="noStrike" cap="none" spc="0" normalizeH="0" baseline="0" dirty="0">
-              <a:ln>
-                <a:noFill/>
-              </a:ln>
-              <a:solidFill>
-                <a:srgbClr val="000000"/>
-              </a:solidFill>
-              <a:effectLst/>
-              <a:uFillTx/>
-              <a:latin typeface="Helvetica Neue"/>
-              <a:ea typeface="Helvetica Neue"/>
-              <a:cs typeface="Helvetica Neue"/>
-              <a:sym typeface="Helvetica Neue"/>
-            </a:endParaRPr>
           </a:p>
         </p:txBody>
       </p:sp>
@@ -5230,7 +5155,7 @@
               <a:tabLst/>
             </a:pPr>
             <a:r>
-              <a:rPr kumimoji="0" lang="de-DE" sz="2000" b="0" i="0" u="none" strike="noStrike" cap="none" spc="0" normalizeH="0" baseline="0" dirty="0" smtClean="0">
+              <a:rPr kumimoji="0" lang="de-DE" sz="2000" b="0" i="0" u="none" strike="noStrike" cap="none" spc="0" normalizeH="0" baseline="0" dirty="0">
                 <a:ln>
                   <a:noFill/>
                 </a:ln>
@@ -5246,20 +5171,6 @@
               </a:rPr>
               <a:t>DGCNN:Dynamic Graph Convolutional Neural Network</a:t>
             </a:r>
-            <a:endParaRPr kumimoji="0" lang="de-DE" sz="2000" b="0" i="0" u="none" strike="noStrike" cap="none" spc="0" normalizeH="0" baseline="0" dirty="0">
-              <a:ln>
-                <a:noFill/>
-              </a:ln>
-              <a:solidFill>
-                <a:srgbClr val="000000"/>
-              </a:solidFill>
-              <a:effectLst/>
-              <a:uFillTx/>
-              <a:latin typeface="Helvetica Neue"/>
-              <a:ea typeface="Helvetica Neue"/>
-              <a:cs typeface="Helvetica Neue"/>
-              <a:sym typeface="Helvetica Neue"/>
-            </a:endParaRPr>
           </a:p>
         </p:txBody>
       </p:sp>
@@ -5533,16 +5444,12 @@
           <a:lstStyle/>
           <a:p>
             <a:r>
-              <a:rPr lang="de-DE" dirty="0" smtClean="0"/>
+              <a:rPr lang="de-DE" dirty="0"/>
               <a:t>Previous</a:t>
             </a:r>
             <a:r>
-              <a:rPr dirty="0" smtClean="0"/>
-              <a:t> </a:t>
-            </a:r>
-            <a:r>
               <a:rPr dirty="0"/>
-              <a:t>state of the work</a:t>
+              <a:t> state of the work</a:t>
             </a:r>
           </a:p>
         </p:txBody>
@@ -5556,9 +5463,7 @@
           <p:nvPr/>
         </p:nvPicPr>
         <p:blipFill>
-          <a:blip r:embed="rId2">
-            <a:extLst/>
-          </a:blip>
+          <a:blip r:embed="rId2"/>
           <a:stretch>
             <a:fillRect/>
           </a:stretch>
@@ -5638,7 +5543,7 @@
           </a:ln>
           <a:extLst>
             <a:ext uri="{C572A759-6A51-4108-AA02-DFA0A04FC94B}">
-              <ma14:wrappingTextBoxFlag xmlns="" xmlns:m="http://schemas.openxmlformats.org/officeDocument/2006/math" xmlns:a14="http://schemas.microsoft.com/office/drawing/2010/main" xmlns:ma14="http://schemas.microsoft.com/office/mac/drawingml/2011/main" val="1"/>
+              <ma14:wrappingTextBoxFlag xmlns:ma14="http://schemas.microsoft.com/office/mac/drawingml/2011/main" xmlns:a14="http://schemas.microsoft.com/office/drawing/2010/main" xmlns:m="http://schemas.openxmlformats.org/officeDocument/2006/math" xmlns="" val="1"/>
             </a:ext>
           </a:extLst>
         </p:spPr>
@@ -5721,7 +5626,7 @@
           </a:ln>
           <a:extLst>
             <a:ext uri="{C572A759-6A51-4108-AA02-DFA0A04FC94B}">
-              <ma14:wrappingTextBoxFlag xmlns="" xmlns:m="http://schemas.openxmlformats.org/officeDocument/2006/math" xmlns:a14="http://schemas.microsoft.com/office/drawing/2010/main" xmlns:ma14="http://schemas.microsoft.com/office/mac/drawingml/2011/main" val="1"/>
+              <ma14:wrappingTextBoxFlag xmlns:ma14="http://schemas.microsoft.com/office/mac/drawingml/2011/main" xmlns:a14="http://schemas.microsoft.com/office/drawing/2010/main" xmlns:m="http://schemas.openxmlformats.org/officeDocument/2006/math" xmlns="" val="1"/>
             </a:ext>
           </a:extLst>
         </p:spPr>
@@ -5757,7 +5662,7 @@
           </a:ln>
           <a:extLst>
             <a:ext uri="{C572A759-6A51-4108-AA02-DFA0A04FC94B}">
-              <ma14:wrappingTextBoxFlag xmlns="" xmlns:m="http://schemas.openxmlformats.org/officeDocument/2006/math" xmlns:a14="http://schemas.microsoft.com/office/drawing/2010/main" xmlns:ma14="http://schemas.microsoft.com/office/mac/drawingml/2011/main" val="1"/>
+              <ma14:wrappingTextBoxFlag xmlns:ma14="http://schemas.microsoft.com/office/mac/drawingml/2011/main" xmlns:a14="http://schemas.microsoft.com/office/drawing/2010/main" xmlns:m="http://schemas.openxmlformats.org/officeDocument/2006/math" xmlns="" val="1"/>
             </a:ext>
           </a:extLst>
         </p:spPr>
@@ -5801,7 +5706,7 @@
           </a:prstGeom>
           <a:extLst>
             <a:ext uri="{C572A759-6A51-4108-AA02-DFA0A04FC94B}">
-              <ma14:wrappingTextBoxFlag xmlns="" xmlns:m="http://schemas.openxmlformats.org/officeDocument/2006/math" xmlns:a14="http://schemas.microsoft.com/office/drawing/2010/main" xmlns:ma14="http://schemas.microsoft.com/office/mac/drawingml/2011/main" val="1"/>
+              <ma14:wrappingTextBoxFlag xmlns:ma14="http://schemas.microsoft.com/office/mac/drawingml/2011/main" xmlns:a14="http://schemas.microsoft.com/office/drawing/2010/main" xmlns:m="http://schemas.openxmlformats.org/officeDocument/2006/math" xmlns="" val="1"/>
             </a:ext>
           </a:extLst>
         </p:spPr>
@@ -5827,13 +5732,6 @@
     <a:masterClrMapping/>
   </p:clrMapOvr>
   <p:transition spd="med"/>
-  <p:timing>
-    <p:tnLst>
-      <p:par>
-        <p:cTn id="1" dur="indefinite" restart="never" nodeType="tmRoot"/>
-      </p:par>
-    </p:tnLst>
-  </p:timing>
 </p:sld>
 </file>
 
@@ -5870,12 +5768,8 @@
           <a:lstStyle/>
           <a:p>
             <a:r>
-              <a:rPr lang="en-US" dirty="0" smtClean="0"/>
-              <a:t>Current </a:t>
-            </a:r>
-            <a:r>
               <a:rPr lang="en-US" dirty="0"/>
-              <a:t>state of the work</a:t>
+              <a:t>Current state of the work</a:t>
             </a:r>
             <a:endParaRPr lang="de-DE" dirty="0"/>
           </a:p>
@@ -6424,7 +6318,7 @@
               <a:tabLst/>
             </a:pPr>
             <a:r>
-              <a:rPr kumimoji="0" lang="de-DE" sz="4800" b="0" i="0" u="none" strike="noStrike" cap="none" spc="0" normalizeH="0" baseline="0" dirty="0" smtClean="0">
+              <a:rPr kumimoji="0" lang="de-DE" sz="4800" b="0" i="0" u="none" strike="noStrike" cap="none" spc="0" normalizeH="0" baseline="0" dirty="0">
                 <a:ln>
                   <a:noFill/>
                 </a:ln>
@@ -6441,7 +6335,7 @@
               <a:t>Entire ABC</a:t>
             </a:r>
             <a:r>
-              <a:rPr kumimoji="0" lang="de-DE" sz="4800" b="0" i="0" u="none" strike="noStrike" cap="none" spc="0" normalizeH="0" dirty="0" smtClean="0">
+              <a:rPr kumimoji="0" lang="de-DE" sz="4800" b="0" i="0" u="none" strike="noStrike" cap="none" spc="0" normalizeH="0" dirty="0">
                 <a:ln>
                   <a:noFill/>
                 </a:ln>
@@ -6458,7 +6352,7 @@
               <a:t> Dataset </a:t>
             </a:r>
             <a:r>
-              <a:rPr kumimoji="0" lang="de-DE" sz="4800" b="0" i="0" u="none" strike="noStrike" cap="none" spc="0" normalizeH="0" dirty="0" smtClean="0">
+              <a:rPr kumimoji="0" lang="de-DE" sz="4800" b="0" i="0" u="none" strike="noStrike" cap="none" spc="0" normalizeH="0" dirty="0">
                 <a:ln>
                   <a:noFill/>
                 </a:ln>
@@ -6502,13 +6396,6 @@
     <a:masterClrMapping/>
   </p:clrMapOvr>
   <p:transition spd="med"/>
-  <p:timing>
-    <p:tnLst>
-      <p:par>
-        <p:cTn id="1" dur="indefinite" restart="never" nodeType="tmRoot"/>
-      </p:par>
-    </p:tnLst>
-  </p:timing>
 </p:sld>
 </file>
 
@@ -6545,10 +6432,9 @@
           <a:lstStyle/>
           <a:p>
             <a:r>
-              <a:rPr lang="de-DE" dirty="0" smtClean="0"/>
+              <a:rPr lang="de-DE" dirty="0"/>
               <a:t>Quick stats</a:t>
             </a:r>
-            <a:endParaRPr lang="de-DE" dirty="0"/>
           </a:p>
         </p:txBody>
       </p:sp>
@@ -6666,14 +6552,11 @@
                     <a:lstStyle/>
                     <a:p>
                       <a:r>
-                        <a:rPr lang="de-DE" sz="4800" dirty="0" smtClean="0">
+                        <a:rPr lang="de-DE" sz="4800" dirty="0">
                           <a:latin typeface="+mn-lt"/>
                         </a:rPr>
                         <a:t>Factors</a:t>
                       </a:r>
-                      <a:endParaRPr lang="de-DE" sz="4800" dirty="0">
-                        <a:latin typeface="+mn-lt"/>
-                      </a:endParaRPr>
                     </a:p>
                   </a:txBody>
                   <a:tcPr anchor="ctr"/>
@@ -6684,10 +6567,9 @@
                     <a:lstStyle/>
                     <a:p>
                       <a:r>
-                        <a:rPr lang="de-DE" sz="4800" dirty="0" smtClean="0"/>
+                        <a:rPr lang="de-DE" sz="4800" dirty="0"/>
                         <a:t>PointNet</a:t>
                       </a:r>
-                      <a:endParaRPr lang="de-DE" sz="4800" dirty="0"/>
                     </a:p>
                   </a:txBody>
                   <a:tcPr anchor="ctr"/>
@@ -6698,10 +6580,9 @@
                     <a:lstStyle/>
                     <a:p>
                       <a:r>
-                        <a:rPr lang="de-DE" sz="4800" dirty="0" smtClean="0"/>
+                        <a:rPr lang="de-DE" sz="4800" dirty="0"/>
                         <a:t>DGCNN</a:t>
                       </a:r>
-                      <a:endParaRPr lang="de-DE" sz="4800" dirty="0"/>
                     </a:p>
                   </a:txBody>
                   <a:tcPr anchor="ctr"/>
@@ -6719,10 +6600,9 @@
                     <a:lstStyle/>
                     <a:p>
                       <a:r>
-                        <a:rPr lang="de-DE" sz="4800" dirty="0" smtClean="0"/>
+                        <a:rPr lang="de-DE" sz="4800" dirty="0"/>
                         <a:t>Epochs</a:t>
                       </a:r>
-                      <a:endParaRPr lang="de-DE" sz="4800" dirty="0"/>
                     </a:p>
                   </a:txBody>
                   <a:tcPr anchor="ctr"/>
@@ -6733,10 +6613,9 @@
                     <a:lstStyle/>
                     <a:p>
                       <a:r>
-                        <a:rPr lang="de-DE" sz="4800" dirty="0" smtClean="0"/>
+                        <a:rPr lang="de-DE" sz="4800" dirty="0"/>
                         <a:t>33</a:t>
                       </a:r>
-                      <a:endParaRPr lang="de-DE" sz="4800" dirty="0"/>
                     </a:p>
                   </a:txBody>
                   <a:tcPr anchor="ctr"/>
@@ -6747,10 +6626,9 @@
                     <a:lstStyle/>
                     <a:p>
                       <a:r>
-                        <a:rPr lang="de-DE" sz="4800" dirty="0" smtClean="0"/>
+                        <a:rPr lang="de-DE" sz="4800" dirty="0"/>
                         <a:t>37</a:t>
                       </a:r>
-                      <a:endParaRPr lang="de-DE" sz="4800" dirty="0"/>
                     </a:p>
                   </a:txBody>
                   <a:tcPr anchor="ctr"/>
@@ -6768,10 +6646,9 @@
                     <a:lstStyle/>
                     <a:p>
                       <a:r>
-                        <a:rPr lang="de-DE" sz="4800" dirty="0" smtClean="0"/>
+                        <a:rPr lang="de-DE" sz="4800" dirty="0"/>
                         <a:t>Time taken</a:t>
                       </a:r>
-                      <a:endParaRPr lang="de-DE" sz="4800" dirty="0"/>
                     </a:p>
                   </a:txBody>
                   <a:tcPr anchor="ctr"/>
@@ -6782,10 +6659,9 @@
                     <a:lstStyle/>
                     <a:p>
                       <a:r>
-                        <a:rPr lang="de-DE" sz="4800" dirty="0" smtClean="0"/>
+                        <a:rPr lang="de-DE" sz="4800" dirty="0"/>
                         <a:t>38 hrs</a:t>
                       </a:r>
-                      <a:endParaRPr lang="de-DE" sz="4800" dirty="0"/>
                     </a:p>
                   </a:txBody>
                   <a:tcPr anchor="ctr"/>
@@ -6796,10 +6672,9 @@
                     <a:lstStyle/>
                     <a:p>
                       <a:r>
-                        <a:rPr lang="de-DE" sz="4800" dirty="0" smtClean="0"/>
+                        <a:rPr lang="de-DE" sz="4800" dirty="0"/>
                         <a:t>168 hrs</a:t>
                       </a:r>
-                      <a:endParaRPr lang="de-DE" sz="4800" dirty="0"/>
                     </a:p>
                   </a:txBody>
                   <a:tcPr anchor="ctr"/>
@@ -6817,10 +6692,9 @@
                     <a:lstStyle/>
                     <a:p>
                       <a:r>
-                        <a:rPr lang="de-DE" sz="4800" dirty="0" smtClean="0"/>
+                        <a:rPr lang="de-DE" sz="4800" dirty="0"/>
                         <a:t>GPU used</a:t>
                       </a:r>
-                      <a:endParaRPr lang="de-DE" sz="4800" dirty="0"/>
                     </a:p>
                   </a:txBody>
                   <a:tcPr anchor="ctr"/>
@@ -6831,10 +6705,9 @@
                     <a:lstStyle/>
                     <a:p>
                       <a:r>
-                        <a:rPr lang="de-DE" sz="4800" dirty="0" smtClean="0"/>
+                        <a:rPr lang="de-DE" sz="4800" dirty="0"/>
                         <a:t>NVIDIA GeForce RTX 3090</a:t>
                       </a:r>
-                      <a:endParaRPr lang="de-DE" sz="4800" dirty="0"/>
                     </a:p>
                   </a:txBody>
                   <a:tcPr anchor="ctr"/>
@@ -6845,10 +6718,9 @@
                     <a:lstStyle/>
                     <a:p>
                       <a:r>
-                        <a:rPr lang="de-DE" sz="4800" dirty="0" smtClean="0"/>
+                        <a:rPr lang="de-DE" sz="4800" dirty="0"/>
                         <a:t>Tesla V100-PCIE-32GB</a:t>
                       </a:r>
-                      <a:endParaRPr lang="de-DE" sz="4800" dirty="0"/>
                     </a:p>
                   </a:txBody>
                   <a:tcPr anchor="ctr"/>
@@ -6866,10 +6738,9 @@
                     <a:lstStyle/>
                     <a:p>
                       <a:r>
-                        <a:rPr lang="de-DE" sz="4800" dirty="0" smtClean="0"/>
+                        <a:rPr lang="de-DE" sz="4800" dirty="0"/>
                         <a:t>Batch size</a:t>
                       </a:r>
-                      <a:endParaRPr lang="de-DE" sz="4800" dirty="0"/>
                     </a:p>
                   </a:txBody>
                   <a:tcPr anchor="ctr"/>
@@ -6880,10 +6751,9 @@
                     <a:lstStyle/>
                     <a:p>
                       <a:r>
-                        <a:rPr lang="de-DE" sz="4800" dirty="0" smtClean="0"/>
+                        <a:rPr lang="de-DE" sz="4800" dirty="0"/>
                         <a:t>128</a:t>
                       </a:r>
-                      <a:endParaRPr lang="de-DE" sz="4800" dirty="0"/>
                     </a:p>
                   </a:txBody>
                   <a:tcPr anchor="ctr"/>
@@ -6894,10 +6764,9 @@
                     <a:lstStyle/>
                     <a:p>
                       <a:r>
-                        <a:rPr lang="de-DE" sz="4800" dirty="0" smtClean="0"/>
+                        <a:rPr lang="de-DE" sz="4800" dirty="0"/>
                         <a:t>32</a:t>
                       </a:r>
-                      <a:endParaRPr lang="de-DE" sz="4800" dirty="0"/>
                     </a:p>
                   </a:txBody>
                   <a:tcPr anchor="ctr"/>
@@ -6915,11 +6784,11 @@
                     <a:lstStyle/>
                     <a:p>
                       <a:r>
-                        <a:rPr lang="de-DE" sz="4800" dirty="0" smtClean="0"/>
+                        <a:rPr lang="de-DE" sz="4800" dirty="0"/>
                         <a:t>Val</a:t>
                       </a:r>
                       <a:r>
-                        <a:rPr lang="de-DE" sz="4800" baseline="0" dirty="0" smtClean="0"/>
+                        <a:rPr lang="de-DE" sz="4800" baseline="0" dirty="0"/>
                         <a:t> Loss</a:t>
                       </a:r>
                       <a:endParaRPr lang="de-DE" sz="4800" dirty="0"/>
@@ -6933,10 +6802,9 @@
                     <a:lstStyle/>
                     <a:p>
                       <a:r>
-                        <a:rPr lang="de-DE" sz="4800" dirty="0" smtClean="0"/>
+                        <a:rPr lang="de-DE" sz="4800" dirty="0"/>
                         <a:t>0.6660</a:t>
                       </a:r>
-                      <a:endParaRPr lang="de-DE" sz="4800" dirty="0"/>
                     </a:p>
                   </a:txBody>
                   <a:tcPr anchor="ctr"/>
@@ -6947,10 +6815,9 @@
                     <a:lstStyle/>
                     <a:p>
                       <a:r>
-                        <a:rPr lang="de-DE" sz="4800" dirty="0" smtClean="0"/>
+                        <a:rPr lang="de-DE" sz="4800" dirty="0"/>
                         <a:t>0.6979</a:t>
                       </a:r>
-                      <a:endParaRPr lang="de-DE" sz="4800" dirty="0"/>
                     </a:p>
                   </a:txBody>
                   <a:tcPr anchor="ctr"/>
@@ -6976,13 +6843,6 @@
     <a:masterClrMapping/>
   </p:clrMapOvr>
   <p:transition spd="med"/>
-  <p:timing>
-    <p:tnLst>
-      <p:par>
-        <p:cTn id="1" dur="indefinite" restart="never" nodeType="tmRoot"/>
-      </p:par>
-    </p:tnLst>
-  </p:timing>
 </p:sld>
 </file>
 
@@ -7019,10 +6879,9 @@
           <a:lstStyle/>
           <a:p>
             <a:r>
-              <a:rPr lang="de-DE" dirty="0" smtClean="0"/>
+              <a:rPr lang="de-DE" dirty="0"/>
               <a:t>DBCV</a:t>
             </a:r>
-            <a:endParaRPr lang="de-DE" dirty="0"/>
           </a:p>
         </p:txBody>
       </p:sp>
@@ -7085,7 +6944,7 @@
               <a:tabLst/>
             </a:pPr>
             <a:r>
-              <a:rPr kumimoji="0" lang="de-DE" sz="4800" b="0" i="0" u="none" strike="noStrike" cap="none" spc="0" normalizeH="0" baseline="0" dirty="0" smtClean="0">
+              <a:rPr kumimoji="0" lang="de-DE" sz="4800" b="0" i="0" u="none" strike="noStrike" cap="none" spc="0" normalizeH="0" baseline="0" dirty="0">
                 <a:ln>
                   <a:noFill/>
                 </a:ln>
@@ -7120,7 +6979,7 @@
               <a:tabLst/>
             </a:pPr>
             <a:r>
-              <a:rPr kumimoji="0" lang="de-DE" sz="4800" b="0" i="0" u="none" strike="noStrike" cap="none" spc="0" normalizeH="0" baseline="0" dirty="0" smtClean="0">
+              <a:rPr kumimoji="0" lang="de-DE" sz="4800" b="0" i="0" u="none" strike="noStrike" cap="none" spc="0" normalizeH="0" baseline="0" dirty="0">
                 <a:ln>
                   <a:noFill/>
                 </a:ln>
@@ -7136,20 +6995,6 @@
               </a:rPr>
               <a:t>DGCNN</a:t>
             </a:r>
-            <a:endParaRPr kumimoji="0" lang="de-DE" sz="4800" b="0" i="0" u="none" strike="noStrike" cap="none" spc="0" normalizeH="0" baseline="0" dirty="0">
-              <a:ln>
-                <a:noFill/>
-              </a:ln>
-              <a:solidFill>
-                <a:srgbClr val="000000"/>
-              </a:solidFill>
-              <a:effectLst/>
-              <a:uFillTx/>
-              <a:latin typeface="Helvetica Neue"/>
-              <a:ea typeface="Helvetica Neue"/>
-              <a:cs typeface="Helvetica Neue"/>
-              <a:sym typeface="Helvetica Neue"/>
-            </a:endParaRPr>
           </a:p>
         </p:txBody>
       </p:sp>
@@ -7299,7 +7144,7 @@
                 <a:tabLst/>
               </a:pPr>
               <a:r>
-                <a:rPr kumimoji="0" lang="de-DE" sz="4800" b="0" i="0" u="none" strike="noStrike" cap="none" spc="0" normalizeH="0" baseline="0" dirty="0" smtClean="0">
+                <a:rPr kumimoji="0" lang="de-DE" sz="4800" b="0" i="0" u="none" strike="noStrike" cap="none" spc="0" normalizeH="0" baseline="0" dirty="0">
                   <a:ln>
                     <a:noFill/>
                   </a:ln>
@@ -7317,13 +7162,9 @@
               </a:r>
               <a:r>
                 <a:rPr lang="de-DE" dirty="0"/>
-                <a:t> </a:t>
+                <a:t> representation</a:t>
               </a:r>
-              <a:r>
-                <a:rPr lang="de-DE" dirty="0" smtClean="0"/>
-                <a:t>representation</a:t>
-              </a:r>
-              <a:endParaRPr kumimoji="0" lang="de-DE" sz="4800" b="0" i="0" u="none" strike="noStrike" cap="none" spc="0" normalizeH="0" baseline="0" dirty="0" smtClean="0">
+              <a:endParaRPr kumimoji="0" lang="de-DE" sz="4800" b="0" i="0" u="none" strike="noStrike" cap="none" spc="0" normalizeH="0" baseline="0" dirty="0">
                 <a:ln>
                   <a:noFill/>
                 </a:ln>
@@ -7562,7 +7403,7 @@
                 <a:tabLst/>
               </a:pPr>
               <a:r>
-                <a:rPr kumimoji="0" lang="de-DE" sz="4800" b="0" i="0" u="none" strike="noStrike" cap="none" spc="0" normalizeH="0" baseline="0" dirty="0" smtClean="0">
+                <a:rPr kumimoji="0" lang="de-DE" sz="4800" b="0" i="0" u="none" strike="noStrike" cap="none" spc="0" normalizeH="0" baseline="0" dirty="0">
                   <a:ln>
                     <a:noFill/>
                   </a:ln>
@@ -7578,20 +7419,6 @@
                 </a:rPr>
                 <a:t>Clusters</a:t>
               </a:r>
-              <a:endParaRPr kumimoji="0" lang="de-DE" sz="4800" b="0" i="0" u="none" strike="noStrike" cap="none" spc="0" normalizeH="0" baseline="0" dirty="0">
-                <a:ln>
-                  <a:noFill/>
-                </a:ln>
-                <a:solidFill>
-                  <a:srgbClr val="000000"/>
-                </a:solidFill>
-                <a:effectLst/>
-                <a:uFillTx/>
-                <a:latin typeface="Helvetica Neue"/>
-                <a:ea typeface="Helvetica Neue"/>
-                <a:cs typeface="Helvetica Neue"/>
-                <a:sym typeface="Helvetica Neue"/>
-              </a:endParaRPr>
             </a:p>
           </p:txBody>
         </p:sp>
@@ -7667,7 +7494,7 @@
                 <a:tabLst/>
               </a:pPr>
               <a:r>
-                <a:rPr kumimoji="0" lang="de-DE" sz="4800" b="0" i="0" u="none" strike="noStrike" cap="none" spc="0" normalizeH="0" baseline="0" dirty="0" smtClean="0">
+                <a:rPr kumimoji="0" lang="de-DE" sz="4800" b="0" i="0" u="none" strike="noStrike" cap="none" spc="0" normalizeH="0" baseline="0" dirty="0">
                   <a:ln>
                     <a:noFill/>
                   </a:ln>
@@ -7683,20 +7510,6 @@
                 </a:rPr>
                 <a:t>DBCV</a:t>
               </a:r>
-              <a:endParaRPr kumimoji="0" lang="de-DE" sz="4800" b="0" i="0" u="none" strike="noStrike" cap="none" spc="0" normalizeH="0" baseline="0" dirty="0">
-                <a:ln>
-                  <a:noFill/>
-                </a:ln>
-                <a:solidFill>
-                  <a:srgbClr val="000000"/>
-                </a:solidFill>
-                <a:effectLst/>
-                <a:uFillTx/>
-                <a:latin typeface="Helvetica Neue"/>
-                <a:ea typeface="Helvetica Neue"/>
-                <a:cs typeface="Helvetica Neue"/>
-                <a:sym typeface="Helvetica Neue"/>
-              </a:endParaRPr>
             </a:p>
           </p:txBody>
         </p:sp>
@@ -7833,7 +7646,7 @@
               <a:tabLst/>
             </a:pPr>
             <a:r>
-              <a:rPr kumimoji="0" lang="de-DE" sz="9600" b="0" i="0" u="none" strike="noStrike" cap="none" spc="0" normalizeH="0" baseline="0" dirty="0" smtClean="0">
+              <a:rPr kumimoji="0" lang="de-DE" sz="9600" b="0" i="0" u="none" strike="noStrike" cap="none" spc="0" normalizeH="0" baseline="0" dirty="0">
                 <a:ln>
                   <a:noFill/>
                 </a:ln>
@@ -7849,20 +7662,6 @@
               </a:rPr>
               <a:t>❌</a:t>
             </a:r>
-            <a:endParaRPr kumimoji="0" lang="de-DE" sz="9600" b="0" i="0" u="none" strike="noStrike" cap="none" spc="0" normalizeH="0" baseline="0" dirty="0">
-              <a:ln>
-                <a:noFill/>
-              </a:ln>
-              <a:solidFill>
-                <a:srgbClr val="FF0000"/>
-              </a:solidFill>
-              <a:effectLst/>
-              <a:uFillTx/>
-              <a:latin typeface="Helvetica Neue"/>
-              <a:ea typeface="Helvetica Neue"/>
-              <a:cs typeface="Helvetica Neue"/>
-              <a:sym typeface="Helvetica Neue"/>
-            </a:endParaRPr>
           </a:p>
         </p:txBody>
       </p:sp>
@@ -7925,7 +7724,7 @@
               <a:tabLst/>
             </a:pPr>
             <a:r>
-              <a:rPr kumimoji="0" lang="de-DE" sz="4800" b="0" i="0" u="none" strike="noStrike" cap="none" spc="0" normalizeH="0" baseline="0" dirty="0" smtClean="0">
+              <a:rPr kumimoji="0" lang="de-DE" sz="4800" b="0" i="0" u="none" strike="noStrike" cap="none" spc="0" normalizeH="0" baseline="0" dirty="0">
                 <a:ln>
                   <a:noFill/>
                 </a:ln>
@@ -7960,7 +7759,7 @@
               <a:tabLst/>
             </a:pPr>
             <a:r>
-              <a:rPr kumimoji="0" lang="de-DE" sz="4800" b="0" i="0" u="none" strike="noStrike" cap="none" spc="0" normalizeH="0" baseline="0" dirty="0" smtClean="0">
+              <a:rPr kumimoji="0" lang="de-DE" sz="4800" b="0" i="0" u="none" strike="noStrike" cap="none" spc="0" normalizeH="0" baseline="0" dirty="0">
                 <a:ln>
                   <a:noFill/>
                 </a:ln>
@@ -7976,20 +7775,6 @@
               </a:rPr>
               <a:t>DGCNN</a:t>
             </a:r>
-            <a:endParaRPr kumimoji="0" lang="de-DE" sz="4800" b="0" i="0" u="none" strike="noStrike" cap="none" spc="0" normalizeH="0" baseline="0" dirty="0">
-              <a:ln>
-                <a:noFill/>
-              </a:ln>
-              <a:solidFill>
-                <a:srgbClr val="000000"/>
-              </a:solidFill>
-              <a:effectLst/>
-              <a:uFillTx/>
-              <a:latin typeface="Helvetica Neue"/>
-              <a:ea typeface="Helvetica Neue"/>
-              <a:cs typeface="Helvetica Neue"/>
-              <a:sym typeface="Helvetica Neue"/>
-            </a:endParaRPr>
           </a:p>
         </p:txBody>
       </p:sp>
@@ -8139,7 +7924,7 @@
                 <a:tabLst/>
               </a:pPr>
               <a:r>
-                <a:rPr kumimoji="0" lang="de-DE" sz="4800" b="0" i="0" u="none" strike="noStrike" cap="none" spc="0" normalizeH="0" baseline="0" dirty="0" smtClean="0">
+                <a:rPr kumimoji="0" lang="de-DE" sz="4800" b="0" i="0" u="none" strike="noStrike" cap="none" spc="0" normalizeH="0" baseline="0" dirty="0">
                   <a:ln>
                     <a:noFill/>
                   </a:ln>
@@ -8157,13 +7942,9 @@
               </a:r>
               <a:r>
                 <a:rPr lang="de-DE" dirty="0"/>
-                <a:t> </a:t>
+                <a:t> representation</a:t>
               </a:r>
-              <a:r>
-                <a:rPr lang="de-DE" dirty="0" smtClean="0"/>
-                <a:t>representation</a:t>
-              </a:r>
-              <a:endParaRPr kumimoji="0" lang="de-DE" sz="4800" b="0" i="0" u="none" strike="noStrike" cap="none" spc="0" normalizeH="0" baseline="0" dirty="0" smtClean="0">
+              <a:endParaRPr kumimoji="0" lang="de-DE" sz="4800" b="0" i="0" u="none" strike="noStrike" cap="none" spc="0" normalizeH="0" baseline="0" dirty="0">
                 <a:ln>
                   <a:noFill/>
                 </a:ln>
@@ -8402,7 +8183,7 @@
                 <a:tabLst/>
               </a:pPr>
               <a:r>
-                <a:rPr kumimoji="0" lang="de-DE" sz="4800" b="0" i="0" u="none" strike="noStrike" cap="none" spc="0" normalizeH="0" baseline="0" dirty="0" smtClean="0">
+                <a:rPr kumimoji="0" lang="de-DE" sz="4800" b="0" i="0" u="none" strike="noStrike" cap="none" spc="0" normalizeH="0" baseline="0" dirty="0">
                   <a:ln>
                     <a:noFill/>
                   </a:ln>
@@ -8418,20 +8199,6 @@
                 </a:rPr>
                 <a:t>Clusters</a:t>
               </a:r>
-              <a:endParaRPr kumimoji="0" lang="de-DE" sz="4800" b="0" i="0" u="none" strike="noStrike" cap="none" spc="0" normalizeH="0" baseline="0" dirty="0">
-                <a:ln>
-                  <a:noFill/>
-                </a:ln>
-                <a:solidFill>
-                  <a:srgbClr val="000000"/>
-                </a:solidFill>
-                <a:effectLst/>
-                <a:uFillTx/>
-                <a:latin typeface="Helvetica Neue"/>
-                <a:ea typeface="Helvetica Neue"/>
-                <a:cs typeface="Helvetica Neue"/>
-                <a:sym typeface="Helvetica Neue"/>
-              </a:endParaRPr>
             </a:p>
           </p:txBody>
         </p:sp>
@@ -8507,7 +8274,7 @@
                 <a:tabLst/>
               </a:pPr>
               <a:r>
-                <a:rPr kumimoji="0" lang="de-DE" sz="4800" b="0" i="0" u="none" strike="noStrike" cap="none" spc="0" normalizeH="0" baseline="0" dirty="0" smtClean="0">
+                <a:rPr kumimoji="0" lang="de-DE" sz="4800" b="0" i="0" u="none" strike="noStrike" cap="none" spc="0" normalizeH="0" baseline="0" dirty="0">
                   <a:ln>
                     <a:noFill/>
                   </a:ln>
@@ -8523,20 +8290,6 @@
                 </a:rPr>
                 <a:t>DBCV</a:t>
               </a:r>
-              <a:endParaRPr kumimoji="0" lang="de-DE" sz="4800" b="0" i="0" u="none" strike="noStrike" cap="none" spc="0" normalizeH="0" baseline="0" dirty="0">
-                <a:ln>
-                  <a:noFill/>
-                </a:ln>
-                <a:solidFill>
-                  <a:srgbClr val="000000"/>
-                </a:solidFill>
-                <a:effectLst/>
-                <a:uFillTx/>
-                <a:latin typeface="Helvetica Neue"/>
-                <a:ea typeface="Helvetica Neue"/>
-                <a:cs typeface="Helvetica Neue"/>
-                <a:sym typeface="Helvetica Neue"/>
-              </a:endParaRPr>
             </a:p>
           </p:txBody>
         </p:sp>
@@ -8687,7 +8440,7 @@
                 <a:tabLst/>
               </a:pPr>
               <a:r>
-                <a:rPr kumimoji="0" lang="de-DE" sz="4800" b="0" i="0" u="none" strike="noStrike" cap="none" spc="0" normalizeH="0" baseline="0" dirty="0" smtClean="0">
+                <a:rPr kumimoji="0" lang="de-DE" sz="4800" b="0" i="0" u="none" strike="noStrike" cap="none" spc="0" normalizeH="0" baseline="0" dirty="0">
                   <a:ln>
                     <a:noFill/>
                   </a:ln>
@@ -8704,7 +8457,7 @@
                 <a:t>Dim</a:t>
               </a:r>
               <a:r>
-                <a:rPr kumimoji="0" lang="de-DE" sz="4800" b="0" i="0" u="none" strike="noStrike" cap="none" spc="0" normalizeH="0" dirty="0" smtClean="0">
+                <a:rPr kumimoji="0" lang="de-DE" sz="4800" b="0" i="0" u="none" strike="noStrike" cap="none" spc="0" normalizeH="0" dirty="0">
                   <a:ln>
                     <a:noFill/>
                   </a:ln>
@@ -8959,7 +8712,7 @@
                 <a:tabLst/>
               </a:pPr>
               <a:r>
-                <a:rPr kumimoji="0" lang="de-DE" sz="4800" b="0" i="0" u="none" strike="noStrike" cap="none" spc="0" normalizeH="0" baseline="0" dirty="0" smtClean="0">
+                <a:rPr kumimoji="0" lang="de-DE" sz="4800" b="0" i="0" u="none" strike="noStrike" cap="none" spc="0" normalizeH="0" baseline="0" dirty="0">
                   <a:ln>
                     <a:noFill/>
                   </a:ln>
@@ -8977,13 +8730,9 @@
               </a:r>
               <a:r>
                 <a:rPr lang="de-DE" dirty="0"/>
-                <a:t> </a:t>
+                <a:t> representation</a:t>
               </a:r>
-              <a:r>
-                <a:rPr lang="de-DE" dirty="0" smtClean="0"/>
-                <a:t>representation</a:t>
-              </a:r>
-              <a:endParaRPr kumimoji="0" lang="de-DE" sz="4800" b="0" i="0" u="none" strike="noStrike" cap="none" spc="0" normalizeH="0" baseline="0" dirty="0" smtClean="0">
+              <a:endParaRPr kumimoji="0" lang="de-DE" sz="4800" b="0" i="0" u="none" strike="noStrike" cap="none" spc="0" normalizeH="0" baseline="0" dirty="0">
                 <a:ln>
                   <a:noFill/>
                 </a:ln>
@@ -9147,7 +8896,7 @@
                 <a:tabLst/>
               </a:pPr>
               <a:r>
-                <a:rPr kumimoji="0" lang="de-DE" sz="4800" b="0" i="0" u="none" strike="noStrike" cap="none" spc="0" normalizeH="0" baseline="0" dirty="0" smtClean="0">
+                <a:rPr kumimoji="0" lang="de-DE" sz="4800" b="0" i="0" u="none" strike="noStrike" cap="none" spc="0" normalizeH="0" baseline="0" dirty="0">
                   <a:ln>
                     <a:noFill/>
                   </a:ln>
@@ -9163,20 +8912,6 @@
                 </a:rPr>
                 <a:t>Clustering Algo</a:t>
               </a:r>
-              <a:endParaRPr kumimoji="0" lang="de-DE" sz="4800" b="0" i="0" u="none" strike="noStrike" cap="none" spc="0" normalizeH="0" baseline="0" dirty="0">
-                <a:ln>
-                  <a:noFill/>
-                </a:ln>
-                <a:solidFill>
-                  <a:srgbClr val="000000"/>
-                </a:solidFill>
-                <a:effectLst/>
-                <a:uFillTx/>
-                <a:latin typeface="Helvetica Neue"/>
-                <a:ea typeface="Helvetica Neue"/>
-                <a:cs typeface="Helvetica Neue"/>
-                <a:sym typeface="Helvetica Neue"/>
-              </a:endParaRPr>
             </a:p>
           </p:txBody>
         </p:sp>
@@ -9238,7 +8973,7 @@
               <a:tabLst/>
             </a:pPr>
             <a:r>
-              <a:rPr kumimoji="0" lang="de-DE" sz="9600" b="0" i="0" u="none" strike="noStrike" cap="none" spc="0" normalizeH="0" baseline="0" dirty="0" smtClean="0">
+              <a:rPr kumimoji="0" lang="de-DE" sz="9600" b="0" i="0" u="none" strike="noStrike" cap="none" spc="0" normalizeH="0" baseline="0" dirty="0">
                 <a:ln>
                   <a:noFill/>
                 </a:ln>
@@ -9254,20 +8989,6 @@
               </a:rPr>
               <a:t>✔</a:t>
             </a:r>
-            <a:endParaRPr kumimoji="0" lang="de-DE" sz="9600" b="0" i="0" u="none" strike="noStrike" cap="none" spc="0" normalizeH="0" baseline="0" dirty="0">
-              <a:ln>
-                <a:noFill/>
-              </a:ln>
-              <a:solidFill>
-                <a:schemeClr val="accent3"/>
-              </a:solidFill>
-              <a:effectLst/>
-              <a:uFillTx/>
-              <a:latin typeface="Helvetica Neue"/>
-              <a:ea typeface="Helvetica Neue"/>
-              <a:cs typeface="Helvetica Neue"/>
-              <a:sym typeface="Helvetica Neue"/>
-            </a:endParaRPr>
           </a:p>
         </p:txBody>
       </p:sp>
@@ -9417,7 +9138,7 @@
                 <a:tabLst/>
               </a:pPr>
               <a:r>
-                <a:rPr kumimoji="0" lang="de-DE" sz="4800" b="0" i="0" u="none" strike="noStrike" cap="none" spc="0" normalizeH="0" baseline="0" dirty="0" smtClean="0">
+                <a:rPr kumimoji="0" lang="de-DE" sz="4800" b="0" i="0" u="none" strike="noStrike" cap="none" spc="0" normalizeH="0" baseline="0" dirty="0">
                   <a:ln>
                     <a:noFill/>
                   </a:ln>
@@ -9433,20 +9154,6 @@
                 </a:rPr>
                 <a:t>Clustering Algo</a:t>
               </a:r>
-              <a:endParaRPr kumimoji="0" lang="de-DE" sz="4800" b="0" i="0" u="none" strike="noStrike" cap="none" spc="0" normalizeH="0" baseline="0" dirty="0">
-                <a:ln>
-                  <a:noFill/>
-                </a:ln>
-                <a:solidFill>
-                  <a:srgbClr val="000000"/>
-                </a:solidFill>
-                <a:effectLst/>
-                <a:uFillTx/>
-                <a:latin typeface="Helvetica Neue"/>
-                <a:ea typeface="Helvetica Neue"/>
-                <a:cs typeface="Helvetica Neue"/>
-                <a:sym typeface="Helvetica Neue"/>
-              </a:endParaRPr>
             </a:p>
           </p:txBody>
         </p:sp>
@@ -10169,10 +9876,9 @@
           <a:lstStyle/>
           <a:p>
             <a:r>
-              <a:rPr lang="de-DE" dirty="0" smtClean="0"/>
+              <a:rPr lang="de-DE" dirty="0"/>
               <a:t>Evaluation</a:t>
             </a:r>
-            <a:endParaRPr lang="de-DE" dirty="0"/>
           </a:p>
         </p:txBody>
       </p:sp>
@@ -10397,7 +10103,7 @@
                 <a:tabLst/>
               </a:pPr>
               <a:r>
-                <a:rPr kumimoji="0" lang="de-DE" sz="4800" b="0" i="0" u="none" strike="noStrike" cap="none" spc="0" normalizeH="0" baseline="0" dirty="0" smtClean="0">
+                <a:rPr kumimoji="0" lang="de-DE" sz="4800" b="0" i="0" u="none" strike="noStrike" cap="none" spc="0" normalizeH="0" baseline="0" dirty="0">
                   <a:ln>
                     <a:noFill/>
                   </a:ln>
@@ -10413,20 +10119,6 @@
                 </a:rPr>
                 <a:t>Model X</a:t>
               </a:r>
-              <a:endParaRPr kumimoji="0" lang="de-DE" sz="4800" b="0" i="0" u="none" strike="noStrike" cap="none" spc="0" normalizeH="0" baseline="0" dirty="0">
-                <a:ln>
-                  <a:noFill/>
-                </a:ln>
-                <a:solidFill>
-                  <a:srgbClr val="000000"/>
-                </a:solidFill>
-                <a:effectLst/>
-                <a:uFillTx/>
-                <a:latin typeface="Helvetica Neue"/>
-                <a:ea typeface="Helvetica Neue"/>
-                <a:cs typeface="Helvetica Neue"/>
-                <a:sym typeface="Helvetica Neue"/>
-              </a:endParaRPr>
             </a:p>
           </p:txBody>
         </p:sp>
@@ -10487,7 +10179,7 @@
                 <a:tabLst/>
               </a:pPr>
               <a:r>
-                <a:rPr kumimoji="0" lang="de-DE" sz="3600" b="0" i="0" u="none" strike="noStrike" cap="none" spc="0" normalizeH="0" baseline="0" dirty="0" smtClean="0">
+                <a:rPr kumimoji="0" lang="de-DE" sz="3600" b="0" i="0" u="none" strike="noStrike" cap="none" spc="0" normalizeH="0" baseline="0" dirty="0">
                   <a:ln>
                     <a:noFill/>
                   </a:ln>
@@ -10503,20 +10195,6 @@
                 </a:rPr>
                 <a:t>Test Set</a:t>
               </a:r>
-              <a:endParaRPr kumimoji="0" lang="de-DE" sz="3600" b="0" i="0" u="none" strike="noStrike" cap="none" spc="0" normalizeH="0" baseline="0" dirty="0">
-                <a:ln>
-                  <a:noFill/>
-                </a:ln>
-                <a:solidFill>
-                  <a:srgbClr val="000000"/>
-                </a:solidFill>
-                <a:effectLst/>
-                <a:uFillTx/>
-                <a:latin typeface="Helvetica Neue"/>
-                <a:ea typeface="Helvetica Neue"/>
-                <a:cs typeface="Helvetica Neue"/>
-                <a:sym typeface="Helvetica Neue"/>
-              </a:endParaRPr>
             </a:p>
           </p:txBody>
         </p:sp>
@@ -10952,7 +10630,7 @@
                 <a:tabLst/>
               </a:pPr>
               <a:r>
-                <a:rPr lang="de-DE" sz="3600" dirty="0" smtClean="0"/>
+                <a:rPr lang="de-DE" sz="3600" dirty="0"/>
                 <a:t>Representative objects</a:t>
               </a:r>
               <a:endParaRPr kumimoji="0" lang="de-DE" sz="3600" b="0" i="0" u="none" strike="noStrike" cap="none" spc="0" normalizeH="0" baseline="0" dirty="0">
@@ -11561,7 +11239,7 @@
               <a:tabLst/>
             </a:pPr>
             <a:r>
-              <a:rPr kumimoji="0" lang="de-DE" sz="4800" b="0" i="0" u="none" strike="noStrike" cap="none" spc="0" normalizeH="0" baseline="0" dirty="0" smtClean="0">
+              <a:rPr kumimoji="0" lang="de-DE" sz="4800" b="0" i="0" u="none" strike="noStrike" cap="none" spc="0" normalizeH="0" baseline="0" dirty="0">
                 <a:ln>
                   <a:noFill/>
                 </a:ln>
@@ -11577,20 +11255,6 @@
               </a:rPr>
               <a:t>Model Y</a:t>
             </a:r>
-            <a:endParaRPr kumimoji="0" lang="de-DE" sz="4800" b="0" i="0" u="none" strike="noStrike" cap="none" spc="0" normalizeH="0" baseline="0" dirty="0">
-              <a:ln>
-                <a:noFill/>
-              </a:ln>
-              <a:solidFill>
-                <a:srgbClr val="000000"/>
-              </a:solidFill>
-              <a:effectLst/>
-              <a:uFillTx/>
-              <a:latin typeface="Helvetica Neue"/>
-              <a:ea typeface="Helvetica Neue"/>
-              <a:cs typeface="Helvetica Neue"/>
-              <a:sym typeface="Helvetica Neue"/>
-            </a:endParaRPr>
           </a:p>
         </p:txBody>
       </p:sp>
@@ -11651,7 +11315,7 @@
               <a:tabLst/>
             </a:pPr>
             <a:r>
-              <a:rPr kumimoji="0" lang="de-DE" sz="3600" b="0" i="0" u="none" strike="noStrike" cap="none" spc="0" normalizeH="0" baseline="0" dirty="0" smtClean="0">
+              <a:rPr kumimoji="0" lang="de-DE" sz="3600" b="0" i="0" u="none" strike="noStrike" cap="none" spc="0" normalizeH="0" baseline="0" dirty="0">
                 <a:ln>
                   <a:noFill/>
                 </a:ln>
@@ -11667,20 +11331,6 @@
               </a:rPr>
               <a:t>Test Set</a:t>
             </a:r>
-            <a:endParaRPr kumimoji="0" lang="de-DE" sz="3600" b="0" i="0" u="none" strike="noStrike" cap="none" spc="0" normalizeH="0" baseline="0" dirty="0">
-              <a:ln>
-                <a:noFill/>
-              </a:ln>
-              <a:solidFill>
-                <a:srgbClr val="000000"/>
-              </a:solidFill>
-              <a:effectLst/>
-              <a:uFillTx/>
-              <a:latin typeface="Helvetica Neue"/>
-              <a:ea typeface="Helvetica Neue"/>
-              <a:cs typeface="Helvetica Neue"/>
-              <a:sym typeface="Helvetica Neue"/>
-            </a:endParaRPr>
           </a:p>
         </p:txBody>
       </p:sp>
@@ -12116,7 +11766,7 @@
               <a:tabLst/>
             </a:pPr>
             <a:r>
-              <a:rPr lang="de-DE" sz="3600" dirty="0" smtClean="0"/>
+              <a:rPr lang="de-DE" sz="3600" dirty="0"/>
               <a:t>Representative objects</a:t>
             </a:r>
             <a:endParaRPr kumimoji="0" lang="de-DE" sz="3600" b="0" i="0" u="none" strike="noStrike" cap="none" spc="0" normalizeH="0" baseline="0" dirty="0">
@@ -12408,18 +12058,9 @@
           <a:lstStyle/>
           <a:p>
             <a:r>
-              <a:rPr lang="de-DE" sz="3600" dirty="0" smtClean="0"/>
-              <a:t>Avg Hausdorff distance(test,repr. Objs) (Model X)&lt; Avg Hausdorff </a:t>
+              <a:rPr lang="de-DE" sz="3600" dirty="0"/>
+              <a:t>Avg Hausdorff distance(test,repr. Objs) (Model X)&lt; Avg Hausdorff distance(test,repr. Objs) (Model Y)</a:t>
             </a:r>
-            <a:r>
-              <a:rPr lang="de-DE" sz="3600" dirty="0"/>
-              <a:t>distance(test,repr. Objs) (Model </a:t>
-            </a:r>
-            <a:r>
-              <a:rPr lang="de-DE" sz="3600" dirty="0" smtClean="0"/>
-              <a:t>Y)</a:t>
-            </a:r>
-            <a:endParaRPr lang="de-DE" sz="3600" dirty="0"/>
           </a:p>
         </p:txBody>
       </p:sp>
@@ -12480,7 +12121,7 @@
               <a:tabLst/>
             </a:pPr>
             <a:r>
-              <a:rPr kumimoji="0" lang="de-DE" sz="4800" b="0" i="0" u="none" strike="noStrike" cap="none" spc="0" normalizeH="0" baseline="0" dirty="0" smtClean="0">
+              <a:rPr kumimoji="0" lang="de-DE" sz="4800" b="0" i="0" u="none" strike="noStrike" cap="none" spc="0" normalizeH="0" baseline="0" dirty="0">
                 <a:ln>
                   <a:noFill/>
                 </a:ln>
@@ -12496,20 +12137,6 @@
               </a:rPr>
               <a:t>Model X🎉🎊</a:t>
             </a:r>
-            <a:endParaRPr kumimoji="0" lang="de-DE" sz="4800" b="0" i="0" u="none" strike="noStrike" cap="none" spc="0" normalizeH="0" baseline="0" dirty="0">
-              <a:ln>
-                <a:noFill/>
-              </a:ln>
-              <a:solidFill>
-                <a:srgbClr val="000000"/>
-              </a:solidFill>
-              <a:effectLst/>
-              <a:uFillTx/>
-              <a:latin typeface="Helvetica Neue"/>
-              <a:ea typeface="Helvetica Neue"/>
-              <a:cs typeface="Helvetica Neue"/>
-              <a:sym typeface="Helvetica Neue"/>
-            </a:endParaRPr>
           </a:p>
         </p:txBody>
       </p:sp>
@@ -12837,7 +12464,7 @@
           </a:ln>
           <a:extLst>
             <a:ext uri="{C572A759-6A51-4108-AA02-DFA0A04FC94B}">
-              <ma14:wrappingTextBoxFlag xmlns="" xmlns:m="http://schemas.openxmlformats.org/officeDocument/2006/math" xmlns:a14="http://schemas.microsoft.com/office/drawing/2010/main" xmlns:ma14="http://schemas.microsoft.com/office/mac/drawingml/2011/main" val="1"/>
+              <ma14:wrappingTextBoxFlag xmlns:ma14="http://schemas.microsoft.com/office/mac/drawingml/2011/main" xmlns:a14="http://schemas.microsoft.com/office/drawing/2010/main" xmlns:m="http://schemas.openxmlformats.org/officeDocument/2006/math" xmlns="" val="1"/>
             </a:ext>
           </a:extLst>
         </p:spPr>
@@ -12866,7 +12493,7 @@
               <a:buChar char="•"/>
             </a:pPr>
             <a:r>
-              <a:rPr lang="de-DE" dirty="0" smtClean="0"/>
+              <a:rPr lang="de-DE" dirty="0"/>
               <a:t>Agglomerative</a:t>
             </a:r>
             <a:endParaRPr dirty="0"/>
@@ -12880,18 +12507,17 @@
               <a:buChar char="•"/>
             </a:pPr>
             <a:r>
-              <a:rPr dirty="0" smtClean="0"/>
+              <a:rPr dirty="0"/>
               <a:t>HD</a:t>
             </a:r>
             <a:r>
-              <a:rPr lang="de-DE" dirty="0" smtClean="0"/>
+              <a:rPr lang="de-DE" dirty="0"/>
               <a:t>B</a:t>
             </a:r>
             <a:r>
-              <a:rPr dirty="0" smtClean="0"/>
+              <a:rPr dirty="0"/>
               <a:t>SCAN</a:t>
             </a:r>
-            <a:endParaRPr dirty="0"/>
           </a:p>
           <a:p>
             <a:pPr marL="1270000" lvl="1" indent="-635000">
@@ -12902,7 +12528,7 @@
               <a:buChar char="•"/>
             </a:pPr>
             <a:r>
-              <a:rPr lang="de-DE" dirty="0" smtClean="0"/>
+              <a:rPr lang="de-DE" dirty="0"/>
               <a:t>Spectral</a:t>
             </a:r>
             <a:endParaRPr dirty="0"/>
@@ -12916,11 +12542,11 @@
               <a:buChar char="•"/>
             </a:pPr>
             <a:r>
-              <a:rPr lang="de-DE" dirty="0" smtClean="0"/>
+              <a:rPr lang="de-DE" dirty="0"/>
               <a:t>Mini-Batch </a:t>
             </a:r>
             <a:r>
-              <a:rPr dirty="0" err="1" smtClean="0"/>
+              <a:rPr dirty="0" err="1"/>
               <a:t>KMeans</a:t>
             </a:r>
             <a:endParaRPr dirty="0"/>
@@ -12947,7 +12573,7 @@
           <a:lstStyle/>
           <a:p>
             <a:r>
-              <a:rPr lang="de-DE" dirty="0" smtClean="0"/>
+              <a:rPr lang="de-DE" dirty="0"/>
               <a:t>Quick Recap</a:t>
             </a:r>
             <a:endParaRPr dirty="0"/>
@@ -12963,9 +12589,7 @@
           <p:nvPr/>
         </p:nvPicPr>
         <p:blipFill>
-          <a:blip r:embed="rId3">
-            <a:extLst/>
-          </a:blip>
+          <a:blip r:embed="rId3"/>
           <a:stretch>
             <a:fillRect/>
           </a:stretch>
@@ -13002,7 +12626,7 @@
           </a:ln>
           <a:extLst>
             <a:ext uri="{C572A759-6A51-4108-AA02-DFA0A04FC94B}">
-              <ma14:wrappingTextBoxFlag xmlns="" xmlns:m="http://schemas.openxmlformats.org/officeDocument/2006/math" xmlns:a14="http://schemas.microsoft.com/office/drawing/2010/main" xmlns:ma14="http://schemas.microsoft.com/office/mac/drawingml/2011/main" val="1"/>
+              <ma14:wrappingTextBoxFlag xmlns:ma14="http://schemas.microsoft.com/office/mac/drawingml/2011/main" xmlns:a14="http://schemas.microsoft.com/office/drawing/2010/main" xmlns:m="http://schemas.openxmlformats.org/officeDocument/2006/math" xmlns="" val="1"/>
             </a:ext>
           </a:extLst>
         </p:spPr>
@@ -13075,7 +12699,7 @@
               <a:buChar char="•"/>
             </a:pPr>
             <a:r>
-              <a:rPr dirty="0" err="1" smtClean="0"/>
+              <a:rPr dirty="0" err="1"/>
               <a:t>KMeans</a:t>
             </a:r>
             <a:endParaRPr dirty="0"/>
@@ -13098,7 +12722,7 @@
           </a:prstGeom>
           <a:extLst>
             <a:ext uri="{C572A759-6A51-4108-AA02-DFA0A04FC94B}">
-              <ma14:wrappingTextBoxFlag xmlns="" xmlns:m="http://schemas.openxmlformats.org/officeDocument/2006/math" xmlns:a14="http://schemas.microsoft.com/office/drawing/2010/main" xmlns:ma14="http://schemas.microsoft.com/office/mac/drawingml/2011/main" val="1"/>
+              <ma14:wrappingTextBoxFlag xmlns:ma14="http://schemas.microsoft.com/office/mac/drawingml/2011/main" xmlns:a14="http://schemas.microsoft.com/office/drawing/2010/main" xmlns:m="http://schemas.openxmlformats.org/officeDocument/2006/math" xmlns="" val="1"/>
             </a:ext>
           </a:extLst>
         </p:spPr>
@@ -13186,7 +12810,7 @@
                 <a:tabLst/>
               </a:pPr>
               <a:r>
-                <a:rPr kumimoji="0" lang="de-DE" b="0" i="0" u="none" strike="noStrike" cap="none" spc="0" normalizeH="0" baseline="0" dirty="0" smtClean="0">
+                <a:rPr kumimoji="0" lang="de-DE" b="0" i="0" u="none" strike="noStrike" cap="none" spc="0" normalizeH="0" baseline="0" dirty="0">
                   <a:ln>
                     <a:noFill/>
                   </a:ln>
@@ -13202,20 +12826,6 @@
                 </a:rPr>
                 <a:t>PointNet</a:t>
               </a:r>
-              <a:endParaRPr kumimoji="0" lang="de-DE" b="0" i="0" u="none" strike="noStrike" cap="none" spc="0" normalizeH="0" baseline="0" dirty="0">
-                <a:ln>
-                  <a:noFill/>
-                </a:ln>
-                <a:solidFill>
-                  <a:srgbClr val="FFFFFF"/>
-                </a:solidFill>
-                <a:effectLst/>
-                <a:uFillTx/>
-                <a:latin typeface="+mn-lt"/>
-                <a:ea typeface="+mn-ea"/>
-                <a:cs typeface="+mn-cs"/>
-                <a:sym typeface="Helvetica Neue Medium"/>
-              </a:endParaRPr>
             </a:p>
           </p:txBody>
         </p:sp>
@@ -13278,7 +12888,7 @@
                 <a:tabLst/>
               </a:pPr>
               <a:r>
-                <a:rPr kumimoji="0" lang="de-DE" b="0" i="0" u="none" strike="noStrike" cap="none" spc="0" normalizeH="0" baseline="0" dirty="0" smtClean="0">
+                <a:rPr kumimoji="0" lang="de-DE" b="0" i="0" u="none" strike="noStrike" cap="none" spc="0" normalizeH="0" baseline="0" dirty="0">
                   <a:ln>
                     <a:noFill/>
                   </a:ln>
@@ -13294,20 +12904,6 @@
                 </a:rPr>
                 <a:t>DGCNN</a:t>
               </a:r>
-              <a:endParaRPr kumimoji="0" lang="de-DE" b="0" i="0" u="none" strike="noStrike" cap="none" spc="0" normalizeH="0" baseline="0" dirty="0">
-                <a:ln>
-                  <a:noFill/>
-                </a:ln>
-                <a:solidFill>
-                  <a:srgbClr val="FFFFFF"/>
-                </a:solidFill>
-                <a:effectLst/>
-                <a:uFillTx/>
-                <a:latin typeface="+mn-lt"/>
-                <a:ea typeface="+mn-ea"/>
-                <a:cs typeface="+mn-cs"/>
-                <a:sym typeface="Helvetica Neue Medium"/>
-              </a:endParaRPr>
             </a:p>
           </p:txBody>
         </p:sp>
@@ -13369,7 +12965,7 @@
               <a:tabLst/>
             </a:pPr>
             <a:r>
-              <a:rPr kumimoji="0" lang="de-DE" sz="4800" b="0" i="0" u="none" strike="noStrike" cap="none" spc="0" normalizeH="0" baseline="0" dirty="0" smtClean="0">
+              <a:rPr kumimoji="0" lang="de-DE" sz="4800" b="0" i="0" u="none" strike="noStrike" cap="none" spc="0" normalizeH="0" baseline="0" dirty="0">
                 <a:ln>
                   <a:noFill/>
                 </a:ln>
@@ -13385,20 +12981,6 @@
               </a:rPr>
               <a:t>DBCV: Density based Clustering Evaluation</a:t>
             </a:r>
-            <a:endParaRPr kumimoji="0" lang="de-DE" sz="4800" b="0" i="0" u="none" strike="noStrike" cap="none" spc="0" normalizeH="0" baseline="0" dirty="0">
-              <a:ln>
-                <a:noFill/>
-              </a:ln>
-              <a:solidFill>
-                <a:srgbClr val="000000"/>
-              </a:solidFill>
-              <a:effectLst/>
-              <a:uFillTx/>
-              <a:latin typeface="Helvetica Neue"/>
-              <a:ea typeface="Helvetica Neue"/>
-              <a:cs typeface="Helvetica Neue"/>
-              <a:sym typeface="Helvetica Neue"/>
-            </a:endParaRPr>
           </a:p>
         </p:txBody>
       </p:sp>
@@ -13448,18 +13030,17 @@
               </a:lnSpc>
             </a:pPr>
             <a:r>
-              <a:rPr lang="fr-FR" dirty="0" smtClean="0"/>
+              <a:rPr lang="fr-FR" dirty="0"/>
               <a:t>Evaluation </a:t>
             </a:r>
             <a:r>
-              <a:rPr lang="fr-FR" dirty="0" err="1" smtClean="0"/>
+              <a:rPr lang="fr-FR" dirty="0" err="1"/>
               <a:t>metrics</a:t>
             </a:r>
             <a:r>
-              <a:rPr lang="fr-FR" dirty="0" smtClean="0"/>
+              <a:rPr lang="fr-FR" dirty="0"/>
               <a:t> - </a:t>
             </a:r>
-            <a:endParaRPr lang="fr-FR" dirty="0"/>
           </a:p>
         </p:txBody>
       </p:sp>
@@ -13520,7 +13101,7 @@
               <a:tabLst/>
             </a:pPr>
             <a:r>
-              <a:rPr kumimoji="0" lang="de-DE" sz="2000" b="0" i="0" u="none" strike="noStrike" cap="none" spc="0" normalizeH="0" baseline="0" dirty="0" smtClean="0">
+              <a:rPr kumimoji="0" lang="de-DE" sz="2000" b="0" i="0" u="none" strike="noStrike" cap="none" spc="0" normalizeH="0" baseline="0" dirty="0">
                 <a:ln>
                   <a:noFill/>
                 </a:ln>
@@ -13536,20 +13117,6 @@
               </a:rPr>
               <a:t>DGCNN:Dynamic Graph Convolutional Neural Network</a:t>
             </a:r>
-            <a:endParaRPr kumimoji="0" lang="de-DE" sz="2000" b="0" i="0" u="none" strike="noStrike" cap="none" spc="0" normalizeH="0" baseline="0" dirty="0">
-              <a:ln>
-                <a:noFill/>
-              </a:ln>
-              <a:solidFill>
-                <a:srgbClr val="000000"/>
-              </a:solidFill>
-              <a:effectLst/>
-              <a:uFillTx/>
-              <a:latin typeface="Helvetica Neue"/>
-              <a:ea typeface="Helvetica Neue"/>
-              <a:cs typeface="Helvetica Neue"/>
-              <a:sym typeface="Helvetica Neue"/>
-            </a:endParaRPr>
           </a:p>
         </p:txBody>
       </p:sp>
@@ -13690,7 +13257,7 @@
               <a:tabLst/>
             </a:pPr>
             <a:r>
-              <a:rPr kumimoji="0" lang="de-DE" b="0" i="0" u="none" strike="noStrike" cap="none" spc="0" normalizeH="0" baseline="0" dirty="0" smtClean="0">
+              <a:rPr kumimoji="0" lang="de-DE" b="0" i="0" u="none" strike="noStrike" cap="none" spc="0" normalizeH="0" baseline="0" dirty="0">
                 <a:ln>
                   <a:noFill/>
                 </a:ln>
@@ -13709,7 +13276,7 @@
               <a:t>Multi-level</a:t>
             </a:r>
             <a:r>
-              <a:rPr kumimoji="0" lang="de-DE" b="0" i="0" u="none" strike="noStrike" cap="none" spc="0" normalizeH="0" dirty="0" smtClean="0">
+              <a:rPr kumimoji="0" lang="de-DE" b="0" i="0" u="none" strike="noStrike" cap="none" spc="0" normalizeH="0" dirty="0">
                 <a:ln>
                   <a:noFill/>
                 </a:ln>
@@ -13963,9 +13530,7 @@
           <p:nvPr/>
         </p:nvPicPr>
         <p:blipFill>
-          <a:blip r:embed="rId2">
-            <a:extLst/>
-          </a:blip>
+          <a:blip r:embed="rId2"/>
           <a:stretch>
             <a:fillRect/>
           </a:stretch>
@@ -13992,9 +13557,7 @@
           <p:nvPr/>
         </p:nvPicPr>
         <p:blipFill>
-          <a:blip r:embed="rId3">
-            <a:extLst/>
-          </a:blip>
+          <a:blip r:embed="rId3"/>
           <a:stretch>
             <a:fillRect/>
           </a:stretch>
@@ -14021,9 +13584,7 @@
           <p:nvPr/>
         </p:nvPicPr>
         <p:blipFill>
-          <a:blip r:embed="rId4">
-            <a:extLst/>
-          </a:blip>
+          <a:blip r:embed="rId4"/>
           <a:stretch>
             <a:fillRect/>
           </a:stretch>
@@ -14050,9 +13611,7 @@
           <p:nvPr/>
         </p:nvPicPr>
         <p:blipFill>
-          <a:blip r:embed="rId5">
-            <a:extLst/>
-          </a:blip>
+          <a:blip r:embed="rId5"/>
           <a:stretch>
             <a:fillRect/>
           </a:stretch>
@@ -14090,7 +13649,7 @@
           </a:prstGeom>
           <a:extLst>
             <a:ext uri="{C572A759-6A51-4108-AA02-DFA0A04FC94B}">
-              <ma14:wrappingTextBoxFlag xmlns="" xmlns:m="http://schemas.openxmlformats.org/officeDocument/2006/math" xmlns:a14="http://schemas.microsoft.com/office/drawing/2010/main" xmlns:ma14="http://schemas.microsoft.com/office/mac/drawingml/2011/main" val="1"/>
+              <ma14:wrappingTextBoxFlag xmlns:ma14="http://schemas.microsoft.com/office/mac/drawingml/2011/main" xmlns:a14="http://schemas.microsoft.com/office/drawing/2010/main" xmlns:m="http://schemas.openxmlformats.org/officeDocument/2006/math" xmlns="" val="1"/>
             </a:ext>
           </a:extLst>
         </p:spPr>
@@ -14759,10 +14318,9 @@
           <a:lstStyle/>
           <a:p>
             <a:r>
-              <a:rPr lang="de-DE" dirty="0" smtClean="0"/>
+              <a:rPr lang="de-DE" dirty="0"/>
               <a:t>Multi-level HDBSCAN</a:t>
             </a:r>
-            <a:endParaRPr lang="de-DE" dirty="0"/>
           </a:p>
         </p:txBody>
       </p:sp>
@@ -18565,7 +18123,7 @@
               <a:tabLst/>
             </a:pPr>
             <a:r>
-              <a:rPr kumimoji="0" lang="de-DE" sz="4800" b="0" i="0" u="none" strike="noStrike" cap="none" spc="0" normalizeH="0" baseline="0" dirty="0" smtClean="0">
+              <a:rPr kumimoji="0" lang="de-DE" sz="4800" b="0" i="0" u="none" strike="noStrike" cap="none" spc="0" normalizeH="0" baseline="0" dirty="0">
                 <a:ln>
                   <a:noFill/>
                 </a:ln>
@@ -18581,20 +18139,6 @@
               </a:rPr>
               <a:t>No new outliers from second level!</a:t>
             </a:r>
-            <a:endParaRPr kumimoji="0" lang="de-DE" sz="4800" b="0" i="0" u="none" strike="noStrike" cap="none" spc="0" normalizeH="0" baseline="0" dirty="0">
-              <a:ln>
-                <a:noFill/>
-              </a:ln>
-              <a:solidFill>
-                <a:srgbClr val="000000"/>
-              </a:solidFill>
-              <a:effectLst/>
-              <a:uFillTx/>
-              <a:latin typeface="Helvetica Neue"/>
-              <a:ea typeface="Helvetica Neue"/>
-              <a:cs typeface="Helvetica Neue"/>
-              <a:sym typeface="Helvetica Neue"/>
-            </a:endParaRPr>
           </a:p>
         </p:txBody>
       </p:sp>
@@ -19989,10 +19533,9 @@
           <a:lstStyle/>
           <a:p>
             <a:r>
-              <a:rPr lang="de-DE" dirty="0" smtClean="0"/>
+              <a:rPr lang="de-DE" dirty="0"/>
               <a:t>Experiments</a:t>
             </a:r>
-            <a:endParaRPr lang="de-DE" dirty="0"/>
           </a:p>
         </p:txBody>
       </p:sp>
@@ -20053,7 +19596,7 @@
               <a:tabLst/>
             </a:pPr>
             <a:r>
-              <a:rPr kumimoji="0" lang="de-DE" sz="4800" b="0" i="0" u="none" strike="noStrike" cap="none" spc="0" normalizeH="0" baseline="0" dirty="0" smtClean="0">
+              <a:rPr kumimoji="0" lang="de-DE" sz="4800" b="0" i="0" u="none" strike="noStrike" cap="none" spc="0" normalizeH="0" baseline="0" dirty="0">
                 <a:ln>
                   <a:noFill/>
                 </a:ln>
@@ -20070,7 +19613,7 @@
               <a:t>Hyperparameter: Dimension</a:t>
             </a:r>
             <a:r>
-              <a:rPr kumimoji="0" lang="de-DE" sz="4800" b="0" i="0" u="none" strike="noStrike" cap="none" spc="0" normalizeH="0" dirty="0" smtClean="0">
+              <a:rPr kumimoji="0" lang="de-DE" sz="4800" b="0" i="0" u="none" strike="noStrike" cap="none" spc="0" normalizeH="0" dirty="0">
                 <a:ln>
                   <a:noFill/>
                 </a:ln>
@@ -20160,7 +19703,7 @@
               <a:tabLst/>
             </a:pPr>
             <a:r>
-              <a:rPr kumimoji="0" lang="de-DE" sz="4800" b="0" i="0" u="none" strike="noStrike" cap="none" spc="0" normalizeH="0" baseline="0" dirty="0" smtClean="0">
+              <a:rPr kumimoji="0" lang="de-DE" sz="4800" b="0" i="0" u="none" strike="noStrike" cap="none" spc="0" normalizeH="0" baseline="0" dirty="0">
                 <a:ln>
                   <a:noFill/>
                 </a:ln>
@@ -20177,7 +19720,7 @@
               <a:t>Dimension</a:t>
             </a:r>
             <a:r>
-              <a:rPr kumimoji="0" lang="de-DE" sz="4800" b="0" i="0" u="none" strike="noStrike" cap="none" spc="0" normalizeH="0" dirty="0" smtClean="0">
+              <a:rPr kumimoji="0" lang="de-DE" sz="4800" b="0" i="0" u="none" strike="noStrike" cap="none" spc="0" normalizeH="0" dirty="0">
                 <a:ln>
                   <a:noFill/>
                 </a:ln>
@@ -20251,13 +19794,6 @@
     <a:masterClrMapping/>
   </p:clrMapOvr>
   <p:transition spd="med"/>
-  <p:timing>
-    <p:tnLst>
-      <p:par>
-        <p:cTn id="1" dur="indefinite" restart="never" nodeType="tmRoot"/>
-      </p:par>
-    </p:tnLst>
-  </p:timing>
 </p:sld>
 </file>
 
@@ -20294,10 +19830,9 @@
           <a:lstStyle/>
           <a:p>
             <a:r>
-              <a:rPr lang="de-DE" dirty="0" smtClean="0"/>
+              <a:rPr lang="de-DE" dirty="0"/>
               <a:t>Experiments</a:t>
             </a:r>
-            <a:endParaRPr lang="de-DE" dirty="0"/>
           </a:p>
         </p:txBody>
       </p:sp>
@@ -20358,7 +19893,7 @@
               <a:tabLst/>
             </a:pPr>
             <a:r>
-              <a:rPr kumimoji="0" lang="de-DE" sz="4800" b="0" i="0" u="none" strike="noStrike" cap="none" spc="0" normalizeH="0" baseline="0" dirty="0" smtClean="0">
+              <a:rPr kumimoji="0" lang="de-DE" sz="4800" b="0" i="0" u="none" strike="noStrike" cap="none" spc="0" normalizeH="0" baseline="0" dirty="0">
                 <a:ln>
                   <a:noFill/>
                 </a:ln>
@@ -20375,7 +19910,7 @@
               <a:t>Hyperparameter: Dimension</a:t>
             </a:r>
             <a:r>
-              <a:rPr kumimoji="0" lang="de-DE" sz="4800" b="0" i="0" u="none" strike="noStrike" cap="none" spc="0" normalizeH="0" dirty="0" smtClean="0">
+              <a:rPr kumimoji="0" lang="de-DE" sz="4800" b="0" i="0" u="none" strike="noStrike" cap="none" spc="0" normalizeH="0" dirty="0">
                 <a:ln>
                   <a:noFill/>
                 </a:ln>
@@ -20465,7 +20000,7 @@
               <a:tabLst/>
             </a:pPr>
             <a:r>
-              <a:rPr kumimoji="0" lang="de-DE" sz="4800" b="0" i="0" u="none" strike="noStrike" cap="none" spc="0" normalizeH="0" baseline="0" dirty="0" smtClean="0">
+              <a:rPr kumimoji="0" lang="de-DE" sz="4800" b="0" i="0" u="none" strike="noStrike" cap="none" spc="0" normalizeH="0" baseline="0" dirty="0">
                 <a:ln>
                   <a:noFill/>
                 </a:ln>
@@ -20482,7 +20017,7 @@
               <a:t>Dimension</a:t>
             </a:r>
             <a:r>
-              <a:rPr kumimoji="0" lang="de-DE" sz="4800" b="0" i="0" u="none" strike="noStrike" cap="none" spc="0" normalizeH="0" dirty="0" smtClean="0">
+              <a:rPr kumimoji="0" lang="de-DE" sz="4800" b="0" i="0" u="none" strike="noStrike" cap="none" spc="0" normalizeH="0" dirty="0">
                 <a:ln>
                   <a:noFill/>
                 </a:ln>
@@ -20556,13 +20091,6 @@
     <a:masterClrMapping/>
   </p:clrMapOvr>
   <p:transition spd="med"/>
-  <p:timing>
-    <p:tnLst>
-      <p:par>
-        <p:cTn id="1" dur="indefinite" restart="never" nodeType="tmRoot"/>
-      </p:par>
-    </p:tnLst>
-  </p:timing>
 </p:sld>
 </file>
 
@@ -20599,10 +20127,9 @@
           <a:lstStyle/>
           <a:p>
             <a:r>
-              <a:rPr lang="de-DE" dirty="0" smtClean="0"/>
+              <a:rPr lang="de-DE" dirty="0"/>
               <a:t>Experiments</a:t>
             </a:r>
-            <a:endParaRPr lang="de-DE" dirty="0"/>
           </a:p>
         </p:txBody>
       </p:sp>
@@ -20663,7 +20190,7 @@
               <a:tabLst/>
             </a:pPr>
             <a:r>
-              <a:rPr kumimoji="0" lang="de-DE" sz="4800" b="0" i="0" u="none" strike="noStrike" cap="none" spc="0" normalizeH="0" baseline="0" dirty="0" smtClean="0">
+              <a:rPr kumimoji="0" lang="de-DE" sz="4800" b="0" i="0" u="none" strike="noStrike" cap="none" spc="0" normalizeH="0" baseline="0" dirty="0">
                 <a:ln>
                   <a:noFill/>
                 </a:ln>
@@ -20680,7 +20207,7 @@
               <a:t>Hyperparameter: Partition</a:t>
             </a:r>
             <a:r>
-              <a:rPr kumimoji="0" lang="de-DE" sz="4800" b="0" i="0" u="none" strike="noStrike" cap="none" spc="0" normalizeH="0" dirty="0" smtClean="0">
+              <a:rPr kumimoji="0" lang="de-DE" sz="4800" b="0" i="0" u="none" strike="noStrike" cap="none" spc="0" normalizeH="0" dirty="0">
                 <a:ln>
                   <a:noFill/>
                 </a:ln>
@@ -20770,7 +20297,7 @@
               <a:tabLst/>
             </a:pPr>
             <a:r>
-              <a:rPr kumimoji="0" lang="de-DE" sz="4800" b="0" i="0" u="none" strike="noStrike" cap="none" spc="0" normalizeH="0" baseline="0" dirty="0" smtClean="0">
+              <a:rPr kumimoji="0" lang="de-DE" sz="4800" b="0" i="0" u="none" strike="noStrike" cap="none" spc="0" normalizeH="0" baseline="0" dirty="0">
                 <a:ln>
                   <a:noFill/>
                 </a:ln>
@@ -20787,7 +20314,7 @@
               <a:t>For dimension</a:t>
             </a:r>
             <a:r>
-              <a:rPr kumimoji="0" lang="de-DE" sz="4800" b="0" i="0" u="none" strike="noStrike" cap="none" spc="0" normalizeH="0" dirty="0" smtClean="0">
+              <a:rPr kumimoji="0" lang="de-DE" sz="4800" b="0" i="0" u="none" strike="noStrike" cap="none" spc="0" normalizeH="0" dirty="0">
                 <a:ln>
                   <a:noFill/>
                 </a:ln>
@@ -20861,13 +20388,6 @@
     <a:masterClrMapping/>
   </p:clrMapOvr>
   <p:transition spd="med"/>
-  <p:timing>
-    <p:tnLst>
-      <p:par>
-        <p:cTn id="1" dur="indefinite" restart="never" nodeType="tmRoot"/>
-      </p:par>
-    </p:tnLst>
-  </p:timing>
 </p:sld>
 </file>
 
@@ -20904,10 +20424,9 @@
           <a:lstStyle/>
           <a:p>
             <a:r>
-              <a:rPr lang="de-DE" dirty="0" smtClean="0"/>
+              <a:rPr lang="de-DE" dirty="0"/>
               <a:t>Experiments</a:t>
             </a:r>
-            <a:endParaRPr lang="de-DE" dirty="0"/>
           </a:p>
         </p:txBody>
       </p:sp>
@@ -20968,7 +20487,7 @@
               <a:tabLst/>
             </a:pPr>
             <a:r>
-              <a:rPr kumimoji="0" lang="de-DE" sz="4800" b="0" i="0" u="none" strike="noStrike" cap="none" spc="0" normalizeH="0" baseline="0" dirty="0" smtClean="0">
+              <a:rPr kumimoji="0" lang="de-DE" sz="4800" b="0" i="0" u="none" strike="noStrike" cap="none" spc="0" normalizeH="0" baseline="0" dirty="0">
                 <a:ln>
                   <a:noFill/>
                 </a:ln>
@@ -20985,7 +20504,7 @@
               <a:t>Hyperparameter: Partition</a:t>
             </a:r>
             <a:r>
-              <a:rPr kumimoji="0" lang="de-DE" sz="4800" b="0" i="0" u="none" strike="noStrike" cap="none" spc="0" normalizeH="0" dirty="0" smtClean="0">
+              <a:rPr kumimoji="0" lang="de-DE" sz="4800" b="0" i="0" u="none" strike="noStrike" cap="none" spc="0" normalizeH="0" dirty="0">
                 <a:ln>
                   <a:noFill/>
                 </a:ln>
@@ -21075,7 +20594,7 @@
               <a:tabLst/>
             </a:pPr>
             <a:r>
-              <a:rPr kumimoji="0" lang="de-DE" sz="4800" b="0" i="0" u="none" strike="noStrike" cap="none" spc="0" normalizeH="0" baseline="0" dirty="0" smtClean="0">
+              <a:rPr kumimoji="0" lang="de-DE" sz="4800" b="0" i="0" u="none" strike="noStrike" cap="none" spc="0" normalizeH="0" baseline="0" dirty="0">
                 <a:ln>
                   <a:noFill/>
                 </a:ln>
@@ -21092,7 +20611,7 @@
               <a:t>For dimension</a:t>
             </a:r>
             <a:r>
-              <a:rPr kumimoji="0" lang="de-DE" sz="4800" b="0" i="0" u="none" strike="noStrike" cap="none" spc="0" normalizeH="0" dirty="0" smtClean="0">
+              <a:rPr kumimoji="0" lang="de-DE" sz="4800" b="0" i="0" u="none" strike="noStrike" cap="none" spc="0" normalizeH="0" dirty="0">
                 <a:ln>
                   <a:noFill/>
                 </a:ln>
@@ -21166,13 +20685,6 @@
     <a:masterClrMapping/>
   </p:clrMapOvr>
   <p:transition spd="med"/>
-  <p:timing>
-    <p:tnLst>
-      <p:par>
-        <p:cTn id="1" dur="indefinite" restart="never" nodeType="tmRoot"/>
-      </p:par>
-    </p:tnLst>
-  </p:timing>
 </p:sld>
 </file>
 
@@ -21209,10 +20721,9 @@
           <a:lstStyle/>
           <a:p>
             <a:r>
-              <a:rPr lang="de-DE" dirty="0" smtClean="0"/>
+              <a:rPr lang="de-DE" dirty="0"/>
               <a:t>Experiments</a:t>
             </a:r>
-            <a:endParaRPr lang="de-DE" dirty="0"/>
           </a:p>
         </p:txBody>
       </p:sp>
@@ -21273,7 +20784,7 @@
               <a:tabLst/>
             </a:pPr>
             <a:r>
-              <a:rPr kumimoji="0" lang="de-DE" sz="4800" b="0" i="0" u="none" strike="noStrike" cap="none" spc="0" normalizeH="0" baseline="0" dirty="0" smtClean="0">
+              <a:rPr kumimoji="0" lang="de-DE" sz="4800" b="0" i="0" u="none" strike="noStrike" cap="none" spc="0" normalizeH="0" baseline="0" dirty="0">
                 <a:ln>
                   <a:noFill/>
                 </a:ln>
@@ -21290,7 +20801,7 @@
               <a:t>Hyperparameter: Batch</a:t>
             </a:r>
             <a:r>
-              <a:rPr kumimoji="0" lang="de-DE" sz="4800" b="0" i="0" u="none" strike="noStrike" cap="none" spc="0" normalizeH="0" dirty="0" smtClean="0">
+              <a:rPr kumimoji="0" lang="de-DE" sz="4800" b="0" i="0" u="none" strike="noStrike" cap="none" spc="0" normalizeH="0" dirty="0">
                 <a:ln>
                   <a:noFill/>
                 </a:ln>
@@ -21380,7 +20891,7 @@
               <a:tabLst/>
             </a:pPr>
             <a:r>
-              <a:rPr kumimoji="0" lang="de-DE" sz="4800" b="0" i="0" u="none" strike="noStrike" cap="none" spc="0" normalizeH="0" baseline="0" dirty="0" smtClean="0">
+              <a:rPr kumimoji="0" lang="de-DE" sz="4800" b="0" i="0" u="none" strike="noStrike" cap="none" spc="0" normalizeH="0" baseline="0" dirty="0">
                 <a:ln>
                   <a:noFill/>
                 </a:ln>
@@ -21396,20 +20907,6 @@
               </a:rPr>
               <a:t>256 is the maximum batch size possible</a:t>
             </a:r>
-            <a:endParaRPr kumimoji="0" lang="de-DE" sz="4800" b="0" i="0" u="none" strike="noStrike" cap="none" spc="0" normalizeH="0" baseline="0" dirty="0">
-              <a:ln>
-                <a:noFill/>
-              </a:ln>
-              <a:solidFill>
-                <a:srgbClr val="000000"/>
-              </a:solidFill>
-              <a:effectLst/>
-              <a:uFillTx/>
-              <a:latin typeface="Helvetica Neue"/>
-              <a:ea typeface="Helvetica Neue"/>
-              <a:cs typeface="Helvetica Neue"/>
-              <a:sym typeface="Helvetica Neue"/>
-            </a:endParaRPr>
           </a:p>
         </p:txBody>
       </p:sp>
@@ -21454,13 +20951,6 @@
     <a:masterClrMapping/>
   </p:clrMapOvr>
   <p:transition spd="med"/>
-  <p:timing>
-    <p:tnLst>
-      <p:par>
-        <p:cTn id="1" dur="indefinite" restart="never" nodeType="tmRoot"/>
-      </p:par>
-    </p:tnLst>
-  </p:timing>
 </p:sld>
 </file>
 
@@ -21497,10 +20987,9 @@
           <a:lstStyle/>
           <a:p>
             <a:r>
-              <a:rPr lang="de-DE" dirty="0" smtClean="0"/>
+              <a:rPr lang="de-DE" dirty="0"/>
               <a:t>Experiments</a:t>
             </a:r>
-            <a:endParaRPr lang="de-DE" dirty="0"/>
           </a:p>
         </p:txBody>
       </p:sp>
@@ -21561,7 +21050,7 @@
               <a:tabLst/>
             </a:pPr>
             <a:r>
-              <a:rPr kumimoji="0" lang="de-DE" sz="4800" b="0" i="0" u="none" strike="noStrike" cap="none" spc="0" normalizeH="0" baseline="0" dirty="0" smtClean="0">
+              <a:rPr kumimoji="0" lang="de-DE" sz="4800" b="0" i="0" u="none" strike="noStrike" cap="none" spc="0" normalizeH="0" baseline="0" dirty="0">
                 <a:ln>
                   <a:noFill/>
                 </a:ln>
@@ -21578,7 +21067,7 @@
               <a:t>Hyperparameter: Batch</a:t>
             </a:r>
             <a:r>
-              <a:rPr kumimoji="0" lang="de-DE" sz="4800" b="0" i="0" u="none" strike="noStrike" cap="none" spc="0" normalizeH="0" dirty="0" smtClean="0">
+              <a:rPr kumimoji="0" lang="de-DE" sz="4800" b="0" i="0" u="none" strike="noStrike" cap="none" spc="0" normalizeH="0" dirty="0">
                 <a:ln>
                   <a:noFill/>
                 </a:ln>
@@ -21668,7 +21157,7 @@
               <a:tabLst/>
             </a:pPr>
             <a:r>
-              <a:rPr kumimoji="0" lang="de-DE" sz="4800" b="0" i="0" u="none" strike="noStrike" cap="none" spc="0" normalizeH="0" baseline="0" dirty="0" smtClean="0">
+              <a:rPr kumimoji="0" lang="de-DE" sz="4800" b="0" i="0" u="none" strike="noStrike" cap="none" spc="0" normalizeH="0" baseline="0" dirty="0">
                 <a:ln>
                   <a:noFill/>
                 </a:ln>
@@ -21684,20 +21173,6 @@
               </a:rPr>
               <a:t>256 is the maximum batch size possible</a:t>
             </a:r>
-            <a:endParaRPr kumimoji="0" lang="de-DE" sz="4800" b="0" i="0" u="none" strike="noStrike" cap="none" spc="0" normalizeH="0" baseline="0" dirty="0">
-              <a:ln>
-                <a:noFill/>
-              </a:ln>
-              <a:solidFill>
-                <a:srgbClr val="000000"/>
-              </a:solidFill>
-              <a:effectLst/>
-              <a:uFillTx/>
-              <a:latin typeface="Helvetica Neue"/>
-              <a:ea typeface="Helvetica Neue"/>
-              <a:cs typeface="Helvetica Neue"/>
-              <a:sym typeface="Helvetica Neue"/>
-            </a:endParaRPr>
           </a:p>
         </p:txBody>
       </p:sp>
@@ -21892,13 +21367,6 @@
     <a:masterClrMapping/>
   </p:clrMapOvr>
   <p:transition spd="med"/>
-  <p:timing>
-    <p:tnLst>
-      <p:par>
-        <p:cTn id="1" dur="indefinite" restart="never" nodeType="tmRoot"/>
-      </p:par>
-    </p:tnLst>
-  </p:timing>
 </p:sld>
 </file>
 
@@ -21935,10 +21403,9 @@
           <a:lstStyle/>
           <a:p>
             <a:r>
-              <a:rPr lang="de-DE" dirty="0" smtClean="0"/>
+              <a:rPr lang="de-DE" dirty="0"/>
               <a:t>Experiments</a:t>
             </a:r>
-            <a:endParaRPr lang="de-DE" dirty="0"/>
           </a:p>
         </p:txBody>
       </p:sp>
@@ -21958,31 +21425,30 @@
           <a:lstStyle/>
           <a:p>
             <a:r>
-              <a:rPr lang="de-DE" dirty="0" smtClean="0"/>
+              <a:rPr lang="de-DE" dirty="0"/>
               <a:t>In Progress</a:t>
             </a:r>
           </a:p>
           <a:p>
             <a:pPr lvl="1"/>
             <a:r>
-              <a:rPr lang="de-DE" dirty="0" smtClean="0"/>
+              <a:rPr lang="de-DE" dirty="0"/>
               <a:t>Finding the representative objects</a:t>
             </a:r>
           </a:p>
           <a:p>
             <a:pPr lvl="1"/>
             <a:r>
-              <a:rPr lang="de-DE" dirty="0" smtClean="0"/>
+              <a:rPr lang="de-DE" dirty="0"/>
               <a:t>Experiments on DGCNN</a:t>
             </a:r>
           </a:p>
           <a:p>
             <a:pPr lvl="1"/>
             <a:r>
-              <a:rPr lang="de-DE" dirty="0" smtClean="0"/>
+              <a:rPr lang="de-DE" dirty="0"/>
               <a:t>Experiments on PointNet: Lower batch size</a:t>
             </a:r>
-            <a:endParaRPr lang="de-DE" dirty="0"/>
           </a:p>
         </p:txBody>
       </p:sp>
@@ -21997,13 +21463,6 @@
     <a:masterClrMapping/>
   </p:clrMapOvr>
   <p:transition spd="med"/>
-  <p:timing>
-    <p:tnLst>
-      <p:par>
-        <p:cTn id="1" dur="indefinite" restart="never" nodeType="tmRoot"/>
-      </p:par>
-    </p:tnLst>
-  </p:timing>
 </p:sld>
 </file>
 
@@ -22024,41 +21483,594 @@
           <a:chExt cx="0" cy="0"/>
         </a:xfrm>
       </p:grpSpPr>
+      <p:pic>
+        <p:nvPicPr>
+          <p:cNvPr id="5" name="Picture 4">
+            <a:extLst>
+              <a:ext uri="{FF2B5EF4-FFF2-40B4-BE49-F238E27FC236}">
+                <a16:creationId xmlns:a16="http://schemas.microsoft.com/office/drawing/2014/main" id="{EDF8DE15-33A3-12A8-E2FC-226B28B6EACB}"/>
+              </a:ext>
+            </a:extLst>
+          </p:cNvPr>
+          <p:cNvPicPr>
+            <a:picLocks noChangeAspect="1"/>
+          </p:cNvPicPr>
+          <p:nvPr/>
+        </p:nvPicPr>
+        <p:blipFill rotWithShape="1">
+          <a:blip r:embed="rId2">
+            <a:extLst>
+              <a:ext uri="{28A0092B-C50C-407E-A947-70E740481C1C}">
+                <a14:useLocalDpi xmlns:a14="http://schemas.microsoft.com/office/drawing/2010/main" val="0"/>
+              </a:ext>
+            </a:extLst>
+          </a:blip>
+          <a:srcRect l="4948"/>
+          <a:stretch/>
+        </p:blipFill>
+        <p:spPr>
+          <a:xfrm>
+            <a:off x="16443665" y="8899391"/>
+            <a:ext cx="3816000" cy="3781252"/>
+          </a:xfrm>
+          <a:prstGeom prst="rect">
+            <a:avLst/>
+          </a:prstGeom>
+        </p:spPr>
+      </p:pic>
+      <p:pic>
+        <p:nvPicPr>
+          <p:cNvPr id="7" name="Picture 6">
+            <a:extLst>
+              <a:ext uri="{FF2B5EF4-FFF2-40B4-BE49-F238E27FC236}">
+                <a16:creationId xmlns:a16="http://schemas.microsoft.com/office/drawing/2014/main" id="{7A171CDF-D298-A1C8-AA5D-159B0923BCAA}"/>
+              </a:ext>
+            </a:extLst>
+          </p:cNvPr>
+          <p:cNvPicPr>
+            <a:picLocks noChangeAspect="1"/>
+          </p:cNvPicPr>
+          <p:nvPr/>
+        </p:nvPicPr>
+        <p:blipFill>
+          <a:blip r:embed="rId3">
+            <a:extLst>
+              <a:ext uri="{28A0092B-C50C-407E-A947-70E740481C1C}">
+                <a14:useLocalDpi xmlns:a14="http://schemas.microsoft.com/office/drawing/2010/main" val="0"/>
+              </a:ext>
+            </a:extLst>
+          </a:blip>
+          <a:stretch>
+            <a:fillRect/>
+          </a:stretch>
+        </p:blipFill>
+        <p:spPr>
+          <a:xfrm>
+            <a:off x="12274085" y="9409701"/>
+            <a:ext cx="3816000" cy="3441885"/>
+          </a:xfrm>
+          <a:prstGeom prst="rect">
+            <a:avLst/>
+          </a:prstGeom>
+        </p:spPr>
+      </p:pic>
+      <p:pic>
+        <p:nvPicPr>
+          <p:cNvPr id="9" name="Picture 8">
+            <a:extLst>
+              <a:ext uri="{FF2B5EF4-FFF2-40B4-BE49-F238E27FC236}">
+                <a16:creationId xmlns:a16="http://schemas.microsoft.com/office/drawing/2014/main" id="{83BBCB3D-C5F2-E06A-FB46-D70A88DC86EC}"/>
+              </a:ext>
+            </a:extLst>
+          </p:cNvPr>
+          <p:cNvPicPr>
+            <a:picLocks noChangeAspect="1"/>
+          </p:cNvPicPr>
+          <p:nvPr/>
+        </p:nvPicPr>
+        <p:blipFill>
+          <a:blip r:embed="rId4">
+            <a:extLst>
+              <a:ext uri="{28A0092B-C50C-407E-A947-70E740481C1C}">
+                <a14:useLocalDpi xmlns:a14="http://schemas.microsoft.com/office/drawing/2010/main" val="0"/>
+              </a:ext>
+            </a:extLst>
+          </a:blip>
+          <a:stretch>
+            <a:fillRect/>
+          </a:stretch>
+        </p:blipFill>
+        <p:spPr>
+          <a:xfrm>
+            <a:off x="8152181" y="9422094"/>
+            <a:ext cx="3816000" cy="3250671"/>
+          </a:xfrm>
+          <a:prstGeom prst="rect">
+            <a:avLst/>
+          </a:prstGeom>
+        </p:spPr>
+      </p:pic>
+      <p:pic>
+        <p:nvPicPr>
+          <p:cNvPr id="11" name="Picture 10">
+            <a:extLst>
+              <a:ext uri="{FF2B5EF4-FFF2-40B4-BE49-F238E27FC236}">
+                <a16:creationId xmlns:a16="http://schemas.microsoft.com/office/drawing/2014/main" id="{4C221598-731E-C3D5-F1FB-B6DD3FA34518}"/>
+              </a:ext>
+            </a:extLst>
+          </p:cNvPr>
+          <p:cNvPicPr>
+            <a:picLocks noChangeAspect="1"/>
+          </p:cNvPicPr>
+          <p:nvPr/>
+        </p:nvPicPr>
+        <p:blipFill>
+          <a:blip r:embed="rId5">
+            <a:extLst>
+              <a:ext uri="{28A0092B-C50C-407E-A947-70E740481C1C}">
+                <a14:useLocalDpi xmlns:a14="http://schemas.microsoft.com/office/drawing/2010/main" val="0"/>
+              </a:ext>
+            </a:extLst>
+          </a:blip>
+          <a:stretch>
+            <a:fillRect/>
+          </a:stretch>
+        </p:blipFill>
+        <p:spPr>
+          <a:xfrm>
+            <a:off x="3939897" y="9609117"/>
+            <a:ext cx="3816000" cy="3380719"/>
+          </a:xfrm>
+          <a:prstGeom prst="rect">
+            <a:avLst/>
+          </a:prstGeom>
+        </p:spPr>
+      </p:pic>
+      <p:pic>
+        <p:nvPicPr>
+          <p:cNvPr id="13" name="Picture 12">
+            <a:extLst>
+              <a:ext uri="{FF2B5EF4-FFF2-40B4-BE49-F238E27FC236}">
+                <a16:creationId xmlns:a16="http://schemas.microsoft.com/office/drawing/2014/main" id="{8C9326CF-FFC7-5E1B-0287-34899D6F9DC4}"/>
+              </a:ext>
+            </a:extLst>
+          </p:cNvPr>
+          <p:cNvPicPr>
+            <a:picLocks noChangeAspect="1"/>
+          </p:cNvPicPr>
+          <p:nvPr/>
+        </p:nvPicPr>
+        <p:blipFill>
+          <a:blip r:embed="rId6">
+            <a:extLst>
+              <a:ext uri="{28A0092B-C50C-407E-A947-70E740481C1C}">
+                <a14:useLocalDpi xmlns:a14="http://schemas.microsoft.com/office/drawing/2010/main" val="0"/>
+              </a:ext>
+            </a:extLst>
+          </a:blip>
+          <a:stretch>
+            <a:fillRect/>
+          </a:stretch>
+        </p:blipFill>
+        <p:spPr>
+          <a:xfrm>
+            <a:off x="3604352" y="5850551"/>
+            <a:ext cx="3816000" cy="3359152"/>
+          </a:xfrm>
+          <a:prstGeom prst="rect">
+            <a:avLst/>
+          </a:prstGeom>
+        </p:spPr>
+      </p:pic>
+      <p:pic>
+        <p:nvPicPr>
+          <p:cNvPr id="15" name="Picture 14">
+            <a:extLst>
+              <a:ext uri="{FF2B5EF4-FFF2-40B4-BE49-F238E27FC236}">
+                <a16:creationId xmlns:a16="http://schemas.microsoft.com/office/drawing/2014/main" id="{E412D848-FA30-9142-FBB7-D8ED1E8E0FAC}"/>
+              </a:ext>
+            </a:extLst>
+          </p:cNvPr>
+          <p:cNvPicPr>
+            <a:picLocks noChangeAspect="1"/>
+          </p:cNvPicPr>
+          <p:nvPr/>
+        </p:nvPicPr>
+        <p:blipFill>
+          <a:blip r:embed="rId7">
+            <a:extLst>
+              <a:ext uri="{28A0092B-C50C-407E-A947-70E740481C1C}">
+                <a14:useLocalDpi xmlns:a14="http://schemas.microsoft.com/office/drawing/2010/main" val="0"/>
+              </a:ext>
+            </a:extLst>
+          </a:blip>
+          <a:stretch>
+            <a:fillRect/>
+          </a:stretch>
+        </p:blipFill>
+        <p:spPr>
+          <a:xfrm>
+            <a:off x="3491678" y="1393563"/>
+            <a:ext cx="3816000" cy="3329789"/>
+          </a:xfrm>
+          <a:prstGeom prst="rect">
+            <a:avLst/>
+          </a:prstGeom>
+        </p:spPr>
+      </p:pic>
+      <p:pic>
+        <p:nvPicPr>
+          <p:cNvPr id="17" name="Picture 16">
+            <a:extLst>
+              <a:ext uri="{FF2B5EF4-FFF2-40B4-BE49-F238E27FC236}">
+                <a16:creationId xmlns:a16="http://schemas.microsoft.com/office/drawing/2014/main" id="{0CB02D3E-4B6E-FA91-4665-602FDA40BBF6}"/>
+              </a:ext>
+            </a:extLst>
+          </p:cNvPr>
+          <p:cNvPicPr>
+            <a:picLocks noChangeAspect="1"/>
+          </p:cNvPicPr>
+          <p:nvPr/>
+        </p:nvPicPr>
+        <p:blipFill>
+          <a:blip r:embed="rId8">
+            <a:extLst>
+              <a:ext uri="{28A0092B-C50C-407E-A947-70E740481C1C}">
+                <a14:useLocalDpi xmlns:a14="http://schemas.microsoft.com/office/drawing/2010/main" val="0"/>
+              </a:ext>
+            </a:extLst>
+          </a:blip>
+          <a:stretch>
+            <a:fillRect/>
+          </a:stretch>
+        </p:blipFill>
+        <p:spPr>
+          <a:xfrm>
+            <a:off x="8019096" y="5737764"/>
+            <a:ext cx="3816000" cy="3584726"/>
+          </a:xfrm>
+          <a:prstGeom prst="rect">
+            <a:avLst/>
+          </a:prstGeom>
+        </p:spPr>
+      </p:pic>
+      <p:pic>
+        <p:nvPicPr>
+          <p:cNvPr id="19" name="Picture 18">
+            <a:extLst>
+              <a:ext uri="{FF2B5EF4-FFF2-40B4-BE49-F238E27FC236}">
+                <a16:creationId xmlns:a16="http://schemas.microsoft.com/office/drawing/2014/main" id="{3C97B24B-9CC8-6B41-C824-908F8EDEF9F2}"/>
+              </a:ext>
+            </a:extLst>
+          </p:cNvPr>
+          <p:cNvPicPr>
+            <a:picLocks noChangeAspect="1"/>
+          </p:cNvPicPr>
+          <p:nvPr/>
+        </p:nvPicPr>
+        <p:blipFill>
+          <a:blip r:embed="rId9">
+            <a:extLst>
+              <a:ext uri="{28A0092B-C50C-407E-A947-70E740481C1C}">
+                <a14:useLocalDpi xmlns:a14="http://schemas.microsoft.com/office/drawing/2010/main" val="0"/>
+              </a:ext>
+            </a:extLst>
+          </a:blip>
+          <a:stretch>
+            <a:fillRect/>
+          </a:stretch>
+        </p:blipFill>
+        <p:spPr>
+          <a:xfrm>
+            <a:off x="7800101" y="864414"/>
+            <a:ext cx="3816000" cy="4244765"/>
+          </a:xfrm>
+          <a:prstGeom prst="rect">
+            <a:avLst/>
+          </a:prstGeom>
+        </p:spPr>
+      </p:pic>
+      <p:pic>
+        <p:nvPicPr>
+          <p:cNvPr id="21" name="Picture 20">
+            <a:extLst>
+              <a:ext uri="{FF2B5EF4-FFF2-40B4-BE49-F238E27FC236}">
+                <a16:creationId xmlns:a16="http://schemas.microsoft.com/office/drawing/2014/main" id="{73395FE5-5715-C5DB-8626-8D06CE6A9370}"/>
+              </a:ext>
+            </a:extLst>
+          </p:cNvPr>
+          <p:cNvPicPr>
+            <a:picLocks noChangeAspect="1"/>
+          </p:cNvPicPr>
+          <p:nvPr/>
+        </p:nvPicPr>
+        <p:blipFill>
+          <a:blip r:embed="rId10">
+            <a:extLst>
+              <a:ext uri="{28A0092B-C50C-407E-A947-70E740481C1C}">
+                <a14:useLocalDpi xmlns:a14="http://schemas.microsoft.com/office/drawing/2010/main" val="0"/>
+              </a:ext>
+            </a:extLst>
+          </a:blip>
+          <a:stretch>
+            <a:fillRect/>
+          </a:stretch>
+        </p:blipFill>
+        <p:spPr>
+          <a:xfrm>
+            <a:off x="12108524" y="864414"/>
+            <a:ext cx="3816000" cy="3786419"/>
+          </a:xfrm>
+          <a:prstGeom prst="rect">
+            <a:avLst/>
+          </a:prstGeom>
+        </p:spPr>
+      </p:pic>
+      <p:pic>
+        <p:nvPicPr>
+          <p:cNvPr id="23" name="Picture 22">
+            <a:extLst>
+              <a:ext uri="{FF2B5EF4-FFF2-40B4-BE49-F238E27FC236}">
+                <a16:creationId xmlns:a16="http://schemas.microsoft.com/office/drawing/2014/main" id="{3A55E057-5EE6-1E7F-1E2F-D49DCEBB0E33}"/>
+              </a:ext>
+            </a:extLst>
+          </p:cNvPr>
+          <p:cNvPicPr>
+            <a:picLocks noChangeAspect="1"/>
+          </p:cNvPicPr>
+          <p:nvPr/>
+        </p:nvPicPr>
+        <p:blipFill>
+          <a:blip r:embed="rId11">
+            <a:extLst>
+              <a:ext uri="{28A0092B-C50C-407E-A947-70E740481C1C}">
+                <a14:useLocalDpi xmlns:a14="http://schemas.microsoft.com/office/drawing/2010/main" val="0"/>
+              </a:ext>
+            </a:extLst>
+          </a:blip>
+          <a:stretch>
+            <a:fillRect/>
+          </a:stretch>
+        </p:blipFill>
+        <p:spPr>
+          <a:xfrm>
+            <a:off x="12352254" y="5014005"/>
+            <a:ext cx="3816000" cy="3885386"/>
+          </a:xfrm>
+          <a:prstGeom prst="rect">
+            <a:avLst/>
+          </a:prstGeom>
+        </p:spPr>
+      </p:pic>
+      <p:pic>
+        <p:nvPicPr>
+          <p:cNvPr id="25" name="Picture 24">
+            <a:extLst>
+              <a:ext uri="{FF2B5EF4-FFF2-40B4-BE49-F238E27FC236}">
+                <a16:creationId xmlns:a16="http://schemas.microsoft.com/office/drawing/2014/main" id="{FF92999A-AF21-52C1-3FDD-1A52522F9495}"/>
+              </a:ext>
+            </a:extLst>
+          </p:cNvPr>
+          <p:cNvPicPr>
+            <a:picLocks noChangeAspect="1"/>
+          </p:cNvPicPr>
+          <p:nvPr/>
+        </p:nvPicPr>
+        <p:blipFill rotWithShape="1">
+          <a:blip r:embed="rId12">
+            <a:extLst>
+              <a:ext uri="{28A0092B-C50C-407E-A947-70E740481C1C}">
+                <a14:useLocalDpi xmlns:a14="http://schemas.microsoft.com/office/drawing/2010/main" val="0"/>
+              </a:ext>
+            </a:extLst>
+          </a:blip>
+          <a:srcRect l="3571" r="4498" b="2099"/>
+          <a:stretch/>
+        </p:blipFill>
+        <p:spPr>
+          <a:xfrm>
+            <a:off x="16224670" y="4723352"/>
+            <a:ext cx="3816000" cy="4593970"/>
+          </a:xfrm>
+          <a:prstGeom prst="rect">
+            <a:avLst/>
+          </a:prstGeom>
+        </p:spPr>
+      </p:pic>
+      <p:pic>
+        <p:nvPicPr>
+          <p:cNvPr id="27" name="Picture 26">
+            <a:extLst>
+              <a:ext uri="{FF2B5EF4-FFF2-40B4-BE49-F238E27FC236}">
+                <a16:creationId xmlns:a16="http://schemas.microsoft.com/office/drawing/2014/main" id="{EF1535A9-C12F-3CD1-B095-F2D655F9AED6}"/>
+              </a:ext>
+            </a:extLst>
+          </p:cNvPr>
+          <p:cNvPicPr>
+            <a:picLocks noChangeAspect="1"/>
+          </p:cNvPicPr>
+          <p:nvPr/>
+        </p:nvPicPr>
+        <p:blipFill rotWithShape="1">
+          <a:blip r:embed="rId13">
+            <a:extLst>
+              <a:ext uri="{28A0092B-C50C-407E-A947-70E740481C1C}">
+                <a14:useLocalDpi xmlns:a14="http://schemas.microsoft.com/office/drawing/2010/main" val="0"/>
+              </a:ext>
+            </a:extLst>
+          </a:blip>
+          <a:srcRect/>
+          <a:stretch/>
+        </p:blipFill>
+        <p:spPr>
+          <a:xfrm>
+            <a:off x="16083412" y="930995"/>
+            <a:ext cx="3816000" cy="3537135"/>
+          </a:xfrm>
+          <a:prstGeom prst="rect">
+            <a:avLst/>
+          </a:prstGeom>
+        </p:spPr>
+      </p:pic>
       <p:sp>
         <p:nvSpPr>
-          <p:cNvPr id="2" name="Title 1"/>
-          <p:cNvSpPr>
-            <a:spLocks noGrp="1"/>
-          </p:cNvSpPr>
-          <p:nvPr>
-            <p:ph type="title"/>
-          </p:nvPr>
+          <p:cNvPr id="28" name="Rectangle 27">
+            <a:extLst>
+              <a:ext uri="{FF2B5EF4-FFF2-40B4-BE49-F238E27FC236}">
+                <a16:creationId xmlns:a16="http://schemas.microsoft.com/office/drawing/2014/main" id="{53360465-115B-A1CF-CD21-205000149FA7}"/>
+              </a:ext>
+            </a:extLst>
+          </p:cNvPr>
+          <p:cNvSpPr/>
+          <p:nvPr/>
         </p:nvSpPr>
-        <p:spPr/>
+        <p:spPr>
+          <a:xfrm>
+            <a:off x="19740524" y="3058457"/>
+            <a:ext cx="516326" cy="1091512"/>
+          </a:xfrm>
+          <a:prstGeom prst="rect">
+            <a:avLst/>
+          </a:prstGeom>
+          <a:solidFill>
+            <a:schemeClr val="bg1"/>
+          </a:solidFill>
+          <a:ln w="12700" cap="flat">
+            <a:noFill/>
+            <a:miter lim="400000"/>
+          </a:ln>
+          <a:effectLst/>
+          <a:sp3d/>
+        </p:spPr>
+        <p:style>
+          <a:lnRef idx="0">
+            <a:scrgbClr r="0" g="0" b="0"/>
+          </a:lnRef>
+          <a:fillRef idx="0">
+            <a:scrgbClr r="0" g="0" b="0"/>
+          </a:fillRef>
+          <a:effectRef idx="0">
+            <a:scrgbClr r="0" g="0" b="0"/>
+          </a:effectRef>
+          <a:fontRef idx="none"/>
+        </p:style>
         <p:txBody>
-          <a:bodyPr/>
+          <a:bodyPr rot="0" spcFirstLastPara="1" vertOverflow="overflow" horzOverflow="overflow" vert="horz" wrap="square" lIns="0" tIns="0" rIns="0" bIns="0" numCol="1" spcCol="38100" rtlCol="0" anchor="ctr">
+            <a:spAutoFit/>
+          </a:bodyPr>
           <a:lstStyle/>
           <a:p>
-            <a:endParaRPr lang="de-DE"/>
+            <a:pPr marL="0" marR="0" indent="0" algn="ctr" defTabSz="825500" rtl="0" fontAlgn="auto" latinLnBrk="0" hangingPunct="0">
+              <a:lnSpc>
+                <a:spcPct val="100000"/>
+              </a:lnSpc>
+              <a:spcBef>
+                <a:spcPts val="0"/>
+              </a:spcBef>
+              <a:spcAft>
+                <a:spcPts val="0"/>
+              </a:spcAft>
+              <a:buClrTx/>
+              <a:buSzTx/>
+              <a:buFontTx/>
+              <a:buNone/>
+              <a:tabLst/>
+            </a:pPr>
+            <a:endParaRPr kumimoji="0" lang="de-DE" sz="3200" b="0" i="0" u="none" strike="noStrike" cap="none" spc="0" normalizeH="0" baseline="0">
+              <a:ln>
+                <a:noFill/>
+              </a:ln>
+              <a:solidFill>
+                <a:srgbClr val="FFFFFF"/>
+              </a:solidFill>
+              <a:effectLst/>
+              <a:uFillTx/>
+              <a:latin typeface="+mn-lt"/>
+              <a:ea typeface="+mn-ea"/>
+              <a:cs typeface="+mn-cs"/>
+              <a:sym typeface="Helvetica Neue Medium"/>
+            </a:endParaRPr>
           </a:p>
         </p:txBody>
       </p:sp>
       <p:sp>
         <p:nvSpPr>
-          <p:cNvPr id="3" name="Text Placeholder 2"/>
-          <p:cNvSpPr>
-            <a:spLocks noGrp="1"/>
-          </p:cNvSpPr>
-          <p:nvPr>
-            <p:ph type="body" idx="1"/>
-          </p:nvPr>
+          <p:cNvPr id="29" name="Rectangle 28">
+            <a:extLst>
+              <a:ext uri="{FF2B5EF4-FFF2-40B4-BE49-F238E27FC236}">
+                <a16:creationId xmlns:a16="http://schemas.microsoft.com/office/drawing/2014/main" id="{4EF64620-036C-A690-3C4F-D16290205541}"/>
+              </a:ext>
+            </a:extLst>
+          </p:cNvPr>
+          <p:cNvSpPr/>
+          <p:nvPr/>
         </p:nvSpPr>
-        <p:spPr/>
+        <p:spPr>
+          <a:xfrm>
+            <a:off x="20033865" y="11383893"/>
+            <a:ext cx="990530" cy="1617785"/>
+          </a:xfrm>
+          <a:prstGeom prst="rect">
+            <a:avLst/>
+          </a:prstGeom>
+          <a:solidFill>
+            <a:schemeClr val="bg1"/>
+          </a:solidFill>
+          <a:ln w="12700" cap="flat">
+            <a:noFill/>
+            <a:miter lim="400000"/>
+          </a:ln>
+          <a:effectLst/>
+          <a:sp3d/>
+        </p:spPr>
+        <p:style>
+          <a:lnRef idx="0">
+            <a:scrgbClr r="0" g="0" b="0"/>
+          </a:lnRef>
+          <a:fillRef idx="0">
+            <a:scrgbClr r="0" g="0" b="0"/>
+          </a:fillRef>
+          <a:effectRef idx="0">
+            <a:scrgbClr r="0" g="0" b="0"/>
+          </a:effectRef>
+          <a:fontRef idx="none"/>
+        </p:style>
         <p:txBody>
-          <a:bodyPr/>
+          <a:bodyPr rot="0" spcFirstLastPara="1" vertOverflow="overflow" horzOverflow="overflow" vert="horz" wrap="square" lIns="0" tIns="0" rIns="0" bIns="0" numCol="1" spcCol="38100" rtlCol="0" anchor="ctr">
+            <a:spAutoFit/>
+          </a:bodyPr>
           <a:lstStyle/>
           <a:p>
-            <a:endParaRPr lang="de-DE" dirty="0"/>
+            <a:pPr marL="0" marR="0" indent="0" algn="ctr" defTabSz="825500" rtl="0" fontAlgn="auto" latinLnBrk="0" hangingPunct="0">
+              <a:lnSpc>
+                <a:spcPct val="100000"/>
+              </a:lnSpc>
+              <a:spcBef>
+                <a:spcPts val="0"/>
+              </a:spcBef>
+              <a:spcAft>
+                <a:spcPts val="0"/>
+              </a:spcAft>
+              <a:buClrTx/>
+              <a:buSzTx/>
+              <a:buFontTx/>
+              <a:buNone/>
+              <a:tabLst/>
+            </a:pPr>
+            <a:endParaRPr kumimoji="0" lang="de-DE" sz="3200" b="0" i="0" u="none" strike="noStrike" cap="none" spc="0" normalizeH="0" baseline="0">
+              <a:ln>
+                <a:noFill/>
+              </a:ln>
+              <a:solidFill>
+                <a:srgbClr val="FFFFFF"/>
+              </a:solidFill>
+              <a:effectLst/>
+              <a:uFillTx/>
+              <a:latin typeface="+mn-lt"/>
+              <a:ea typeface="+mn-ea"/>
+              <a:cs typeface="+mn-cs"/>
+              <a:sym typeface="Helvetica Neue Medium"/>
+            </a:endParaRPr>
           </a:p>
         </p:txBody>
       </p:sp>
@@ -22266,7 +22278,7 @@
           </a:prstGeom>
           <a:extLst>
             <a:ext uri="{C572A759-6A51-4108-AA02-DFA0A04FC94B}">
-              <ma14:wrappingTextBoxFlag xmlns="" xmlns:m="http://schemas.openxmlformats.org/officeDocument/2006/math" xmlns:a14="http://schemas.microsoft.com/office/drawing/2010/main" xmlns:ma14="http://schemas.microsoft.com/office/mac/drawingml/2011/main" val="1"/>
+              <ma14:wrappingTextBoxFlag xmlns:ma14="http://schemas.microsoft.com/office/mac/drawingml/2011/main" xmlns:a14="http://schemas.microsoft.com/office/drawing/2010/main" xmlns:m="http://schemas.openxmlformats.org/officeDocument/2006/math" xmlns="" val="1"/>
             </a:ext>
           </a:extLst>
         </p:spPr>
@@ -22287,13 +22299,6 @@
     <a:masterClrMapping/>
   </p:clrMapOvr>
   <p:transition spd="med"/>
-  <p:timing>
-    <p:tnLst>
-      <p:par>
-        <p:cTn id="1" dur="indefinite" restart="never" nodeType="tmRoot"/>
-      </p:par>
-    </p:tnLst>
-  </p:timing>
 </p:sld>
 </file>
 
@@ -22352,9 +22357,7 @@
           <p:nvPr/>
         </p:nvPicPr>
         <p:blipFill>
-          <a:blip r:embed="rId2">
-            <a:extLst/>
-          </a:blip>
+          <a:blip r:embed="rId2"/>
           <a:stretch>
             <a:fillRect/>
           </a:stretch>
@@ -22395,9 +22398,7 @@
             <p:nvPr/>
           </p:nvPicPr>
           <p:blipFill>
-            <a:blip r:embed="rId2">
-              <a:extLst/>
-            </a:blip>
+            <a:blip r:embed="rId2"/>
             <a:srcRect l="59232" t="50415" r="29892" b="4537"/>
             <a:stretch>
               <a:fillRect/>
@@ -22427,9 +22428,7 @@
             <p:nvPr/>
           </p:nvPicPr>
           <p:blipFill>
-            <a:blip r:embed="rId2">
-              <a:extLst/>
-            </a:blip>
+            <a:blip r:embed="rId2"/>
             <a:srcRect l="69444" t="7085" r="21276" b="47070"/>
             <a:stretch>
               <a:fillRect/>
@@ -22474,9 +22473,7 @@
             <p:nvPr/>
           </p:nvPicPr>
           <p:blipFill>
-            <a:blip r:embed="rId2">
-              <a:extLst/>
-            </a:blip>
+            <a:blip r:embed="rId2"/>
             <a:srcRect l="11814" t="9029" r="77893" b="48156"/>
             <a:stretch>
               <a:fillRect/>
@@ -22506,9 +22503,7 @@
             <p:nvPr/>
           </p:nvPicPr>
           <p:blipFill>
-            <a:blip r:embed="rId2">
-              <a:extLst/>
-            </a:blip>
+            <a:blip r:embed="rId2"/>
             <a:srcRect l="21810" t="10318" r="68919" b="48561"/>
             <a:stretch>
               <a:fillRect/>
@@ -22538,9 +22533,7 @@
             <p:nvPr/>
           </p:nvPicPr>
           <p:blipFill>
-            <a:blip r:embed="rId2">
-              <a:extLst/>
-            </a:blip>
+            <a:blip r:embed="rId2"/>
             <a:srcRect l="42823" t="51475" r="49207" b="5827"/>
             <a:stretch>
               <a:fillRect/>
@@ -22570,9 +22563,7 @@
             <p:nvPr/>
           </p:nvPicPr>
           <p:blipFill>
-            <a:blip r:embed="rId2">
-              <a:extLst/>
-            </a:blip>
+            <a:blip r:embed="rId2"/>
             <a:srcRect l="69440" t="12627" r="20812" b="51785"/>
             <a:stretch>
               <a:fillRect/>
@@ -22602,9 +22593,7 @@
             <p:nvPr/>
           </p:nvPicPr>
           <p:blipFill>
-            <a:blip r:embed="rId2">
-              <a:extLst/>
-            </a:blip>
+            <a:blip r:embed="rId2"/>
             <a:srcRect l="59581" t="53903" r="29125" b="9226"/>
             <a:stretch>
               <a:fillRect/>
@@ -22634,9 +22623,7 @@
             <p:nvPr/>
           </p:nvPicPr>
           <p:blipFill>
-            <a:blip r:embed="rId2">
-              <a:extLst/>
-            </a:blip>
+            <a:blip r:embed="rId2"/>
             <a:srcRect l="11814" t="9029" r="77893" b="48156"/>
             <a:stretch>
               <a:fillRect/>
@@ -22667,9 +22654,7 @@
           <p:nvPr/>
         </p:nvPicPr>
         <p:blipFill>
-          <a:blip r:embed="rId3">
-            <a:extLst/>
-          </a:blip>
+          <a:blip r:embed="rId3"/>
           <a:stretch>
             <a:fillRect/>
           </a:stretch>
@@ -22707,7 +22692,7 @@
           </a:prstGeom>
           <a:extLst>
             <a:ext uri="{C572A759-6A51-4108-AA02-DFA0A04FC94B}">
-              <ma14:wrappingTextBoxFlag xmlns="" xmlns:m="http://schemas.openxmlformats.org/officeDocument/2006/math" xmlns:a14="http://schemas.microsoft.com/office/drawing/2010/main" xmlns:ma14="http://schemas.microsoft.com/office/mac/drawingml/2011/main" val="1"/>
+              <ma14:wrappingTextBoxFlag xmlns:ma14="http://schemas.microsoft.com/office/mac/drawingml/2011/main" xmlns:a14="http://schemas.microsoft.com/office/drawing/2010/main" xmlns:m="http://schemas.openxmlformats.org/officeDocument/2006/math" xmlns="" val="1"/>
             </a:ext>
           </a:extLst>
         </p:spPr>
@@ -23298,9 +23283,7 @@
           <p:nvPr/>
         </p:nvPicPr>
         <p:blipFill>
-          <a:blip r:embed="rId2">
-            <a:extLst/>
-          </a:blip>
+          <a:blip r:embed="rId2"/>
           <a:stretch>
             <a:fillRect/>
           </a:stretch>
@@ -23343,9 +23326,7 @@
             <p:nvPr/>
           </p:nvPicPr>
           <p:blipFill>
-            <a:blip r:embed="rId2">
-              <a:extLst/>
-            </a:blip>
+            <a:blip r:embed="rId2"/>
             <a:srcRect l="59232" t="50415" r="29892" b="4537"/>
             <a:stretch>
               <a:fillRect/>
@@ -23375,9 +23356,7 @@
             <p:nvPr/>
           </p:nvPicPr>
           <p:blipFill>
-            <a:blip r:embed="rId2">
-              <a:extLst/>
-            </a:blip>
+            <a:blip r:embed="rId2"/>
             <a:srcRect l="69444" t="7085" r="21276" b="47070"/>
             <a:stretch>
               <a:fillRect/>
@@ -23422,9 +23401,7 @@
             <p:nvPr/>
           </p:nvPicPr>
           <p:blipFill>
-            <a:blip r:embed="rId2">
-              <a:extLst/>
-            </a:blip>
+            <a:blip r:embed="rId2"/>
             <a:srcRect l="11814" t="9029" r="77893" b="48156"/>
             <a:stretch>
               <a:fillRect/>
@@ -23454,9 +23431,7 @@
             <p:nvPr/>
           </p:nvPicPr>
           <p:blipFill>
-            <a:blip r:embed="rId2">
-              <a:extLst/>
-            </a:blip>
+            <a:blip r:embed="rId2"/>
             <a:srcRect l="21810" t="10318" r="68919" b="48561"/>
             <a:stretch>
               <a:fillRect/>
@@ -23486,9 +23461,7 @@
             <p:nvPr/>
           </p:nvPicPr>
           <p:blipFill>
-            <a:blip r:embed="rId2">
-              <a:extLst/>
-            </a:blip>
+            <a:blip r:embed="rId2"/>
             <a:srcRect l="42823" t="51475" r="49207" b="5827"/>
             <a:stretch>
               <a:fillRect/>
@@ -23518,9 +23491,7 @@
             <p:nvPr/>
           </p:nvPicPr>
           <p:blipFill>
-            <a:blip r:embed="rId2">
-              <a:extLst/>
-            </a:blip>
+            <a:blip r:embed="rId2"/>
             <a:srcRect l="69440" t="12627" r="20812" b="51785"/>
             <a:stretch>
               <a:fillRect/>
@@ -23550,9 +23521,7 @@
             <p:nvPr/>
           </p:nvPicPr>
           <p:blipFill>
-            <a:blip r:embed="rId2">
-              <a:extLst/>
-            </a:blip>
+            <a:blip r:embed="rId2"/>
             <a:srcRect l="59581" t="53903" r="29125" b="9226"/>
             <a:stretch>
               <a:fillRect/>
@@ -23582,9 +23551,7 @@
             <p:nvPr/>
           </p:nvPicPr>
           <p:blipFill>
-            <a:blip r:embed="rId2">
-              <a:extLst/>
-            </a:blip>
+            <a:blip r:embed="rId2"/>
             <a:srcRect l="11814" t="9029" r="77893" b="48156"/>
             <a:stretch>
               <a:fillRect/>
@@ -23626,7 +23593,7 @@
           </a:prstGeom>
           <a:extLst>
             <a:ext uri="{C572A759-6A51-4108-AA02-DFA0A04FC94B}">
-              <ma14:wrappingTextBoxFlag xmlns="" xmlns:m="http://schemas.openxmlformats.org/officeDocument/2006/math" xmlns:a14="http://schemas.microsoft.com/office/drawing/2010/main" xmlns:ma14="http://schemas.microsoft.com/office/mac/drawingml/2011/main" val="1"/>
+              <ma14:wrappingTextBoxFlag xmlns:ma14="http://schemas.microsoft.com/office/mac/drawingml/2011/main" xmlns:a14="http://schemas.microsoft.com/office/drawing/2010/main" xmlns:m="http://schemas.openxmlformats.org/officeDocument/2006/math" xmlns="" val="1"/>
             </a:ext>
           </a:extLst>
         </p:spPr>
@@ -23650,9 +23617,7 @@
           <p:nvPr/>
         </p:nvPicPr>
         <p:blipFill>
-          <a:blip r:embed="rId3">
-            <a:extLst/>
-          </a:blip>
+          <a:blip r:embed="rId3"/>
           <a:stretch>
             <a:fillRect/>
           </a:stretch>
@@ -24256,7 +24221,7 @@
           </a:ln>
           <a:extLst>
             <a:ext uri="{C572A759-6A51-4108-AA02-DFA0A04FC94B}">
-              <ma14:wrappingTextBoxFlag xmlns="" xmlns:m="http://schemas.openxmlformats.org/officeDocument/2006/math" xmlns:a14="http://schemas.microsoft.com/office/drawing/2010/main" xmlns:ma14="http://schemas.microsoft.com/office/mac/drawingml/2011/main" val="1"/>
+              <ma14:wrappingTextBoxFlag xmlns:ma14="http://schemas.microsoft.com/office/mac/drawingml/2011/main" xmlns:a14="http://schemas.microsoft.com/office/drawing/2010/main" xmlns:m="http://schemas.openxmlformats.org/officeDocument/2006/math" xmlns="" val="1"/>
             </a:ext>
           </a:extLst>
         </p:spPr>
@@ -24285,9 +24250,7 @@
           <p:nvPr/>
         </p:nvPicPr>
         <p:blipFill>
-          <a:blip r:embed="rId2">
-            <a:extLst/>
-          </a:blip>
+          <a:blip r:embed="rId2"/>
           <a:stretch>
             <a:fillRect/>
           </a:stretch>
@@ -24328,9 +24291,7 @@
             <p:nvPr/>
           </p:nvPicPr>
           <p:blipFill>
-            <a:blip r:embed="rId3">
-              <a:extLst/>
-            </a:blip>
+            <a:blip r:embed="rId3"/>
             <a:stretch>
               <a:fillRect/>
             </a:stretch>
@@ -24372,7 +24333,7 @@
             <a:effectLst/>
             <a:extLst>
               <a:ext uri="{C572A759-6A51-4108-AA02-DFA0A04FC94B}">
-                <ma14:wrappingTextBoxFlag xmlns="" xmlns:m="http://schemas.openxmlformats.org/officeDocument/2006/math" xmlns:a14="http://schemas.microsoft.com/office/drawing/2010/main" xmlns:ma14="http://schemas.microsoft.com/office/mac/drawingml/2011/main" val="1"/>
+                <ma14:wrappingTextBoxFlag xmlns:ma14="http://schemas.microsoft.com/office/mac/drawingml/2011/main" xmlns:a14="http://schemas.microsoft.com/office/drawing/2010/main" xmlns:m="http://schemas.openxmlformats.org/officeDocument/2006/math" xmlns="" val="1"/>
               </a:ext>
             </a:extLst>
           </p:spPr>
@@ -24417,7 +24378,7 @@
           </a:prstGeom>
           <a:extLst>
             <a:ext uri="{C572A759-6A51-4108-AA02-DFA0A04FC94B}">
-              <ma14:wrappingTextBoxFlag xmlns="" xmlns:m="http://schemas.openxmlformats.org/officeDocument/2006/math" xmlns:a14="http://schemas.microsoft.com/office/drawing/2010/main" xmlns:ma14="http://schemas.microsoft.com/office/mac/drawingml/2011/main" val="1"/>
+              <ma14:wrappingTextBoxFlag xmlns:ma14="http://schemas.microsoft.com/office/mac/drawingml/2011/main" xmlns:a14="http://schemas.microsoft.com/office/drawing/2010/main" xmlns:m="http://schemas.openxmlformats.org/officeDocument/2006/math" xmlns="" val="1"/>
             </a:ext>
           </a:extLst>
         </p:spPr>
@@ -24682,7 +24643,7 @@
           </a:ln>
           <a:extLst>
             <a:ext uri="{C572A759-6A51-4108-AA02-DFA0A04FC94B}">
-              <ma14:wrappingTextBoxFlag xmlns="" xmlns:m="http://schemas.openxmlformats.org/officeDocument/2006/math" xmlns:a14="http://schemas.microsoft.com/office/drawing/2010/main" xmlns:ma14="http://schemas.microsoft.com/office/mac/drawingml/2011/main" val="1"/>
+              <ma14:wrappingTextBoxFlag xmlns:ma14="http://schemas.microsoft.com/office/mac/drawingml/2011/main" xmlns:a14="http://schemas.microsoft.com/office/drawing/2010/main" xmlns:m="http://schemas.openxmlformats.org/officeDocument/2006/math" xmlns="" val="1"/>
             </a:ext>
           </a:extLst>
         </p:spPr>
@@ -24725,9 +24686,7 @@
             <p:nvPr/>
           </p:nvPicPr>
           <p:blipFill>
-            <a:blip r:embed="rId2">
-              <a:extLst/>
-            </a:blip>
+            <a:blip r:embed="rId2"/>
             <a:stretch>
               <a:fillRect/>
             </a:stretch>
@@ -24769,7 +24728,7 @@
             <a:effectLst/>
             <a:extLst>
               <a:ext uri="{C572A759-6A51-4108-AA02-DFA0A04FC94B}">
-                <ma14:wrappingTextBoxFlag xmlns="" xmlns:m="http://schemas.openxmlformats.org/officeDocument/2006/math" xmlns:a14="http://schemas.microsoft.com/office/drawing/2010/main" xmlns:ma14="http://schemas.microsoft.com/office/mac/drawingml/2011/main" val="1"/>
+                <ma14:wrappingTextBoxFlag xmlns:ma14="http://schemas.microsoft.com/office/mac/drawingml/2011/main" xmlns:a14="http://schemas.microsoft.com/office/drawing/2010/main" xmlns:m="http://schemas.openxmlformats.org/officeDocument/2006/math" xmlns="" val="1"/>
               </a:ext>
             </a:extLst>
           </p:spPr>
@@ -24809,9 +24768,7 @@
             <p:nvPr/>
           </p:nvPicPr>
           <p:blipFill>
-            <a:blip r:embed="rId3">
-              <a:extLst/>
-            </a:blip>
+            <a:blip r:embed="rId3"/>
             <a:stretch>
               <a:fillRect/>
             </a:stretch>
@@ -24853,7 +24810,7 @@
             <a:effectLst/>
             <a:extLst>
               <a:ext uri="{C572A759-6A51-4108-AA02-DFA0A04FC94B}">
-                <ma14:wrappingTextBoxFlag xmlns="" xmlns:m="http://schemas.openxmlformats.org/officeDocument/2006/math" xmlns:a14="http://schemas.microsoft.com/office/drawing/2010/main" xmlns:ma14="http://schemas.microsoft.com/office/mac/drawingml/2011/main" val="1"/>
+                <ma14:wrappingTextBoxFlag xmlns:ma14="http://schemas.microsoft.com/office/mac/drawingml/2011/main" xmlns:a14="http://schemas.microsoft.com/office/drawing/2010/main" xmlns:m="http://schemas.openxmlformats.org/officeDocument/2006/math" xmlns="" val="1"/>
               </a:ext>
             </a:extLst>
           </p:spPr>
@@ -24890,7 +24847,7 @@
           </a:prstGeom>
           <a:extLst>
             <a:ext uri="{C572A759-6A51-4108-AA02-DFA0A04FC94B}">
-              <ma14:wrappingTextBoxFlag xmlns="" xmlns:m="http://schemas.openxmlformats.org/officeDocument/2006/math" xmlns:a14="http://schemas.microsoft.com/office/drawing/2010/main" xmlns:ma14="http://schemas.microsoft.com/office/mac/drawingml/2011/main" val="1"/>
+              <ma14:wrappingTextBoxFlag xmlns:ma14="http://schemas.microsoft.com/office/mac/drawingml/2011/main" xmlns:a14="http://schemas.microsoft.com/office/drawing/2010/main" xmlns:m="http://schemas.openxmlformats.org/officeDocument/2006/math" xmlns="" val="1"/>
             </a:ext>
           </a:extLst>
         </p:spPr>
@@ -25141,7 +25098,7 @@
           </a:ln>
           <a:extLst>
             <a:ext uri="{C572A759-6A51-4108-AA02-DFA0A04FC94B}">
-              <ma14:wrappingTextBoxFlag xmlns="" xmlns:m="http://schemas.openxmlformats.org/officeDocument/2006/math" xmlns:a14="http://schemas.microsoft.com/office/drawing/2010/main" xmlns:ma14="http://schemas.microsoft.com/office/mac/drawingml/2011/main" val="1"/>
+              <ma14:wrappingTextBoxFlag xmlns:ma14="http://schemas.microsoft.com/office/mac/drawingml/2011/main" xmlns:a14="http://schemas.microsoft.com/office/drawing/2010/main" xmlns:m="http://schemas.openxmlformats.org/officeDocument/2006/math" xmlns="" val="1"/>
             </a:ext>
           </a:extLst>
         </p:spPr>
@@ -25395,7 +25352,7 @@
           </a:ln>
           <a:extLst>
             <a:ext uri="{C572A759-6A51-4108-AA02-DFA0A04FC94B}">
-              <ma14:wrappingTextBoxFlag xmlns="" xmlns:m="http://schemas.openxmlformats.org/officeDocument/2006/math" xmlns:a14="http://schemas.microsoft.com/office/drawing/2010/main" xmlns:ma14="http://schemas.microsoft.com/office/mac/drawingml/2011/main" val="1"/>
+              <ma14:wrappingTextBoxFlag xmlns:ma14="http://schemas.microsoft.com/office/mac/drawingml/2011/main" xmlns:a14="http://schemas.microsoft.com/office/drawing/2010/main" xmlns:m="http://schemas.openxmlformats.org/officeDocument/2006/math" xmlns="" val="1"/>
             </a:ext>
           </a:extLst>
         </p:spPr>
@@ -25438,7 +25395,7 @@
           </a:prstGeom>
           <a:extLst>
             <a:ext uri="{C572A759-6A51-4108-AA02-DFA0A04FC94B}">
-              <ma14:wrappingTextBoxFlag xmlns="" xmlns:m="http://schemas.openxmlformats.org/officeDocument/2006/math" xmlns:a14="http://schemas.microsoft.com/office/drawing/2010/main" xmlns:ma14="http://schemas.microsoft.com/office/mac/drawingml/2011/main" val="1"/>
+              <ma14:wrappingTextBoxFlag xmlns:ma14="http://schemas.microsoft.com/office/mac/drawingml/2011/main" xmlns:a14="http://schemas.microsoft.com/office/drawing/2010/main" xmlns:m="http://schemas.openxmlformats.org/officeDocument/2006/math" xmlns="" val="1"/>
             </a:ext>
           </a:extLst>
         </p:spPr>
@@ -25459,13 +25416,6 @@
     <a:masterClrMapping/>
   </p:clrMapOvr>
   <p:transition spd="med"/>
-  <p:timing>
-    <p:tnLst>
-      <p:par>
-        <p:cTn id="1" dur="indefinite" restart="never" nodeType="tmRoot"/>
-      </p:par>
-    </p:tnLst>
-  </p:timing>
 </p:sld>
 </file>
 
@@ -25520,9 +25470,7 @@
           <p:nvPr/>
         </p:nvPicPr>
         <p:blipFill>
-          <a:blip r:embed="rId2">
-            <a:extLst/>
-          </a:blip>
+          <a:blip r:embed="rId2"/>
           <a:stretch>
             <a:fillRect/>
           </a:stretch>
@@ -25559,7 +25507,7 @@
           </a:ln>
           <a:extLst>
             <a:ext uri="{C572A759-6A51-4108-AA02-DFA0A04FC94B}">
-              <ma14:wrappingTextBoxFlag xmlns="" xmlns:m="http://schemas.openxmlformats.org/officeDocument/2006/math" xmlns:a14="http://schemas.microsoft.com/office/drawing/2010/main" xmlns:ma14="http://schemas.microsoft.com/office/mac/drawingml/2011/main" val="1"/>
+              <ma14:wrappingTextBoxFlag xmlns:ma14="http://schemas.microsoft.com/office/mac/drawingml/2011/main" xmlns:a14="http://schemas.microsoft.com/office/drawing/2010/main" xmlns:m="http://schemas.openxmlformats.org/officeDocument/2006/math" xmlns="" val="1"/>
             </a:ext>
           </a:extLst>
         </p:spPr>
@@ -25603,7 +25551,7 @@
           </a:prstGeom>
           <a:extLst>
             <a:ext uri="{C572A759-6A51-4108-AA02-DFA0A04FC94B}">
-              <ma14:wrappingTextBoxFlag xmlns="" xmlns:m="http://schemas.openxmlformats.org/officeDocument/2006/math" xmlns:a14="http://schemas.microsoft.com/office/drawing/2010/main" xmlns:ma14="http://schemas.microsoft.com/office/mac/drawingml/2011/main" val="1"/>
+              <ma14:wrappingTextBoxFlag xmlns:ma14="http://schemas.microsoft.com/office/mac/drawingml/2011/main" xmlns:a14="http://schemas.microsoft.com/office/drawing/2010/main" xmlns:m="http://schemas.openxmlformats.org/officeDocument/2006/math" xmlns="" val="1"/>
             </a:ext>
           </a:extLst>
         </p:spPr>
@@ -25793,13 +25741,6 @@
     <a:masterClrMapping/>
   </p:clrMapOvr>
   <p:transition spd="med"/>
-  <p:timing>
-    <p:tnLst>
-      <p:par>
-        <p:cTn id="1" dur="indefinite" restart="never" nodeType="tmRoot"/>
-      </p:par>
-    </p:tnLst>
-  </p:timing>
 </p:sld>
 </file>
 
